--- a/docs/School Management Software.pptx
+++ b/docs/School Management Software.pptx
@@ -4,9 +4,6 @@
   <p:sldMasterIdLst>
     <p:sldMasterId id="2147483648" r:id="rId1"/>
   </p:sldMasterIdLst>
-  <p:notesMasterIdLst>
-    <p:notesMasterId r:id="rId16"/>
-  </p:notesMasterIdLst>
   <p:sldIdLst>
     <p:sldId id="256" r:id="rId2"/>
     <p:sldId id="257" r:id="rId3"/>
@@ -22,8 +19,12 @@
     <p:sldId id="267" r:id="rId13"/>
     <p:sldId id="268" r:id="rId14"/>
     <p:sldId id="269" r:id="rId15"/>
+    <p:sldId id="270" r:id="rId16"/>
   </p:sldIdLst>
-  <p:sldSz cx="9144000" cy="5143500" type="screen16x9"/>
+  <p:notesMasterIdLst>
+    <p:notesMasterId r:id="rId17"/>
+  </p:notesMasterIdLst>
+  <p:sldSz cx="9144000" cy="5143500"/>
   <p:notesSz cx="5143500" cy="9144000"/>
   <p:defaultTextStyle>
     <a:lvl1pPr marL="0" algn="l" defTabSz="914400" rtl="0" eaLnBrk="1" latinLnBrk="0" hangingPunct="1">
@@ -117,11 +118,6 @@
       </a:defRPr>
     </a:lvl9pPr>
   </p:defaultTextStyle>
-  <p:extLst>
-    <p:ext uri="{EFAFB233-063F-42B5-8137-9DF3F51BA10A}">
-      <p15:sldGuideLst xmlns:p15="http://schemas.microsoft.com/office/powerpoint/2012/main"/>
-    </p:ext>
-  </p:extLst>
 </p:presentation>
 </file>
 
@@ -147,10 +143,234 @@
           <a:chExt cx="0" cy="0"/>
         </a:xfrm>
       </p:grpSpPr>
+      <p:sp>
+        <p:nvSpPr>
+          <p:cNvPr id="2" name="Header Placeholder 1"/>
+          <p:cNvSpPr>
+            <a:spLocks noGrp="1"/>
+          </p:cNvSpPr>
+          <p:nvPr>
+            <p:ph type="hdr" sz="quarter"/>
+          </p:nvPr>
+        </p:nvSpPr>
+        <p:spPr>
+          <a:xfrm>
+            <a:off x="0" y="0"/>
+            <a:ext cx="2971800" cy="458788"/>
+          </a:xfrm>
+          <a:prstGeom prst="rect">
+            <a:avLst/>
+          </a:prstGeom>
+        </p:spPr>
+        <p:txBody>
+          <a:bodyPr vert="horz" lIns="91440" tIns="45720" rIns="91440" bIns="45720" rtlCol="0"/>
+          <a:lstStyle>
+            <a:lvl1pPr algn="l">
+              <a:defRPr sz="1200"/>
+            </a:lvl1pPr>
+          </a:lstStyle>
+          <a:p>
+            <a:endParaRPr lang="en-US"/>
+          </a:p>
+        </p:txBody>
+      </p:sp>
+      <p:sp>
+        <p:nvSpPr>
+          <p:cNvPr id="3" name="Date Placeholder 2"/>
+          <p:cNvSpPr>
+            <a:spLocks noGrp="1"/>
+          </p:cNvSpPr>
+          <p:nvPr>
+            <p:ph type="dt" idx="1"/>
+          </p:nvPr>
+        </p:nvSpPr>
+        <p:spPr>
+          <a:xfrm>
+            <a:off x="3884613" y="0"/>
+            <a:ext cx="2971800" cy="458788"/>
+          </a:xfrm>
+          <a:prstGeom prst="rect">
+            <a:avLst/>
+          </a:prstGeom>
+        </p:spPr>
+        <p:txBody>
+          <a:bodyPr vert="horz" lIns="91440" tIns="45720" rIns="91440" bIns="45720" rtlCol="0"/>
+          <a:lstStyle>
+            <a:lvl1pPr algn="r">
+              <a:defRPr sz="1200"/>
+            </a:lvl1pPr>
+          </a:lstStyle>
+          <a:p>
+            <a:fld id="{5282F153-3F37-0F45-9E97-73ACFA13230C}" type="datetimeFigureOut">
+              <a:rPr lang="en-US"/>
+              <a:t>7/23/19</a:t>
+            </a:fld>
+            <a:endParaRPr lang="en-US"/>
+          </a:p>
+        </p:txBody>
+      </p:sp>
+      <p:sp>
+        <p:nvSpPr>
+          <p:cNvPr id="4" name="Slide Image Placeholder 3"/>
+          <p:cNvSpPr>
+            <a:spLocks noGrp="1" noRot="1" noChangeAspect="1"/>
+          </p:cNvSpPr>
+          <p:nvPr>
+            <p:ph type="sldImg" idx="2"/>
+          </p:nvPr>
+        </p:nvSpPr>
+        <p:spPr>
+          <a:xfrm>
+            <a:off x="685800" y="1143000"/>
+            <a:ext cx="5486400" cy="3086100"/>
+          </a:xfrm>
+          <a:prstGeom prst="rect">
+            <a:avLst/>
+          </a:prstGeom>
+          <a:noFill/>
+          <a:ln w="12700">
+            <a:solidFill>
+              <a:prstClr val="black"/>
+            </a:solidFill>
+          </a:ln>
+        </p:spPr>
+        <p:txBody>
+          <a:bodyPr vert="horz" lIns="91440" tIns="45720" rIns="91440" bIns="45720" rtlCol="0" anchor="ctr"/>
+          <a:lstStyle/>
+          <a:p>
+            <a:endParaRPr lang="en-US"/>
+          </a:p>
+        </p:txBody>
+      </p:sp>
+      <p:sp>
+        <p:nvSpPr>
+          <p:cNvPr id="5" name="Notes Placeholder 4"/>
+          <p:cNvSpPr>
+            <a:spLocks noGrp="1"/>
+          </p:cNvSpPr>
+          <p:nvPr>
+            <p:ph type="body" sz="quarter" idx="3"/>
+          </p:nvPr>
+        </p:nvSpPr>
+        <p:spPr>
+          <a:xfrm>
+            <a:off x="685800" y="4400550"/>
+            <a:ext cx="5486400" cy="3600450"/>
+          </a:xfrm>
+          <a:prstGeom prst="rect">
+            <a:avLst/>
+          </a:prstGeom>
+        </p:spPr>
+        <p:txBody>
+          <a:bodyPr vert="horz" lIns="91440" tIns="45720" rIns="91440" bIns="45720" rtlCol="0"/>
+          <a:lstStyle/>
+          <a:p>
+            <a:pPr lvl="0"/>
+            <a:r>
+              <a:rPr lang="en-US"/>
+              <a:t>Click to edit Master text styles</a:t>
+            </a:r>
+          </a:p>
+          <a:p>
+            <a:pPr lvl="1"/>
+            <a:r>
+              <a:rPr lang="en-US"/>
+              <a:t>Second level</a:t>
+            </a:r>
+          </a:p>
+          <a:p>
+            <a:pPr lvl="2"/>
+            <a:r>
+              <a:rPr lang="en-US"/>
+              <a:t>Third level</a:t>
+            </a:r>
+          </a:p>
+          <a:p>
+            <a:pPr lvl="3"/>
+            <a:r>
+              <a:rPr lang="en-US"/>
+              <a:t>Fourth level</a:t>
+            </a:r>
+          </a:p>
+          <a:p>
+            <a:pPr lvl="4"/>
+            <a:r>
+              <a:rPr lang="en-US"/>
+              <a:t>Fifth level</a:t>
+            </a:r>
+          </a:p>
+        </p:txBody>
+      </p:sp>
+      <p:sp>
+        <p:nvSpPr>
+          <p:cNvPr id="6" name="Footer Placeholder 5"/>
+          <p:cNvSpPr>
+            <a:spLocks noGrp="1"/>
+          </p:cNvSpPr>
+          <p:nvPr>
+            <p:ph type="ftr" sz="quarter" idx="4"/>
+          </p:nvPr>
+        </p:nvSpPr>
+        <p:spPr>
+          <a:xfrm>
+            <a:off x="0" y="8685213"/>
+            <a:ext cx="2971800" cy="458787"/>
+          </a:xfrm>
+          <a:prstGeom prst="rect">
+            <a:avLst/>
+          </a:prstGeom>
+        </p:spPr>
+        <p:txBody>
+          <a:bodyPr vert="horz" lIns="91440" tIns="45720" rIns="91440" bIns="45720" rtlCol="0" anchor="b"/>
+          <a:lstStyle>
+            <a:lvl1pPr algn="l">
+              <a:defRPr sz="1200"/>
+            </a:lvl1pPr>
+          </a:lstStyle>
+          <a:p>
+            <a:endParaRPr lang="en-US"/>
+          </a:p>
+        </p:txBody>
+      </p:sp>
+      <p:sp>
+        <p:nvSpPr>
+          <p:cNvPr id="7" name="Slide Number Placeholder 6"/>
+          <p:cNvSpPr>
+            <a:spLocks noGrp="1"/>
+          </p:cNvSpPr>
+          <p:nvPr>
+            <p:ph type="sldNum" sz="quarter" idx="5"/>
+          </p:nvPr>
+        </p:nvSpPr>
+        <p:spPr>
+          <a:xfrm>
+            <a:off x="3884613" y="8685213"/>
+            <a:ext cx="2971800" cy="458787"/>
+          </a:xfrm>
+          <a:prstGeom prst="rect">
+            <a:avLst/>
+          </a:prstGeom>
+        </p:spPr>
+        <p:txBody>
+          <a:bodyPr vert="horz" lIns="91440" tIns="45720" rIns="91440" bIns="45720" rtlCol="0" anchor="b"/>
+          <a:lstStyle>
+            <a:lvl1pPr algn="r">
+              <a:defRPr sz="1200"/>
+            </a:lvl1pPr>
+          </a:lstStyle>
+          <a:p>
+            <a:fld id="{CE5E9CC1-C706-0F49-92D6-E571CC5EEA8F}" type="slidenum">
+              <a:rPr lang="en-US"/>
+              <a:t>‹#›</a:t>
+            </a:fld>
+            <a:endParaRPr lang="en-US"/>
+          </a:p>
+        </p:txBody>
+      </p:sp>
     </p:spTree>
     <p:extLst>
       <p:ext uri="{BB962C8B-B14F-4D97-AF65-F5344CB8AC3E}">
-        <p14:creationId xmlns:p14="http://schemas.microsoft.com/office/powerpoint/2010/main" val="811352024"/>
+        <p14:creationId xmlns:p14="http://schemas.microsoft.com/office/powerpoint/2010/main" val="1024086991"/>
       </p:ext>
     </p:extLst>
   </p:cSld>
@@ -294,6 +514,10 @@
           <a:bodyPr/>
           <a:lstStyle/>
           <a:p>
+            <a:r>
+              <a:rPr lang="en-US" dirty="0"/>
+              <a:t/>
+            </a:r>
             <a:endParaRPr lang="en-US" dirty="0"/>
           </a:p>
         </p:txBody>
@@ -378,6 +602,10 @@
           <a:bodyPr/>
           <a:lstStyle/>
           <a:p>
+            <a:r>
+              <a:rPr lang="en-US" dirty="0"/>
+              <a:t/>
+            </a:r>
             <a:endParaRPr lang="en-US" dirty="0"/>
           </a:p>
         </p:txBody>
@@ -462,6 +690,10 @@
           <a:bodyPr/>
           <a:lstStyle/>
           <a:p>
+            <a:r>
+              <a:rPr lang="en-US" dirty="0"/>
+              <a:t/>
+            </a:r>
             <a:endParaRPr lang="en-US" dirty="0"/>
           </a:p>
         </p:txBody>
@@ -546,6 +778,10 @@
           <a:bodyPr/>
           <a:lstStyle/>
           <a:p>
+            <a:r>
+              <a:rPr lang="en-US" dirty="0"/>
+              <a:t/>
+            </a:r>
             <a:endParaRPr lang="en-US" dirty="0"/>
           </a:p>
         </p:txBody>
@@ -630,6 +866,10 @@
           <a:bodyPr/>
           <a:lstStyle/>
           <a:p>
+            <a:r>
+              <a:rPr lang="en-US" dirty="0"/>
+              <a:t/>
+            </a:r>
             <a:endParaRPr lang="en-US" dirty="0"/>
           </a:p>
         </p:txBody>
@@ -714,6 +954,10 @@
           <a:bodyPr/>
           <a:lstStyle/>
           <a:p>
+            <a:r>
+              <a:rPr lang="en-US" dirty="0"/>
+              <a:t/>
+            </a:r>
             <a:endParaRPr lang="en-US" dirty="0"/>
           </a:p>
         </p:txBody>
@@ -736,6 +980,94 @@
             <a:fld id="{F7021451-1387-4CA6-816F-3879F97B5CBC}" type="slidenum">
               <a:rPr lang="en-US"/>
               <a:t>14</a:t>
+            </a:fld>
+            <a:endParaRPr lang="en-US"/>
+          </a:p>
+        </p:txBody>
+      </p:sp>
+    </p:spTree>
+    <p:extLst>
+      <p:ext uri="{BB962C8B-B14F-4D97-AF65-F5344CB8AC3E}">
+        <p14:creationId xmlns:p14="http://schemas.microsoft.com/office/powerpoint/2010/main" val="1024086991"/>
+      </p:ext>
+    </p:extLst>
+  </p:cSld>
+  <p:clrMapOvr>
+    <a:masterClrMapping/>
+  </p:clrMapOvr>
+</p:notes>
+</file>
+
+<file path=ppt/notesSlides/notesSlide15.xml><?xml version="1.0" encoding="utf-8"?>
+<p:notes xmlns:a="http://schemas.openxmlformats.org/drawingml/2006/main" xmlns:r="http://schemas.openxmlformats.org/officeDocument/2006/relationships" xmlns:p="http://schemas.openxmlformats.org/presentationml/2006/main">
+  <p:cSld>
+    <p:spTree>
+      <p:nvGrpSpPr>
+        <p:cNvPr id="1" name=""/>
+        <p:cNvGrpSpPr/>
+        <p:nvPr/>
+      </p:nvGrpSpPr>
+      <p:grpSpPr>
+        <a:xfrm>
+          <a:off x="0" y="0"/>
+          <a:ext cx="0" cy="0"/>
+          <a:chOff x="0" y="0"/>
+          <a:chExt cx="0" cy="0"/>
+        </a:xfrm>
+      </p:grpSpPr>
+      <p:sp>
+        <p:nvSpPr>
+          <p:cNvPr id="2" name="Slide Image Placeholder 1"/>
+          <p:cNvSpPr>
+            <a:spLocks noGrp="1" noRot="1" noChangeAspect="1"/>
+          </p:cNvSpPr>
+          <p:nvPr>
+            <p:ph type="sldImg"/>
+          </p:nvPr>
+        </p:nvSpPr>
+        <p:spPr/>
+      </p:sp>
+      <p:sp>
+        <p:nvSpPr>
+          <p:cNvPr id="3" name="Notes Placeholder 2"/>
+          <p:cNvSpPr>
+            <a:spLocks noGrp="1"/>
+          </p:cNvSpPr>
+          <p:nvPr>
+            <p:ph type="body" idx="1"/>
+          </p:nvPr>
+        </p:nvSpPr>
+        <p:spPr/>
+        <p:txBody>
+          <a:bodyPr/>
+          <a:lstStyle/>
+          <a:p>
+            <a:r>
+              <a:rPr lang="en-US" dirty="0"/>
+              <a:t/>
+            </a:r>
+            <a:endParaRPr lang="en-US" dirty="0"/>
+          </a:p>
+        </p:txBody>
+      </p:sp>
+      <p:sp>
+        <p:nvSpPr>
+          <p:cNvPr id="4" name="Slide Number Placeholder 3"/>
+          <p:cNvSpPr>
+            <a:spLocks noGrp="1"/>
+          </p:cNvSpPr>
+          <p:nvPr>
+            <p:ph type="sldNum" sz="quarter" idx="10"/>
+          </p:nvPr>
+        </p:nvSpPr>
+        <p:spPr/>
+        <p:txBody>
+          <a:bodyPr/>
+          <a:lstStyle/>
+          <a:p>
+            <a:fld id="{F7021451-1387-4CA6-816F-3879F97B5CBC}" type="slidenum">
+              <a:rPr lang="en-US"/>
+              <a:t>15</a:t>
             </a:fld>
             <a:endParaRPr lang="en-US"/>
           </a:p>
@@ -798,6 +1130,10 @@
           <a:bodyPr/>
           <a:lstStyle/>
           <a:p>
+            <a:r>
+              <a:rPr lang="en-US" dirty="0"/>
+              <a:t/>
+            </a:r>
             <a:endParaRPr lang="en-US" dirty="0"/>
           </a:p>
         </p:txBody>
@@ -882,6 +1218,10 @@
           <a:bodyPr/>
           <a:lstStyle/>
           <a:p>
+            <a:r>
+              <a:rPr lang="en-US" dirty="0"/>
+              <a:t/>
+            </a:r>
             <a:endParaRPr lang="en-US" dirty="0"/>
           </a:p>
         </p:txBody>
@@ -966,6 +1306,10 @@
           <a:bodyPr/>
           <a:lstStyle/>
           <a:p>
+            <a:r>
+              <a:rPr lang="en-US" dirty="0"/>
+              <a:t/>
+            </a:r>
             <a:endParaRPr lang="en-US" dirty="0"/>
           </a:p>
         </p:txBody>
@@ -1050,6 +1394,10 @@
           <a:bodyPr/>
           <a:lstStyle/>
           <a:p>
+            <a:r>
+              <a:rPr lang="en-US" dirty="0"/>
+              <a:t/>
+            </a:r>
             <a:endParaRPr lang="en-US" dirty="0"/>
           </a:p>
         </p:txBody>
@@ -1134,6 +1482,10 @@
           <a:bodyPr/>
           <a:lstStyle/>
           <a:p>
+            <a:r>
+              <a:rPr lang="en-US" dirty="0"/>
+              <a:t/>
+            </a:r>
             <a:endParaRPr lang="en-US" dirty="0"/>
           </a:p>
         </p:txBody>
@@ -1218,6 +1570,10 @@
           <a:bodyPr/>
           <a:lstStyle/>
           <a:p>
+            <a:r>
+              <a:rPr lang="en-US" dirty="0"/>
+              <a:t/>
+            </a:r>
             <a:endParaRPr lang="en-US" dirty="0"/>
           </a:p>
         </p:txBody>
@@ -1302,6 +1658,10 @@
           <a:bodyPr/>
           <a:lstStyle/>
           <a:p>
+            <a:r>
+              <a:rPr lang="en-US" dirty="0"/>
+              <a:t/>
+            </a:r>
             <a:endParaRPr lang="en-US" dirty="0"/>
           </a:p>
         </p:txBody>
@@ -1386,6 +1746,10 @@
           <a:bodyPr/>
           <a:lstStyle/>
           <a:p>
+            <a:r>
+              <a:rPr lang="en-US" dirty="0"/>
+              <a:t/>
+            </a:r>
             <a:endParaRPr lang="en-US" dirty="0"/>
           </a:p>
         </p:txBody>
@@ -1459,11 +1823,6 @@
 <file path=ppt/slideMasters/slideMaster1.xml><?xml version="1.0" encoding="utf-8"?>
 <p:sldMaster xmlns:a="http://schemas.openxmlformats.org/drawingml/2006/main" xmlns:r="http://schemas.openxmlformats.org/officeDocument/2006/relationships" xmlns:p="http://schemas.openxmlformats.org/presentationml/2006/main">
   <p:cSld>
-    <p:bg>
-      <p:bgRef idx="1001">
-        <a:schemeClr val="bg1"/>
-      </p:bgRef>
-    </p:bg>
     <p:spTree>
       <p:nvGrpSpPr>
         <p:cNvPr id="1" name=""/>
@@ -1746,7 +2105,6 @@
         <a:solidFill>
           <a:srgbClr val="0F172A"/>
         </a:solidFill>
-        <a:effectLst/>
       </p:bgPr>
     </p:bg>
     <p:spTree>
@@ -1784,7 +2142,7 @@
           <a:bodyPr wrap="square" rtlCol="0" anchor="ctr"/>
           <a:lstStyle/>
           <a:p>
-            <a:pPr marL="0" indent="0" algn="ctr">
+            <a:pPr algn="ctr" indent="0" marL="0">
               <a:buNone/>
             </a:pPr>
             <a:r>
@@ -1823,7 +2181,7 @@
           <a:bodyPr wrap="square" rtlCol="0" anchor="ctr"/>
           <a:lstStyle/>
           <a:p>
-            <a:pPr marL="0" indent="0" algn="ctr">
+            <a:pPr algn="ctr" indent="0" marL="0">
               <a:buNone/>
             </a:pPr>
             <a:r>
@@ -1840,7 +2198,7 @@
             <a:endParaRPr lang="en-US" sz="1600" dirty="0"/>
           </a:p>
           <a:p>
-            <a:pPr marL="0" indent="0" algn="ctr">
+            <a:pPr algn="ctr" indent="0" marL="0">
               <a:buNone/>
             </a:pPr>
             <a:r>
@@ -1897,7 +2255,7 @@
           </a:solidFill>
           <a:ln/>
           <a:effectLst>
-            <a:outerShdw blurRad="38100" dist="12700" dir="8100000" algn="bl" rotWithShape="0">
+            <a:outerShdw sx="100000" sy="100000" kx="0" ky="0" algn="bl" rotWithShape="0" blurRad="38100" dist="12700" dir="8100000">
               <a:srgbClr val="000000">
                 <a:alpha val="25000"/>
               </a:srgbClr>
@@ -1926,7 +2284,7 @@
           <a:bodyPr wrap="square" lIns="0" tIns="0" rIns="0" bIns="0" rtlCol="0" anchor="ctr"/>
           <a:lstStyle/>
           <a:p>
-            <a:pPr marL="0" indent="0">
+            <a:pPr indent="0" marL="0">
               <a:buNone/>
             </a:pPr>
             <a:r>
@@ -1965,7 +2323,7 @@
           <a:bodyPr wrap="square" lIns="0" tIns="0" rIns="0" bIns="0" rtlCol="0" anchor="ctr"/>
           <a:lstStyle/>
           <a:p>
-            <a:pPr marL="0" indent="0">
+            <a:pPr indent="0" marL="0">
               <a:buNone/>
             </a:pPr>
             <a:r>
@@ -2004,7 +2362,7 @@
           <a:bodyPr wrap="square" lIns="0" tIns="0" rIns="0" bIns="0" rtlCol="0" anchor="ctr"/>
           <a:lstStyle/>
           <a:p>
-            <a:pPr marL="0" indent="0">
+            <a:pPr indent="0" marL="0">
               <a:buNone/>
             </a:pPr>
             <a:r>
@@ -2043,7 +2401,7 @@
           <a:bodyPr wrap="square" lIns="0" tIns="0" rIns="0" bIns="0" rtlCol="0" anchor="ctr"/>
           <a:lstStyle/>
           <a:p>
-            <a:pPr marL="0" indent="0">
+            <a:pPr indent="0" marL="0">
               <a:buNone/>
             </a:pPr>
             <a:r>
@@ -2082,7 +2440,7 @@
           <a:bodyPr wrap="square" lIns="0" tIns="0" rIns="0" bIns="0" rtlCol="0" anchor="ctr"/>
           <a:lstStyle/>
           <a:p>
-            <a:pPr marL="0" indent="0">
+            <a:pPr indent="0" marL="0">
               <a:buNone/>
             </a:pPr>
             <a:r>
@@ -2121,7 +2479,7 @@
           <a:bodyPr wrap="square" lIns="0" tIns="0" rIns="0" bIns="0" rtlCol="0" anchor="ctr"/>
           <a:lstStyle/>
           <a:p>
-            <a:pPr marL="0" indent="0">
+            <a:pPr indent="0" marL="0">
               <a:buNone/>
             </a:pPr>
             <a:r>
@@ -2160,7 +2518,7 @@
           <a:bodyPr wrap="square" lIns="0" tIns="0" rIns="0" bIns="0" rtlCol="0" anchor="ctr"/>
           <a:lstStyle/>
           <a:p>
-            <a:pPr marL="0" indent="0">
+            <a:pPr indent="0" marL="0">
               <a:buNone/>
             </a:pPr>
             <a:r>
@@ -2199,7 +2557,7 @@
           <a:bodyPr wrap="square" lIns="0" tIns="0" rIns="0" bIns="0" rtlCol="0" anchor="ctr"/>
           <a:lstStyle/>
           <a:p>
-            <a:pPr marL="0" indent="0">
+            <a:pPr indent="0" marL="0">
               <a:buNone/>
             </a:pPr>
             <a:r>
@@ -2238,7 +2596,7 @@
           <a:bodyPr wrap="square" lIns="0" tIns="0" rIns="0" bIns="0" rtlCol="0" anchor="ctr"/>
           <a:lstStyle/>
           <a:p>
-            <a:pPr marL="0" indent="0">
+            <a:pPr indent="0" marL="0">
               <a:buNone/>
             </a:pPr>
             <a:r>
@@ -2277,7 +2635,7 @@
           <a:bodyPr wrap="square" lIns="0" tIns="0" rIns="0" bIns="0" rtlCol="0" anchor="ctr"/>
           <a:lstStyle/>
           <a:p>
-            <a:pPr marL="0" indent="0">
+            <a:pPr indent="0" marL="0">
               <a:buNone/>
             </a:pPr>
             <a:r>
@@ -2336,7 +2694,7 @@
           <a:bodyPr wrap="square" lIns="0" tIns="0" rIns="0" bIns="0" rtlCol="0" anchor="ctr"/>
           <a:lstStyle/>
           <a:p>
-            <a:pPr marL="0" indent="0">
+            <a:pPr indent="0" marL="0">
               <a:buNone/>
             </a:pPr>
             <a:r>
@@ -2375,7 +2733,7 @@
           <a:bodyPr wrap="square" lIns="0" tIns="0" rIns="0" bIns="0" rtlCol="0" anchor="ctr"/>
           <a:lstStyle/>
           <a:p>
-            <a:pPr marL="0" indent="0" algn="r">
+            <a:pPr algn="r" indent="0" marL="0">
               <a:buNone/>
             </a:pPr>
             <a:r>
@@ -2409,7 +2767,6 @@
         <a:solidFill>
           <a:srgbClr val="0F172A"/>
         </a:solidFill>
-        <a:effectLst/>
       </p:bgPr>
     </p:bg>
     <p:spTree>
@@ -2447,7 +2804,7 @@
           <a:bodyPr wrap="square" lIns="0" tIns="0" rIns="0" bIns="0" rtlCol="0" anchor="ctr"/>
           <a:lstStyle/>
           <a:p>
-            <a:pPr marL="0" indent="0">
+            <a:pPr indent="0" marL="0">
               <a:buNone/>
             </a:pPr>
             <a:r>
@@ -2484,7 +2841,7 @@
           </a:solidFill>
           <a:ln/>
           <a:effectLst>
-            <a:outerShdw blurRad="38100" dist="12700" dir="8100000" algn="bl" rotWithShape="0">
+            <a:outerShdw sx="100000" sy="100000" kx="0" ky="0" algn="bl" rotWithShape="0" blurRad="38100" dist="12700" dir="8100000">
               <a:srgbClr val="000000">
                 <a:alpha val="25000"/>
               </a:srgbClr>
@@ -2533,7 +2890,7 @@
           <a:bodyPr wrap="square" rtlCol="0" anchor="ctr"/>
           <a:lstStyle/>
           <a:p>
-            <a:pPr marL="0" indent="0" algn="ctr">
+            <a:pPr algn="ctr" indent="0" marL="0">
               <a:buNone/>
             </a:pPr>
             <a:r>
@@ -2572,7 +2929,7 @@
           <a:bodyPr wrap="square" lIns="0" tIns="0" rIns="0" bIns="0" rtlCol="0" anchor="ctr"/>
           <a:lstStyle/>
           <a:p>
-            <a:pPr marL="0" indent="0">
+            <a:pPr indent="0" marL="0">
               <a:buNone/>
             </a:pPr>
             <a:r>
@@ -2611,7 +2968,7 @@
           <a:bodyPr wrap="square" lIns="0" tIns="0" rIns="0" bIns="0" rtlCol="0" anchor="ctr"/>
           <a:lstStyle/>
           <a:p>
-            <a:pPr marL="0" indent="0">
+            <a:pPr indent="0" marL="0">
               <a:buNone/>
             </a:pPr>
             <a:r>
@@ -2623,7 +2980,7 @@
                 <a:ea typeface="Calibri" pitchFamily="34" charset="-122"/>
                 <a:cs typeface="Calibri" pitchFamily="34" charset="-120"/>
               </a:rPr>
-              <a:t>Any physical or virtual item consumed during instruction. Rooms, laboratories, and equipment. Self-referential so equipment can be nested under a room. Supports capacity limits and staff-only restrictions.</a:t>
+              <a:t>Any physical or virtual item consumed. Rooms, laboratories, equipment. Self-referential so equipment nests under a room. Supports capacity limits and staff-only restrictions.</a:t>
             </a:r>
             <a:endParaRPr lang="en-US" sz="1000" dirty="0"/>
           </a:p>
@@ -2648,7 +3005,7 @@
           </a:solidFill>
           <a:ln/>
           <a:effectLst>
-            <a:outerShdw blurRad="38100" dist="12700" dir="8100000" algn="bl" rotWithShape="0">
+            <a:outerShdw sx="100000" sy="100000" kx="0" ky="0" algn="bl" rotWithShape="0" blurRad="38100" dist="12700" dir="8100000">
               <a:srgbClr val="000000">
                 <a:alpha val="25000"/>
               </a:srgbClr>
@@ -2697,7 +3054,7 @@
           <a:bodyPr wrap="square" rtlCol="0" anchor="ctr"/>
           <a:lstStyle/>
           <a:p>
-            <a:pPr marL="0" indent="0" algn="ctr">
+            <a:pPr algn="ctr" indent="0" marL="0">
               <a:buNone/>
             </a:pPr>
             <a:r>
@@ -2736,7 +3093,7 @@
           <a:bodyPr wrap="square" lIns="0" tIns="0" rIns="0" bIns="0" rtlCol="0" anchor="ctr"/>
           <a:lstStyle/>
           <a:p>
-            <a:pPr marL="0" indent="0">
+            <a:pPr indent="0" marL="0">
               <a:buNone/>
             </a:pPr>
             <a:r>
@@ -2775,7 +3132,7 @@
           <a:bodyPr wrap="square" lIns="0" tIns="0" rIns="0" bIns="0" rtlCol="0" anchor="ctr"/>
           <a:lstStyle/>
           <a:p>
-            <a:pPr marL="0" indent="0">
+            <a:pPr indent="0" marL="0">
               <a:buNone/>
             </a:pPr>
             <a:r>
@@ -2787,7 +3144,7 @@
                 <a:ea typeface="Calibri" pitchFamily="34" charset="-122"/>
                 <a:cs typeface="Calibri" pitchFamily="34" charset="-120"/>
               </a:rPr>
-              <a:t>All money flows within the institution. Invoices, payments, waivers, and scholarships. Supports draft-then-approve workflows for staff-submitted charges and online payment gateway integration.</a:t>
+              <a:t>All money flows. Invoices, payments, waivers, scholarships. Supports draft-then-approve workflows for staff-submitted charges and online payment gateway integration.</a:t>
             </a:r>
             <a:endParaRPr lang="en-US" sz="1000" dirty="0"/>
           </a:p>
@@ -2812,7 +3169,7 @@
           </a:solidFill>
           <a:ln/>
           <a:effectLst>
-            <a:outerShdw blurRad="38100" dist="12700" dir="8100000" algn="bl" rotWithShape="0">
+            <a:outerShdw sx="100000" sy="100000" kx="0" ky="0" algn="bl" rotWithShape="0" blurRad="38100" dist="12700" dir="8100000">
               <a:srgbClr val="000000">
                 <a:alpha val="25000"/>
               </a:srgbClr>
@@ -2841,11 +3198,11 @@
           <a:bodyPr wrap="square" lIns="0" tIns="0" rIns="0" bIns="0" rtlCol="0" anchor="ctr"/>
           <a:lstStyle/>
           <a:p>
-            <a:pPr marL="0" indent="0">
+            <a:pPr indent="0" marL="0">
               <a:buNone/>
             </a:pPr>
             <a:r>
-              <a:rPr lang="en-US" sz="1100" b="1" kern="0" spc="200" dirty="0">
+              <a:rPr lang="en-US" sz="1100" b="1" spc="200" kern="0" dirty="0">
                 <a:solidFill>
                   <a:srgbClr val="6366F1"/>
                 </a:solidFill>
@@ -2880,7 +3237,7 @@
           <a:bodyPr wrap="square" lIns="0" tIns="0" rIns="0" bIns="0" rtlCol="0" anchor="ctr"/>
           <a:lstStyle/>
           <a:p>
-            <a:pPr marL="0" indent="0">
+            <a:pPr indent="0" marL="0">
               <a:buNone/>
             </a:pPr>
             <a:r>
@@ -2892,7 +3249,7 @@
                 <a:ea typeface="Calibri" pitchFamily="34" charset="-122"/>
                 <a:cs typeface="Calibri" pitchFamily="34" charset="-120"/>
               </a:rPr>
-              <a:t>resource and resource_permit manage rooms and equipment bookings for sessions. fee_invoice supports fan-out to classes or individual students, with categories for fees, books, participation, and other charges. Payment processing uses an adapter pattern: Stripe integration is currently being integrated to replace the simulated Paystack adapter.</a:t>
+              <a:t>resource and resource_permit manage rooms and equipment bookings. fee_invoice supports fan-out to classes or students with categories for fees, books, and other charges. Stripe integration is currently in progress.</a:t>
             </a:r>
             <a:endParaRPr lang="en-US" sz="1100" dirty="0"/>
           </a:p>
@@ -2939,7 +3296,7 @@
           <a:bodyPr wrap="square" lIns="0" tIns="0" rIns="0" bIns="0" rtlCol="0" anchor="ctr"/>
           <a:lstStyle/>
           <a:p>
-            <a:pPr marL="0" indent="0">
+            <a:pPr indent="0" marL="0">
               <a:buNone/>
             </a:pPr>
             <a:r>
@@ -2978,7 +3335,7 @@
           <a:bodyPr wrap="square" lIns="0" tIns="0" rIns="0" bIns="0" rtlCol="0" anchor="ctr"/>
           <a:lstStyle/>
           <a:p>
-            <a:pPr marL="0" indent="0" algn="r">
+            <a:pPr algn="r" indent="0" marL="0">
               <a:buNone/>
             </a:pPr>
             <a:r>
@@ -3012,7 +3369,6 @@
         <a:solidFill>
           <a:srgbClr val="0F172A"/>
         </a:solidFill>
-        <a:effectLst/>
       </p:bgPr>
     </p:bg>
     <p:spTree>
@@ -3050,7 +3406,7 @@
           <a:bodyPr wrap="square" lIns="0" tIns="0" rIns="0" bIns="0" rtlCol="0" anchor="ctr"/>
           <a:lstStyle/>
           <a:p>
-            <a:pPr marL="0" indent="0">
+            <a:pPr indent="0" marL="0">
               <a:buNone/>
             </a:pPr>
             <a:r>
@@ -3087,7 +3443,7 @@
           </a:solidFill>
           <a:ln/>
           <a:effectLst>
-            <a:outerShdw blurRad="38100" dist="12700" dir="8100000" algn="bl" rotWithShape="0">
+            <a:outerShdw sx="100000" sy="100000" kx="0" ky="0" algn="bl" rotWithShape="0" blurRad="38100" dist="12700" dir="8100000">
               <a:srgbClr val="000000">
                 <a:alpha val="25000"/>
               </a:srgbClr>
@@ -3136,7 +3492,7 @@
           <a:bodyPr wrap="square" rtlCol="0" anchor="ctr"/>
           <a:lstStyle/>
           <a:p>
-            <a:pPr marL="0" indent="0" algn="ctr">
+            <a:pPr algn="ctr" indent="0" marL="0">
               <a:buNone/>
             </a:pPr>
             <a:r>
@@ -3175,7 +3531,7 @@
           <a:bodyPr wrap="square" lIns="0" tIns="0" rIns="0" bIns="0" rtlCol="0" anchor="ctr"/>
           <a:lstStyle/>
           <a:p>
-            <a:pPr marL="0" indent="0">
+            <a:pPr indent="0" marL="0">
               <a:buNone/>
             </a:pPr>
             <a:r>
@@ -3214,7 +3570,7 @@
           <a:bodyPr wrap="square" lIns="0" tIns="0" rIns="0" bIns="0" rtlCol="0" anchor="ctr"/>
           <a:lstStyle/>
           <a:p>
-            <a:pPr marL="0" indent="0">
+            <a:pPr indent="0" marL="0">
               <a:buNone/>
             </a:pPr>
             <a:r>
@@ -3228,6 +3584,9 @@
               </a:rPr>
               <a:t>Incorrect: </a:t>
             </a:r>
+            <a:pPr indent="0" marL="0">
+              <a:buNone/>
+            </a:pPr>
             <a:r>
               <a:rPr lang="en-US" sz="1000" dirty="0">
                 <a:solidFill>
@@ -3239,6 +3598,9 @@
               </a:rPr>
               <a:t>Separate tables for Student and Teacher</a:t>
             </a:r>
+            <a:pPr indent="0" marL="0">
+              <a:buNone/>
+            </a:pPr>
             <a:r>
               <a:rPr lang="en-US" sz="1000" b="1" dirty="0">
                 <a:solidFill>
@@ -3250,6 +3612,9 @@
               </a:rPr>
               <a:t>    Correct: </a:t>
             </a:r>
+            <a:pPr indent="0" marL="0">
+              <a:buNone/>
+            </a:pPr>
             <a:r>
               <a:rPr lang="en-US" sz="1000" dirty="0">
                 <a:solidFill>
@@ -3286,7 +3651,7 @@
           <a:bodyPr wrap="square" lIns="0" tIns="0" rIns="0" bIns="0" rtlCol="0" anchor="ctr"/>
           <a:lstStyle/>
           <a:p>
-            <a:pPr marL="0" indent="0">
+            <a:pPr indent="0" marL="0">
               <a:buNone/>
             </a:pPr>
             <a:r>
@@ -3298,7 +3663,7 @@
                 <a:ea typeface="Calibri" pitchFamily="34" charset="-122"/>
                 <a:cs typeface="Calibri" pitchFamily="34" charset="-120"/>
               </a:rPr>
-              <a:t>A PhD student who teaches undergraduates must not be a schema contradiction. Getting this wrong requires a system rebuild at the first edge case.</a:t>
+              <a:t>A PhD student who teaches undergraduates must not be a schema contradiction.</a:t>
             </a:r>
             <a:endParaRPr lang="en-US" sz="900" dirty="0"/>
           </a:p>
@@ -3323,7 +3688,7 @@
           </a:solidFill>
           <a:ln/>
           <a:effectLst>
-            <a:outerShdw blurRad="38100" dist="12700" dir="8100000" algn="bl" rotWithShape="0">
+            <a:outerShdw sx="100000" sy="100000" kx="0" ky="0" algn="bl" rotWithShape="0" blurRad="38100" dist="12700" dir="8100000">
               <a:srgbClr val="000000">
                 <a:alpha val="25000"/>
               </a:srgbClr>
@@ -3372,7 +3737,7 @@
           <a:bodyPr wrap="square" rtlCol="0" anchor="ctr"/>
           <a:lstStyle/>
           <a:p>
-            <a:pPr marL="0" indent="0" algn="ctr">
+            <a:pPr algn="ctr" indent="0" marL="0">
               <a:buNone/>
             </a:pPr>
             <a:r>
@@ -3411,7 +3776,7 @@
           <a:bodyPr wrap="square" lIns="0" tIns="0" rIns="0" bIns="0" rtlCol="0" anchor="ctr"/>
           <a:lstStyle/>
           <a:p>
-            <a:pPr marL="0" indent="0">
+            <a:pPr indent="0" marL="0">
               <a:buNone/>
             </a:pPr>
             <a:r>
@@ -3450,7 +3815,7 @@
           <a:bodyPr wrap="square" lIns="0" tIns="0" rIns="0" bIns="0" rtlCol="0" anchor="ctr"/>
           <a:lstStyle/>
           <a:p>
-            <a:pPr marL="0" indent="0">
+            <a:pPr indent="0" marL="0">
               <a:buNone/>
             </a:pPr>
             <a:r>
@@ -3464,6 +3829,9 @@
               </a:rPr>
               <a:t>Incorrect: </a:t>
             </a:r>
+            <a:pPr indent="0" marL="0">
+              <a:buNone/>
+            </a:pPr>
             <a:r>
               <a:rPr lang="en-US" sz="1000" dirty="0">
                 <a:solidFill>
@@ -3475,6 +3843,9 @@
               </a:rPr>
               <a:t>A class_id column on the Student row</a:t>
             </a:r>
+            <a:pPr indent="0" marL="0">
+              <a:buNone/>
+            </a:pPr>
             <a:r>
               <a:rPr lang="en-US" sz="1000" b="1" dirty="0">
                 <a:solidFill>
@@ -3486,6 +3857,9 @@
               </a:rPr>
               <a:t>    Correct: </a:t>
             </a:r>
+            <a:pPr indent="0" marL="0">
+              <a:buNone/>
+            </a:pPr>
             <a:r>
               <a:rPr lang="en-US" sz="1000" dirty="0">
                 <a:solidFill>
@@ -3522,7 +3896,7 @@
           <a:bodyPr wrap="square" lIns="0" tIns="0" rIns="0" bIns="0" rtlCol="0" anchor="ctr"/>
           <a:lstStyle/>
           <a:p>
-            <a:pPr marL="0" indent="0">
+            <a:pPr indent="0" marL="0">
               <a:buNone/>
             </a:pPr>
             <a:r>
@@ -3534,7 +3908,7 @@
                 <a:ea typeface="Calibri" pitchFamily="34" charset="-122"/>
                 <a:cs typeface="Calibri" pitchFamily="34" charset="-120"/>
               </a:rPr>
-              <a:t>Attendance, grading, billing, and progression all depend on Enrollment, not on Student. Nearly every significant feature touches this table.</a:t>
+              <a:t>Attendance, grading, billing, and progression all depend on Enrollment, not Student.</a:t>
             </a:r>
             <a:endParaRPr lang="en-US" sz="900" dirty="0"/>
           </a:p>
@@ -3559,7 +3933,7 @@
           </a:solidFill>
           <a:ln/>
           <a:effectLst>
-            <a:outerShdw blurRad="38100" dist="12700" dir="8100000" algn="bl" rotWithShape="0">
+            <a:outerShdw sx="100000" sy="100000" kx="0" ky="0" algn="bl" rotWithShape="0" blurRad="38100" dist="12700" dir="8100000">
               <a:srgbClr val="000000">
                 <a:alpha val="25000"/>
               </a:srgbClr>
@@ -3608,7 +3982,7 @@
           <a:bodyPr wrap="square" rtlCol="0" anchor="ctr"/>
           <a:lstStyle/>
           <a:p>
-            <a:pPr marL="0" indent="0" algn="ctr">
+            <a:pPr algn="ctr" indent="0" marL="0">
               <a:buNone/>
             </a:pPr>
             <a:r>
@@ -3647,7 +4021,7 @@
           <a:bodyPr wrap="square" lIns="0" tIns="0" rIns="0" bIns="0" rtlCol="0" anchor="ctr"/>
           <a:lstStyle/>
           <a:p>
-            <a:pPr marL="0" indent="0">
+            <a:pPr indent="0" marL="0">
               <a:buNone/>
             </a:pPr>
             <a:r>
@@ -3686,7 +4060,7 @@
           <a:bodyPr wrap="square" lIns="0" tIns="0" rIns="0" bIns="0" rtlCol="0" anchor="ctr"/>
           <a:lstStyle/>
           <a:p>
-            <a:pPr marL="0" indent="0">
+            <a:pPr indent="0" marL="0">
               <a:buNone/>
             </a:pPr>
             <a:r>
@@ -3700,6 +4074,9 @@
               </a:rPr>
               <a:t>Incorrect: </a:t>
             </a:r>
+            <a:pPr indent="0" marL="0">
+              <a:buNone/>
+            </a:pPr>
             <a:r>
               <a:rPr lang="en-US" sz="1000" dirty="0">
                 <a:solidFill>
@@ -3711,6 +4088,9 @@
               </a:rPr>
               <a:t>A single hardcoded Term or Semester model</a:t>
             </a:r>
+            <a:pPr indent="0" marL="0">
+              <a:buNone/>
+            </a:pPr>
             <a:r>
               <a:rPr lang="en-US" sz="1000" b="1" dirty="0">
                 <a:solidFill>
@@ -3722,6 +4102,9 @@
               </a:rPr>
               <a:t>    Correct: </a:t>
             </a:r>
+            <a:pPr indent="0" marL="0">
+              <a:buNone/>
+            </a:pPr>
             <a:r>
               <a:rPr lang="en-US" sz="1000" dirty="0">
                 <a:solidFill>
@@ -3758,7 +4141,7 @@
           <a:bodyPr wrap="square" lIns="0" tIns="0" rIns="0" bIns="0" rtlCol="0" anchor="ctr"/>
           <a:lstStyle/>
           <a:p>
-            <a:pPr marL="0" indent="0">
+            <a:pPr indent="0" marL="0">
               <a:buNone/>
             </a:pPr>
             <a:r>
@@ -3770,7 +4153,7 @@
                 <a:ea typeface="Calibri" pitchFamily="34" charset="-122"/>
                 <a:cs typeface="Calibri" pitchFamily="34" charset="-120"/>
               </a:rPr>
-              <a:t>University semesters, bootcamp rolling intakes, and Montessori continuous cycles require fundamentally different time models. This project is scoped to K-12 term-based institutions.</a:t>
+              <a:t>Different institution types require fundamentally different time models. Scoped to K-12 term-based institutions.</a:t>
             </a:r>
             <a:endParaRPr lang="en-US" sz="900" dirty="0"/>
           </a:p>
@@ -3817,7 +4200,7 @@
           <a:bodyPr wrap="square" lIns="0" tIns="0" rIns="0" bIns="0" rtlCol="0" anchor="ctr"/>
           <a:lstStyle/>
           <a:p>
-            <a:pPr marL="0" indent="0">
+            <a:pPr indent="0" marL="0">
               <a:buNone/>
             </a:pPr>
             <a:r>
@@ -3856,7 +4239,7 @@
           <a:bodyPr wrap="square" lIns="0" tIns="0" rIns="0" bIns="0" rtlCol="0" anchor="ctr"/>
           <a:lstStyle/>
           <a:p>
-            <a:pPr marL="0" indent="0" algn="r">
+            <a:pPr algn="r" indent="0" marL="0">
               <a:buNone/>
             </a:pPr>
             <a:r>
@@ -3890,7 +4273,6 @@
         <a:solidFill>
           <a:srgbClr val="0F172A"/>
         </a:solidFill>
-        <a:effectLst/>
       </p:bgPr>
     </p:bg>
     <p:spTree>
@@ -3928,7 +4310,7 @@
           <a:bodyPr wrap="square" lIns="0" tIns="0" rIns="0" bIns="0" rtlCol="0" anchor="ctr"/>
           <a:lstStyle/>
           <a:p>
-            <a:pPr marL="0" indent="0">
+            <a:pPr indent="0" marL="0">
               <a:buNone/>
             </a:pPr>
             <a:r>
@@ -3967,7 +4349,7 @@
           <a:bodyPr wrap="square" rtlCol="0" anchor="ctr"/>
           <a:lstStyle/>
           <a:p>
-            <a:pPr marL="0" indent="0">
+            <a:pPr indent="0" marL="0">
               <a:buNone/>
             </a:pPr>
             <a:r>
@@ -4006,7 +4388,7 @@
           <a:bodyPr wrap="square" lIns="0" tIns="0" rIns="0" bIns="0" rtlCol="0" anchor="ctr"/>
           <a:lstStyle/>
           <a:p>
-            <a:pPr marL="0" indent="0">
+            <a:pPr indent="0" marL="0">
               <a:buNone/>
             </a:pPr>
             <a:r>
@@ -4045,7 +4427,7 @@
           <a:bodyPr wrap="square" lIns="0" tIns="0" rIns="0" bIns="0" rtlCol="0" anchor="ctr"/>
           <a:lstStyle/>
           <a:p>
-            <a:pPr marL="0" indent="0">
+            <a:pPr indent="0" marL="0">
               <a:buNone/>
             </a:pPr>
             <a:r>
@@ -4082,7 +4464,7 @@
           </a:solidFill>
           <a:ln/>
           <a:effectLst>
-            <a:outerShdw blurRad="38100" dist="12700" dir="8100000" algn="bl" rotWithShape="0">
+            <a:outerShdw sx="100000" sy="100000" kx="0" ky="0" algn="bl" rotWithShape="0" blurRad="38100" dist="12700" dir="8100000">
               <a:srgbClr val="000000">
                 <a:alpha val="25000"/>
               </a:srgbClr>
@@ -4111,7 +4493,7 @@
           <a:bodyPr wrap="square" lIns="0" tIns="0" rIns="0" bIns="0" rtlCol="0" anchor="ctr"/>
           <a:lstStyle/>
           <a:p>
-            <a:pPr marL="0" indent="0">
+            <a:pPr indent="0" marL="0">
               <a:buNone/>
             </a:pPr>
             <a:r>
@@ -4125,6 +4507,9 @@
               </a:rPr>
               <a:t>A universal system supporting every institution type is a career, not a capstone project.</a:t>
             </a:r>
+            <a:pPr indent="0" marL="0">
+              <a:buNone/>
+            </a:pPr>
             <a:r>
               <a:rPr lang="en-US" sz="1200" dirty="0">
                 <a:solidFill>
@@ -4134,7 +4519,7 @@
                 <a:ea typeface="Calibri" pitchFamily="34" charset="-122"/>
                 <a:cs typeface="Calibri" pitchFamily="34" charset="-120"/>
               </a:rPr>
-              <a:t> The rules connecting these primitives multiply combinatorially across institution types. A university requires prerequisite chains with credit-hour validation; a bootcamp needs rolling intakes with overlapping cohorts; a Montessori school uses continuous observation with no fixed terms. Each demands fundamentally different business logic around the same fourteen tables.</a:t>
+              <a:t> The rules multiply combinatorially across institution types. Each demands fundamentally different business logic around the same fourteen tables.</a:t>
             </a:r>
             <a:endParaRPr lang="en-US" sz="1200" dirty="0"/>
           </a:p>
@@ -4159,7 +4544,7 @@
           </a:solidFill>
           <a:ln/>
           <a:effectLst>
-            <a:outerShdw blurRad="38100" dist="12700" dir="8100000" algn="bl" rotWithShape="0">
+            <a:outerShdw sx="100000" sy="100000" kx="0" ky="0" algn="bl" rotWithShape="0" blurRad="38100" dist="12700" dir="8100000">
               <a:srgbClr val="000000">
                 <a:alpha val="25000"/>
               </a:srgbClr>
@@ -4188,7 +4573,7 @@
           <a:bodyPr wrap="square" lIns="0" tIns="0" rIns="0" bIns="0" rtlCol="0" anchor="ctr"/>
           <a:lstStyle/>
           <a:p>
-            <a:pPr marL="0" indent="0">
+            <a:pPr indent="0" marL="0">
               <a:buNone/>
             </a:pPr>
             <a:r>
@@ -4202,6 +4587,9 @@
               </a:rPr>
               <a:t>Scope decision: </a:t>
             </a:r>
+            <a:pPr indent="0" marL="0">
+              <a:buNone/>
+            </a:pPr>
             <a:r>
               <a:rPr lang="en-US" sz="1100" dirty="0">
                 <a:solidFill>
@@ -4211,7 +4599,7 @@
                 <a:ea typeface="Calibri" pitchFamily="34" charset="-122"/>
                 <a:cs typeface="Calibri" pitchFamily="34" charset="-120"/>
               </a:rPr>
-              <a:t>K-12 private schools and vocational institutes. This is specific, buildable within the project timeframe, and defensible under academic examination. The schema supports deeper nesting for future extension.</a:t>
+              <a:t>K-12 private schools and vocational institutes. This is specific, buildable, and defensible under academic examination.</a:t>
             </a:r>
             <a:endParaRPr lang="en-US" sz="1100" dirty="0"/>
           </a:p>
@@ -4258,7 +4646,7 @@
           <a:bodyPr wrap="square" lIns="0" tIns="0" rIns="0" bIns="0" rtlCol="0" anchor="ctr"/>
           <a:lstStyle/>
           <a:p>
-            <a:pPr marL="0" indent="0">
+            <a:pPr indent="0" marL="0">
               <a:buNone/>
             </a:pPr>
             <a:r>
@@ -4297,7 +4685,7 @@
           <a:bodyPr wrap="square" lIns="0" tIns="0" rIns="0" bIns="0" rtlCol="0" anchor="ctr"/>
           <a:lstStyle/>
           <a:p>
-            <a:pPr marL="0" indent="0" algn="r">
+            <a:pPr algn="r" indent="0" marL="0">
               <a:buNone/>
             </a:pPr>
             <a:r>
@@ -4331,7 +4719,6 @@
         <a:solidFill>
           <a:srgbClr val="0F172A"/>
         </a:solidFill>
-        <a:effectLst/>
       </p:bgPr>
     </p:bg>
     <p:spTree>
@@ -4369,7 +4756,7 @@
           <a:bodyPr wrap="square" lIns="0" tIns="0" rIns="0" bIns="0" rtlCol="0" anchor="ctr"/>
           <a:lstStyle/>
           <a:p>
-            <a:pPr marL="0" indent="0">
+            <a:pPr indent="0" marL="0">
               <a:buNone/>
             </a:pPr>
             <a:r>
@@ -4396,34 +4783,22 @@
           <p:nvPr>
             <p:extLst>
               <p:ext uri="{D42A27DB-BD31-4B8C-83A1-F6EECF244321}">
-                <p14:modId xmlns:p14="http://schemas.microsoft.com/office/powerpoint/2010/main" val="53952261"/>
+                <p14:modId xmlns:p14="http://schemas.microsoft.com/office/powerpoint/2010/main" val="1579011935"/>
               </p:ext>
             </p:extLst>
           </p:nvPr>
         </p:nvGraphicFramePr>
         <p:xfrm>
           <a:off x="548640" y="914400"/>
-          <a:ext cx="8046720" cy="3913632"/>
+          <a:ext cx="8046720" cy="914400"/>
         </p:xfrm>
         <a:graphic>
           <a:graphicData uri="http://schemas.openxmlformats.org/drawingml/2006/table">
             <a:tbl>
               <a:tblPr/>
               <a:tblGrid>
-                <a:gridCol w="6400800">
-                  <a:extLst>
-                    <a:ext uri="{9D8B030D-6E8A-4147-A177-3AD203B41FA5}">
-                      <a16:colId xmlns:a16="http://schemas.microsoft.com/office/drawing/2014/main" val="20000"/>
-                    </a:ext>
-                  </a:extLst>
-                </a:gridCol>
-                <a:gridCol w="1645920">
-                  <a:extLst>
-                    <a:ext uri="{9D8B030D-6E8A-4147-A177-3AD203B41FA5}">
-                      <a16:colId xmlns:a16="http://schemas.microsoft.com/office/drawing/2014/main" val="20001"/>
-                    </a:ext>
-                  </a:extLst>
-                </a:gridCol>
+                <a:gridCol w="6400800"/>
+                <a:gridCol w="1645920"/>
               </a:tblGrid>
               <a:tr h="256032">
                 <a:tc>
@@ -4431,7 +4806,7 @@
                     <a:bodyPr/>
                     <a:lstStyle/>
                     <a:p>
-                      <a:pPr marL="0" indent="0" algn="ctr">
+                      <a:pPr algn="ctr" indent="0" marL="0">
                         <a:buNone/>
                       </a:pPr>
                       <a:r>
@@ -4452,7 +4827,7 @@
                       </a:endParaRPr>
                     </a:p>
                   </a:txBody>
-                  <a:tcPr anchor="ctr">
+                  <a:tcPr marL="91440" marR="91440" marT="45720" marB="45720" anchor="ctr">
                     <a:lnL w="6350" cap="flat" cmpd="sng" algn="ctr">
                       <a:solidFill>
                         <a:srgbClr val="334155"/>
@@ -4499,7 +4874,7 @@
                     <a:bodyPr/>
                     <a:lstStyle/>
                     <a:p>
-                      <a:pPr marL="0" indent="0" algn="ctr">
+                      <a:pPr algn="ctr" indent="0" marL="0">
                         <a:buNone/>
                       </a:pPr>
                       <a:r>
@@ -4520,7 +4895,7 @@
                       </a:endParaRPr>
                     </a:p>
                   </a:txBody>
-                  <a:tcPr anchor="ctr">
+                  <a:tcPr marL="91440" marR="91440" marT="45720" marB="45720" anchor="ctr">
                     <a:lnL w="6350" cap="flat" cmpd="sng" algn="ctr">
                       <a:solidFill>
                         <a:srgbClr val="334155"/>
@@ -4562,11 +4937,6 @@
                     </a:solidFill>
                   </a:tcPr>
                 </a:tc>
-                <a:extLst>
-                  <a:ext uri="{0D108BD9-81ED-4DB2-BD59-A6C34878D82A}">
-                    <a16:rowId xmlns:a16="http://schemas.microsoft.com/office/drawing/2014/main" val="10000"/>
-                  </a:ext>
-                </a:extLst>
               </a:tr>
               <a:tr h="237744">
                 <a:tc>
@@ -4574,7 +4944,7 @@
                     <a:bodyPr/>
                     <a:lstStyle/>
                     <a:p>
-                      <a:pPr marL="0" indent="0">
+                      <a:pPr indent="0" marL="0">
                         <a:buNone/>
                       </a:pPr>
                       <a:r>
@@ -4595,7 +4965,7 @@
                       </a:endParaRPr>
                     </a:p>
                   </a:txBody>
-                  <a:tcPr anchor="ctr">
+                  <a:tcPr marL="91440" marR="91440" marT="45720" marB="45720" anchor="ctr">
                     <a:lnL w="6350" cap="flat" cmpd="sng" algn="ctr">
                       <a:solidFill>
                         <a:srgbClr val="334155"/>
@@ -4642,7 +5012,7 @@
                     <a:bodyPr/>
                     <a:lstStyle/>
                     <a:p>
-                      <a:pPr marL="0" indent="0">
+                      <a:pPr indent="0" marL="0">
                         <a:buNone/>
                       </a:pPr>
                       <a:r>
@@ -4663,7 +5033,7 @@
                       </a:endParaRPr>
                     </a:p>
                   </a:txBody>
-                  <a:tcPr anchor="ctr">
+                  <a:tcPr marL="91440" marR="91440" marT="45720" marB="45720" anchor="ctr">
                     <a:lnL w="6350" cap="flat" cmpd="sng" algn="ctr">
                       <a:solidFill>
                         <a:srgbClr val="334155"/>
@@ -4705,11 +5075,6 @@
                     </a:solidFill>
                   </a:tcPr>
                 </a:tc>
-                <a:extLst>
-                  <a:ext uri="{0D108BD9-81ED-4DB2-BD59-A6C34878D82A}">
-                    <a16:rowId xmlns:a16="http://schemas.microsoft.com/office/drawing/2014/main" val="10001"/>
-                  </a:ext>
-                </a:extLst>
               </a:tr>
               <a:tr h="237744">
                 <a:tc>
@@ -4717,7 +5082,7 @@
                     <a:bodyPr/>
                     <a:lstStyle/>
                     <a:p>
-                      <a:pPr marL="0" indent="0">
+                      <a:pPr indent="0" marL="0">
                         <a:buNone/>
                       </a:pPr>
                       <a:r>
@@ -4738,7 +5103,7 @@
                       </a:endParaRPr>
                     </a:p>
                   </a:txBody>
-                  <a:tcPr anchor="ctr">
+                  <a:tcPr marL="91440" marR="91440" marT="45720" marB="45720" anchor="ctr">
                     <a:lnL w="6350" cap="flat" cmpd="sng" algn="ctr">
                       <a:solidFill>
                         <a:srgbClr val="334155"/>
@@ -4785,7 +5150,7 @@
                     <a:bodyPr/>
                     <a:lstStyle/>
                     <a:p>
-                      <a:pPr marL="0" indent="0">
+                      <a:pPr indent="0" marL="0">
                         <a:buNone/>
                       </a:pPr>
                       <a:r>
@@ -4806,7 +5171,7 @@
                       </a:endParaRPr>
                     </a:p>
                   </a:txBody>
-                  <a:tcPr anchor="ctr">
+                  <a:tcPr marL="91440" marR="91440" marT="45720" marB="45720" anchor="ctr">
                     <a:lnL w="6350" cap="flat" cmpd="sng" algn="ctr">
                       <a:solidFill>
                         <a:srgbClr val="334155"/>
@@ -4848,11 +5213,6 @@
                     </a:solidFill>
                   </a:tcPr>
                 </a:tc>
-                <a:extLst>
-                  <a:ext uri="{0D108BD9-81ED-4DB2-BD59-A6C34878D82A}">
-                    <a16:rowId xmlns:a16="http://schemas.microsoft.com/office/drawing/2014/main" val="10002"/>
-                  </a:ext>
-                </a:extLst>
               </a:tr>
               <a:tr h="237744">
                 <a:tc>
@@ -4860,7 +5220,7 @@
                     <a:bodyPr/>
                     <a:lstStyle/>
                     <a:p>
-                      <a:pPr marL="0" indent="0">
+                      <a:pPr indent="0" marL="0">
                         <a:buNone/>
                       </a:pPr>
                       <a:r>
@@ -4881,7 +5241,7 @@
                       </a:endParaRPr>
                     </a:p>
                   </a:txBody>
-                  <a:tcPr anchor="ctr">
+                  <a:tcPr marL="91440" marR="91440" marT="45720" marB="45720" anchor="ctr">
                     <a:lnL w="6350" cap="flat" cmpd="sng" algn="ctr">
                       <a:solidFill>
                         <a:srgbClr val="334155"/>
@@ -4928,7 +5288,7 @@
                     <a:bodyPr/>
                     <a:lstStyle/>
                     <a:p>
-                      <a:pPr marL="0" indent="0">
+                      <a:pPr indent="0" marL="0">
                         <a:buNone/>
                       </a:pPr>
                       <a:r>
@@ -4949,7 +5309,7 @@
                       </a:endParaRPr>
                     </a:p>
                   </a:txBody>
-                  <a:tcPr anchor="ctr">
+                  <a:tcPr marL="91440" marR="91440" marT="45720" marB="45720" anchor="ctr">
                     <a:lnL w="6350" cap="flat" cmpd="sng" algn="ctr">
                       <a:solidFill>
                         <a:srgbClr val="334155"/>
@@ -4991,11 +5351,6 @@
                     </a:solidFill>
                   </a:tcPr>
                 </a:tc>
-                <a:extLst>
-                  <a:ext uri="{0D108BD9-81ED-4DB2-BD59-A6C34878D82A}">
-                    <a16:rowId xmlns:a16="http://schemas.microsoft.com/office/drawing/2014/main" val="10003"/>
-                  </a:ext>
-                </a:extLst>
               </a:tr>
               <a:tr h="237744">
                 <a:tc>
@@ -5003,7 +5358,7 @@
                     <a:bodyPr/>
                     <a:lstStyle/>
                     <a:p>
-                      <a:pPr marL="0" indent="0">
+                      <a:pPr indent="0" marL="0">
                         <a:buNone/>
                       </a:pPr>
                       <a:r>
@@ -5024,7 +5379,7 @@
                       </a:endParaRPr>
                     </a:p>
                   </a:txBody>
-                  <a:tcPr anchor="ctr">
+                  <a:tcPr marL="91440" marR="91440" marT="45720" marB="45720" anchor="ctr">
                     <a:lnL w="6350" cap="flat" cmpd="sng" algn="ctr">
                       <a:solidFill>
                         <a:srgbClr val="334155"/>
@@ -5071,7 +5426,7 @@
                     <a:bodyPr/>
                     <a:lstStyle/>
                     <a:p>
-                      <a:pPr marL="0" indent="0">
+                      <a:pPr indent="0" marL="0">
                         <a:buNone/>
                       </a:pPr>
                       <a:r>
@@ -5092,7 +5447,7 @@
                       </a:endParaRPr>
                     </a:p>
                   </a:txBody>
-                  <a:tcPr anchor="ctr">
+                  <a:tcPr marL="91440" marR="91440" marT="45720" marB="45720" anchor="ctr">
                     <a:lnL w="6350" cap="flat" cmpd="sng" algn="ctr">
                       <a:solidFill>
                         <a:srgbClr val="334155"/>
@@ -5134,11 +5489,6 @@
                     </a:solidFill>
                   </a:tcPr>
                 </a:tc>
-                <a:extLst>
-                  <a:ext uri="{0D108BD9-81ED-4DB2-BD59-A6C34878D82A}">
-                    <a16:rowId xmlns:a16="http://schemas.microsoft.com/office/drawing/2014/main" val="10004"/>
-                  </a:ext>
-                </a:extLst>
               </a:tr>
               <a:tr h="237744">
                 <a:tc>
@@ -5146,7 +5496,7 @@
                     <a:bodyPr/>
                     <a:lstStyle/>
                     <a:p>
-                      <a:pPr marL="0" indent="0">
+                      <a:pPr indent="0" marL="0">
                         <a:buNone/>
                       </a:pPr>
                       <a:r>
@@ -5167,7 +5517,7 @@
                       </a:endParaRPr>
                     </a:p>
                   </a:txBody>
-                  <a:tcPr anchor="ctr">
+                  <a:tcPr marL="91440" marR="91440" marT="45720" marB="45720" anchor="ctr">
                     <a:lnL w="6350" cap="flat" cmpd="sng" algn="ctr">
                       <a:solidFill>
                         <a:srgbClr val="334155"/>
@@ -5214,7 +5564,7 @@
                     <a:bodyPr/>
                     <a:lstStyle/>
                     <a:p>
-                      <a:pPr marL="0" indent="0">
+                      <a:pPr indent="0" marL="0">
                         <a:buNone/>
                       </a:pPr>
                       <a:r>
@@ -5235,7 +5585,7 @@
                       </a:endParaRPr>
                     </a:p>
                   </a:txBody>
-                  <a:tcPr anchor="ctr">
+                  <a:tcPr marL="91440" marR="91440" marT="45720" marB="45720" anchor="ctr">
                     <a:lnL w="6350" cap="flat" cmpd="sng" algn="ctr">
                       <a:solidFill>
                         <a:srgbClr val="334155"/>
@@ -5277,11 +5627,6 @@
                     </a:solidFill>
                   </a:tcPr>
                 </a:tc>
-                <a:extLst>
-                  <a:ext uri="{0D108BD9-81ED-4DB2-BD59-A6C34878D82A}">
-                    <a16:rowId xmlns:a16="http://schemas.microsoft.com/office/drawing/2014/main" val="10005"/>
-                  </a:ext>
-                </a:extLst>
               </a:tr>
               <a:tr h="237744">
                 <a:tc>
@@ -5289,7 +5634,7 @@
                     <a:bodyPr/>
                     <a:lstStyle/>
                     <a:p>
-                      <a:pPr marL="0" indent="0">
+                      <a:pPr indent="0" marL="0">
                         <a:buNone/>
                       </a:pPr>
                       <a:r>
@@ -5310,7 +5655,7 @@
                       </a:endParaRPr>
                     </a:p>
                   </a:txBody>
-                  <a:tcPr anchor="ctr">
+                  <a:tcPr marL="91440" marR="91440" marT="45720" marB="45720" anchor="ctr">
                     <a:lnL w="6350" cap="flat" cmpd="sng" algn="ctr">
                       <a:solidFill>
                         <a:srgbClr val="334155"/>
@@ -5357,7 +5702,7 @@
                     <a:bodyPr/>
                     <a:lstStyle/>
                     <a:p>
-                      <a:pPr marL="0" indent="0">
+                      <a:pPr indent="0" marL="0">
                         <a:buNone/>
                       </a:pPr>
                       <a:r>
@@ -5378,7 +5723,7 @@
                       </a:endParaRPr>
                     </a:p>
                   </a:txBody>
-                  <a:tcPr anchor="ctr">
+                  <a:tcPr marL="91440" marR="91440" marT="45720" marB="45720" anchor="ctr">
                     <a:lnL w="6350" cap="flat" cmpd="sng" algn="ctr">
                       <a:solidFill>
                         <a:srgbClr val="334155"/>
@@ -5420,11 +5765,6 @@
                     </a:solidFill>
                   </a:tcPr>
                 </a:tc>
-                <a:extLst>
-                  <a:ext uri="{0D108BD9-81ED-4DB2-BD59-A6C34878D82A}">
-                    <a16:rowId xmlns:a16="http://schemas.microsoft.com/office/drawing/2014/main" val="10006"/>
-                  </a:ext>
-                </a:extLst>
               </a:tr>
               <a:tr h="237744">
                 <a:tc>
@@ -5432,7 +5772,7 @@
                     <a:bodyPr/>
                     <a:lstStyle/>
                     <a:p>
-                      <a:pPr marL="0" indent="0">
+                      <a:pPr indent="0" marL="0">
                         <a:buNone/>
                       </a:pPr>
                       <a:r>
@@ -5453,7 +5793,7 @@
                       </a:endParaRPr>
                     </a:p>
                   </a:txBody>
-                  <a:tcPr anchor="ctr">
+                  <a:tcPr marL="91440" marR="91440" marT="45720" marB="45720" anchor="ctr">
                     <a:lnL w="6350" cap="flat" cmpd="sng" algn="ctr">
                       <a:solidFill>
                         <a:srgbClr val="334155"/>
@@ -5500,7 +5840,7 @@
                     <a:bodyPr/>
                     <a:lstStyle/>
                     <a:p>
-                      <a:pPr marL="0" indent="0">
+                      <a:pPr indent="0" marL="0">
                         <a:buNone/>
                       </a:pPr>
                       <a:r>
@@ -5521,7 +5861,7 @@
                       </a:endParaRPr>
                     </a:p>
                   </a:txBody>
-                  <a:tcPr anchor="ctr">
+                  <a:tcPr marL="91440" marR="91440" marT="45720" marB="45720" anchor="ctr">
                     <a:lnL w="6350" cap="flat" cmpd="sng" algn="ctr">
                       <a:solidFill>
                         <a:srgbClr val="334155"/>
@@ -5563,11 +5903,6 @@
                     </a:solidFill>
                   </a:tcPr>
                 </a:tc>
-                <a:extLst>
-                  <a:ext uri="{0D108BD9-81ED-4DB2-BD59-A6C34878D82A}">
-                    <a16:rowId xmlns:a16="http://schemas.microsoft.com/office/drawing/2014/main" val="10007"/>
-                  </a:ext>
-                </a:extLst>
               </a:tr>
               <a:tr h="237744">
                 <a:tc>
@@ -5575,7 +5910,7 @@
                     <a:bodyPr/>
                     <a:lstStyle/>
                     <a:p>
-                      <a:pPr marL="0" indent="0">
+                      <a:pPr indent="0" marL="0">
                         <a:buNone/>
                       </a:pPr>
                       <a:r>
@@ -5596,7 +5931,7 @@
                       </a:endParaRPr>
                     </a:p>
                   </a:txBody>
-                  <a:tcPr anchor="ctr">
+                  <a:tcPr marL="91440" marR="91440" marT="45720" marB="45720" anchor="ctr">
                     <a:lnL w="6350" cap="flat" cmpd="sng" algn="ctr">
                       <a:solidFill>
                         <a:srgbClr val="334155"/>
@@ -5643,7 +5978,7 @@
                     <a:bodyPr/>
                     <a:lstStyle/>
                     <a:p>
-                      <a:pPr marL="0" indent="0">
+                      <a:pPr indent="0" marL="0">
                         <a:buNone/>
                       </a:pPr>
                       <a:r>
@@ -5664,7 +5999,7 @@
                       </a:endParaRPr>
                     </a:p>
                   </a:txBody>
-                  <a:tcPr anchor="ctr">
+                  <a:tcPr marL="91440" marR="91440" marT="45720" marB="45720" anchor="ctr">
                     <a:lnL w="6350" cap="flat" cmpd="sng" algn="ctr">
                       <a:solidFill>
                         <a:srgbClr val="334155"/>
@@ -5706,11 +6041,6 @@
                     </a:solidFill>
                   </a:tcPr>
                 </a:tc>
-                <a:extLst>
-                  <a:ext uri="{0D108BD9-81ED-4DB2-BD59-A6C34878D82A}">
-                    <a16:rowId xmlns:a16="http://schemas.microsoft.com/office/drawing/2014/main" val="10008"/>
-                  </a:ext>
-                </a:extLst>
               </a:tr>
               <a:tr h="237744">
                 <a:tc>
@@ -5718,7 +6048,7 @@
                     <a:bodyPr/>
                     <a:lstStyle/>
                     <a:p>
-                      <a:pPr marL="0" indent="0">
+                      <a:pPr indent="0" marL="0">
                         <a:buNone/>
                       </a:pPr>
                       <a:r>
@@ -5739,7 +6069,7 @@
                       </a:endParaRPr>
                     </a:p>
                   </a:txBody>
-                  <a:tcPr anchor="ctr">
+                  <a:tcPr marL="91440" marR="91440" marT="45720" marB="45720" anchor="ctr">
                     <a:lnL w="6350" cap="flat" cmpd="sng" algn="ctr">
                       <a:solidFill>
                         <a:srgbClr val="334155"/>
@@ -5786,7 +6116,7 @@
                     <a:bodyPr/>
                     <a:lstStyle/>
                     <a:p>
-                      <a:pPr marL="0" indent="0">
+                      <a:pPr indent="0" marL="0">
                         <a:buNone/>
                       </a:pPr>
                       <a:r>
@@ -5807,7 +6137,7 @@
                       </a:endParaRPr>
                     </a:p>
                   </a:txBody>
-                  <a:tcPr anchor="ctr">
+                  <a:tcPr marL="91440" marR="91440" marT="45720" marB="45720" anchor="ctr">
                     <a:lnL w="6350" cap="flat" cmpd="sng" algn="ctr">
                       <a:solidFill>
                         <a:srgbClr val="334155"/>
@@ -5849,11 +6179,6 @@
                     </a:solidFill>
                   </a:tcPr>
                 </a:tc>
-                <a:extLst>
-                  <a:ext uri="{0D108BD9-81ED-4DB2-BD59-A6C34878D82A}">
-                    <a16:rowId xmlns:a16="http://schemas.microsoft.com/office/drawing/2014/main" val="10009"/>
-                  </a:ext>
-                </a:extLst>
               </a:tr>
               <a:tr h="237744">
                 <a:tc>
@@ -5861,7 +6186,7 @@
                     <a:bodyPr/>
                     <a:lstStyle/>
                     <a:p>
-                      <a:pPr marL="0" indent="0">
+                      <a:pPr indent="0" marL="0">
                         <a:buNone/>
                       </a:pPr>
                       <a:r>
@@ -5882,7 +6207,7 @@
                       </a:endParaRPr>
                     </a:p>
                   </a:txBody>
-                  <a:tcPr anchor="ctr">
+                  <a:tcPr marL="91440" marR="91440" marT="45720" marB="45720" anchor="ctr">
                     <a:lnL w="6350" cap="flat" cmpd="sng" algn="ctr">
                       <a:solidFill>
                         <a:srgbClr val="334155"/>
@@ -5929,7 +6254,7 @@
                     <a:bodyPr/>
                     <a:lstStyle/>
                     <a:p>
-                      <a:pPr marL="0" indent="0">
+                      <a:pPr indent="0" marL="0">
                         <a:buNone/>
                       </a:pPr>
                       <a:r>
@@ -5950,7 +6275,7 @@
                       </a:endParaRPr>
                     </a:p>
                   </a:txBody>
-                  <a:tcPr anchor="ctr">
+                  <a:tcPr marL="91440" marR="91440" marT="45720" marB="45720" anchor="ctr">
                     <a:lnL w="6350" cap="flat" cmpd="sng" algn="ctr">
                       <a:solidFill>
                         <a:srgbClr val="334155"/>
@@ -5992,11 +6317,6 @@
                     </a:solidFill>
                   </a:tcPr>
                 </a:tc>
-                <a:extLst>
-                  <a:ext uri="{0D108BD9-81ED-4DB2-BD59-A6C34878D82A}">
-                    <a16:rowId xmlns:a16="http://schemas.microsoft.com/office/drawing/2014/main" val="10010"/>
-                  </a:ext>
-                </a:extLst>
               </a:tr>
               <a:tr h="237744">
                 <a:tc>
@@ -6004,7 +6324,7 @@
                     <a:bodyPr/>
                     <a:lstStyle/>
                     <a:p>
-                      <a:pPr marL="0" indent="0">
+                      <a:pPr indent="0" marL="0">
                         <a:buNone/>
                       </a:pPr>
                       <a:r>
@@ -6025,7 +6345,7 @@
                       </a:endParaRPr>
                     </a:p>
                   </a:txBody>
-                  <a:tcPr anchor="ctr">
+                  <a:tcPr marL="91440" marR="91440" marT="45720" marB="45720" anchor="ctr">
                     <a:lnL w="6350" cap="flat" cmpd="sng" algn="ctr">
                       <a:solidFill>
                         <a:srgbClr val="334155"/>
@@ -6072,7 +6392,7 @@
                     <a:bodyPr/>
                     <a:lstStyle/>
                     <a:p>
-                      <a:pPr marL="0" indent="0">
+                      <a:pPr indent="0" marL="0">
                         <a:buNone/>
                       </a:pPr>
                       <a:r>
@@ -6093,7 +6413,7 @@
                       </a:endParaRPr>
                     </a:p>
                   </a:txBody>
-                  <a:tcPr anchor="ctr">
+                  <a:tcPr marL="91440" marR="91440" marT="45720" marB="45720" anchor="ctr">
                     <a:lnL w="6350" cap="flat" cmpd="sng" algn="ctr">
                       <a:solidFill>
                         <a:srgbClr val="334155"/>
@@ -6135,11 +6455,6 @@
                     </a:solidFill>
                   </a:tcPr>
                 </a:tc>
-                <a:extLst>
-                  <a:ext uri="{0D108BD9-81ED-4DB2-BD59-A6C34878D82A}">
-                    <a16:rowId xmlns:a16="http://schemas.microsoft.com/office/drawing/2014/main" val="10011"/>
-                  </a:ext>
-                </a:extLst>
               </a:tr>
               <a:tr h="237744">
                 <a:tc>
@@ -6147,7 +6462,7 @@
                     <a:bodyPr/>
                     <a:lstStyle/>
                     <a:p>
-                      <a:pPr marL="0" indent="0">
+                      <a:pPr indent="0" marL="0">
                         <a:buNone/>
                       </a:pPr>
                       <a:r>
@@ -6168,7 +6483,7 @@
                       </a:endParaRPr>
                     </a:p>
                   </a:txBody>
-                  <a:tcPr anchor="ctr">
+                  <a:tcPr marL="91440" marR="91440" marT="45720" marB="45720" anchor="ctr">
                     <a:lnL w="6350" cap="flat" cmpd="sng" algn="ctr">
                       <a:solidFill>
                         <a:srgbClr val="334155"/>
@@ -6215,7 +6530,7 @@
                     <a:bodyPr/>
                     <a:lstStyle/>
                     <a:p>
-                      <a:pPr marL="0" indent="0">
+                      <a:pPr indent="0" marL="0">
                         <a:buNone/>
                       </a:pPr>
                       <a:r>
@@ -6236,7 +6551,7 @@
                       </a:endParaRPr>
                     </a:p>
                   </a:txBody>
-                  <a:tcPr anchor="ctr">
+                  <a:tcPr marL="91440" marR="91440" marT="45720" marB="45720" anchor="ctr">
                     <a:lnL w="6350" cap="flat" cmpd="sng" algn="ctr">
                       <a:solidFill>
                         <a:srgbClr val="334155"/>
@@ -6278,11 +6593,6 @@
                     </a:solidFill>
                   </a:tcPr>
                 </a:tc>
-                <a:extLst>
-                  <a:ext uri="{0D108BD9-81ED-4DB2-BD59-A6C34878D82A}">
-                    <a16:rowId xmlns:a16="http://schemas.microsoft.com/office/drawing/2014/main" val="10012"/>
-                  </a:ext>
-                </a:extLst>
               </a:tr>
               <a:tr h="237744">
                 <a:tc>
@@ -6290,7 +6600,7 @@
                     <a:bodyPr/>
                     <a:lstStyle/>
                     <a:p>
-                      <a:pPr marL="0" indent="0">
+                      <a:pPr indent="0" marL="0">
                         <a:buNone/>
                       </a:pPr>
                       <a:r>
@@ -6311,7 +6621,7 @@
                       </a:endParaRPr>
                     </a:p>
                   </a:txBody>
-                  <a:tcPr anchor="ctr">
+                  <a:tcPr marL="91440" marR="91440" marT="45720" marB="45720" anchor="ctr">
                     <a:lnL w="6350" cap="flat" cmpd="sng" algn="ctr">
                       <a:solidFill>
                         <a:srgbClr val="334155"/>
@@ -6358,19 +6668,19 @@
                     <a:bodyPr/>
                     <a:lstStyle/>
                     <a:p>
-                      <a:pPr marL="0" indent="0">
+                      <a:pPr indent="0" marL="0">
                         <a:buNone/>
                       </a:pPr>
                       <a:r>
-                        <a:rPr lang="en-US" sz="1000" b="1">
+                        <a:rPr lang="en-US" sz="1000" b="1" dirty="0">
                           <a:solidFill>
-                            <a:srgbClr val="10B981"/>
+                            <a:srgbClr val="F59E0B"/>
                           </a:solidFill>
                           <a:latin typeface="Calibri" pitchFamily="34" charset="0"/>
                           <a:ea typeface="Calibri" pitchFamily="34" charset="-122"/>
                           <a:cs typeface="Calibri" pitchFamily="34" charset="-120"/>
                         </a:rPr>
-                        <a:t>Complete</a:t>
+                        <a:t>In Progress</a:t>
                       </a:r>
                       <a:endParaRPr lang="en-US" sz="1000" dirty="0">
                         <a:latin typeface="Calibri" charset="0"/>
@@ -6379,7 +6689,7 @@
                       </a:endParaRPr>
                     </a:p>
                   </a:txBody>
-                  <a:tcPr anchor="ctr">
+                  <a:tcPr marL="91440" marR="91440" marT="45720" marB="45720" anchor="ctr">
                     <a:lnL w="6350" cap="flat" cmpd="sng" algn="ctr">
                       <a:solidFill>
                         <a:srgbClr val="334155"/>
@@ -6421,11 +6731,6 @@
                     </a:solidFill>
                   </a:tcPr>
                 </a:tc>
-                <a:extLst>
-                  <a:ext uri="{0D108BD9-81ED-4DB2-BD59-A6C34878D82A}">
-                    <a16:rowId xmlns:a16="http://schemas.microsoft.com/office/drawing/2014/main" val="10013"/>
-                  </a:ext>
-                </a:extLst>
               </a:tr>
               <a:tr h="237744">
                 <a:tc>
@@ -6433,7 +6738,7 @@
                     <a:bodyPr/>
                     <a:lstStyle/>
                     <a:p>
-                      <a:pPr marL="0" indent="0">
+                      <a:pPr indent="0" marL="0">
                         <a:buNone/>
                       </a:pPr>
                       <a:r>
@@ -6454,7 +6759,7 @@
                       </a:endParaRPr>
                     </a:p>
                   </a:txBody>
-                  <a:tcPr anchor="ctr">
+                  <a:tcPr marL="91440" marR="91440" marT="45720" marB="45720" anchor="ctr">
                     <a:lnL w="6350" cap="flat" cmpd="sng" algn="ctr">
                       <a:solidFill>
                         <a:srgbClr val="334155"/>
@@ -6501,7 +6806,7 @@
                     <a:bodyPr/>
                     <a:lstStyle/>
                     <a:p>
-                      <a:pPr marL="0" indent="0">
+                      <a:pPr indent="0" marL="0">
                         <a:buNone/>
                       </a:pPr>
                       <a:r>
@@ -6522,7 +6827,7 @@
                       </a:endParaRPr>
                     </a:p>
                   </a:txBody>
-                  <a:tcPr anchor="ctr">
+                  <a:tcPr marL="91440" marR="91440" marT="45720" marB="45720" anchor="ctr">
                     <a:lnL w="6350" cap="flat" cmpd="sng" algn="ctr">
                       <a:solidFill>
                         <a:srgbClr val="334155"/>
@@ -6564,11 +6869,6 @@
                     </a:solidFill>
                   </a:tcPr>
                 </a:tc>
-                <a:extLst>
-                  <a:ext uri="{0D108BD9-81ED-4DB2-BD59-A6C34878D82A}">
-                    <a16:rowId xmlns:a16="http://schemas.microsoft.com/office/drawing/2014/main" val="10014"/>
-                  </a:ext>
-                </a:extLst>
               </a:tr>
               <a:tr h="237744">
                 <a:tc>
@@ -6576,7 +6876,7 @@
                     <a:bodyPr/>
                     <a:lstStyle/>
                     <a:p>
-                      <a:pPr marL="0" indent="0">
+                      <a:pPr indent="0" marL="0">
                         <a:buNone/>
                       </a:pPr>
                       <a:r>
@@ -6597,7 +6897,7 @@
                       </a:endParaRPr>
                     </a:p>
                   </a:txBody>
-                  <a:tcPr anchor="ctr">
+                  <a:tcPr marL="91440" marR="91440" marT="45720" marB="45720" anchor="ctr">
                     <a:lnL w="6350" cap="flat" cmpd="sng" algn="ctr">
                       <a:solidFill>
                         <a:srgbClr val="334155"/>
@@ -6644,7 +6944,7 @@
                     <a:bodyPr/>
                     <a:lstStyle/>
                     <a:p>
-                      <a:pPr marL="0" indent="0">
+                      <a:pPr indent="0" marL="0">
                         <a:buNone/>
                       </a:pPr>
                       <a:r>
@@ -6665,7 +6965,7 @@
                       </a:endParaRPr>
                     </a:p>
                   </a:txBody>
-                  <a:tcPr anchor="ctr">
+                  <a:tcPr marL="91440" marR="91440" marT="45720" marB="45720" anchor="ctr">
                     <a:lnL w="6350" cap="flat" cmpd="sng" algn="ctr">
                       <a:solidFill>
                         <a:srgbClr val="334155"/>
@@ -6707,11 +7007,6 @@
                     </a:solidFill>
                   </a:tcPr>
                 </a:tc>
-                <a:extLst>
-                  <a:ext uri="{0D108BD9-81ED-4DB2-BD59-A6C34878D82A}">
-                    <a16:rowId xmlns:a16="http://schemas.microsoft.com/office/drawing/2014/main" val="10015"/>
-                  </a:ext>
-                </a:extLst>
               </a:tr>
             </a:tbl>
           </a:graphicData>
@@ -6758,7 +7053,7 @@
           <a:bodyPr wrap="square" lIns="0" tIns="0" rIns="0" bIns="0" rtlCol="0" anchor="ctr"/>
           <a:lstStyle/>
           <a:p>
-            <a:pPr marL="0" indent="0">
+            <a:pPr indent="0" marL="0">
               <a:buNone/>
             </a:pPr>
             <a:r>
@@ -6797,7 +7092,7 @@
           <a:bodyPr wrap="square" lIns="0" tIns="0" rIns="0" bIns="0" rtlCol="0" anchor="ctr"/>
           <a:lstStyle/>
           <a:p>
-            <a:pPr marL="0" indent="0" algn="r">
+            <a:pPr algn="r" indent="0" marL="0">
               <a:buNone/>
             </a:pPr>
             <a:r>
@@ -6831,7 +7126,6 @@
         <a:solidFill>
           <a:srgbClr val="0F172A"/>
         </a:solidFill>
-        <a:effectLst/>
       </p:bgPr>
     </p:bg>
     <p:spTree>
@@ -6869,7 +7163,4866 @@
           <a:bodyPr wrap="square" lIns="0" tIns="0" rIns="0" bIns="0" rtlCol="0" anchor="ctr"/>
           <a:lstStyle/>
           <a:p>
-            <a:pPr marL="0" indent="0">
+            <a:pPr indent="0" marL="0">
+              <a:buNone/>
+            </a:pPr>
+            <a:r>
+              <a:rPr lang="en-US" sz="2600" b="1" dirty="0">
+                <a:solidFill>
+                  <a:srgbClr val="F1F5F9"/>
+                </a:solidFill>
+                <a:latin typeface="Georgia" pitchFamily="34" charset="0"/>
+                <a:ea typeface="Georgia" pitchFamily="34" charset="-122"/>
+                <a:cs typeface="Georgia" pitchFamily="34" charset="-120"/>
+              </a:rPr>
+              <a:t>Dependencies Used</a:t>
+            </a:r>
+            <a:endParaRPr lang="en-US" sz="2600" dirty="0"/>
+          </a:p>
+        </p:txBody>
+      </p:sp>
+      <p:graphicFrame>
+        <p:nvGraphicFramePr>
+          <p:cNvPr id="15" name="Table 0"/>
+          <p:cNvGraphicFramePr>
+            <a:graphicFrameLocks noGrp="1"/>
+          </p:cNvGraphicFramePr>
+          <p:nvPr>
+            <p:extLst>
+              <p:ext uri="{D42A27DB-BD31-4B8C-83A1-F6EECF244321}">
+                <p14:modId xmlns:p14="http://schemas.microsoft.com/office/powerpoint/2010/main" val="1579011935"/>
+              </p:ext>
+            </p:extLst>
+          </p:nvPr>
+        </p:nvGraphicFramePr>
+        <p:xfrm>
+          <a:off x="274320" y="868680"/>
+          <a:ext cx="8595360" cy="914400"/>
+        </p:xfrm>
+        <a:graphic>
+          <a:graphicData uri="http://schemas.openxmlformats.org/drawingml/2006/table">
+            <a:tbl>
+              <a:tblPr/>
+              <a:tblGrid>
+                <a:gridCol w="1371600"/>
+                <a:gridCol w="2560320"/>
+                <a:gridCol w="1280160"/>
+                <a:gridCol w="3383280"/>
+              </a:tblGrid>
+              <a:tr h="256032">
+                <a:tc>
+                  <a:txBody>
+                    <a:bodyPr/>
+                    <a:lstStyle/>
+                    <a:p>
+                      <a:pPr algn="ctr" indent="0" marL="0">
+                        <a:buNone/>
+                      </a:pPr>
+                      <a:r>
+                        <a:rPr lang="en-US" sz="900" b="1" dirty="0">
+                          <a:solidFill>
+                            <a:srgbClr val="FFFFFF"/>
+                          </a:solidFill>
+                          <a:latin typeface="Georgia" pitchFamily="34" charset="0"/>
+                          <a:ea typeface="Georgia" pitchFamily="34" charset="-122"/>
+                          <a:cs typeface="Georgia" pitchFamily="34" charset="-120"/>
+                        </a:rPr>
+                        <a:t>Category</a:t>
+                      </a:r>
+                      <a:endParaRPr lang="en-US" sz="900" dirty="0">
+                        <a:latin typeface="Georgia" charset="0"/>
+                        <a:ea typeface="Georgia" charset="0"/>
+                        <a:cs typeface="Georgia" charset="0"/>
+                      </a:endParaRPr>
+                    </a:p>
+                  </a:txBody>
+                  <a:tcPr marL="91440" marR="91440" marT="45720" marB="45720" anchor="ctr">
+                    <a:lnL w="6350" cap="flat" cmpd="sng" algn="ctr">
+                      <a:solidFill>
+                        <a:srgbClr val="334155"/>
+                      </a:solidFill>
+                      <a:prstDash val="solid"/>
+                      <a:round/>
+                      <a:headEnd type="none" w="med" len="med"/>
+                      <a:tailEnd type="none" w="med" len="med"/>
+                    </a:lnL>
+                    <a:lnR w="6350" cap="flat" cmpd="sng" algn="ctr">
+                      <a:solidFill>
+                        <a:srgbClr val="334155"/>
+                      </a:solidFill>
+                      <a:prstDash val="solid"/>
+                      <a:round/>
+                      <a:headEnd type="none" w="med" len="med"/>
+                      <a:tailEnd type="none" w="med" len="med"/>
+                    </a:lnR>
+                    <a:lnT w="6350" cap="flat" cmpd="sng" algn="ctr">
+                      <a:solidFill>
+                        <a:srgbClr val="334155"/>
+                      </a:solidFill>
+                      <a:prstDash val="solid"/>
+                      <a:round/>
+                      <a:headEnd type="none" w="med" len="med"/>
+                      <a:tailEnd type="none" w="med" len="med"/>
+                    </a:lnT>
+                    <a:lnB w="6350" cap="flat" cmpd="sng" algn="ctr">
+                      <a:solidFill>
+                        <a:srgbClr val="334155"/>
+                      </a:solidFill>
+                      <a:prstDash val="solid"/>
+                      <a:round/>
+                      <a:headEnd type="none" w="med" len="med"/>
+                      <a:tailEnd type="none" w="med" len="med"/>
+                    </a:lnB>
+                    <a:solidFill>
+                      <a:srgbClr val="3B82F6"/>
+                    </a:solidFill>
+                  </a:tcPr>
+                </a:tc>
+                <a:tc>
+                  <a:txBody>
+                    <a:bodyPr/>
+                    <a:lstStyle/>
+                    <a:p>
+                      <a:pPr algn="ctr" indent="0" marL="0">
+                        <a:buNone/>
+                      </a:pPr>
+                      <a:r>
+                        <a:rPr lang="en-US" sz="900" b="1" dirty="0">
+                          <a:solidFill>
+                            <a:srgbClr val="FFFFFF"/>
+                          </a:solidFill>
+                          <a:latin typeface="Georgia" pitchFamily="34" charset="0"/>
+                          <a:ea typeface="Georgia" pitchFamily="34" charset="-122"/>
+                          <a:cs typeface="Georgia" pitchFamily="34" charset="-120"/>
+                        </a:rPr>
+                        <a:t>Dependency</a:t>
+                      </a:r>
+                      <a:endParaRPr lang="en-US" sz="900" dirty="0">
+                        <a:latin typeface="Georgia" charset="0"/>
+                        <a:ea typeface="Georgia" charset="0"/>
+                        <a:cs typeface="Georgia" charset="0"/>
+                      </a:endParaRPr>
+                    </a:p>
+                  </a:txBody>
+                  <a:tcPr marL="91440" marR="91440" marT="45720" marB="45720" anchor="ctr">
+                    <a:lnL w="6350" cap="flat" cmpd="sng" algn="ctr">
+                      <a:solidFill>
+                        <a:srgbClr val="334155"/>
+                      </a:solidFill>
+                      <a:prstDash val="solid"/>
+                      <a:round/>
+                      <a:headEnd type="none" w="med" len="med"/>
+                      <a:tailEnd type="none" w="med" len="med"/>
+                    </a:lnL>
+                    <a:lnR w="6350" cap="flat" cmpd="sng" algn="ctr">
+                      <a:solidFill>
+                        <a:srgbClr val="334155"/>
+                      </a:solidFill>
+                      <a:prstDash val="solid"/>
+                      <a:round/>
+                      <a:headEnd type="none" w="med" len="med"/>
+                      <a:tailEnd type="none" w="med" len="med"/>
+                    </a:lnR>
+                    <a:lnT w="6350" cap="flat" cmpd="sng" algn="ctr">
+                      <a:solidFill>
+                        <a:srgbClr val="334155"/>
+                      </a:solidFill>
+                      <a:prstDash val="solid"/>
+                      <a:round/>
+                      <a:headEnd type="none" w="med" len="med"/>
+                      <a:tailEnd type="none" w="med" len="med"/>
+                    </a:lnT>
+                    <a:lnB w="6350" cap="flat" cmpd="sng" algn="ctr">
+                      <a:solidFill>
+                        <a:srgbClr val="334155"/>
+                      </a:solidFill>
+                      <a:prstDash val="solid"/>
+                      <a:round/>
+                      <a:headEnd type="none" w="med" len="med"/>
+                      <a:tailEnd type="none" w="med" len="med"/>
+                    </a:lnB>
+                    <a:solidFill>
+                      <a:srgbClr val="3B82F6"/>
+                    </a:solidFill>
+                  </a:tcPr>
+                </a:tc>
+                <a:tc>
+                  <a:txBody>
+                    <a:bodyPr/>
+                    <a:lstStyle/>
+                    <a:p>
+                      <a:pPr algn="ctr" indent="0" marL="0">
+                        <a:buNone/>
+                      </a:pPr>
+                      <a:r>
+                        <a:rPr lang="en-US" sz="900" b="1" dirty="0">
+                          <a:solidFill>
+                            <a:srgbClr val="FFFFFF"/>
+                          </a:solidFill>
+                          <a:latin typeface="Georgia" pitchFamily="34" charset="0"/>
+                          <a:ea typeface="Georgia" pitchFamily="34" charset="-122"/>
+                          <a:cs typeface="Georgia" pitchFamily="34" charset="-120"/>
+                        </a:rPr>
+                        <a:t>Version</a:t>
+                      </a:r>
+                      <a:endParaRPr lang="en-US" sz="900" dirty="0">
+                        <a:latin typeface="Georgia" charset="0"/>
+                        <a:ea typeface="Georgia" charset="0"/>
+                        <a:cs typeface="Georgia" charset="0"/>
+                      </a:endParaRPr>
+                    </a:p>
+                  </a:txBody>
+                  <a:tcPr marL="91440" marR="91440" marT="45720" marB="45720" anchor="ctr">
+                    <a:lnL w="6350" cap="flat" cmpd="sng" algn="ctr">
+                      <a:solidFill>
+                        <a:srgbClr val="334155"/>
+                      </a:solidFill>
+                      <a:prstDash val="solid"/>
+                      <a:round/>
+                      <a:headEnd type="none" w="med" len="med"/>
+                      <a:tailEnd type="none" w="med" len="med"/>
+                    </a:lnL>
+                    <a:lnR w="6350" cap="flat" cmpd="sng" algn="ctr">
+                      <a:solidFill>
+                        <a:srgbClr val="334155"/>
+                      </a:solidFill>
+                      <a:prstDash val="solid"/>
+                      <a:round/>
+                      <a:headEnd type="none" w="med" len="med"/>
+                      <a:tailEnd type="none" w="med" len="med"/>
+                    </a:lnR>
+                    <a:lnT w="6350" cap="flat" cmpd="sng" algn="ctr">
+                      <a:solidFill>
+                        <a:srgbClr val="334155"/>
+                      </a:solidFill>
+                      <a:prstDash val="solid"/>
+                      <a:round/>
+                      <a:headEnd type="none" w="med" len="med"/>
+                      <a:tailEnd type="none" w="med" len="med"/>
+                    </a:lnT>
+                    <a:lnB w="6350" cap="flat" cmpd="sng" algn="ctr">
+                      <a:solidFill>
+                        <a:srgbClr val="334155"/>
+                      </a:solidFill>
+                      <a:prstDash val="solid"/>
+                      <a:round/>
+                      <a:headEnd type="none" w="med" len="med"/>
+                      <a:tailEnd type="none" w="med" len="med"/>
+                    </a:lnB>
+                    <a:solidFill>
+                      <a:srgbClr val="3B82F6"/>
+                    </a:solidFill>
+                  </a:tcPr>
+                </a:tc>
+                <a:tc>
+                  <a:txBody>
+                    <a:bodyPr/>
+                    <a:lstStyle/>
+                    <a:p>
+                      <a:pPr algn="ctr" indent="0" marL="0">
+                        <a:buNone/>
+                      </a:pPr>
+                      <a:r>
+                        <a:rPr lang="en-US" sz="900" b="1" dirty="0">
+                          <a:solidFill>
+                            <a:srgbClr val="FFFFFF"/>
+                          </a:solidFill>
+                          <a:latin typeface="Georgia" pitchFamily="34" charset="0"/>
+                          <a:ea typeface="Georgia" pitchFamily="34" charset="-122"/>
+                          <a:cs typeface="Georgia" pitchFamily="34" charset="-120"/>
+                        </a:rPr>
+                        <a:t>Purpose</a:t>
+                      </a:r>
+                      <a:endParaRPr lang="en-US" sz="900" dirty="0">
+                        <a:latin typeface="Georgia" charset="0"/>
+                        <a:ea typeface="Georgia" charset="0"/>
+                        <a:cs typeface="Georgia" charset="0"/>
+                      </a:endParaRPr>
+                    </a:p>
+                  </a:txBody>
+                  <a:tcPr marL="91440" marR="91440" marT="45720" marB="45720" anchor="ctr">
+                    <a:lnL w="6350" cap="flat" cmpd="sng" algn="ctr">
+                      <a:solidFill>
+                        <a:srgbClr val="334155"/>
+                      </a:solidFill>
+                      <a:prstDash val="solid"/>
+                      <a:round/>
+                      <a:headEnd type="none" w="med" len="med"/>
+                      <a:tailEnd type="none" w="med" len="med"/>
+                    </a:lnL>
+                    <a:lnR w="6350" cap="flat" cmpd="sng" algn="ctr">
+                      <a:solidFill>
+                        <a:srgbClr val="334155"/>
+                      </a:solidFill>
+                      <a:prstDash val="solid"/>
+                      <a:round/>
+                      <a:headEnd type="none" w="med" len="med"/>
+                      <a:tailEnd type="none" w="med" len="med"/>
+                    </a:lnR>
+                    <a:lnT w="6350" cap="flat" cmpd="sng" algn="ctr">
+                      <a:solidFill>
+                        <a:srgbClr val="334155"/>
+                      </a:solidFill>
+                      <a:prstDash val="solid"/>
+                      <a:round/>
+                      <a:headEnd type="none" w="med" len="med"/>
+                      <a:tailEnd type="none" w="med" len="med"/>
+                    </a:lnT>
+                    <a:lnB w="6350" cap="flat" cmpd="sng" algn="ctr">
+                      <a:solidFill>
+                        <a:srgbClr val="334155"/>
+                      </a:solidFill>
+                      <a:prstDash val="solid"/>
+                      <a:round/>
+                      <a:headEnd type="none" w="med" len="med"/>
+                      <a:tailEnd type="none" w="med" len="med"/>
+                    </a:lnB>
+                    <a:solidFill>
+                      <a:srgbClr val="3B82F6"/>
+                    </a:solidFill>
+                  </a:tcPr>
+                </a:tc>
+              </a:tr>
+              <a:tr h="228600">
+                <a:tc>
+                  <a:txBody>
+                    <a:bodyPr/>
+                    <a:lstStyle/>
+                    <a:p>
+                      <a:pPr indent="0" marL="0">
+                        <a:buNone/>
+                      </a:pPr>
+                      <a:r>
+                        <a:rPr lang="en-US" sz="850" dirty="0">
+                          <a:solidFill>
+                            <a:srgbClr val="F1F5F9"/>
+                          </a:solidFill>
+                          <a:latin typeface="Calibri" pitchFamily="34" charset="0"/>
+                          <a:ea typeface="Calibri" pitchFamily="34" charset="-122"/>
+                          <a:cs typeface="Calibri" pitchFamily="34" charset="-120"/>
+                        </a:rPr>
+                        <a:t>Framework</a:t>
+                      </a:r>
+                      <a:endParaRPr lang="en-US" sz="850" dirty="0">
+                        <a:latin typeface="Calibri" charset="0"/>
+                        <a:ea typeface="Calibri" charset="0"/>
+                        <a:cs typeface="Calibri" charset="0"/>
+                      </a:endParaRPr>
+                    </a:p>
+                  </a:txBody>
+                  <a:tcPr marL="91440" marR="91440" marT="45720" marB="45720" anchor="ctr">
+                    <a:lnL w="6350" cap="flat" cmpd="sng" algn="ctr">
+                      <a:solidFill>
+                        <a:srgbClr val="334155"/>
+                      </a:solidFill>
+                      <a:prstDash val="solid"/>
+                      <a:round/>
+                      <a:headEnd type="none" w="med" len="med"/>
+                      <a:tailEnd type="none" w="med" len="med"/>
+                    </a:lnL>
+                    <a:lnR w="6350" cap="flat" cmpd="sng" algn="ctr">
+                      <a:solidFill>
+                        <a:srgbClr val="334155"/>
+                      </a:solidFill>
+                      <a:prstDash val="solid"/>
+                      <a:round/>
+                      <a:headEnd type="none" w="med" len="med"/>
+                      <a:tailEnd type="none" w="med" len="med"/>
+                    </a:lnR>
+                    <a:lnT w="6350" cap="flat" cmpd="sng" algn="ctr">
+                      <a:solidFill>
+                        <a:srgbClr val="334155"/>
+                      </a:solidFill>
+                      <a:prstDash val="solid"/>
+                      <a:round/>
+                      <a:headEnd type="none" w="med" len="med"/>
+                      <a:tailEnd type="none" w="med" len="med"/>
+                    </a:lnT>
+                    <a:lnB w="6350" cap="flat" cmpd="sng" algn="ctr">
+                      <a:solidFill>
+                        <a:srgbClr val="334155"/>
+                      </a:solidFill>
+                      <a:prstDash val="solid"/>
+                      <a:round/>
+                      <a:headEnd type="none" w="med" len="med"/>
+                      <a:tailEnd type="none" w="med" len="med"/>
+                    </a:lnB>
+                    <a:solidFill>
+                      <a:srgbClr val="1E293B"/>
+                    </a:solidFill>
+                  </a:tcPr>
+                </a:tc>
+                <a:tc>
+                  <a:txBody>
+                    <a:bodyPr/>
+                    <a:lstStyle/>
+                    <a:p>
+                      <a:pPr indent="0" marL="0">
+                        <a:buNone/>
+                      </a:pPr>
+                      <a:r>
+                        <a:rPr lang="en-US" sz="850" dirty="0">
+                          <a:solidFill>
+                            <a:srgbClr val="F1F5F9"/>
+                          </a:solidFill>
+                          <a:latin typeface="Calibri" pitchFamily="34" charset="0"/>
+                          <a:ea typeface="Calibri" pitchFamily="34" charset="-122"/>
+                          <a:cs typeface="Calibri" pitchFamily="34" charset="-120"/>
+                        </a:rPr>
+                        <a:t>Spring Boot</a:t>
+                      </a:r>
+                      <a:endParaRPr lang="en-US" sz="850" dirty="0">
+                        <a:latin typeface="Calibri" charset="0"/>
+                        <a:ea typeface="Calibri" charset="0"/>
+                        <a:cs typeface="Calibri" charset="0"/>
+                      </a:endParaRPr>
+                    </a:p>
+                  </a:txBody>
+                  <a:tcPr marL="91440" marR="91440" marT="45720" marB="45720" anchor="ctr">
+                    <a:lnL w="6350" cap="flat" cmpd="sng" algn="ctr">
+                      <a:solidFill>
+                        <a:srgbClr val="334155"/>
+                      </a:solidFill>
+                      <a:prstDash val="solid"/>
+                      <a:round/>
+                      <a:headEnd type="none" w="med" len="med"/>
+                      <a:tailEnd type="none" w="med" len="med"/>
+                    </a:lnL>
+                    <a:lnR w="6350" cap="flat" cmpd="sng" algn="ctr">
+                      <a:solidFill>
+                        <a:srgbClr val="334155"/>
+                      </a:solidFill>
+                      <a:prstDash val="solid"/>
+                      <a:round/>
+                      <a:headEnd type="none" w="med" len="med"/>
+                      <a:tailEnd type="none" w="med" len="med"/>
+                    </a:lnR>
+                    <a:lnT w="6350" cap="flat" cmpd="sng" algn="ctr">
+                      <a:solidFill>
+                        <a:srgbClr val="334155"/>
+                      </a:solidFill>
+                      <a:prstDash val="solid"/>
+                      <a:round/>
+                      <a:headEnd type="none" w="med" len="med"/>
+                      <a:tailEnd type="none" w="med" len="med"/>
+                    </a:lnT>
+                    <a:lnB w="6350" cap="flat" cmpd="sng" algn="ctr">
+                      <a:solidFill>
+                        <a:srgbClr val="334155"/>
+                      </a:solidFill>
+                      <a:prstDash val="solid"/>
+                      <a:round/>
+                      <a:headEnd type="none" w="med" len="med"/>
+                      <a:tailEnd type="none" w="med" len="med"/>
+                    </a:lnB>
+                    <a:solidFill>
+                      <a:srgbClr val="1E293B"/>
+                    </a:solidFill>
+                  </a:tcPr>
+                </a:tc>
+                <a:tc>
+                  <a:txBody>
+                    <a:bodyPr/>
+                    <a:lstStyle/>
+                    <a:p>
+                      <a:pPr indent="0" marL="0">
+                        <a:buNone/>
+                      </a:pPr>
+                      <a:r>
+                        <a:rPr lang="en-US" sz="850" dirty="0">
+                          <a:solidFill>
+                            <a:srgbClr val="F1F5F9"/>
+                          </a:solidFill>
+                          <a:latin typeface="Calibri" pitchFamily="34" charset="0"/>
+                          <a:ea typeface="Calibri" pitchFamily="34" charset="-122"/>
+                          <a:cs typeface="Calibri" pitchFamily="34" charset="-120"/>
+                        </a:rPr>
+                        <a:t>3.5.14</a:t>
+                      </a:r>
+                      <a:endParaRPr lang="en-US" sz="850" dirty="0">
+                        <a:latin typeface="Calibri" charset="0"/>
+                        <a:ea typeface="Calibri" charset="0"/>
+                        <a:cs typeface="Calibri" charset="0"/>
+                      </a:endParaRPr>
+                    </a:p>
+                  </a:txBody>
+                  <a:tcPr marL="91440" marR="91440" marT="45720" marB="45720" anchor="ctr">
+                    <a:lnL w="6350" cap="flat" cmpd="sng" algn="ctr">
+                      <a:solidFill>
+                        <a:srgbClr val="334155"/>
+                      </a:solidFill>
+                      <a:prstDash val="solid"/>
+                      <a:round/>
+                      <a:headEnd type="none" w="med" len="med"/>
+                      <a:tailEnd type="none" w="med" len="med"/>
+                    </a:lnL>
+                    <a:lnR w="6350" cap="flat" cmpd="sng" algn="ctr">
+                      <a:solidFill>
+                        <a:srgbClr val="334155"/>
+                      </a:solidFill>
+                      <a:prstDash val="solid"/>
+                      <a:round/>
+                      <a:headEnd type="none" w="med" len="med"/>
+                      <a:tailEnd type="none" w="med" len="med"/>
+                    </a:lnR>
+                    <a:lnT w="6350" cap="flat" cmpd="sng" algn="ctr">
+                      <a:solidFill>
+                        <a:srgbClr val="334155"/>
+                      </a:solidFill>
+                      <a:prstDash val="solid"/>
+                      <a:round/>
+                      <a:headEnd type="none" w="med" len="med"/>
+                      <a:tailEnd type="none" w="med" len="med"/>
+                    </a:lnT>
+                    <a:lnB w="6350" cap="flat" cmpd="sng" algn="ctr">
+                      <a:solidFill>
+                        <a:srgbClr val="334155"/>
+                      </a:solidFill>
+                      <a:prstDash val="solid"/>
+                      <a:round/>
+                      <a:headEnd type="none" w="med" len="med"/>
+                      <a:tailEnd type="none" w="med" len="med"/>
+                    </a:lnB>
+                    <a:solidFill>
+                      <a:srgbClr val="1E293B"/>
+                    </a:solidFill>
+                  </a:tcPr>
+                </a:tc>
+                <a:tc>
+                  <a:txBody>
+                    <a:bodyPr/>
+                    <a:lstStyle/>
+                    <a:p>
+                      <a:pPr indent="0" marL="0">
+                        <a:buNone/>
+                      </a:pPr>
+                      <a:r>
+                        <a:rPr lang="en-US" sz="850" dirty="0">
+                          <a:solidFill>
+                            <a:srgbClr val="F1F5F9"/>
+                          </a:solidFill>
+                          <a:latin typeface="Calibri" pitchFamily="34" charset="0"/>
+                          <a:ea typeface="Calibri" pitchFamily="34" charset="-122"/>
+                          <a:cs typeface="Calibri" pitchFamily="34" charset="-120"/>
+                        </a:rPr>
+                        <a:t>Application framework, inversion of control</a:t>
+                      </a:r>
+                      <a:endParaRPr lang="en-US" sz="850" dirty="0">
+                        <a:latin typeface="Calibri" charset="0"/>
+                        <a:ea typeface="Calibri" charset="0"/>
+                        <a:cs typeface="Calibri" charset="0"/>
+                      </a:endParaRPr>
+                    </a:p>
+                  </a:txBody>
+                  <a:tcPr marL="91440" marR="91440" marT="45720" marB="45720" anchor="ctr">
+                    <a:lnL w="6350" cap="flat" cmpd="sng" algn="ctr">
+                      <a:solidFill>
+                        <a:srgbClr val="334155"/>
+                      </a:solidFill>
+                      <a:prstDash val="solid"/>
+                      <a:round/>
+                      <a:headEnd type="none" w="med" len="med"/>
+                      <a:tailEnd type="none" w="med" len="med"/>
+                    </a:lnL>
+                    <a:lnR w="6350" cap="flat" cmpd="sng" algn="ctr">
+                      <a:solidFill>
+                        <a:srgbClr val="334155"/>
+                      </a:solidFill>
+                      <a:prstDash val="solid"/>
+                      <a:round/>
+                      <a:headEnd type="none" w="med" len="med"/>
+                      <a:tailEnd type="none" w="med" len="med"/>
+                    </a:lnR>
+                    <a:lnT w="6350" cap="flat" cmpd="sng" algn="ctr">
+                      <a:solidFill>
+                        <a:srgbClr val="334155"/>
+                      </a:solidFill>
+                      <a:prstDash val="solid"/>
+                      <a:round/>
+                      <a:headEnd type="none" w="med" len="med"/>
+                      <a:tailEnd type="none" w="med" len="med"/>
+                    </a:lnT>
+                    <a:lnB w="6350" cap="flat" cmpd="sng" algn="ctr">
+                      <a:solidFill>
+                        <a:srgbClr val="334155"/>
+                      </a:solidFill>
+                      <a:prstDash val="solid"/>
+                      <a:round/>
+                      <a:headEnd type="none" w="med" len="med"/>
+                      <a:tailEnd type="none" w="med" len="med"/>
+                    </a:lnB>
+                    <a:solidFill>
+                      <a:srgbClr val="1E293B"/>
+                    </a:solidFill>
+                  </a:tcPr>
+                </a:tc>
+              </a:tr>
+              <a:tr h="228600">
+                <a:tc>
+                  <a:txBody>
+                    <a:bodyPr/>
+                    <a:lstStyle/>
+                    <a:p>
+                      <a:pPr indent="0" marL="0">
+                        <a:buNone/>
+                      </a:pPr>
+                      <a:r>
+                        <a:rPr lang="en-US" sz="850" dirty="0">
+                          <a:solidFill>
+                            <a:srgbClr val="F1F5F9"/>
+                          </a:solidFill>
+                          <a:latin typeface="Calibri" pitchFamily="34" charset="0"/>
+                          <a:ea typeface="Calibri" pitchFamily="34" charset="-122"/>
+                          <a:cs typeface="Calibri" pitchFamily="34" charset="-120"/>
+                        </a:rPr>
+                        <a:t>Framework</a:t>
+                      </a:r>
+                      <a:endParaRPr lang="en-US" sz="850" dirty="0">
+                        <a:latin typeface="Calibri" charset="0"/>
+                        <a:ea typeface="Calibri" charset="0"/>
+                        <a:cs typeface="Calibri" charset="0"/>
+                      </a:endParaRPr>
+                    </a:p>
+                  </a:txBody>
+                  <a:tcPr marL="91440" marR="91440" marT="45720" marB="45720" anchor="ctr">
+                    <a:lnL w="6350" cap="flat" cmpd="sng" algn="ctr">
+                      <a:solidFill>
+                        <a:srgbClr val="334155"/>
+                      </a:solidFill>
+                      <a:prstDash val="solid"/>
+                      <a:round/>
+                      <a:headEnd type="none" w="med" len="med"/>
+                      <a:tailEnd type="none" w="med" len="med"/>
+                    </a:lnL>
+                    <a:lnR w="6350" cap="flat" cmpd="sng" algn="ctr">
+                      <a:solidFill>
+                        <a:srgbClr val="334155"/>
+                      </a:solidFill>
+                      <a:prstDash val="solid"/>
+                      <a:round/>
+                      <a:headEnd type="none" w="med" len="med"/>
+                      <a:tailEnd type="none" w="med" len="med"/>
+                    </a:lnR>
+                    <a:lnT w="6350" cap="flat" cmpd="sng" algn="ctr">
+                      <a:solidFill>
+                        <a:srgbClr val="334155"/>
+                      </a:solidFill>
+                      <a:prstDash val="solid"/>
+                      <a:round/>
+                      <a:headEnd type="none" w="med" len="med"/>
+                      <a:tailEnd type="none" w="med" len="med"/>
+                    </a:lnT>
+                    <a:lnB w="6350" cap="flat" cmpd="sng" algn="ctr">
+                      <a:solidFill>
+                        <a:srgbClr val="334155"/>
+                      </a:solidFill>
+                      <a:prstDash val="solid"/>
+                      <a:round/>
+                      <a:headEnd type="none" w="med" len="med"/>
+                      <a:tailEnd type="none" w="med" len="med"/>
+                    </a:lnB>
+                    <a:solidFill>
+                      <a:srgbClr val="0F172A"/>
+                    </a:solidFill>
+                  </a:tcPr>
+                </a:tc>
+                <a:tc>
+                  <a:txBody>
+                    <a:bodyPr/>
+                    <a:lstStyle/>
+                    <a:p>
+                      <a:pPr indent="0" marL="0">
+                        <a:buNone/>
+                      </a:pPr>
+                      <a:r>
+                        <a:rPr lang="en-US" sz="850" dirty="0">
+                          <a:solidFill>
+                            <a:srgbClr val="F1F5F9"/>
+                          </a:solidFill>
+                          <a:latin typeface="Calibri" pitchFamily="34" charset="0"/>
+                          <a:ea typeface="Calibri" pitchFamily="34" charset="-122"/>
+                          <a:cs typeface="Calibri" pitchFamily="34" charset="-120"/>
+                        </a:rPr>
+                        <a:t>Spring Security</a:t>
+                      </a:r>
+                      <a:endParaRPr lang="en-US" sz="850" dirty="0">
+                        <a:latin typeface="Calibri" charset="0"/>
+                        <a:ea typeface="Calibri" charset="0"/>
+                        <a:cs typeface="Calibri" charset="0"/>
+                      </a:endParaRPr>
+                    </a:p>
+                  </a:txBody>
+                  <a:tcPr marL="91440" marR="91440" marT="45720" marB="45720" anchor="ctr">
+                    <a:lnL w="6350" cap="flat" cmpd="sng" algn="ctr">
+                      <a:solidFill>
+                        <a:srgbClr val="334155"/>
+                      </a:solidFill>
+                      <a:prstDash val="solid"/>
+                      <a:round/>
+                      <a:headEnd type="none" w="med" len="med"/>
+                      <a:tailEnd type="none" w="med" len="med"/>
+                    </a:lnL>
+                    <a:lnR w="6350" cap="flat" cmpd="sng" algn="ctr">
+                      <a:solidFill>
+                        <a:srgbClr val="334155"/>
+                      </a:solidFill>
+                      <a:prstDash val="solid"/>
+                      <a:round/>
+                      <a:headEnd type="none" w="med" len="med"/>
+                      <a:tailEnd type="none" w="med" len="med"/>
+                    </a:lnR>
+                    <a:lnT w="6350" cap="flat" cmpd="sng" algn="ctr">
+                      <a:solidFill>
+                        <a:srgbClr val="334155"/>
+                      </a:solidFill>
+                      <a:prstDash val="solid"/>
+                      <a:round/>
+                      <a:headEnd type="none" w="med" len="med"/>
+                      <a:tailEnd type="none" w="med" len="med"/>
+                    </a:lnT>
+                    <a:lnB w="6350" cap="flat" cmpd="sng" algn="ctr">
+                      <a:solidFill>
+                        <a:srgbClr val="334155"/>
+                      </a:solidFill>
+                      <a:prstDash val="solid"/>
+                      <a:round/>
+                      <a:headEnd type="none" w="med" len="med"/>
+                      <a:tailEnd type="none" w="med" len="med"/>
+                    </a:lnB>
+                    <a:solidFill>
+                      <a:srgbClr val="0F172A"/>
+                    </a:solidFill>
+                  </a:tcPr>
+                </a:tc>
+                <a:tc>
+                  <a:txBody>
+                    <a:bodyPr/>
+                    <a:lstStyle/>
+                    <a:p>
+                      <a:pPr indent="0" marL="0">
+                        <a:buNone/>
+                      </a:pPr>
+                      <a:r>
+                        <a:rPr lang="en-US" sz="850" dirty="0">
+                          <a:solidFill>
+                            <a:srgbClr val="F1F5F9"/>
+                          </a:solidFill>
+                          <a:latin typeface="Calibri" pitchFamily="34" charset="0"/>
+                          <a:ea typeface="Calibri" pitchFamily="34" charset="-122"/>
+                          <a:cs typeface="Calibri" pitchFamily="34" charset="-120"/>
+                        </a:rPr>
+                        <a:t>3.5.14</a:t>
+                      </a:r>
+                      <a:endParaRPr lang="en-US" sz="850" dirty="0">
+                        <a:latin typeface="Calibri" charset="0"/>
+                        <a:ea typeface="Calibri" charset="0"/>
+                        <a:cs typeface="Calibri" charset="0"/>
+                      </a:endParaRPr>
+                    </a:p>
+                  </a:txBody>
+                  <a:tcPr marL="91440" marR="91440" marT="45720" marB="45720" anchor="ctr">
+                    <a:lnL w="6350" cap="flat" cmpd="sng" algn="ctr">
+                      <a:solidFill>
+                        <a:srgbClr val="334155"/>
+                      </a:solidFill>
+                      <a:prstDash val="solid"/>
+                      <a:round/>
+                      <a:headEnd type="none" w="med" len="med"/>
+                      <a:tailEnd type="none" w="med" len="med"/>
+                    </a:lnL>
+                    <a:lnR w="6350" cap="flat" cmpd="sng" algn="ctr">
+                      <a:solidFill>
+                        <a:srgbClr val="334155"/>
+                      </a:solidFill>
+                      <a:prstDash val="solid"/>
+                      <a:round/>
+                      <a:headEnd type="none" w="med" len="med"/>
+                      <a:tailEnd type="none" w="med" len="med"/>
+                    </a:lnR>
+                    <a:lnT w="6350" cap="flat" cmpd="sng" algn="ctr">
+                      <a:solidFill>
+                        <a:srgbClr val="334155"/>
+                      </a:solidFill>
+                      <a:prstDash val="solid"/>
+                      <a:round/>
+                      <a:headEnd type="none" w="med" len="med"/>
+                      <a:tailEnd type="none" w="med" len="med"/>
+                    </a:lnT>
+                    <a:lnB w="6350" cap="flat" cmpd="sng" algn="ctr">
+                      <a:solidFill>
+                        <a:srgbClr val="334155"/>
+                      </a:solidFill>
+                      <a:prstDash val="solid"/>
+                      <a:round/>
+                      <a:headEnd type="none" w="med" len="med"/>
+                      <a:tailEnd type="none" w="med" len="med"/>
+                    </a:lnB>
+                    <a:solidFill>
+                      <a:srgbClr val="0F172A"/>
+                    </a:solidFill>
+                  </a:tcPr>
+                </a:tc>
+                <a:tc>
+                  <a:txBody>
+                    <a:bodyPr/>
+                    <a:lstStyle/>
+                    <a:p>
+                      <a:pPr indent="0" marL="0">
+                        <a:buNone/>
+                      </a:pPr>
+                      <a:r>
+                        <a:rPr lang="en-US" sz="850" dirty="0">
+                          <a:solidFill>
+                            <a:srgbClr val="F1F5F9"/>
+                          </a:solidFill>
+                          <a:latin typeface="Calibri" pitchFamily="34" charset="0"/>
+                          <a:ea typeface="Calibri" pitchFamily="34" charset="-122"/>
+                          <a:cs typeface="Calibri" pitchFamily="34" charset="-120"/>
+                        </a:rPr>
+                        <a:t>Authentication and role-based access control</a:t>
+                      </a:r>
+                      <a:endParaRPr lang="en-US" sz="850" dirty="0">
+                        <a:latin typeface="Calibri" charset="0"/>
+                        <a:ea typeface="Calibri" charset="0"/>
+                        <a:cs typeface="Calibri" charset="0"/>
+                      </a:endParaRPr>
+                    </a:p>
+                  </a:txBody>
+                  <a:tcPr marL="91440" marR="91440" marT="45720" marB="45720" anchor="ctr">
+                    <a:lnL w="6350" cap="flat" cmpd="sng" algn="ctr">
+                      <a:solidFill>
+                        <a:srgbClr val="334155"/>
+                      </a:solidFill>
+                      <a:prstDash val="solid"/>
+                      <a:round/>
+                      <a:headEnd type="none" w="med" len="med"/>
+                      <a:tailEnd type="none" w="med" len="med"/>
+                    </a:lnL>
+                    <a:lnR w="6350" cap="flat" cmpd="sng" algn="ctr">
+                      <a:solidFill>
+                        <a:srgbClr val="334155"/>
+                      </a:solidFill>
+                      <a:prstDash val="solid"/>
+                      <a:round/>
+                      <a:headEnd type="none" w="med" len="med"/>
+                      <a:tailEnd type="none" w="med" len="med"/>
+                    </a:lnR>
+                    <a:lnT w="6350" cap="flat" cmpd="sng" algn="ctr">
+                      <a:solidFill>
+                        <a:srgbClr val="334155"/>
+                      </a:solidFill>
+                      <a:prstDash val="solid"/>
+                      <a:round/>
+                      <a:headEnd type="none" w="med" len="med"/>
+                      <a:tailEnd type="none" w="med" len="med"/>
+                    </a:lnT>
+                    <a:lnB w="6350" cap="flat" cmpd="sng" algn="ctr">
+                      <a:solidFill>
+                        <a:srgbClr val="334155"/>
+                      </a:solidFill>
+                      <a:prstDash val="solid"/>
+                      <a:round/>
+                      <a:headEnd type="none" w="med" len="med"/>
+                      <a:tailEnd type="none" w="med" len="med"/>
+                    </a:lnB>
+                    <a:solidFill>
+                      <a:srgbClr val="0F172A"/>
+                    </a:solidFill>
+                  </a:tcPr>
+                </a:tc>
+              </a:tr>
+              <a:tr h="228600">
+                <a:tc>
+                  <a:txBody>
+                    <a:bodyPr/>
+                    <a:lstStyle/>
+                    <a:p>
+                      <a:pPr indent="0" marL="0">
+                        <a:buNone/>
+                      </a:pPr>
+                      <a:r>
+                        <a:rPr lang="en-US" sz="850" dirty="0">
+                          <a:solidFill>
+                            <a:srgbClr val="F1F5F9"/>
+                          </a:solidFill>
+                          <a:latin typeface="Calibri" pitchFamily="34" charset="0"/>
+                          <a:ea typeface="Calibri" pitchFamily="34" charset="-122"/>
+                          <a:cs typeface="Calibri" pitchFamily="34" charset="-120"/>
+                        </a:rPr>
+                        <a:t>Framework</a:t>
+                      </a:r>
+                      <a:endParaRPr lang="en-US" sz="850" dirty="0">
+                        <a:latin typeface="Calibri" charset="0"/>
+                        <a:ea typeface="Calibri" charset="0"/>
+                        <a:cs typeface="Calibri" charset="0"/>
+                      </a:endParaRPr>
+                    </a:p>
+                  </a:txBody>
+                  <a:tcPr marL="91440" marR="91440" marT="45720" marB="45720" anchor="ctr">
+                    <a:lnL w="6350" cap="flat" cmpd="sng" algn="ctr">
+                      <a:solidFill>
+                        <a:srgbClr val="334155"/>
+                      </a:solidFill>
+                      <a:prstDash val="solid"/>
+                      <a:round/>
+                      <a:headEnd type="none" w="med" len="med"/>
+                      <a:tailEnd type="none" w="med" len="med"/>
+                    </a:lnL>
+                    <a:lnR w="6350" cap="flat" cmpd="sng" algn="ctr">
+                      <a:solidFill>
+                        <a:srgbClr val="334155"/>
+                      </a:solidFill>
+                      <a:prstDash val="solid"/>
+                      <a:round/>
+                      <a:headEnd type="none" w="med" len="med"/>
+                      <a:tailEnd type="none" w="med" len="med"/>
+                    </a:lnR>
+                    <a:lnT w="6350" cap="flat" cmpd="sng" algn="ctr">
+                      <a:solidFill>
+                        <a:srgbClr val="334155"/>
+                      </a:solidFill>
+                      <a:prstDash val="solid"/>
+                      <a:round/>
+                      <a:headEnd type="none" w="med" len="med"/>
+                      <a:tailEnd type="none" w="med" len="med"/>
+                    </a:lnT>
+                    <a:lnB w="6350" cap="flat" cmpd="sng" algn="ctr">
+                      <a:solidFill>
+                        <a:srgbClr val="334155"/>
+                      </a:solidFill>
+                      <a:prstDash val="solid"/>
+                      <a:round/>
+                      <a:headEnd type="none" w="med" len="med"/>
+                      <a:tailEnd type="none" w="med" len="med"/>
+                    </a:lnB>
+                    <a:solidFill>
+                      <a:srgbClr val="1E293B"/>
+                    </a:solidFill>
+                  </a:tcPr>
+                </a:tc>
+                <a:tc>
+                  <a:txBody>
+                    <a:bodyPr/>
+                    <a:lstStyle/>
+                    <a:p>
+                      <a:pPr indent="0" marL="0">
+                        <a:buNone/>
+                      </a:pPr>
+                      <a:r>
+                        <a:rPr lang="en-US" sz="850" dirty="0">
+                          <a:solidFill>
+                            <a:srgbClr val="F1F5F9"/>
+                          </a:solidFill>
+                          <a:latin typeface="Calibri" pitchFamily="34" charset="0"/>
+                          <a:ea typeface="Calibri" pitchFamily="34" charset="-122"/>
+                          <a:cs typeface="Calibri" pitchFamily="34" charset="-120"/>
+                        </a:rPr>
+                        <a:t>Spring Data JPA</a:t>
+                      </a:r>
+                      <a:endParaRPr lang="en-US" sz="850" dirty="0">
+                        <a:latin typeface="Calibri" charset="0"/>
+                        <a:ea typeface="Calibri" charset="0"/>
+                        <a:cs typeface="Calibri" charset="0"/>
+                      </a:endParaRPr>
+                    </a:p>
+                  </a:txBody>
+                  <a:tcPr marL="91440" marR="91440" marT="45720" marB="45720" anchor="ctr">
+                    <a:lnL w="6350" cap="flat" cmpd="sng" algn="ctr">
+                      <a:solidFill>
+                        <a:srgbClr val="334155"/>
+                      </a:solidFill>
+                      <a:prstDash val="solid"/>
+                      <a:round/>
+                      <a:headEnd type="none" w="med" len="med"/>
+                      <a:tailEnd type="none" w="med" len="med"/>
+                    </a:lnL>
+                    <a:lnR w="6350" cap="flat" cmpd="sng" algn="ctr">
+                      <a:solidFill>
+                        <a:srgbClr val="334155"/>
+                      </a:solidFill>
+                      <a:prstDash val="solid"/>
+                      <a:round/>
+                      <a:headEnd type="none" w="med" len="med"/>
+                      <a:tailEnd type="none" w="med" len="med"/>
+                    </a:lnR>
+                    <a:lnT w="6350" cap="flat" cmpd="sng" algn="ctr">
+                      <a:solidFill>
+                        <a:srgbClr val="334155"/>
+                      </a:solidFill>
+                      <a:prstDash val="solid"/>
+                      <a:round/>
+                      <a:headEnd type="none" w="med" len="med"/>
+                      <a:tailEnd type="none" w="med" len="med"/>
+                    </a:lnT>
+                    <a:lnB w="6350" cap="flat" cmpd="sng" algn="ctr">
+                      <a:solidFill>
+                        <a:srgbClr val="334155"/>
+                      </a:solidFill>
+                      <a:prstDash val="solid"/>
+                      <a:round/>
+                      <a:headEnd type="none" w="med" len="med"/>
+                      <a:tailEnd type="none" w="med" len="med"/>
+                    </a:lnB>
+                    <a:solidFill>
+                      <a:srgbClr val="1E293B"/>
+                    </a:solidFill>
+                  </a:tcPr>
+                </a:tc>
+                <a:tc>
+                  <a:txBody>
+                    <a:bodyPr/>
+                    <a:lstStyle/>
+                    <a:p>
+                      <a:pPr indent="0" marL="0">
+                        <a:buNone/>
+                      </a:pPr>
+                      <a:r>
+                        <a:rPr lang="en-US" sz="850" dirty="0">
+                          <a:solidFill>
+                            <a:srgbClr val="F1F5F9"/>
+                          </a:solidFill>
+                          <a:latin typeface="Calibri" pitchFamily="34" charset="0"/>
+                          <a:ea typeface="Calibri" pitchFamily="34" charset="-122"/>
+                          <a:cs typeface="Calibri" pitchFamily="34" charset="-120"/>
+                        </a:rPr>
+                        <a:t>3.5.14</a:t>
+                      </a:r>
+                      <a:endParaRPr lang="en-US" sz="850" dirty="0">
+                        <a:latin typeface="Calibri" charset="0"/>
+                        <a:ea typeface="Calibri" charset="0"/>
+                        <a:cs typeface="Calibri" charset="0"/>
+                      </a:endParaRPr>
+                    </a:p>
+                  </a:txBody>
+                  <a:tcPr marL="91440" marR="91440" marT="45720" marB="45720" anchor="ctr">
+                    <a:lnL w="6350" cap="flat" cmpd="sng" algn="ctr">
+                      <a:solidFill>
+                        <a:srgbClr val="334155"/>
+                      </a:solidFill>
+                      <a:prstDash val="solid"/>
+                      <a:round/>
+                      <a:headEnd type="none" w="med" len="med"/>
+                      <a:tailEnd type="none" w="med" len="med"/>
+                    </a:lnL>
+                    <a:lnR w="6350" cap="flat" cmpd="sng" algn="ctr">
+                      <a:solidFill>
+                        <a:srgbClr val="334155"/>
+                      </a:solidFill>
+                      <a:prstDash val="solid"/>
+                      <a:round/>
+                      <a:headEnd type="none" w="med" len="med"/>
+                      <a:tailEnd type="none" w="med" len="med"/>
+                    </a:lnR>
+                    <a:lnT w="6350" cap="flat" cmpd="sng" algn="ctr">
+                      <a:solidFill>
+                        <a:srgbClr val="334155"/>
+                      </a:solidFill>
+                      <a:prstDash val="solid"/>
+                      <a:round/>
+                      <a:headEnd type="none" w="med" len="med"/>
+                      <a:tailEnd type="none" w="med" len="med"/>
+                    </a:lnT>
+                    <a:lnB w="6350" cap="flat" cmpd="sng" algn="ctr">
+                      <a:solidFill>
+                        <a:srgbClr val="334155"/>
+                      </a:solidFill>
+                      <a:prstDash val="solid"/>
+                      <a:round/>
+                      <a:headEnd type="none" w="med" len="med"/>
+                      <a:tailEnd type="none" w="med" len="med"/>
+                    </a:lnB>
+                    <a:solidFill>
+                      <a:srgbClr val="1E293B"/>
+                    </a:solidFill>
+                  </a:tcPr>
+                </a:tc>
+                <a:tc>
+                  <a:txBody>
+                    <a:bodyPr/>
+                    <a:lstStyle/>
+                    <a:p>
+                      <a:pPr indent="0" marL="0">
+                        <a:buNone/>
+                      </a:pPr>
+                      <a:r>
+                        <a:rPr lang="en-US" sz="850" dirty="0">
+                          <a:solidFill>
+                            <a:srgbClr val="F1F5F9"/>
+                          </a:solidFill>
+                          <a:latin typeface="Calibri" pitchFamily="34" charset="0"/>
+                          <a:ea typeface="Calibri" pitchFamily="34" charset="-122"/>
+                          <a:cs typeface="Calibri" pitchFamily="34" charset="-120"/>
+                        </a:rPr>
+                        <a:t>Object-relational mapping and repositories</a:t>
+                      </a:r>
+                      <a:endParaRPr lang="en-US" sz="850" dirty="0">
+                        <a:latin typeface="Calibri" charset="0"/>
+                        <a:ea typeface="Calibri" charset="0"/>
+                        <a:cs typeface="Calibri" charset="0"/>
+                      </a:endParaRPr>
+                    </a:p>
+                  </a:txBody>
+                  <a:tcPr marL="91440" marR="91440" marT="45720" marB="45720" anchor="ctr">
+                    <a:lnL w="6350" cap="flat" cmpd="sng" algn="ctr">
+                      <a:solidFill>
+                        <a:srgbClr val="334155"/>
+                      </a:solidFill>
+                      <a:prstDash val="solid"/>
+                      <a:round/>
+                      <a:headEnd type="none" w="med" len="med"/>
+                      <a:tailEnd type="none" w="med" len="med"/>
+                    </a:lnL>
+                    <a:lnR w="6350" cap="flat" cmpd="sng" algn="ctr">
+                      <a:solidFill>
+                        <a:srgbClr val="334155"/>
+                      </a:solidFill>
+                      <a:prstDash val="solid"/>
+                      <a:round/>
+                      <a:headEnd type="none" w="med" len="med"/>
+                      <a:tailEnd type="none" w="med" len="med"/>
+                    </a:lnR>
+                    <a:lnT w="6350" cap="flat" cmpd="sng" algn="ctr">
+                      <a:solidFill>
+                        <a:srgbClr val="334155"/>
+                      </a:solidFill>
+                      <a:prstDash val="solid"/>
+                      <a:round/>
+                      <a:headEnd type="none" w="med" len="med"/>
+                      <a:tailEnd type="none" w="med" len="med"/>
+                    </a:lnT>
+                    <a:lnB w="6350" cap="flat" cmpd="sng" algn="ctr">
+                      <a:solidFill>
+                        <a:srgbClr val="334155"/>
+                      </a:solidFill>
+                      <a:prstDash val="solid"/>
+                      <a:round/>
+                      <a:headEnd type="none" w="med" len="med"/>
+                      <a:tailEnd type="none" w="med" len="med"/>
+                    </a:lnB>
+                    <a:solidFill>
+                      <a:srgbClr val="1E293B"/>
+                    </a:solidFill>
+                  </a:tcPr>
+                </a:tc>
+              </a:tr>
+              <a:tr h="228600">
+                <a:tc>
+                  <a:txBody>
+                    <a:bodyPr/>
+                    <a:lstStyle/>
+                    <a:p>
+                      <a:pPr indent="0" marL="0">
+                        <a:buNone/>
+                      </a:pPr>
+                      <a:r>
+                        <a:rPr lang="en-US" sz="850" dirty="0">
+                          <a:solidFill>
+                            <a:srgbClr val="F1F5F9"/>
+                          </a:solidFill>
+                          <a:latin typeface="Calibri" pitchFamily="34" charset="0"/>
+                          <a:ea typeface="Calibri" pitchFamily="34" charset="-122"/>
+                          <a:cs typeface="Calibri" pitchFamily="34" charset="-120"/>
+                        </a:rPr>
+                        <a:t>Framework</a:t>
+                      </a:r>
+                      <a:endParaRPr lang="en-US" sz="850" dirty="0">
+                        <a:latin typeface="Calibri" charset="0"/>
+                        <a:ea typeface="Calibri" charset="0"/>
+                        <a:cs typeface="Calibri" charset="0"/>
+                      </a:endParaRPr>
+                    </a:p>
+                  </a:txBody>
+                  <a:tcPr marL="91440" marR="91440" marT="45720" marB="45720" anchor="ctr">
+                    <a:lnL w="6350" cap="flat" cmpd="sng" algn="ctr">
+                      <a:solidFill>
+                        <a:srgbClr val="334155"/>
+                      </a:solidFill>
+                      <a:prstDash val="solid"/>
+                      <a:round/>
+                      <a:headEnd type="none" w="med" len="med"/>
+                      <a:tailEnd type="none" w="med" len="med"/>
+                    </a:lnL>
+                    <a:lnR w="6350" cap="flat" cmpd="sng" algn="ctr">
+                      <a:solidFill>
+                        <a:srgbClr val="334155"/>
+                      </a:solidFill>
+                      <a:prstDash val="solid"/>
+                      <a:round/>
+                      <a:headEnd type="none" w="med" len="med"/>
+                      <a:tailEnd type="none" w="med" len="med"/>
+                    </a:lnR>
+                    <a:lnT w="6350" cap="flat" cmpd="sng" algn="ctr">
+                      <a:solidFill>
+                        <a:srgbClr val="334155"/>
+                      </a:solidFill>
+                      <a:prstDash val="solid"/>
+                      <a:round/>
+                      <a:headEnd type="none" w="med" len="med"/>
+                      <a:tailEnd type="none" w="med" len="med"/>
+                    </a:lnT>
+                    <a:lnB w="6350" cap="flat" cmpd="sng" algn="ctr">
+                      <a:solidFill>
+                        <a:srgbClr val="334155"/>
+                      </a:solidFill>
+                      <a:prstDash val="solid"/>
+                      <a:round/>
+                      <a:headEnd type="none" w="med" len="med"/>
+                      <a:tailEnd type="none" w="med" len="med"/>
+                    </a:lnB>
+                    <a:solidFill>
+                      <a:srgbClr val="0F172A"/>
+                    </a:solidFill>
+                  </a:tcPr>
+                </a:tc>
+                <a:tc>
+                  <a:txBody>
+                    <a:bodyPr/>
+                    <a:lstStyle/>
+                    <a:p>
+                      <a:pPr indent="0" marL="0">
+                        <a:buNone/>
+                      </a:pPr>
+                      <a:r>
+                        <a:rPr lang="en-US" sz="850" dirty="0">
+                          <a:solidFill>
+                            <a:srgbClr val="F1F5F9"/>
+                          </a:solidFill>
+                          <a:latin typeface="Calibri" pitchFamily="34" charset="0"/>
+                          <a:ea typeface="Calibri" pitchFamily="34" charset="-122"/>
+                          <a:cs typeface="Calibri" pitchFamily="34" charset="-120"/>
+                        </a:rPr>
+                        <a:t>Spring Web (Tomcat)</a:t>
+                      </a:r>
+                      <a:endParaRPr lang="en-US" sz="850" dirty="0">
+                        <a:latin typeface="Calibri" charset="0"/>
+                        <a:ea typeface="Calibri" charset="0"/>
+                        <a:cs typeface="Calibri" charset="0"/>
+                      </a:endParaRPr>
+                    </a:p>
+                  </a:txBody>
+                  <a:tcPr marL="91440" marR="91440" marT="45720" marB="45720" anchor="ctr">
+                    <a:lnL w="6350" cap="flat" cmpd="sng" algn="ctr">
+                      <a:solidFill>
+                        <a:srgbClr val="334155"/>
+                      </a:solidFill>
+                      <a:prstDash val="solid"/>
+                      <a:round/>
+                      <a:headEnd type="none" w="med" len="med"/>
+                      <a:tailEnd type="none" w="med" len="med"/>
+                    </a:lnL>
+                    <a:lnR w="6350" cap="flat" cmpd="sng" algn="ctr">
+                      <a:solidFill>
+                        <a:srgbClr val="334155"/>
+                      </a:solidFill>
+                      <a:prstDash val="solid"/>
+                      <a:round/>
+                      <a:headEnd type="none" w="med" len="med"/>
+                      <a:tailEnd type="none" w="med" len="med"/>
+                    </a:lnR>
+                    <a:lnT w="6350" cap="flat" cmpd="sng" algn="ctr">
+                      <a:solidFill>
+                        <a:srgbClr val="334155"/>
+                      </a:solidFill>
+                      <a:prstDash val="solid"/>
+                      <a:round/>
+                      <a:headEnd type="none" w="med" len="med"/>
+                      <a:tailEnd type="none" w="med" len="med"/>
+                    </a:lnT>
+                    <a:lnB w="6350" cap="flat" cmpd="sng" algn="ctr">
+                      <a:solidFill>
+                        <a:srgbClr val="334155"/>
+                      </a:solidFill>
+                      <a:prstDash val="solid"/>
+                      <a:round/>
+                      <a:headEnd type="none" w="med" len="med"/>
+                      <a:tailEnd type="none" w="med" len="med"/>
+                    </a:lnB>
+                    <a:solidFill>
+                      <a:srgbClr val="0F172A"/>
+                    </a:solidFill>
+                  </a:tcPr>
+                </a:tc>
+                <a:tc>
+                  <a:txBody>
+                    <a:bodyPr/>
+                    <a:lstStyle/>
+                    <a:p>
+                      <a:pPr indent="0" marL="0">
+                        <a:buNone/>
+                      </a:pPr>
+                      <a:r>
+                        <a:rPr lang="en-US" sz="850" dirty="0">
+                          <a:solidFill>
+                            <a:srgbClr val="F1F5F9"/>
+                          </a:solidFill>
+                          <a:latin typeface="Calibri" pitchFamily="34" charset="0"/>
+                          <a:ea typeface="Calibri" pitchFamily="34" charset="-122"/>
+                          <a:cs typeface="Calibri" pitchFamily="34" charset="-120"/>
+                        </a:rPr>
+                        <a:t>10.1.54</a:t>
+                      </a:r>
+                      <a:endParaRPr lang="en-US" sz="850" dirty="0">
+                        <a:latin typeface="Calibri" charset="0"/>
+                        <a:ea typeface="Calibri" charset="0"/>
+                        <a:cs typeface="Calibri" charset="0"/>
+                      </a:endParaRPr>
+                    </a:p>
+                  </a:txBody>
+                  <a:tcPr marL="91440" marR="91440" marT="45720" marB="45720" anchor="ctr">
+                    <a:lnL w="6350" cap="flat" cmpd="sng" algn="ctr">
+                      <a:solidFill>
+                        <a:srgbClr val="334155"/>
+                      </a:solidFill>
+                      <a:prstDash val="solid"/>
+                      <a:round/>
+                      <a:headEnd type="none" w="med" len="med"/>
+                      <a:tailEnd type="none" w="med" len="med"/>
+                    </a:lnL>
+                    <a:lnR w="6350" cap="flat" cmpd="sng" algn="ctr">
+                      <a:solidFill>
+                        <a:srgbClr val="334155"/>
+                      </a:solidFill>
+                      <a:prstDash val="solid"/>
+                      <a:round/>
+                      <a:headEnd type="none" w="med" len="med"/>
+                      <a:tailEnd type="none" w="med" len="med"/>
+                    </a:lnR>
+                    <a:lnT w="6350" cap="flat" cmpd="sng" algn="ctr">
+                      <a:solidFill>
+                        <a:srgbClr val="334155"/>
+                      </a:solidFill>
+                      <a:prstDash val="solid"/>
+                      <a:round/>
+                      <a:headEnd type="none" w="med" len="med"/>
+                      <a:tailEnd type="none" w="med" len="med"/>
+                    </a:lnT>
+                    <a:lnB w="6350" cap="flat" cmpd="sng" algn="ctr">
+                      <a:solidFill>
+                        <a:srgbClr val="334155"/>
+                      </a:solidFill>
+                      <a:prstDash val="solid"/>
+                      <a:round/>
+                      <a:headEnd type="none" w="med" len="med"/>
+                      <a:tailEnd type="none" w="med" len="med"/>
+                    </a:lnB>
+                    <a:solidFill>
+                      <a:srgbClr val="0F172A"/>
+                    </a:solidFill>
+                  </a:tcPr>
+                </a:tc>
+                <a:tc>
+                  <a:txBody>
+                    <a:bodyPr/>
+                    <a:lstStyle/>
+                    <a:p>
+                      <a:pPr indent="0" marL="0">
+                        <a:buNone/>
+                      </a:pPr>
+                      <a:r>
+                        <a:rPr lang="en-US" sz="850" dirty="0">
+                          <a:solidFill>
+                            <a:srgbClr val="F1F5F9"/>
+                          </a:solidFill>
+                          <a:latin typeface="Calibri" pitchFamily="34" charset="0"/>
+                          <a:ea typeface="Calibri" pitchFamily="34" charset="-122"/>
+                          <a:cs typeface="Calibri" pitchFamily="34" charset="-120"/>
+                        </a:rPr>
+                        <a:t>Embedded HTTP server and REST endpoints</a:t>
+                      </a:r>
+                      <a:endParaRPr lang="en-US" sz="850" dirty="0">
+                        <a:latin typeface="Calibri" charset="0"/>
+                        <a:ea typeface="Calibri" charset="0"/>
+                        <a:cs typeface="Calibri" charset="0"/>
+                      </a:endParaRPr>
+                    </a:p>
+                  </a:txBody>
+                  <a:tcPr marL="91440" marR="91440" marT="45720" marB="45720" anchor="ctr">
+                    <a:lnL w="6350" cap="flat" cmpd="sng" algn="ctr">
+                      <a:solidFill>
+                        <a:srgbClr val="334155"/>
+                      </a:solidFill>
+                      <a:prstDash val="solid"/>
+                      <a:round/>
+                      <a:headEnd type="none" w="med" len="med"/>
+                      <a:tailEnd type="none" w="med" len="med"/>
+                    </a:lnL>
+                    <a:lnR w="6350" cap="flat" cmpd="sng" algn="ctr">
+                      <a:solidFill>
+                        <a:srgbClr val="334155"/>
+                      </a:solidFill>
+                      <a:prstDash val="solid"/>
+                      <a:round/>
+                      <a:headEnd type="none" w="med" len="med"/>
+                      <a:tailEnd type="none" w="med" len="med"/>
+                    </a:lnR>
+                    <a:lnT w="6350" cap="flat" cmpd="sng" algn="ctr">
+                      <a:solidFill>
+                        <a:srgbClr val="334155"/>
+                      </a:solidFill>
+                      <a:prstDash val="solid"/>
+                      <a:round/>
+                      <a:headEnd type="none" w="med" len="med"/>
+                      <a:tailEnd type="none" w="med" len="med"/>
+                    </a:lnT>
+                    <a:lnB w="6350" cap="flat" cmpd="sng" algn="ctr">
+                      <a:solidFill>
+                        <a:srgbClr val="334155"/>
+                      </a:solidFill>
+                      <a:prstDash val="solid"/>
+                      <a:round/>
+                      <a:headEnd type="none" w="med" len="med"/>
+                      <a:tailEnd type="none" w="med" len="med"/>
+                    </a:lnB>
+                    <a:solidFill>
+                      <a:srgbClr val="0F172A"/>
+                    </a:solidFill>
+                  </a:tcPr>
+                </a:tc>
+              </a:tr>
+              <a:tr h="228600">
+                <a:tc>
+                  <a:txBody>
+                    <a:bodyPr/>
+                    <a:lstStyle/>
+                    <a:p>
+                      <a:pPr indent="0" marL="0">
+                        <a:buNone/>
+                      </a:pPr>
+                      <a:r>
+                        <a:rPr lang="en-US" sz="850" dirty="0">
+                          <a:solidFill>
+                            <a:srgbClr val="F1F5F9"/>
+                          </a:solidFill>
+                          <a:latin typeface="Calibri" pitchFamily="34" charset="0"/>
+                          <a:ea typeface="Calibri" pitchFamily="34" charset="-122"/>
+                          <a:cs typeface="Calibri" pitchFamily="34" charset="-120"/>
+                        </a:rPr>
+                        <a:t>Framework</a:t>
+                      </a:r>
+                      <a:endParaRPr lang="en-US" sz="850" dirty="0">
+                        <a:latin typeface="Calibri" charset="0"/>
+                        <a:ea typeface="Calibri" charset="0"/>
+                        <a:cs typeface="Calibri" charset="0"/>
+                      </a:endParaRPr>
+                    </a:p>
+                  </a:txBody>
+                  <a:tcPr marL="91440" marR="91440" marT="45720" marB="45720" anchor="ctr">
+                    <a:lnL w="6350" cap="flat" cmpd="sng" algn="ctr">
+                      <a:solidFill>
+                        <a:srgbClr val="334155"/>
+                      </a:solidFill>
+                      <a:prstDash val="solid"/>
+                      <a:round/>
+                      <a:headEnd type="none" w="med" len="med"/>
+                      <a:tailEnd type="none" w="med" len="med"/>
+                    </a:lnL>
+                    <a:lnR w="6350" cap="flat" cmpd="sng" algn="ctr">
+                      <a:solidFill>
+                        <a:srgbClr val="334155"/>
+                      </a:solidFill>
+                      <a:prstDash val="solid"/>
+                      <a:round/>
+                      <a:headEnd type="none" w="med" len="med"/>
+                      <a:tailEnd type="none" w="med" len="med"/>
+                    </a:lnR>
+                    <a:lnT w="6350" cap="flat" cmpd="sng" algn="ctr">
+                      <a:solidFill>
+                        <a:srgbClr val="334155"/>
+                      </a:solidFill>
+                      <a:prstDash val="solid"/>
+                      <a:round/>
+                      <a:headEnd type="none" w="med" len="med"/>
+                      <a:tailEnd type="none" w="med" len="med"/>
+                    </a:lnT>
+                    <a:lnB w="6350" cap="flat" cmpd="sng" algn="ctr">
+                      <a:solidFill>
+                        <a:srgbClr val="334155"/>
+                      </a:solidFill>
+                      <a:prstDash val="solid"/>
+                      <a:round/>
+                      <a:headEnd type="none" w="med" len="med"/>
+                      <a:tailEnd type="none" w="med" len="med"/>
+                    </a:lnB>
+                    <a:solidFill>
+                      <a:srgbClr val="1E293B"/>
+                    </a:solidFill>
+                  </a:tcPr>
+                </a:tc>
+                <a:tc>
+                  <a:txBody>
+                    <a:bodyPr/>
+                    <a:lstStyle/>
+                    <a:p>
+                      <a:pPr indent="0" marL="0">
+                        <a:buNone/>
+                      </a:pPr>
+                      <a:r>
+                        <a:rPr lang="en-US" sz="850" dirty="0">
+                          <a:solidFill>
+                            <a:srgbClr val="F1F5F9"/>
+                          </a:solidFill>
+                          <a:latin typeface="Calibri" pitchFamily="34" charset="0"/>
+                          <a:ea typeface="Calibri" pitchFamily="34" charset="-122"/>
+                          <a:cs typeface="Calibri" pitchFamily="34" charset="-120"/>
+                        </a:rPr>
+                        <a:t>Spring Actuator</a:t>
+                      </a:r>
+                      <a:endParaRPr lang="en-US" sz="850" dirty="0">
+                        <a:latin typeface="Calibri" charset="0"/>
+                        <a:ea typeface="Calibri" charset="0"/>
+                        <a:cs typeface="Calibri" charset="0"/>
+                      </a:endParaRPr>
+                    </a:p>
+                  </a:txBody>
+                  <a:tcPr marL="91440" marR="91440" marT="45720" marB="45720" anchor="ctr">
+                    <a:lnL w="6350" cap="flat" cmpd="sng" algn="ctr">
+                      <a:solidFill>
+                        <a:srgbClr val="334155"/>
+                      </a:solidFill>
+                      <a:prstDash val="solid"/>
+                      <a:round/>
+                      <a:headEnd type="none" w="med" len="med"/>
+                      <a:tailEnd type="none" w="med" len="med"/>
+                    </a:lnL>
+                    <a:lnR w="6350" cap="flat" cmpd="sng" algn="ctr">
+                      <a:solidFill>
+                        <a:srgbClr val="334155"/>
+                      </a:solidFill>
+                      <a:prstDash val="solid"/>
+                      <a:round/>
+                      <a:headEnd type="none" w="med" len="med"/>
+                      <a:tailEnd type="none" w="med" len="med"/>
+                    </a:lnR>
+                    <a:lnT w="6350" cap="flat" cmpd="sng" algn="ctr">
+                      <a:solidFill>
+                        <a:srgbClr val="334155"/>
+                      </a:solidFill>
+                      <a:prstDash val="solid"/>
+                      <a:round/>
+                      <a:headEnd type="none" w="med" len="med"/>
+                      <a:tailEnd type="none" w="med" len="med"/>
+                    </a:lnT>
+                    <a:lnB w="6350" cap="flat" cmpd="sng" algn="ctr">
+                      <a:solidFill>
+                        <a:srgbClr val="334155"/>
+                      </a:solidFill>
+                      <a:prstDash val="solid"/>
+                      <a:round/>
+                      <a:headEnd type="none" w="med" len="med"/>
+                      <a:tailEnd type="none" w="med" len="med"/>
+                    </a:lnB>
+                    <a:solidFill>
+                      <a:srgbClr val="1E293B"/>
+                    </a:solidFill>
+                  </a:tcPr>
+                </a:tc>
+                <a:tc>
+                  <a:txBody>
+                    <a:bodyPr/>
+                    <a:lstStyle/>
+                    <a:p>
+                      <a:pPr indent="0" marL="0">
+                        <a:buNone/>
+                      </a:pPr>
+                      <a:r>
+                        <a:rPr lang="en-US" sz="850" dirty="0">
+                          <a:solidFill>
+                            <a:srgbClr val="F1F5F9"/>
+                          </a:solidFill>
+                          <a:latin typeface="Calibri" pitchFamily="34" charset="0"/>
+                          <a:ea typeface="Calibri" pitchFamily="34" charset="-122"/>
+                          <a:cs typeface="Calibri" pitchFamily="34" charset="-120"/>
+                        </a:rPr>
+                        <a:t>3.5.14</a:t>
+                      </a:r>
+                      <a:endParaRPr lang="en-US" sz="850" dirty="0">
+                        <a:latin typeface="Calibri" charset="0"/>
+                        <a:ea typeface="Calibri" charset="0"/>
+                        <a:cs typeface="Calibri" charset="0"/>
+                      </a:endParaRPr>
+                    </a:p>
+                  </a:txBody>
+                  <a:tcPr marL="91440" marR="91440" marT="45720" marB="45720" anchor="ctr">
+                    <a:lnL w="6350" cap="flat" cmpd="sng" algn="ctr">
+                      <a:solidFill>
+                        <a:srgbClr val="334155"/>
+                      </a:solidFill>
+                      <a:prstDash val="solid"/>
+                      <a:round/>
+                      <a:headEnd type="none" w="med" len="med"/>
+                      <a:tailEnd type="none" w="med" len="med"/>
+                    </a:lnL>
+                    <a:lnR w="6350" cap="flat" cmpd="sng" algn="ctr">
+                      <a:solidFill>
+                        <a:srgbClr val="334155"/>
+                      </a:solidFill>
+                      <a:prstDash val="solid"/>
+                      <a:round/>
+                      <a:headEnd type="none" w="med" len="med"/>
+                      <a:tailEnd type="none" w="med" len="med"/>
+                    </a:lnR>
+                    <a:lnT w="6350" cap="flat" cmpd="sng" algn="ctr">
+                      <a:solidFill>
+                        <a:srgbClr val="334155"/>
+                      </a:solidFill>
+                      <a:prstDash val="solid"/>
+                      <a:round/>
+                      <a:headEnd type="none" w="med" len="med"/>
+                      <a:tailEnd type="none" w="med" len="med"/>
+                    </a:lnT>
+                    <a:lnB w="6350" cap="flat" cmpd="sng" algn="ctr">
+                      <a:solidFill>
+                        <a:srgbClr val="334155"/>
+                      </a:solidFill>
+                      <a:prstDash val="solid"/>
+                      <a:round/>
+                      <a:headEnd type="none" w="med" len="med"/>
+                      <a:tailEnd type="none" w="med" len="med"/>
+                    </a:lnB>
+                    <a:solidFill>
+                      <a:srgbClr val="1E293B"/>
+                    </a:solidFill>
+                  </a:tcPr>
+                </a:tc>
+                <a:tc>
+                  <a:txBody>
+                    <a:bodyPr/>
+                    <a:lstStyle/>
+                    <a:p>
+                      <a:pPr indent="0" marL="0">
+                        <a:buNone/>
+                      </a:pPr>
+                      <a:r>
+                        <a:rPr lang="en-US" sz="850" dirty="0">
+                          <a:solidFill>
+                            <a:srgbClr val="F1F5F9"/>
+                          </a:solidFill>
+                          <a:latin typeface="Calibri" pitchFamily="34" charset="0"/>
+                          <a:ea typeface="Calibri" pitchFamily="34" charset="-122"/>
+                          <a:cs typeface="Calibri" pitchFamily="34" charset="-120"/>
+                        </a:rPr>
+                        <a:t>Health checks and monitoring endpoints</a:t>
+                      </a:r>
+                      <a:endParaRPr lang="en-US" sz="850" dirty="0">
+                        <a:latin typeface="Calibri" charset="0"/>
+                        <a:ea typeface="Calibri" charset="0"/>
+                        <a:cs typeface="Calibri" charset="0"/>
+                      </a:endParaRPr>
+                    </a:p>
+                  </a:txBody>
+                  <a:tcPr marL="91440" marR="91440" marT="45720" marB="45720" anchor="ctr">
+                    <a:lnL w="6350" cap="flat" cmpd="sng" algn="ctr">
+                      <a:solidFill>
+                        <a:srgbClr val="334155"/>
+                      </a:solidFill>
+                      <a:prstDash val="solid"/>
+                      <a:round/>
+                      <a:headEnd type="none" w="med" len="med"/>
+                      <a:tailEnd type="none" w="med" len="med"/>
+                    </a:lnL>
+                    <a:lnR w="6350" cap="flat" cmpd="sng" algn="ctr">
+                      <a:solidFill>
+                        <a:srgbClr val="334155"/>
+                      </a:solidFill>
+                      <a:prstDash val="solid"/>
+                      <a:round/>
+                      <a:headEnd type="none" w="med" len="med"/>
+                      <a:tailEnd type="none" w="med" len="med"/>
+                    </a:lnR>
+                    <a:lnT w="6350" cap="flat" cmpd="sng" algn="ctr">
+                      <a:solidFill>
+                        <a:srgbClr val="334155"/>
+                      </a:solidFill>
+                      <a:prstDash val="solid"/>
+                      <a:round/>
+                      <a:headEnd type="none" w="med" len="med"/>
+                      <a:tailEnd type="none" w="med" len="med"/>
+                    </a:lnT>
+                    <a:lnB w="6350" cap="flat" cmpd="sng" algn="ctr">
+                      <a:solidFill>
+                        <a:srgbClr val="334155"/>
+                      </a:solidFill>
+                      <a:prstDash val="solid"/>
+                      <a:round/>
+                      <a:headEnd type="none" w="med" len="med"/>
+                      <a:tailEnd type="none" w="med" len="med"/>
+                    </a:lnB>
+                    <a:solidFill>
+                      <a:srgbClr val="1E293B"/>
+                    </a:solidFill>
+                  </a:tcPr>
+                </a:tc>
+              </a:tr>
+              <a:tr h="228600">
+                <a:tc>
+                  <a:txBody>
+                    <a:bodyPr/>
+                    <a:lstStyle/>
+                    <a:p>
+                      <a:pPr indent="0" marL="0">
+                        <a:buNone/>
+                      </a:pPr>
+                      <a:r>
+                        <a:rPr lang="en-US" sz="850" dirty="0">
+                          <a:solidFill>
+                            <a:srgbClr val="F1F5F9"/>
+                          </a:solidFill>
+                          <a:latin typeface="Calibri" pitchFamily="34" charset="0"/>
+                          <a:ea typeface="Calibri" pitchFamily="34" charset="-122"/>
+                          <a:cs typeface="Calibri" pitchFamily="34" charset="-120"/>
+                        </a:rPr>
+                        <a:t>Framework</a:t>
+                      </a:r>
+                      <a:endParaRPr lang="en-US" sz="850" dirty="0">
+                        <a:latin typeface="Calibri" charset="0"/>
+                        <a:ea typeface="Calibri" charset="0"/>
+                        <a:cs typeface="Calibri" charset="0"/>
+                      </a:endParaRPr>
+                    </a:p>
+                  </a:txBody>
+                  <a:tcPr marL="91440" marR="91440" marT="45720" marB="45720" anchor="ctr">
+                    <a:lnL w="6350" cap="flat" cmpd="sng" algn="ctr">
+                      <a:solidFill>
+                        <a:srgbClr val="334155"/>
+                      </a:solidFill>
+                      <a:prstDash val="solid"/>
+                      <a:round/>
+                      <a:headEnd type="none" w="med" len="med"/>
+                      <a:tailEnd type="none" w="med" len="med"/>
+                    </a:lnL>
+                    <a:lnR w="6350" cap="flat" cmpd="sng" algn="ctr">
+                      <a:solidFill>
+                        <a:srgbClr val="334155"/>
+                      </a:solidFill>
+                      <a:prstDash val="solid"/>
+                      <a:round/>
+                      <a:headEnd type="none" w="med" len="med"/>
+                      <a:tailEnd type="none" w="med" len="med"/>
+                    </a:lnR>
+                    <a:lnT w="6350" cap="flat" cmpd="sng" algn="ctr">
+                      <a:solidFill>
+                        <a:srgbClr val="334155"/>
+                      </a:solidFill>
+                      <a:prstDash val="solid"/>
+                      <a:round/>
+                      <a:headEnd type="none" w="med" len="med"/>
+                      <a:tailEnd type="none" w="med" len="med"/>
+                    </a:lnT>
+                    <a:lnB w="6350" cap="flat" cmpd="sng" algn="ctr">
+                      <a:solidFill>
+                        <a:srgbClr val="334155"/>
+                      </a:solidFill>
+                      <a:prstDash val="solid"/>
+                      <a:round/>
+                      <a:headEnd type="none" w="med" len="med"/>
+                      <a:tailEnd type="none" w="med" len="med"/>
+                    </a:lnB>
+                    <a:solidFill>
+                      <a:srgbClr val="0F172A"/>
+                    </a:solidFill>
+                  </a:tcPr>
+                </a:tc>
+                <a:tc>
+                  <a:txBody>
+                    <a:bodyPr/>
+                    <a:lstStyle/>
+                    <a:p>
+                      <a:pPr indent="0" marL="0">
+                        <a:buNone/>
+                      </a:pPr>
+                      <a:r>
+                        <a:rPr lang="en-US" sz="850" dirty="0">
+                          <a:solidFill>
+                            <a:srgbClr val="F1F5F9"/>
+                          </a:solidFill>
+                          <a:latin typeface="Calibri" pitchFamily="34" charset="0"/>
+                          <a:ea typeface="Calibri" pitchFamily="34" charset="-122"/>
+                          <a:cs typeface="Calibri" pitchFamily="34" charset="-120"/>
+                        </a:rPr>
+                        <a:t>Spring Validation</a:t>
+                      </a:r>
+                      <a:endParaRPr lang="en-US" sz="850" dirty="0">
+                        <a:latin typeface="Calibri" charset="0"/>
+                        <a:ea typeface="Calibri" charset="0"/>
+                        <a:cs typeface="Calibri" charset="0"/>
+                      </a:endParaRPr>
+                    </a:p>
+                  </a:txBody>
+                  <a:tcPr marL="91440" marR="91440" marT="45720" marB="45720" anchor="ctr">
+                    <a:lnL w="6350" cap="flat" cmpd="sng" algn="ctr">
+                      <a:solidFill>
+                        <a:srgbClr val="334155"/>
+                      </a:solidFill>
+                      <a:prstDash val="solid"/>
+                      <a:round/>
+                      <a:headEnd type="none" w="med" len="med"/>
+                      <a:tailEnd type="none" w="med" len="med"/>
+                    </a:lnL>
+                    <a:lnR w="6350" cap="flat" cmpd="sng" algn="ctr">
+                      <a:solidFill>
+                        <a:srgbClr val="334155"/>
+                      </a:solidFill>
+                      <a:prstDash val="solid"/>
+                      <a:round/>
+                      <a:headEnd type="none" w="med" len="med"/>
+                      <a:tailEnd type="none" w="med" len="med"/>
+                    </a:lnR>
+                    <a:lnT w="6350" cap="flat" cmpd="sng" algn="ctr">
+                      <a:solidFill>
+                        <a:srgbClr val="334155"/>
+                      </a:solidFill>
+                      <a:prstDash val="solid"/>
+                      <a:round/>
+                      <a:headEnd type="none" w="med" len="med"/>
+                      <a:tailEnd type="none" w="med" len="med"/>
+                    </a:lnT>
+                    <a:lnB w="6350" cap="flat" cmpd="sng" algn="ctr">
+                      <a:solidFill>
+                        <a:srgbClr val="334155"/>
+                      </a:solidFill>
+                      <a:prstDash val="solid"/>
+                      <a:round/>
+                      <a:headEnd type="none" w="med" len="med"/>
+                      <a:tailEnd type="none" w="med" len="med"/>
+                    </a:lnB>
+                    <a:solidFill>
+                      <a:srgbClr val="0F172A"/>
+                    </a:solidFill>
+                  </a:tcPr>
+                </a:tc>
+                <a:tc>
+                  <a:txBody>
+                    <a:bodyPr/>
+                    <a:lstStyle/>
+                    <a:p>
+                      <a:pPr indent="0" marL="0">
+                        <a:buNone/>
+                      </a:pPr>
+                      <a:r>
+                        <a:rPr lang="en-US" sz="850" dirty="0">
+                          <a:solidFill>
+                            <a:srgbClr val="F1F5F9"/>
+                          </a:solidFill>
+                          <a:latin typeface="Calibri" pitchFamily="34" charset="0"/>
+                          <a:ea typeface="Calibri" pitchFamily="34" charset="-122"/>
+                          <a:cs typeface="Calibri" pitchFamily="34" charset="-120"/>
+                        </a:rPr>
+                        <a:t>3.5.14</a:t>
+                      </a:r>
+                      <a:endParaRPr lang="en-US" sz="850" dirty="0">
+                        <a:latin typeface="Calibri" charset="0"/>
+                        <a:ea typeface="Calibri" charset="0"/>
+                        <a:cs typeface="Calibri" charset="0"/>
+                      </a:endParaRPr>
+                    </a:p>
+                  </a:txBody>
+                  <a:tcPr marL="91440" marR="91440" marT="45720" marB="45720" anchor="ctr">
+                    <a:lnL w="6350" cap="flat" cmpd="sng" algn="ctr">
+                      <a:solidFill>
+                        <a:srgbClr val="334155"/>
+                      </a:solidFill>
+                      <a:prstDash val="solid"/>
+                      <a:round/>
+                      <a:headEnd type="none" w="med" len="med"/>
+                      <a:tailEnd type="none" w="med" len="med"/>
+                    </a:lnL>
+                    <a:lnR w="6350" cap="flat" cmpd="sng" algn="ctr">
+                      <a:solidFill>
+                        <a:srgbClr val="334155"/>
+                      </a:solidFill>
+                      <a:prstDash val="solid"/>
+                      <a:round/>
+                      <a:headEnd type="none" w="med" len="med"/>
+                      <a:tailEnd type="none" w="med" len="med"/>
+                    </a:lnR>
+                    <a:lnT w="6350" cap="flat" cmpd="sng" algn="ctr">
+                      <a:solidFill>
+                        <a:srgbClr val="334155"/>
+                      </a:solidFill>
+                      <a:prstDash val="solid"/>
+                      <a:round/>
+                      <a:headEnd type="none" w="med" len="med"/>
+                      <a:tailEnd type="none" w="med" len="med"/>
+                    </a:lnT>
+                    <a:lnB w="6350" cap="flat" cmpd="sng" algn="ctr">
+                      <a:solidFill>
+                        <a:srgbClr val="334155"/>
+                      </a:solidFill>
+                      <a:prstDash val="solid"/>
+                      <a:round/>
+                      <a:headEnd type="none" w="med" len="med"/>
+                      <a:tailEnd type="none" w="med" len="med"/>
+                    </a:lnB>
+                    <a:solidFill>
+                      <a:srgbClr val="0F172A"/>
+                    </a:solidFill>
+                  </a:tcPr>
+                </a:tc>
+                <a:tc>
+                  <a:txBody>
+                    <a:bodyPr/>
+                    <a:lstStyle/>
+                    <a:p>
+                      <a:pPr indent="0" marL="0">
+                        <a:buNone/>
+                      </a:pPr>
+                      <a:r>
+                        <a:rPr lang="en-US" sz="850" dirty="0">
+                          <a:solidFill>
+                            <a:srgbClr val="F1F5F9"/>
+                          </a:solidFill>
+                          <a:latin typeface="Calibri" pitchFamily="34" charset="0"/>
+                          <a:ea typeface="Calibri" pitchFamily="34" charset="-122"/>
+                          <a:cs typeface="Calibri" pitchFamily="34" charset="-120"/>
+                        </a:rPr>
+                        <a:t>Request DTO validation</a:t>
+                      </a:r>
+                      <a:endParaRPr lang="en-US" sz="850" dirty="0">
+                        <a:latin typeface="Calibri" charset="0"/>
+                        <a:ea typeface="Calibri" charset="0"/>
+                        <a:cs typeface="Calibri" charset="0"/>
+                      </a:endParaRPr>
+                    </a:p>
+                  </a:txBody>
+                  <a:tcPr marL="91440" marR="91440" marT="45720" marB="45720" anchor="ctr">
+                    <a:lnL w="6350" cap="flat" cmpd="sng" algn="ctr">
+                      <a:solidFill>
+                        <a:srgbClr val="334155"/>
+                      </a:solidFill>
+                      <a:prstDash val="solid"/>
+                      <a:round/>
+                      <a:headEnd type="none" w="med" len="med"/>
+                      <a:tailEnd type="none" w="med" len="med"/>
+                    </a:lnL>
+                    <a:lnR w="6350" cap="flat" cmpd="sng" algn="ctr">
+                      <a:solidFill>
+                        <a:srgbClr val="334155"/>
+                      </a:solidFill>
+                      <a:prstDash val="solid"/>
+                      <a:round/>
+                      <a:headEnd type="none" w="med" len="med"/>
+                      <a:tailEnd type="none" w="med" len="med"/>
+                    </a:lnR>
+                    <a:lnT w="6350" cap="flat" cmpd="sng" algn="ctr">
+                      <a:solidFill>
+                        <a:srgbClr val="334155"/>
+                      </a:solidFill>
+                      <a:prstDash val="solid"/>
+                      <a:round/>
+                      <a:headEnd type="none" w="med" len="med"/>
+                      <a:tailEnd type="none" w="med" len="med"/>
+                    </a:lnT>
+                    <a:lnB w="6350" cap="flat" cmpd="sng" algn="ctr">
+                      <a:solidFill>
+                        <a:srgbClr val="334155"/>
+                      </a:solidFill>
+                      <a:prstDash val="solid"/>
+                      <a:round/>
+                      <a:headEnd type="none" w="med" len="med"/>
+                      <a:tailEnd type="none" w="med" len="med"/>
+                    </a:lnB>
+                    <a:solidFill>
+                      <a:srgbClr val="0F172A"/>
+                    </a:solidFill>
+                  </a:tcPr>
+                </a:tc>
+              </a:tr>
+              <a:tr h="228600">
+                <a:tc>
+                  <a:txBody>
+                    <a:bodyPr/>
+                    <a:lstStyle/>
+                    <a:p>
+                      <a:pPr indent="0" marL="0">
+                        <a:buNone/>
+                      </a:pPr>
+                      <a:r>
+                        <a:rPr lang="en-US" sz="850" dirty="0">
+                          <a:solidFill>
+                            <a:srgbClr val="F1F5F9"/>
+                          </a:solidFill>
+                          <a:latin typeface="Calibri" pitchFamily="34" charset="0"/>
+                          <a:ea typeface="Calibri" pitchFamily="34" charset="-122"/>
+                          <a:cs typeface="Calibri" pitchFamily="34" charset="-120"/>
+                        </a:rPr>
+                        <a:t>Auth</a:t>
+                      </a:r>
+                      <a:endParaRPr lang="en-US" sz="850" dirty="0">
+                        <a:latin typeface="Calibri" charset="0"/>
+                        <a:ea typeface="Calibri" charset="0"/>
+                        <a:cs typeface="Calibri" charset="0"/>
+                      </a:endParaRPr>
+                    </a:p>
+                  </a:txBody>
+                  <a:tcPr marL="91440" marR="91440" marT="45720" marB="45720" anchor="ctr">
+                    <a:lnL w="6350" cap="flat" cmpd="sng" algn="ctr">
+                      <a:solidFill>
+                        <a:srgbClr val="334155"/>
+                      </a:solidFill>
+                      <a:prstDash val="solid"/>
+                      <a:round/>
+                      <a:headEnd type="none" w="med" len="med"/>
+                      <a:tailEnd type="none" w="med" len="med"/>
+                    </a:lnL>
+                    <a:lnR w="6350" cap="flat" cmpd="sng" algn="ctr">
+                      <a:solidFill>
+                        <a:srgbClr val="334155"/>
+                      </a:solidFill>
+                      <a:prstDash val="solid"/>
+                      <a:round/>
+                      <a:headEnd type="none" w="med" len="med"/>
+                      <a:tailEnd type="none" w="med" len="med"/>
+                    </a:lnR>
+                    <a:lnT w="6350" cap="flat" cmpd="sng" algn="ctr">
+                      <a:solidFill>
+                        <a:srgbClr val="334155"/>
+                      </a:solidFill>
+                      <a:prstDash val="solid"/>
+                      <a:round/>
+                      <a:headEnd type="none" w="med" len="med"/>
+                      <a:tailEnd type="none" w="med" len="med"/>
+                    </a:lnT>
+                    <a:lnB w="6350" cap="flat" cmpd="sng" algn="ctr">
+                      <a:solidFill>
+                        <a:srgbClr val="334155"/>
+                      </a:solidFill>
+                      <a:prstDash val="solid"/>
+                      <a:round/>
+                      <a:headEnd type="none" w="med" len="med"/>
+                      <a:tailEnd type="none" w="med" len="med"/>
+                    </a:lnB>
+                    <a:solidFill>
+                      <a:srgbClr val="1E293B"/>
+                    </a:solidFill>
+                  </a:tcPr>
+                </a:tc>
+                <a:tc>
+                  <a:txBody>
+                    <a:bodyPr/>
+                    <a:lstStyle/>
+                    <a:p>
+                      <a:pPr indent="0" marL="0">
+                        <a:buNone/>
+                      </a:pPr>
+                      <a:r>
+                        <a:rPr lang="en-US" sz="850" dirty="0">
+                          <a:solidFill>
+                            <a:srgbClr val="F1F5F9"/>
+                          </a:solidFill>
+                          <a:latin typeface="Calibri" pitchFamily="34" charset="0"/>
+                          <a:ea typeface="Calibri" pitchFamily="34" charset="-122"/>
+                          <a:cs typeface="Calibri" pitchFamily="34" charset="-120"/>
+                        </a:rPr>
+                        <a:t>JJWT (io.jsonwebtoken)</a:t>
+                      </a:r>
+                      <a:endParaRPr lang="en-US" sz="850" dirty="0">
+                        <a:latin typeface="Calibri" charset="0"/>
+                        <a:ea typeface="Calibri" charset="0"/>
+                        <a:cs typeface="Calibri" charset="0"/>
+                      </a:endParaRPr>
+                    </a:p>
+                  </a:txBody>
+                  <a:tcPr marL="91440" marR="91440" marT="45720" marB="45720" anchor="ctr">
+                    <a:lnL w="6350" cap="flat" cmpd="sng" algn="ctr">
+                      <a:solidFill>
+                        <a:srgbClr val="334155"/>
+                      </a:solidFill>
+                      <a:prstDash val="solid"/>
+                      <a:round/>
+                      <a:headEnd type="none" w="med" len="med"/>
+                      <a:tailEnd type="none" w="med" len="med"/>
+                    </a:lnL>
+                    <a:lnR w="6350" cap="flat" cmpd="sng" algn="ctr">
+                      <a:solidFill>
+                        <a:srgbClr val="334155"/>
+                      </a:solidFill>
+                      <a:prstDash val="solid"/>
+                      <a:round/>
+                      <a:headEnd type="none" w="med" len="med"/>
+                      <a:tailEnd type="none" w="med" len="med"/>
+                    </a:lnR>
+                    <a:lnT w="6350" cap="flat" cmpd="sng" algn="ctr">
+                      <a:solidFill>
+                        <a:srgbClr val="334155"/>
+                      </a:solidFill>
+                      <a:prstDash val="solid"/>
+                      <a:round/>
+                      <a:headEnd type="none" w="med" len="med"/>
+                      <a:tailEnd type="none" w="med" len="med"/>
+                    </a:lnT>
+                    <a:lnB w="6350" cap="flat" cmpd="sng" algn="ctr">
+                      <a:solidFill>
+                        <a:srgbClr val="334155"/>
+                      </a:solidFill>
+                      <a:prstDash val="solid"/>
+                      <a:round/>
+                      <a:headEnd type="none" w="med" len="med"/>
+                      <a:tailEnd type="none" w="med" len="med"/>
+                    </a:lnB>
+                    <a:solidFill>
+                      <a:srgbClr val="1E293B"/>
+                    </a:solidFill>
+                  </a:tcPr>
+                </a:tc>
+                <a:tc>
+                  <a:txBody>
+                    <a:bodyPr/>
+                    <a:lstStyle/>
+                    <a:p>
+                      <a:pPr indent="0" marL="0">
+                        <a:buNone/>
+                      </a:pPr>
+                      <a:r>
+                        <a:rPr lang="en-US" sz="850" dirty="0">
+                          <a:solidFill>
+                            <a:srgbClr val="F1F5F9"/>
+                          </a:solidFill>
+                          <a:latin typeface="Calibri" pitchFamily="34" charset="0"/>
+                          <a:ea typeface="Calibri" pitchFamily="34" charset="-122"/>
+                          <a:cs typeface="Calibri" pitchFamily="34" charset="-120"/>
+                        </a:rPr>
+                        <a:t>0.12.6</a:t>
+                      </a:r>
+                      <a:endParaRPr lang="en-US" sz="850" dirty="0">
+                        <a:latin typeface="Calibri" charset="0"/>
+                        <a:ea typeface="Calibri" charset="0"/>
+                        <a:cs typeface="Calibri" charset="0"/>
+                      </a:endParaRPr>
+                    </a:p>
+                  </a:txBody>
+                  <a:tcPr marL="91440" marR="91440" marT="45720" marB="45720" anchor="ctr">
+                    <a:lnL w="6350" cap="flat" cmpd="sng" algn="ctr">
+                      <a:solidFill>
+                        <a:srgbClr val="334155"/>
+                      </a:solidFill>
+                      <a:prstDash val="solid"/>
+                      <a:round/>
+                      <a:headEnd type="none" w="med" len="med"/>
+                      <a:tailEnd type="none" w="med" len="med"/>
+                    </a:lnL>
+                    <a:lnR w="6350" cap="flat" cmpd="sng" algn="ctr">
+                      <a:solidFill>
+                        <a:srgbClr val="334155"/>
+                      </a:solidFill>
+                      <a:prstDash val="solid"/>
+                      <a:round/>
+                      <a:headEnd type="none" w="med" len="med"/>
+                      <a:tailEnd type="none" w="med" len="med"/>
+                    </a:lnR>
+                    <a:lnT w="6350" cap="flat" cmpd="sng" algn="ctr">
+                      <a:solidFill>
+                        <a:srgbClr val="334155"/>
+                      </a:solidFill>
+                      <a:prstDash val="solid"/>
+                      <a:round/>
+                      <a:headEnd type="none" w="med" len="med"/>
+                      <a:tailEnd type="none" w="med" len="med"/>
+                    </a:lnT>
+                    <a:lnB w="6350" cap="flat" cmpd="sng" algn="ctr">
+                      <a:solidFill>
+                        <a:srgbClr val="334155"/>
+                      </a:solidFill>
+                      <a:prstDash val="solid"/>
+                      <a:round/>
+                      <a:headEnd type="none" w="med" len="med"/>
+                      <a:tailEnd type="none" w="med" len="med"/>
+                    </a:lnB>
+                    <a:solidFill>
+                      <a:srgbClr val="1E293B"/>
+                    </a:solidFill>
+                  </a:tcPr>
+                </a:tc>
+                <a:tc>
+                  <a:txBody>
+                    <a:bodyPr/>
+                    <a:lstStyle/>
+                    <a:p>
+                      <a:pPr indent="0" marL="0">
+                        <a:buNone/>
+                      </a:pPr>
+                      <a:r>
+                        <a:rPr lang="en-US" sz="850" dirty="0">
+                          <a:solidFill>
+                            <a:srgbClr val="F1F5F9"/>
+                          </a:solidFill>
+                          <a:latin typeface="Calibri" pitchFamily="34" charset="0"/>
+                          <a:ea typeface="Calibri" pitchFamily="34" charset="-122"/>
+                          <a:cs typeface="Calibri" pitchFamily="34" charset="-120"/>
+                        </a:rPr>
+                        <a:t>JWT token generation and verification</a:t>
+                      </a:r>
+                      <a:endParaRPr lang="en-US" sz="850" dirty="0">
+                        <a:latin typeface="Calibri" charset="0"/>
+                        <a:ea typeface="Calibri" charset="0"/>
+                        <a:cs typeface="Calibri" charset="0"/>
+                      </a:endParaRPr>
+                    </a:p>
+                  </a:txBody>
+                  <a:tcPr marL="91440" marR="91440" marT="45720" marB="45720" anchor="ctr">
+                    <a:lnL w="6350" cap="flat" cmpd="sng" algn="ctr">
+                      <a:solidFill>
+                        <a:srgbClr val="334155"/>
+                      </a:solidFill>
+                      <a:prstDash val="solid"/>
+                      <a:round/>
+                      <a:headEnd type="none" w="med" len="med"/>
+                      <a:tailEnd type="none" w="med" len="med"/>
+                    </a:lnL>
+                    <a:lnR w="6350" cap="flat" cmpd="sng" algn="ctr">
+                      <a:solidFill>
+                        <a:srgbClr val="334155"/>
+                      </a:solidFill>
+                      <a:prstDash val="solid"/>
+                      <a:round/>
+                      <a:headEnd type="none" w="med" len="med"/>
+                      <a:tailEnd type="none" w="med" len="med"/>
+                    </a:lnR>
+                    <a:lnT w="6350" cap="flat" cmpd="sng" algn="ctr">
+                      <a:solidFill>
+                        <a:srgbClr val="334155"/>
+                      </a:solidFill>
+                      <a:prstDash val="solid"/>
+                      <a:round/>
+                      <a:headEnd type="none" w="med" len="med"/>
+                      <a:tailEnd type="none" w="med" len="med"/>
+                    </a:lnT>
+                    <a:lnB w="6350" cap="flat" cmpd="sng" algn="ctr">
+                      <a:solidFill>
+                        <a:srgbClr val="334155"/>
+                      </a:solidFill>
+                      <a:prstDash val="solid"/>
+                      <a:round/>
+                      <a:headEnd type="none" w="med" len="med"/>
+                      <a:tailEnd type="none" w="med" len="med"/>
+                    </a:lnB>
+                    <a:solidFill>
+                      <a:srgbClr val="1E293B"/>
+                    </a:solidFill>
+                  </a:tcPr>
+                </a:tc>
+              </a:tr>
+              <a:tr h="228600">
+                <a:tc>
+                  <a:txBody>
+                    <a:bodyPr/>
+                    <a:lstStyle/>
+                    <a:p>
+                      <a:pPr indent="0" marL="0">
+                        <a:buNone/>
+                      </a:pPr>
+                      <a:r>
+                        <a:rPr lang="en-US" sz="850" dirty="0">
+                          <a:solidFill>
+                            <a:srgbClr val="F1F5F9"/>
+                          </a:solidFill>
+                          <a:latin typeface="Calibri" pitchFamily="34" charset="0"/>
+                          <a:ea typeface="Calibri" pitchFamily="34" charset="-122"/>
+                          <a:cs typeface="Calibri" pitchFamily="34" charset="-120"/>
+                        </a:rPr>
+                        <a:t>Database</a:t>
+                      </a:r>
+                      <a:endParaRPr lang="en-US" sz="850" dirty="0">
+                        <a:latin typeface="Calibri" charset="0"/>
+                        <a:ea typeface="Calibri" charset="0"/>
+                        <a:cs typeface="Calibri" charset="0"/>
+                      </a:endParaRPr>
+                    </a:p>
+                  </a:txBody>
+                  <a:tcPr marL="91440" marR="91440" marT="45720" marB="45720" anchor="ctr">
+                    <a:lnL w="6350" cap="flat" cmpd="sng" algn="ctr">
+                      <a:solidFill>
+                        <a:srgbClr val="334155"/>
+                      </a:solidFill>
+                      <a:prstDash val="solid"/>
+                      <a:round/>
+                      <a:headEnd type="none" w="med" len="med"/>
+                      <a:tailEnd type="none" w="med" len="med"/>
+                    </a:lnL>
+                    <a:lnR w="6350" cap="flat" cmpd="sng" algn="ctr">
+                      <a:solidFill>
+                        <a:srgbClr val="334155"/>
+                      </a:solidFill>
+                      <a:prstDash val="solid"/>
+                      <a:round/>
+                      <a:headEnd type="none" w="med" len="med"/>
+                      <a:tailEnd type="none" w="med" len="med"/>
+                    </a:lnR>
+                    <a:lnT w="6350" cap="flat" cmpd="sng" algn="ctr">
+                      <a:solidFill>
+                        <a:srgbClr val="334155"/>
+                      </a:solidFill>
+                      <a:prstDash val="solid"/>
+                      <a:round/>
+                      <a:headEnd type="none" w="med" len="med"/>
+                      <a:tailEnd type="none" w="med" len="med"/>
+                    </a:lnT>
+                    <a:lnB w="6350" cap="flat" cmpd="sng" algn="ctr">
+                      <a:solidFill>
+                        <a:srgbClr val="334155"/>
+                      </a:solidFill>
+                      <a:prstDash val="solid"/>
+                      <a:round/>
+                      <a:headEnd type="none" w="med" len="med"/>
+                      <a:tailEnd type="none" w="med" len="med"/>
+                    </a:lnB>
+                    <a:solidFill>
+                      <a:srgbClr val="0F172A"/>
+                    </a:solidFill>
+                  </a:tcPr>
+                </a:tc>
+                <a:tc>
+                  <a:txBody>
+                    <a:bodyPr/>
+                    <a:lstStyle/>
+                    <a:p>
+                      <a:pPr indent="0" marL="0">
+                        <a:buNone/>
+                      </a:pPr>
+                      <a:r>
+                        <a:rPr lang="en-US" sz="850" dirty="0">
+                          <a:solidFill>
+                            <a:srgbClr val="F1F5F9"/>
+                          </a:solidFill>
+                          <a:latin typeface="Calibri" pitchFamily="34" charset="0"/>
+                          <a:ea typeface="Calibri" pitchFamily="34" charset="-122"/>
+                          <a:cs typeface="Calibri" pitchFamily="34" charset="-120"/>
+                        </a:rPr>
+                        <a:t>PostgreSQL JDBC Driver</a:t>
+                      </a:r>
+                      <a:endParaRPr lang="en-US" sz="850" dirty="0">
+                        <a:latin typeface="Calibri" charset="0"/>
+                        <a:ea typeface="Calibri" charset="0"/>
+                        <a:cs typeface="Calibri" charset="0"/>
+                      </a:endParaRPr>
+                    </a:p>
+                  </a:txBody>
+                  <a:tcPr marL="91440" marR="91440" marT="45720" marB="45720" anchor="ctr">
+                    <a:lnL w="6350" cap="flat" cmpd="sng" algn="ctr">
+                      <a:solidFill>
+                        <a:srgbClr val="334155"/>
+                      </a:solidFill>
+                      <a:prstDash val="solid"/>
+                      <a:round/>
+                      <a:headEnd type="none" w="med" len="med"/>
+                      <a:tailEnd type="none" w="med" len="med"/>
+                    </a:lnL>
+                    <a:lnR w="6350" cap="flat" cmpd="sng" algn="ctr">
+                      <a:solidFill>
+                        <a:srgbClr val="334155"/>
+                      </a:solidFill>
+                      <a:prstDash val="solid"/>
+                      <a:round/>
+                      <a:headEnd type="none" w="med" len="med"/>
+                      <a:tailEnd type="none" w="med" len="med"/>
+                    </a:lnR>
+                    <a:lnT w="6350" cap="flat" cmpd="sng" algn="ctr">
+                      <a:solidFill>
+                        <a:srgbClr val="334155"/>
+                      </a:solidFill>
+                      <a:prstDash val="solid"/>
+                      <a:round/>
+                      <a:headEnd type="none" w="med" len="med"/>
+                      <a:tailEnd type="none" w="med" len="med"/>
+                    </a:lnT>
+                    <a:lnB w="6350" cap="flat" cmpd="sng" algn="ctr">
+                      <a:solidFill>
+                        <a:srgbClr val="334155"/>
+                      </a:solidFill>
+                      <a:prstDash val="solid"/>
+                      <a:round/>
+                      <a:headEnd type="none" w="med" len="med"/>
+                      <a:tailEnd type="none" w="med" len="med"/>
+                    </a:lnB>
+                    <a:solidFill>
+                      <a:srgbClr val="0F172A"/>
+                    </a:solidFill>
+                  </a:tcPr>
+                </a:tc>
+                <a:tc>
+                  <a:txBody>
+                    <a:bodyPr/>
+                    <a:lstStyle/>
+                    <a:p>
+                      <a:pPr indent="0" marL="0">
+                        <a:buNone/>
+                      </a:pPr>
+                      <a:r>
+                        <a:rPr lang="en-US" sz="850" dirty="0">
+                          <a:solidFill>
+                            <a:srgbClr val="F1F5F9"/>
+                          </a:solidFill>
+                          <a:latin typeface="Calibri" pitchFamily="34" charset="0"/>
+                          <a:ea typeface="Calibri" pitchFamily="34" charset="-122"/>
+                          <a:cs typeface="Calibri" pitchFamily="34" charset="-120"/>
+                        </a:rPr>
+                        <a:t>—</a:t>
+                      </a:r>
+                      <a:endParaRPr lang="en-US" sz="850" dirty="0">
+                        <a:latin typeface="Calibri" charset="0"/>
+                        <a:ea typeface="Calibri" charset="0"/>
+                        <a:cs typeface="Calibri" charset="0"/>
+                      </a:endParaRPr>
+                    </a:p>
+                  </a:txBody>
+                  <a:tcPr marL="91440" marR="91440" marT="45720" marB="45720" anchor="ctr">
+                    <a:lnL w="6350" cap="flat" cmpd="sng" algn="ctr">
+                      <a:solidFill>
+                        <a:srgbClr val="334155"/>
+                      </a:solidFill>
+                      <a:prstDash val="solid"/>
+                      <a:round/>
+                      <a:headEnd type="none" w="med" len="med"/>
+                      <a:tailEnd type="none" w="med" len="med"/>
+                    </a:lnL>
+                    <a:lnR w="6350" cap="flat" cmpd="sng" algn="ctr">
+                      <a:solidFill>
+                        <a:srgbClr val="334155"/>
+                      </a:solidFill>
+                      <a:prstDash val="solid"/>
+                      <a:round/>
+                      <a:headEnd type="none" w="med" len="med"/>
+                      <a:tailEnd type="none" w="med" len="med"/>
+                    </a:lnR>
+                    <a:lnT w="6350" cap="flat" cmpd="sng" algn="ctr">
+                      <a:solidFill>
+                        <a:srgbClr val="334155"/>
+                      </a:solidFill>
+                      <a:prstDash val="solid"/>
+                      <a:round/>
+                      <a:headEnd type="none" w="med" len="med"/>
+                      <a:tailEnd type="none" w="med" len="med"/>
+                    </a:lnT>
+                    <a:lnB w="6350" cap="flat" cmpd="sng" algn="ctr">
+                      <a:solidFill>
+                        <a:srgbClr val="334155"/>
+                      </a:solidFill>
+                      <a:prstDash val="solid"/>
+                      <a:round/>
+                      <a:headEnd type="none" w="med" len="med"/>
+                      <a:tailEnd type="none" w="med" len="med"/>
+                    </a:lnB>
+                    <a:solidFill>
+                      <a:srgbClr val="0F172A"/>
+                    </a:solidFill>
+                  </a:tcPr>
+                </a:tc>
+                <a:tc>
+                  <a:txBody>
+                    <a:bodyPr/>
+                    <a:lstStyle/>
+                    <a:p>
+                      <a:pPr indent="0" marL="0">
+                        <a:buNone/>
+                      </a:pPr>
+                      <a:r>
+                        <a:rPr lang="en-US" sz="850" dirty="0">
+                          <a:solidFill>
+                            <a:srgbClr val="F1F5F9"/>
+                          </a:solidFill>
+                          <a:latin typeface="Calibri" pitchFamily="34" charset="0"/>
+                          <a:ea typeface="Calibri" pitchFamily="34" charset="-122"/>
+                          <a:cs typeface="Calibri" pitchFamily="34" charset="-120"/>
+                        </a:rPr>
+                        <a:t>Postgres connectivity with schema-per-tenant</a:t>
+                      </a:r>
+                      <a:endParaRPr lang="en-US" sz="850" dirty="0">
+                        <a:latin typeface="Calibri" charset="0"/>
+                        <a:ea typeface="Calibri" charset="0"/>
+                        <a:cs typeface="Calibri" charset="0"/>
+                      </a:endParaRPr>
+                    </a:p>
+                  </a:txBody>
+                  <a:tcPr marL="91440" marR="91440" marT="45720" marB="45720" anchor="ctr">
+                    <a:lnL w="6350" cap="flat" cmpd="sng" algn="ctr">
+                      <a:solidFill>
+                        <a:srgbClr val="334155"/>
+                      </a:solidFill>
+                      <a:prstDash val="solid"/>
+                      <a:round/>
+                      <a:headEnd type="none" w="med" len="med"/>
+                      <a:tailEnd type="none" w="med" len="med"/>
+                    </a:lnL>
+                    <a:lnR w="6350" cap="flat" cmpd="sng" algn="ctr">
+                      <a:solidFill>
+                        <a:srgbClr val="334155"/>
+                      </a:solidFill>
+                      <a:prstDash val="solid"/>
+                      <a:round/>
+                      <a:headEnd type="none" w="med" len="med"/>
+                      <a:tailEnd type="none" w="med" len="med"/>
+                    </a:lnR>
+                    <a:lnT w="6350" cap="flat" cmpd="sng" algn="ctr">
+                      <a:solidFill>
+                        <a:srgbClr val="334155"/>
+                      </a:solidFill>
+                      <a:prstDash val="solid"/>
+                      <a:round/>
+                      <a:headEnd type="none" w="med" len="med"/>
+                      <a:tailEnd type="none" w="med" len="med"/>
+                    </a:lnT>
+                    <a:lnB w="6350" cap="flat" cmpd="sng" algn="ctr">
+                      <a:solidFill>
+                        <a:srgbClr val="334155"/>
+                      </a:solidFill>
+                      <a:prstDash val="solid"/>
+                      <a:round/>
+                      <a:headEnd type="none" w="med" len="med"/>
+                      <a:tailEnd type="none" w="med" len="med"/>
+                    </a:lnB>
+                    <a:solidFill>
+                      <a:srgbClr val="0F172A"/>
+                    </a:solidFill>
+                  </a:tcPr>
+                </a:tc>
+              </a:tr>
+              <a:tr h="228600">
+                <a:tc>
+                  <a:txBody>
+                    <a:bodyPr/>
+                    <a:lstStyle/>
+                    <a:p>
+                      <a:pPr indent="0" marL="0">
+                        <a:buNone/>
+                      </a:pPr>
+                      <a:r>
+                        <a:rPr lang="en-US" sz="850" dirty="0">
+                          <a:solidFill>
+                            <a:srgbClr val="F1F5F9"/>
+                          </a:solidFill>
+                          <a:latin typeface="Calibri" pitchFamily="34" charset="0"/>
+                          <a:ea typeface="Calibri" pitchFamily="34" charset="-122"/>
+                          <a:cs typeface="Calibri" pitchFamily="34" charset="-120"/>
+                        </a:rPr>
+                        <a:t>Database</a:t>
+                      </a:r>
+                      <a:endParaRPr lang="en-US" sz="850" dirty="0">
+                        <a:latin typeface="Calibri" charset="0"/>
+                        <a:ea typeface="Calibri" charset="0"/>
+                        <a:cs typeface="Calibri" charset="0"/>
+                      </a:endParaRPr>
+                    </a:p>
+                  </a:txBody>
+                  <a:tcPr marL="91440" marR="91440" marT="45720" marB="45720" anchor="ctr">
+                    <a:lnL w="6350" cap="flat" cmpd="sng" algn="ctr">
+                      <a:solidFill>
+                        <a:srgbClr val="334155"/>
+                      </a:solidFill>
+                      <a:prstDash val="solid"/>
+                      <a:round/>
+                      <a:headEnd type="none" w="med" len="med"/>
+                      <a:tailEnd type="none" w="med" len="med"/>
+                    </a:lnL>
+                    <a:lnR w="6350" cap="flat" cmpd="sng" algn="ctr">
+                      <a:solidFill>
+                        <a:srgbClr val="334155"/>
+                      </a:solidFill>
+                      <a:prstDash val="solid"/>
+                      <a:round/>
+                      <a:headEnd type="none" w="med" len="med"/>
+                      <a:tailEnd type="none" w="med" len="med"/>
+                    </a:lnR>
+                    <a:lnT w="6350" cap="flat" cmpd="sng" algn="ctr">
+                      <a:solidFill>
+                        <a:srgbClr val="334155"/>
+                      </a:solidFill>
+                      <a:prstDash val="solid"/>
+                      <a:round/>
+                      <a:headEnd type="none" w="med" len="med"/>
+                      <a:tailEnd type="none" w="med" len="med"/>
+                    </a:lnT>
+                    <a:lnB w="6350" cap="flat" cmpd="sng" algn="ctr">
+                      <a:solidFill>
+                        <a:srgbClr val="334155"/>
+                      </a:solidFill>
+                      <a:prstDash val="solid"/>
+                      <a:round/>
+                      <a:headEnd type="none" w="med" len="med"/>
+                      <a:tailEnd type="none" w="med" len="med"/>
+                    </a:lnB>
+                    <a:solidFill>
+                      <a:srgbClr val="1E293B"/>
+                    </a:solidFill>
+                  </a:tcPr>
+                </a:tc>
+                <a:tc>
+                  <a:txBody>
+                    <a:bodyPr/>
+                    <a:lstStyle/>
+                    <a:p>
+                      <a:pPr indent="0" marL="0">
+                        <a:buNone/>
+                      </a:pPr>
+                      <a:r>
+                        <a:rPr lang="en-US" sz="850" dirty="0">
+                          <a:solidFill>
+                            <a:srgbClr val="F1F5F9"/>
+                          </a:solidFill>
+                          <a:latin typeface="Calibri" pitchFamily="34" charset="0"/>
+                          <a:ea typeface="Calibri" pitchFamily="34" charset="-122"/>
+                          <a:cs typeface="Calibri" pitchFamily="34" charset="-120"/>
+                        </a:rPr>
+                        <a:t>HikariCP</a:t>
+                      </a:r>
+                      <a:endParaRPr lang="en-US" sz="850" dirty="0">
+                        <a:latin typeface="Calibri" charset="0"/>
+                        <a:ea typeface="Calibri" charset="0"/>
+                        <a:cs typeface="Calibri" charset="0"/>
+                      </a:endParaRPr>
+                    </a:p>
+                  </a:txBody>
+                  <a:tcPr marL="91440" marR="91440" marT="45720" marB="45720" anchor="ctr">
+                    <a:lnL w="6350" cap="flat" cmpd="sng" algn="ctr">
+                      <a:solidFill>
+                        <a:srgbClr val="334155"/>
+                      </a:solidFill>
+                      <a:prstDash val="solid"/>
+                      <a:round/>
+                      <a:headEnd type="none" w="med" len="med"/>
+                      <a:tailEnd type="none" w="med" len="med"/>
+                    </a:lnL>
+                    <a:lnR w="6350" cap="flat" cmpd="sng" algn="ctr">
+                      <a:solidFill>
+                        <a:srgbClr val="334155"/>
+                      </a:solidFill>
+                      <a:prstDash val="solid"/>
+                      <a:round/>
+                      <a:headEnd type="none" w="med" len="med"/>
+                      <a:tailEnd type="none" w="med" len="med"/>
+                    </a:lnR>
+                    <a:lnT w="6350" cap="flat" cmpd="sng" algn="ctr">
+                      <a:solidFill>
+                        <a:srgbClr val="334155"/>
+                      </a:solidFill>
+                      <a:prstDash val="solid"/>
+                      <a:round/>
+                      <a:headEnd type="none" w="med" len="med"/>
+                      <a:tailEnd type="none" w="med" len="med"/>
+                    </a:lnT>
+                    <a:lnB w="6350" cap="flat" cmpd="sng" algn="ctr">
+                      <a:solidFill>
+                        <a:srgbClr val="334155"/>
+                      </a:solidFill>
+                      <a:prstDash val="solid"/>
+                      <a:round/>
+                      <a:headEnd type="none" w="med" len="med"/>
+                      <a:tailEnd type="none" w="med" len="med"/>
+                    </a:lnB>
+                    <a:solidFill>
+                      <a:srgbClr val="1E293B"/>
+                    </a:solidFill>
+                  </a:tcPr>
+                </a:tc>
+                <a:tc>
+                  <a:txBody>
+                    <a:bodyPr/>
+                    <a:lstStyle/>
+                    <a:p>
+                      <a:pPr indent="0" marL="0">
+                        <a:buNone/>
+                      </a:pPr>
+                      <a:r>
+                        <a:rPr lang="en-US" sz="850" dirty="0">
+                          <a:solidFill>
+                            <a:srgbClr val="F1F5F9"/>
+                          </a:solidFill>
+                          <a:latin typeface="Calibri" pitchFamily="34" charset="0"/>
+                          <a:ea typeface="Calibri" pitchFamily="34" charset="-122"/>
+                          <a:cs typeface="Calibri" pitchFamily="34" charset="-120"/>
+                        </a:rPr>
+                        <a:t>(bundled)</a:t>
+                      </a:r>
+                      <a:endParaRPr lang="en-US" sz="850" dirty="0">
+                        <a:latin typeface="Calibri" charset="0"/>
+                        <a:ea typeface="Calibri" charset="0"/>
+                        <a:cs typeface="Calibri" charset="0"/>
+                      </a:endParaRPr>
+                    </a:p>
+                  </a:txBody>
+                  <a:tcPr marL="91440" marR="91440" marT="45720" marB="45720" anchor="ctr">
+                    <a:lnL w="6350" cap="flat" cmpd="sng" algn="ctr">
+                      <a:solidFill>
+                        <a:srgbClr val="334155"/>
+                      </a:solidFill>
+                      <a:prstDash val="solid"/>
+                      <a:round/>
+                      <a:headEnd type="none" w="med" len="med"/>
+                      <a:tailEnd type="none" w="med" len="med"/>
+                    </a:lnL>
+                    <a:lnR w="6350" cap="flat" cmpd="sng" algn="ctr">
+                      <a:solidFill>
+                        <a:srgbClr val="334155"/>
+                      </a:solidFill>
+                      <a:prstDash val="solid"/>
+                      <a:round/>
+                      <a:headEnd type="none" w="med" len="med"/>
+                      <a:tailEnd type="none" w="med" len="med"/>
+                    </a:lnR>
+                    <a:lnT w="6350" cap="flat" cmpd="sng" algn="ctr">
+                      <a:solidFill>
+                        <a:srgbClr val="334155"/>
+                      </a:solidFill>
+                      <a:prstDash val="solid"/>
+                      <a:round/>
+                      <a:headEnd type="none" w="med" len="med"/>
+                      <a:tailEnd type="none" w="med" len="med"/>
+                    </a:lnT>
+                    <a:lnB w="6350" cap="flat" cmpd="sng" algn="ctr">
+                      <a:solidFill>
+                        <a:srgbClr val="334155"/>
+                      </a:solidFill>
+                      <a:prstDash val="solid"/>
+                      <a:round/>
+                      <a:headEnd type="none" w="med" len="med"/>
+                      <a:tailEnd type="none" w="med" len="med"/>
+                    </a:lnB>
+                    <a:solidFill>
+                      <a:srgbClr val="1E293B"/>
+                    </a:solidFill>
+                  </a:tcPr>
+                </a:tc>
+                <a:tc>
+                  <a:txBody>
+                    <a:bodyPr/>
+                    <a:lstStyle/>
+                    <a:p>
+                      <a:pPr indent="0" marL="0">
+                        <a:buNone/>
+                      </a:pPr>
+                      <a:r>
+                        <a:rPr lang="en-US" sz="850" dirty="0">
+                          <a:solidFill>
+                            <a:srgbClr val="F1F5F9"/>
+                          </a:solidFill>
+                          <a:latin typeface="Calibri" pitchFamily="34" charset="0"/>
+                          <a:ea typeface="Calibri" pitchFamily="34" charset="-122"/>
+                          <a:cs typeface="Calibri" pitchFamily="34" charset="-120"/>
+                        </a:rPr>
+                        <a:t>High-performance JDBC connection pooling</a:t>
+                      </a:r>
+                      <a:endParaRPr lang="en-US" sz="850" dirty="0">
+                        <a:latin typeface="Calibri" charset="0"/>
+                        <a:ea typeface="Calibri" charset="0"/>
+                        <a:cs typeface="Calibri" charset="0"/>
+                      </a:endParaRPr>
+                    </a:p>
+                  </a:txBody>
+                  <a:tcPr marL="91440" marR="91440" marT="45720" marB="45720" anchor="ctr">
+                    <a:lnL w="6350" cap="flat" cmpd="sng" algn="ctr">
+                      <a:solidFill>
+                        <a:srgbClr val="334155"/>
+                      </a:solidFill>
+                      <a:prstDash val="solid"/>
+                      <a:round/>
+                      <a:headEnd type="none" w="med" len="med"/>
+                      <a:tailEnd type="none" w="med" len="med"/>
+                    </a:lnL>
+                    <a:lnR w="6350" cap="flat" cmpd="sng" algn="ctr">
+                      <a:solidFill>
+                        <a:srgbClr val="334155"/>
+                      </a:solidFill>
+                      <a:prstDash val="solid"/>
+                      <a:round/>
+                      <a:headEnd type="none" w="med" len="med"/>
+                      <a:tailEnd type="none" w="med" len="med"/>
+                    </a:lnR>
+                    <a:lnT w="6350" cap="flat" cmpd="sng" algn="ctr">
+                      <a:solidFill>
+                        <a:srgbClr val="334155"/>
+                      </a:solidFill>
+                      <a:prstDash val="solid"/>
+                      <a:round/>
+                      <a:headEnd type="none" w="med" len="med"/>
+                      <a:tailEnd type="none" w="med" len="med"/>
+                    </a:lnT>
+                    <a:lnB w="6350" cap="flat" cmpd="sng" algn="ctr">
+                      <a:solidFill>
+                        <a:srgbClr val="334155"/>
+                      </a:solidFill>
+                      <a:prstDash val="solid"/>
+                      <a:round/>
+                      <a:headEnd type="none" w="med" len="med"/>
+                      <a:tailEnd type="none" w="med" len="med"/>
+                    </a:lnB>
+                    <a:solidFill>
+                      <a:srgbClr val="1E293B"/>
+                    </a:solidFill>
+                  </a:tcPr>
+                </a:tc>
+              </a:tr>
+              <a:tr h="228600">
+                <a:tc>
+                  <a:txBody>
+                    <a:bodyPr/>
+                    <a:lstStyle/>
+                    <a:p>
+                      <a:pPr indent="0" marL="0">
+                        <a:buNone/>
+                      </a:pPr>
+                      <a:r>
+                        <a:rPr lang="en-US" sz="850" dirty="0">
+                          <a:solidFill>
+                            <a:srgbClr val="F1F5F9"/>
+                          </a:solidFill>
+                          <a:latin typeface="Calibri" pitchFamily="34" charset="0"/>
+                          <a:ea typeface="Calibri" pitchFamily="34" charset="-122"/>
+                          <a:cs typeface="Calibri" pitchFamily="34" charset="-120"/>
+                        </a:rPr>
+                        <a:t>ORM</a:t>
+                      </a:r>
+                      <a:endParaRPr lang="en-US" sz="850" dirty="0">
+                        <a:latin typeface="Calibri" charset="0"/>
+                        <a:ea typeface="Calibri" charset="0"/>
+                        <a:cs typeface="Calibri" charset="0"/>
+                      </a:endParaRPr>
+                    </a:p>
+                  </a:txBody>
+                  <a:tcPr marL="91440" marR="91440" marT="45720" marB="45720" anchor="ctr">
+                    <a:lnL w="6350" cap="flat" cmpd="sng" algn="ctr">
+                      <a:solidFill>
+                        <a:srgbClr val="334155"/>
+                      </a:solidFill>
+                      <a:prstDash val="solid"/>
+                      <a:round/>
+                      <a:headEnd type="none" w="med" len="med"/>
+                      <a:tailEnd type="none" w="med" len="med"/>
+                    </a:lnL>
+                    <a:lnR w="6350" cap="flat" cmpd="sng" algn="ctr">
+                      <a:solidFill>
+                        <a:srgbClr val="334155"/>
+                      </a:solidFill>
+                      <a:prstDash val="solid"/>
+                      <a:round/>
+                      <a:headEnd type="none" w="med" len="med"/>
+                      <a:tailEnd type="none" w="med" len="med"/>
+                    </a:lnR>
+                    <a:lnT w="6350" cap="flat" cmpd="sng" algn="ctr">
+                      <a:solidFill>
+                        <a:srgbClr val="334155"/>
+                      </a:solidFill>
+                      <a:prstDash val="solid"/>
+                      <a:round/>
+                      <a:headEnd type="none" w="med" len="med"/>
+                      <a:tailEnd type="none" w="med" len="med"/>
+                    </a:lnT>
+                    <a:lnB w="6350" cap="flat" cmpd="sng" algn="ctr">
+                      <a:solidFill>
+                        <a:srgbClr val="334155"/>
+                      </a:solidFill>
+                      <a:prstDash val="solid"/>
+                      <a:round/>
+                      <a:headEnd type="none" w="med" len="med"/>
+                      <a:tailEnd type="none" w="med" len="med"/>
+                    </a:lnB>
+                    <a:solidFill>
+                      <a:srgbClr val="0F172A"/>
+                    </a:solidFill>
+                  </a:tcPr>
+                </a:tc>
+                <a:tc>
+                  <a:txBody>
+                    <a:bodyPr/>
+                    <a:lstStyle/>
+                    <a:p>
+                      <a:pPr indent="0" marL="0">
+                        <a:buNone/>
+                      </a:pPr>
+                      <a:r>
+                        <a:rPr lang="en-US" sz="850" dirty="0">
+                          <a:solidFill>
+                            <a:srgbClr val="F1F5F9"/>
+                          </a:solidFill>
+                          <a:latin typeface="Calibri" pitchFamily="34" charset="0"/>
+                          <a:ea typeface="Calibri" pitchFamily="34" charset="-122"/>
+                          <a:cs typeface="Calibri" pitchFamily="34" charset="-120"/>
+                        </a:rPr>
+                        <a:t>Hibernate ORM</a:t>
+                      </a:r>
+                      <a:endParaRPr lang="en-US" sz="850" dirty="0">
+                        <a:latin typeface="Calibri" charset="0"/>
+                        <a:ea typeface="Calibri" charset="0"/>
+                        <a:cs typeface="Calibri" charset="0"/>
+                      </a:endParaRPr>
+                    </a:p>
+                  </a:txBody>
+                  <a:tcPr marL="91440" marR="91440" marT="45720" marB="45720" anchor="ctr">
+                    <a:lnL w="6350" cap="flat" cmpd="sng" algn="ctr">
+                      <a:solidFill>
+                        <a:srgbClr val="334155"/>
+                      </a:solidFill>
+                      <a:prstDash val="solid"/>
+                      <a:round/>
+                      <a:headEnd type="none" w="med" len="med"/>
+                      <a:tailEnd type="none" w="med" len="med"/>
+                    </a:lnL>
+                    <a:lnR w="6350" cap="flat" cmpd="sng" algn="ctr">
+                      <a:solidFill>
+                        <a:srgbClr val="334155"/>
+                      </a:solidFill>
+                      <a:prstDash val="solid"/>
+                      <a:round/>
+                      <a:headEnd type="none" w="med" len="med"/>
+                      <a:tailEnd type="none" w="med" len="med"/>
+                    </a:lnR>
+                    <a:lnT w="6350" cap="flat" cmpd="sng" algn="ctr">
+                      <a:solidFill>
+                        <a:srgbClr val="334155"/>
+                      </a:solidFill>
+                      <a:prstDash val="solid"/>
+                      <a:round/>
+                      <a:headEnd type="none" w="med" len="med"/>
+                      <a:tailEnd type="none" w="med" len="med"/>
+                    </a:lnT>
+                    <a:lnB w="6350" cap="flat" cmpd="sng" algn="ctr">
+                      <a:solidFill>
+                        <a:srgbClr val="334155"/>
+                      </a:solidFill>
+                      <a:prstDash val="solid"/>
+                      <a:round/>
+                      <a:headEnd type="none" w="med" len="med"/>
+                      <a:tailEnd type="none" w="med" len="med"/>
+                    </a:lnB>
+                    <a:solidFill>
+                      <a:srgbClr val="0F172A"/>
+                    </a:solidFill>
+                  </a:tcPr>
+                </a:tc>
+                <a:tc>
+                  <a:txBody>
+                    <a:bodyPr/>
+                    <a:lstStyle/>
+                    <a:p>
+                      <a:pPr indent="0" marL="0">
+                        <a:buNone/>
+                      </a:pPr>
+                      <a:r>
+                        <a:rPr lang="en-US" sz="850" dirty="0">
+                          <a:solidFill>
+                            <a:srgbClr val="F1F5F9"/>
+                          </a:solidFill>
+                          <a:latin typeface="Calibri" pitchFamily="34" charset="0"/>
+                          <a:ea typeface="Calibri" pitchFamily="34" charset="-122"/>
+                          <a:cs typeface="Calibri" pitchFamily="34" charset="-120"/>
+                        </a:rPr>
+                        <a:t>6.6.49</a:t>
+                      </a:r>
+                      <a:endParaRPr lang="en-US" sz="850" dirty="0">
+                        <a:latin typeface="Calibri" charset="0"/>
+                        <a:ea typeface="Calibri" charset="0"/>
+                        <a:cs typeface="Calibri" charset="0"/>
+                      </a:endParaRPr>
+                    </a:p>
+                  </a:txBody>
+                  <a:tcPr marL="91440" marR="91440" marT="45720" marB="45720" anchor="ctr">
+                    <a:lnL w="6350" cap="flat" cmpd="sng" algn="ctr">
+                      <a:solidFill>
+                        <a:srgbClr val="334155"/>
+                      </a:solidFill>
+                      <a:prstDash val="solid"/>
+                      <a:round/>
+                      <a:headEnd type="none" w="med" len="med"/>
+                      <a:tailEnd type="none" w="med" len="med"/>
+                    </a:lnL>
+                    <a:lnR w="6350" cap="flat" cmpd="sng" algn="ctr">
+                      <a:solidFill>
+                        <a:srgbClr val="334155"/>
+                      </a:solidFill>
+                      <a:prstDash val="solid"/>
+                      <a:round/>
+                      <a:headEnd type="none" w="med" len="med"/>
+                      <a:tailEnd type="none" w="med" len="med"/>
+                    </a:lnR>
+                    <a:lnT w="6350" cap="flat" cmpd="sng" algn="ctr">
+                      <a:solidFill>
+                        <a:srgbClr val="334155"/>
+                      </a:solidFill>
+                      <a:prstDash val="solid"/>
+                      <a:round/>
+                      <a:headEnd type="none" w="med" len="med"/>
+                      <a:tailEnd type="none" w="med" len="med"/>
+                    </a:lnT>
+                    <a:lnB w="6350" cap="flat" cmpd="sng" algn="ctr">
+                      <a:solidFill>
+                        <a:srgbClr val="334155"/>
+                      </a:solidFill>
+                      <a:prstDash val="solid"/>
+                      <a:round/>
+                      <a:headEnd type="none" w="med" len="med"/>
+                      <a:tailEnd type="none" w="med" len="med"/>
+                    </a:lnB>
+                    <a:solidFill>
+                      <a:srgbClr val="0F172A"/>
+                    </a:solidFill>
+                  </a:tcPr>
+                </a:tc>
+                <a:tc>
+                  <a:txBody>
+                    <a:bodyPr/>
+                    <a:lstStyle/>
+                    <a:p>
+                      <a:pPr indent="0" marL="0">
+                        <a:buNone/>
+                      </a:pPr>
+                      <a:r>
+                        <a:rPr lang="en-US" sz="850" dirty="0">
+                          <a:solidFill>
+                            <a:srgbClr val="F1F5F9"/>
+                          </a:solidFill>
+                          <a:latin typeface="Calibri" pitchFamily="34" charset="0"/>
+                          <a:ea typeface="Calibri" pitchFamily="34" charset="-122"/>
+                          <a:cs typeface="Calibri" pitchFamily="34" charset="-120"/>
+                        </a:rPr>
+                        <a:t>Entity management, schema auto-detection</a:t>
+                      </a:r>
+                      <a:endParaRPr lang="en-US" sz="850" dirty="0">
+                        <a:latin typeface="Calibri" charset="0"/>
+                        <a:ea typeface="Calibri" charset="0"/>
+                        <a:cs typeface="Calibri" charset="0"/>
+                      </a:endParaRPr>
+                    </a:p>
+                  </a:txBody>
+                  <a:tcPr marL="91440" marR="91440" marT="45720" marB="45720" anchor="ctr">
+                    <a:lnL w="6350" cap="flat" cmpd="sng" algn="ctr">
+                      <a:solidFill>
+                        <a:srgbClr val="334155"/>
+                      </a:solidFill>
+                      <a:prstDash val="solid"/>
+                      <a:round/>
+                      <a:headEnd type="none" w="med" len="med"/>
+                      <a:tailEnd type="none" w="med" len="med"/>
+                    </a:lnL>
+                    <a:lnR w="6350" cap="flat" cmpd="sng" algn="ctr">
+                      <a:solidFill>
+                        <a:srgbClr val="334155"/>
+                      </a:solidFill>
+                      <a:prstDash val="solid"/>
+                      <a:round/>
+                      <a:headEnd type="none" w="med" len="med"/>
+                      <a:tailEnd type="none" w="med" len="med"/>
+                    </a:lnR>
+                    <a:lnT w="6350" cap="flat" cmpd="sng" algn="ctr">
+                      <a:solidFill>
+                        <a:srgbClr val="334155"/>
+                      </a:solidFill>
+                      <a:prstDash val="solid"/>
+                      <a:round/>
+                      <a:headEnd type="none" w="med" len="med"/>
+                      <a:tailEnd type="none" w="med" len="med"/>
+                    </a:lnT>
+                    <a:lnB w="6350" cap="flat" cmpd="sng" algn="ctr">
+                      <a:solidFill>
+                        <a:srgbClr val="334155"/>
+                      </a:solidFill>
+                      <a:prstDash val="solid"/>
+                      <a:round/>
+                      <a:headEnd type="none" w="med" len="med"/>
+                      <a:tailEnd type="none" w="med" len="med"/>
+                    </a:lnB>
+                    <a:solidFill>
+                      <a:srgbClr val="0F172A"/>
+                    </a:solidFill>
+                  </a:tcPr>
+                </a:tc>
+              </a:tr>
+              <a:tr h="228600">
+                <a:tc>
+                  <a:txBody>
+                    <a:bodyPr/>
+                    <a:lstStyle/>
+                    <a:p>
+                      <a:pPr indent="0" marL="0">
+                        <a:buNone/>
+                      </a:pPr>
+                      <a:r>
+                        <a:rPr lang="en-US" sz="850" dirty="0">
+                          <a:solidFill>
+                            <a:srgbClr val="F1F5F9"/>
+                          </a:solidFill>
+                          <a:latin typeface="Calibri" pitchFamily="34" charset="0"/>
+                          <a:ea typeface="Calibri" pitchFamily="34" charset="-122"/>
+                          <a:cs typeface="Calibri" pitchFamily="34" charset="-120"/>
+                        </a:rPr>
+                        <a:t>JSON</a:t>
+                      </a:r>
+                      <a:endParaRPr lang="en-US" sz="850" dirty="0">
+                        <a:latin typeface="Calibri" charset="0"/>
+                        <a:ea typeface="Calibri" charset="0"/>
+                        <a:cs typeface="Calibri" charset="0"/>
+                      </a:endParaRPr>
+                    </a:p>
+                  </a:txBody>
+                  <a:tcPr marL="91440" marR="91440" marT="45720" marB="45720" anchor="ctr">
+                    <a:lnL w="6350" cap="flat" cmpd="sng" algn="ctr">
+                      <a:solidFill>
+                        <a:srgbClr val="334155"/>
+                      </a:solidFill>
+                      <a:prstDash val="solid"/>
+                      <a:round/>
+                      <a:headEnd type="none" w="med" len="med"/>
+                      <a:tailEnd type="none" w="med" len="med"/>
+                    </a:lnL>
+                    <a:lnR w="6350" cap="flat" cmpd="sng" algn="ctr">
+                      <a:solidFill>
+                        <a:srgbClr val="334155"/>
+                      </a:solidFill>
+                      <a:prstDash val="solid"/>
+                      <a:round/>
+                      <a:headEnd type="none" w="med" len="med"/>
+                      <a:tailEnd type="none" w="med" len="med"/>
+                    </a:lnR>
+                    <a:lnT w="6350" cap="flat" cmpd="sng" algn="ctr">
+                      <a:solidFill>
+                        <a:srgbClr val="334155"/>
+                      </a:solidFill>
+                      <a:prstDash val="solid"/>
+                      <a:round/>
+                      <a:headEnd type="none" w="med" len="med"/>
+                      <a:tailEnd type="none" w="med" len="med"/>
+                    </a:lnT>
+                    <a:lnB w="6350" cap="flat" cmpd="sng" algn="ctr">
+                      <a:solidFill>
+                        <a:srgbClr val="334155"/>
+                      </a:solidFill>
+                      <a:prstDash val="solid"/>
+                      <a:round/>
+                      <a:headEnd type="none" w="med" len="med"/>
+                      <a:tailEnd type="none" w="med" len="med"/>
+                    </a:lnB>
+                    <a:solidFill>
+                      <a:srgbClr val="1E293B"/>
+                    </a:solidFill>
+                  </a:tcPr>
+                </a:tc>
+                <a:tc>
+                  <a:txBody>
+                    <a:bodyPr/>
+                    <a:lstStyle/>
+                    <a:p>
+                      <a:pPr indent="0" marL="0">
+                        <a:buNone/>
+                      </a:pPr>
+                      <a:r>
+                        <a:rPr lang="en-US" sz="850" dirty="0">
+                          <a:solidFill>
+                            <a:srgbClr val="F1F5F9"/>
+                          </a:solidFill>
+                          <a:latin typeface="Calibri" pitchFamily="34" charset="0"/>
+                          <a:ea typeface="Calibri" pitchFamily="34" charset="-122"/>
+                          <a:cs typeface="Calibri" pitchFamily="34" charset="-120"/>
+                        </a:rPr>
+                        <a:t>Jackson</a:t>
+                      </a:r>
+                      <a:endParaRPr lang="en-US" sz="850" dirty="0">
+                        <a:latin typeface="Calibri" charset="0"/>
+                        <a:ea typeface="Calibri" charset="0"/>
+                        <a:cs typeface="Calibri" charset="0"/>
+                      </a:endParaRPr>
+                    </a:p>
+                  </a:txBody>
+                  <a:tcPr marL="91440" marR="91440" marT="45720" marB="45720" anchor="ctr">
+                    <a:lnL w="6350" cap="flat" cmpd="sng" algn="ctr">
+                      <a:solidFill>
+                        <a:srgbClr val="334155"/>
+                      </a:solidFill>
+                      <a:prstDash val="solid"/>
+                      <a:round/>
+                      <a:headEnd type="none" w="med" len="med"/>
+                      <a:tailEnd type="none" w="med" len="med"/>
+                    </a:lnL>
+                    <a:lnR w="6350" cap="flat" cmpd="sng" algn="ctr">
+                      <a:solidFill>
+                        <a:srgbClr val="334155"/>
+                      </a:solidFill>
+                      <a:prstDash val="solid"/>
+                      <a:round/>
+                      <a:headEnd type="none" w="med" len="med"/>
+                      <a:tailEnd type="none" w="med" len="med"/>
+                    </a:lnR>
+                    <a:lnT w="6350" cap="flat" cmpd="sng" algn="ctr">
+                      <a:solidFill>
+                        <a:srgbClr val="334155"/>
+                      </a:solidFill>
+                      <a:prstDash val="solid"/>
+                      <a:round/>
+                      <a:headEnd type="none" w="med" len="med"/>
+                      <a:tailEnd type="none" w="med" len="med"/>
+                    </a:lnT>
+                    <a:lnB w="6350" cap="flat" cmpd="sng" algn="ctr">
+                      <a:solidFill>
+                        <a:srgbClr val="334155"/>
+                      </a:solidFill>
+                      <a:prstDash val="solid"/>
+                      <a:round/>
+                      <a:headEnd type="none" w="med" len="med"/>
+                      <a:tailEnd type="none" w="med" len="med"/>
+                    </a:lnB>
+                    <a:solidFill>
+                      <a:srgbClr val="1E293B"/>
+                    </a:solidFill>
+                  </a:tcPr>
+                </a:tc>
+                <a:tc>
+                  <a:txBody>
+                    <a:bodyPr/>
+                    <a:lstStyle/>
+                    <a:p>
+                      <a:pPr indent="0" marL="0">
+                        <a:buNone/>
+                      </a:pPr>
+                      <a:r>
+                        <a:rPr lang="en-US" sz="850" dirty="0">
+                          <a:solidFill>
+                            <a:srgbClr val="F1F5F9"/>
+                          </a:solidFill>
+                          <a:latin typeface="Calibri" pitchFamily="34" charset="0"/>
+                          <a:ea typeface="Calibri" pitchFamily="34" charset="-122"/>
+                          <a:cs typeface="Calibri" pitchFamily="34" charset="-120"/>
+                        </a:rPr>
+                        <a:t>(bundled)</a:t>
+                      </a:r>
+                      <a:endParaRPr lang="en-US" sz="850" dirty="0">
+                        <a:latin typeface="Calibri" charset="0"/>
+                        <a:ea typeface="Calibri" charset="0"/>
+                        <a:cs typeface="Calibri" charset="0"/>
+                      </a:endParaRPr>
+                    </a:p>
+                  </a:txBody>
+                  <a:tcPr marL="91440" marR="91440" marT="45720" marB="45720" anchor="ctr">
+                    <a:lnL w="6350" cap="flat" cmpd="sng" algn="ctr">
+                      <a:solidFill>
+                        <a:srgbClr val="334155"/>
+                      </a:solidFill>
+                      <a:prstDash val="solid"/>
+                      <a:round/>
+                      <a:headEnd type="none" w="med" len="med"/>
+                      <a:tailEnd type="none" w="med" len="med"/>
+                    </a:lnL>
+                    <a:lnR w="6350" cap="flat" cmpd="sng" algn="ctr">
+                      <a:solidFill>
+                        <a:srgbClr val="334155"/>
+                      </a:solidFill>
+                      <a:prstDash val="solid"/>
+                      <a:round/>
+                      <a:headEnd type="none" w="med" len="med"/>
+                      <a:tailEnd type="none" w="med" len="med"/>
+                    </a:lnR>
+                    <a:lnT w="6350" cap="flat" cmpd="sng" algn="ctr">
+                      <a:solidFill>
+                        <a:srgbClr val="334155"/>
+                      </a:solidFill>
+                      <a:prstDash val="solid"/>
+                      <a:round/>
+                      <a:headEnd type="none" w="med" len="med"/>
+                      <a:tailEnd type="none" w="med" len="med"/>
+                    </a:lnT>
+                    <a:lnB w="6350" cap="flat" cmpd="sng" algn="ctr">
+                      <a:solidFill>
+                        <a:srgbClr val="334155"/>
+                      </a:solidFill>
+                      <a:prstDash val="solid"/>
+                      <a:round/>
+                      <a:headEnd type="none" w="med" len="med"/>
+                      <a:tailEnd type="none" w="med" len="med"/>
+                    </a:lnB>
+                    <a:solidFill>
+                      <a:srgbClr val="1E293B"/>
+                    </a:solidFill>
+                  </a:tcPr>
+                </a:tc>
+                <a:tc>
+                  <a:txBody>
+                    <a:bodyPr/>
+                    <a:lstStyle/>
+                    <a:p>
+                      <a:pPr indent="0" marL="0">
+                        <a:buNone/>
+                      </a:pPr>
+                      <a:r>
+                        <a:rPr lang="en-US" sz="850" dirty="0">
+                          <a:solidFill>
+                            <a:srgbClr val="F1F5F9"/>
+                          </a:solidFill>
+                          <a:latin typeface="Calibri" pitchFamily="34" charset="0"/>
+                          <a:ea typeface="Calibri" pitchFamily="34" charset="-122"/>
+                          <a:cs typeface="Calibri" pitchFamily="34" charset="-120"/>
+                        </a:rPr>
+                        <a:t>JSON serialization and deserialization</a:t>
+                      </a:r>
+                      <a:endParaRPr lang="en-US" sz="850" dirty="0">
+                        <a:latin typeface="Calibri" charset="0"/>
+                        <a:ea typeface="Calibri" charset="0"/>
+                        <a:cs typeface="Calibri" charset="0"/>
+                      </a:endParaRPr>
+                    </a:p>
+                  </a:txBody>
+                  <a:tcPr marL="91440" marR="91440" marT="45720" marB="45720" anchor="ctr">
+                    <a:lnL w="6350" cap="flat" cmpd="sng" algn="ctr">
+                      <a:solidFill>
+                        <a:srgbClr val="334155"/>
+                      </a:solidFill>
+                      <a:prstDash val="solid"/>
+                      <a:round/>
+                      <a:headEnd type="none" w="med" len="med"/>
+                      <a:tailEnd type="none" w="med" len="med"/>
+                    </a:lnL>
+                    <a:lnR w="6350" cap="flat" cmpd="sng" algn="ctr">
+                      <a:solidFill>
+                        <a:srgbClr val="334155"/>
+                      </a:solidFill>
+                      <a:prstDash val="solid"/>
+                      <a:round/>
+                      <a:headEnd type="none" w="med" len="med"/>
+                      <a:tailEnd type="none" w="med" len="med"/>
+                    </a:lnR>
+                    <a:lnT w="6350" cap="flat" cmpd="sng" algn="ctr">
+                      <a:solidFill>
+                        <a:srgbClr val="334155"/>
+                      </a:solidFill>
+                      <a:prstDash val="solid"/>
+                      <a:round/>
+                      <a:headEnd type="none" w="med" len="med"/>
+                      <a:tailEnd type="none" w="med" len="med"/>
+                    </a:lnT>
+                    <a:lnB w="6350" cap="flat" cmpd="sng" algn="ctr">
+                      <a:solidFill>
+                        <a:srgbClr val="334155"/>
+                      </a:solidFill>
+                      <a:prstDash val="solid"/>
+                      <a:round/>
+                      <a:headEnd type="none" w="med" len="med"/>
+                      <a:tailEnd type="none" w="med" len="med"/>
+                    </a:lnB>
+                    <a:solidFill>
+                      <a:srgbClr val="1E293B"/>
+                    </a:solidFill>
+                  </a:tcPr>
+                </a:tc>
+              </a:tr>
+              <a:tr h="228600">
+                <a:tc>
+                  <a:txBody>
+                    <a:bodyPr/>
+                    <a:lstStyle/>
+                    <a:p>
+                      <a:pPr indent="0" marL="0">
+                        <a:buNone/>
+                      </a:pPr>
+                      <a:r>
+                        <a:rPr lang="en-US" sz="850" dirty="0">
+                          <a:solidFill>
+                            <a:srgbClr val="F1F5F9"/>
+                          </a:solidFill>
+                          <a:latin typeface="Calibri" pitchFamily="34" charset="0"/>
+                          <a:ea typeface="Calibri" pitchFamily="34" charset="-122"/>
+                          <a:cs typeface="Calibri" pitchFamily="34" charset="-120"/>
+                        </a:rPr>
+                        <a:t>Frontend</a:t>
+                      </a:r>
+                      <a:endParaRPr lang="en-US" sz="850" dirty="0">
+                        <a:latin typeface="Calibri" charset="0"/>
+                        <a:ea typeface="Calibri" charset="0"/>
+                        <a:cs typeface="Calibri" charset="0"/>
+                      </a:endParaRPr>
+                    </a:p>
+                  </a:txBody>
+                  <a:tcPr marL="91440" marR="91440" marT="45720" marB="45720" anchor="ctr">
+                    <a:lnL w="6350" cap="flat" cmpd="sng" algn="ctr">
+                      <a:solidFill>
+                        <a:srgbClr val="334155"/>
+                      </a:solidFill>
+                      <a:prstDash val="solid"/>
+                      <a:round/>
+                      <a:headEnd type="none" w="med" len="med"/>
+                      <a:tailEnd type="none" w="med" len="med"/>
+                    </a:lnL>
+                    <a:lnR w="6350" cap="flat" cmpd="sng" algn="ctr">
+                      <a:solidFill>
+                        <a:srgbClr val="334155"/>
+                      </a:solidFill>
+                      <a:prstDash val="solid"/>
+                      <a:round/>
+                      <a:headEnd type="none" w="med" len="med"/>
+                      <a:tailEnd type="none" w="med" len="med"/>
+                    </a:lnR>
+                    <a:lnT w="6350" cap="flat" cmpd="sng" algn="ctr">
+                      <a:solidFill>
+                        <a:srgbClr val="334155"/>
+                      </a:solidFill>
+                      <a:prstDash val="solid"/>
+                      <a:round/>
+                      <a:headEnd type="none" w="med" len="med"/>
+                      <a:tailEnd type="none" w="med" len="med"/>
+                    </a:lnT>
+                    <a:lnB w="6350" cap="flat" cmpd="sng" algn="ctr">
+                      <a:solidFill>
+                        <a:srgbClr val="334155"/>
+                      </a:solidFill>
+                      <a:prstDash val="solid"/>
+                      <a:round/>
+                      <a:headEnd type="none" w="med" len="med"/>
+                      <a:tailEnd type="none" w="med" len="med"/>
+                    </a:lnB>
+                    <a:solidFill>
+                      <a:srgbClr val="0F172A"/>
+                    </a:solidFill>
+                  </a:tcPr>
+                </a:tc>
+                <a:tc>
+                  <a:txBody>
+                    <a:bodyPr/>
+                    <a:lstStyle/>
+                    <a:p>
+                      <a:pPr indent="0" marL="0">
+                        <a:buNone/>
+                      </a:pPr>
+                      <a:r>
+                        <a:rPr lang="en-US" sz="850" dirty="0">
+                          <a:solidFill>
+                            <a:srgbClr val="F1F5F9"/>
+                          </a:solidFill>
+                          <a:latin typeface="Calibri" pitchFamily="34" charset="0"/>
+                          <a:ea typeface="Calibri" pitchFamily="34" charset="-122"/>
+                          <a:cs typeface="Calibri" pitchFamily="34" charset="-120"/>
+                        </a:rPr>
+                        <a:t>Lucide Icons</a:t>
+                      </a:r>
+                      <a:endParaRPr lang="en-US" sz="850" dirty="0">
+                        <a:latin typeface="Calibri" charset="0"/>
+                        <a:ea typeface="Calibri" charset="0"/>
+                        <a:cs typeface="Calibri" charset="0"/>
+                      </a:endParaRPr>
+                    </a:p>
+                  </a:txBody>
+                  <a:tcPr marL="91440" marR="91440" marT="45720" marB="45720" anchor="ctr">
+                    <a:lnL w="6350" cap="flat" cmpd="sng" algn="ctr">
+                      <a:solidFill>
+                        <a:srgbClr val="334155"/>
+                      </a:solidFill>
+                      <a:prstDash val="solid"/>
+                      <a:round/>
+                      <a:headEnd type="none" w="med" len="med"/>
+                      <a:tailEnd type="none" w="med" len="med"/>
+                    </a:lnL>
+                    <a:lnR w="6350" cap="flat" cmpd="sng" algn="ctr">
+                      <a:solidFill>
+                        <a:srgbClr val="334155"/>
+                      </a:solidFill>
+                      <a:prstDash val="solid"/>
+                      <a:round/>
+                      <a:headEnd type="none" w="med" len="med"/>
+                      <a:tailEnd type="none" w="med" len="med"/>
+                    </a:lnR>
+                    <a:lnT w="6350" cap="flat" cmpd="sng" algn="ctr">
+                      <a:solidFill>
+                        <a:srgbClr val="334155"/>
+                      </a:solidFill>
+                      <a:prstDash val="solid"/>
+                      <a:round/>
+                      <a:headEnd type="none" w="med" len="med"/>
+                      <a:tailEnd type="none" w="med" len="med"/>
+                    </a:lnT>
+                    <a:lnB w="6350" cap="flat" cmpd="sng" algn="ctr">
+                      <a:solidFill>
+                        <a:srgbClr val="334155"/>
+                      </a:solidFill>
+                      <a:prstDash val="solid"/>
+                      <a:round/>
+                      <a:headEnd type="none" w="med" len="med"/>
+                      <a:tailEnd type="none" w="med" len="med"/>
+                    </a:lnB>
+                    <a:solidFill>
+                      <a:srgbClr val="0F172A"/>
+                    </a:solidFill>
+                  </a:tcPr>
+                </a:tc>
+                <a:tc>
+                  <a:txBody>
+                    <a:bodyPr/>
+                    <a:lstStyle/>
+                    <a:p>
+                      <a:pPr indent="0" marL="0">
+                        <a:buNone/>
+                      </a:pPr>
+                      <a:r>
+                        <a:rPr lang="en-US" sz="850" dirty="0">
+                          <a:solidFill>
+                            <a:srgbClr val="F1F5F9"/>
+                          </a:solidFill>
+                          <a:latin typeface="Calibri" pitchFamily="34" charset="0"/>
+                          <a:ea typeface="Calibri" pitchFamily="34" charset="-122"/>
+                          <a:cs typeface="Calibri" pitchFamily="34" charset="-120"/>
+                        </a:rPr>
+                        <a:t>(CDN)</a:t>
+                      </a:r>
+                      <a:endParaRPr lang="en-US" sz="850" dirty="0">
+                        <a:latin typeface="Calibri" charset="0"/>
+                        <a:ea typeface="Calibri" charset="0"/>
+                        <a:cs typeface="Calibri" charset="0"/>
+                      </a:endParaRPr>
+                    </a:p>
+                  </a:txBody>
+                  <a:tcPr marL="91440" marR="91440" marT="45720" marB="45720" anchor="ctr">
+                    <a:lnL w="6350" cap="flat" cmpd="sng" algn="ctr">
+                      <a:solidFill>
+                        <a:srgbClr val="334155"/>
+                      </a:solidFill>
+                      <a:prstDash val="solid"/>
+                      <a:round/>
+                      <a:headEnd type="none" w="med" len="med"/>
+                      <a:tailEnd type="none" w="med" len="med"/>
+                    </a:lnL>
+                    <a:lnR w="6350" cap="flat" cmpd="sng" algn="ctr">
+                      <a:solidFill>
+                        <a:srgbClr val="334155"/>
+                      </a:solidFill>
+                      <a:prstDash val="solid"/>
+                      <a:round/>
+                      <a:headEnd type="none" w="med" len="med"/>
+                      <a:tailEnd type="none" w="med" len="med"/>
+                    </a:lnR>
+                    <a:lnT w="6350" cap="flat" cmpd="sng" algn="ctr">
+                      <a:solidFill>
+                        <a:srgbClr val="334155"/>
+                      </a:solidFill>
+                      <a:prstDash val="solid"/>
+                      <a:round/>
+                      <a:headEnd type="none" w="med" len="med"/>
+                      <a:tailEnd type="none" w="med" len="med"/>
+                    </a:lnT>
+                    <a:lnB w="6350" cap="flat" cmpd="sng" algn="ctr">
+                      <a:solidFill>
+                        <a:srgbClr val="334155"/>
+                      </a:solidFill>
+                      <a:prstDash val="solid"/>
+                      <a:round/>
+                      <a:headEnd type="none" w="med" len="med"/>
+                      <a:tailEnd type="none" w="med" len="med"/>
+                    </a:lnB>
+                    <a:solidFill>
+                      <a:srgbClr val="0F172A"/>
+                    </a:solidFill>
+                  </a:tcPr>
+                </a:tc>
+                <a:tc>
+                  <a:txBody>
+                    <a:bodyPr/>
+                    <a:lstStyle/>
+                    <a:p>
+                      <a:pPr indent="0" marL="0">
+                        <a:buNone/>
+                      </a:pPr>
+                      <a:r>
+                        <a:rPr lang="en-US" sz="850" dirty="0">
+                          <a:solidFill>
+                            <a:srgbClr val="F1F5F9"/>
+                          </a:solidFill>
+                          <a:latin typeface="Calibri" pitchFamily="34" charset="0"/>
+                          <a:ea typeface="Calibri" pitchFamily="34" charset="-122"/>
+                          <a:cs typeface="Calibri" pitchFamily="34" charset="-120"/>
+                        </a:rPr>
+                        <a:t>Icon library for the user interface</a:t>
+                      </a:r>
+                      <a:endParaRPr lang="en-US" sz="850" dirty="0">
+                        <a:latin typeface="Calibri" charset="0"/>
+                        <a:ea typeface="Calibri" charset="0"/>
+                        <a:cs typeface="Calibri" charset="0"/>
+                      </a:endParaRPr>
+                    </a:p>
+                  </a:txBody>
+                  <a:tcPr marL="91440" marR="91440" marT="45720" marB="45720" anchor="ctr">
+                    <a:lnL w="6350" cap="flat" cmpd="sng" algn="ctr">
+                      <a:solidFill>
+                        <a:srgbClr val="334155"/>
+                      </a:solidFill>
+                      <a:prstDash val="solid"/>
+                      <a:round/>
+                      <a:headEnd type="none" w="med" len="med"/>
+                      <a:tailEnd type="none" w="med" len="med"/>
+                    </a:lnL>
+                    <a:lnR w="6350" cap="flat" cmpd="sng" algn="ctr">
+                      <a:solidFill>
+                        <a:srgbClr val="334155"/>
+                      </a:solidFill>
+                      <a:prstDash val="solid"/>
+                      <a:round/>
+                      <a:headEnd type="none" w="med" len="med"/>
+                      <a:tailEnd type="none" w="med" len="med"/>
+                    </a:lnR>
+                    <a:lnT w="6350" cap="flat" cmpd="sng" algn="ctr">
+                      <a:solidFill>
+                        <a:srgbClr val="334155"/>
+                      </a:solidFill>
+                      <a:prstDash val="solid"/>
+                      <a:round/>
+                      <a:headEnd type="none" w="med" len="med"/>
+                      <a:tailEnd type="none" w="med" len="med"/>
+                    </a:lnT>
+                    <a:lnB w="6350" cap="flat" cmpd="sng" algn="ctr">
+                      <a:solidFill>
+                        <a:srgbClr val="334155"/>
+                      </a:solidFill>
+                      <a:prstDash val="solid"/>
+                      <a:round/>
+                      <a:headEnd type="none" w="med" len="med"/>
+                      <a:tailEnd type="none" w="med" len="med"/>
+                    </a:lnB>
+                    <a:solidFill>
+                      <a:srgbClr val="0F172A"/>
+                    </a:solidFill>
+                  </a:tcPr>
+                </a:tc>
+              </a:tr>
+              <a:tr h="228600">
+                <a:tc>
+                  <a:txBody>
+                    <a:bodyPr/>
+                    <a:lstStyle/>
+                    <a:p>
+                      <a:pPr indent="0" marL="0">
+                        <a:buNone/>
+                      </a:pPr>
+                      <a:r>
+                        <a:rPr lang="en-US" sz="850" dirty="0">
+                          <a:solidFill>
+                            <a:srgbClr val="F1F5F9"/>
+                          </a:solidFill>
+                          <a:latin typeface="Calibri" pitchFamily="34" charset="0"/>
+                          <a:ea typeface="Calibri" pitchFamily="34" charset="-122"/>
+                          <a:cs typeface="Calibri" pitchFamily="34" charset="-120"/>
+                        </a:rPr>
+                        <a:t>Auth</a:t>
+                      </a:r>
+                      <a:endParaRPr lang="en-US" sz="850" dirty="0">
+                        <a:latin typeface="Calibri" charset="0"/>
+                        <a:ea typeface="Calibri" charset="0"/>
+                        <a:cs typeface="Calibri" charset="0"/>
+                      </a:endParaRPr>
+                    </a:p>
+                  </a:txBody>
+                  <a:tcPr marL="91440" marR="91440" marT="45720" marB="45720" anchor="ctr">
+                    <a:lnL w="6350" cap="flat" cmpd="sng" algn="ctr">
+                      <a:solidFill>
+                        <a:srgbClr val="334155"/>
+                      </a:solidFill>
+                      <a:prstDash val="solid"/>
+                      <a:round/>
+                      <a:headEnd type="none" w="med" len="med"/>
+                      <a:tailEnd type="none" w="med" len="med"/>
+                    </a:lnL>
+                    <a:lnR w="6350" cap="flat" cmpd="sng" algn="ctr">
+                      <a:solidFill>
+                        <a:srgbClr val="334155"/>
+                      </a:solidFill>
+                      <a:prstDash val="solid"/>
+                      <a:round/>
+                      <a:headEnd type="none" w="med" len="med"/>
+                      <a:tailEnd type="none" w="med" len="med"/>
+                    </a:lnR>
+                    <a:lnT w="6350" cap="flat" cmpd="sng" algn="ctr">
+                      <a:solidFill>
+                        <a:srgbClr val="334155"/>
+                      </a:solidFill>
+                      <a:prstDash val="solid"/>
+                      <a:round/>
+                      <a:headEnd type="none" w="med" len="med"/>
+                      <a:tailEnd type="none" w="med" len="med"/>
+                    </a:lnT>
+                    <a:lnB w="6350" cap="flat" cmpd="sng" algn="ctr">
+                      <a:solidFill>
+                        <a:srgbClr val="334155"/>
+                      </a:solidFill>
+                      <a:prstDash val="solid"/>
+                      <a:round/>
+                      <a:headEnd type="none" w="med" len="med"/>
+                      <a:tailEnd type="none" w="med" len="med"/>
+                    </a:lnB>
+                    <a:solidFill>
+                      <a:srgbClr val="1E293B"/>
+                    </a:solidFill>
+                  </a:tcPr>
+                </a:tc>
+                <a:tc>
+                  <a:txBody>
+                    <a:bodyPr/>
+                    <a:lstStyle/>
+                    <a:p>
+                      <a:pPr indent="0" marL="0">
+                        <a:buNone/>
+                      </a:pPr>
+                      <a:r>
+                        <a:rPr lang="en-US" sz="850" dirty="0">
+                          <a:solidFill>
+                            <a:srgbClr val="F1F5F9"/>
+                          </a:solidFill>
+                          <a:latin typeface="Calibri" pitchFamily="34" charset="0"/>
+                          <a:ea typeface="Calibri" pitchFamily="34" charset="-122"/>
+                          <a:cs typeface="Calibri" pitchFamily="34" charset="-120"/>
+                        </a:rPr>
+                        <a:t>Google Identity Services</a:t>
+                      </a:r>
+                      <a:endParaRPr lang="en-US" sz="850" dirty="0">
+                        <a:latin typeface="Calibri" charset="0"/>
+                        <a:ea typeface="Calibri" charset="0"/>
+                        <a:cs typeface="Calibri" charset="0"/>
+                      </a:endParaRPr>
+                    </a:p>
+                  </a:txBody>
+                  <a:tcPr marL="91440" marR="91440" marT="45720" marB="45720" anchor="ctr">
+                    <a:lnL w="6350" cap="flat" cmpd="sng" algn="ctr">
+                      <a:solidFill>
+                        <a:srgbClr val="334155"/>
+                      </a:solidFill>
+                      <a:prstDash val="solid"/>
+                      <a:round/>
+                      <a:headEnd type="none" w="med" len="med"/>
+                      <a:tailEnd type="none" w="med" len="med"/>
+                    </a:lnL>
+                    <a:lnR w="6350" cap="flat" cmpd="sng" algn="ctr">
+                      <a:solidFill>
+                        <a:srgbClr val="334155"/>
+                      </a:solidFill>
+                      <a:prstDash val="solid"/>
+                      <a:round/>
+                      <a:headEnd type="none" w="med" len="med"/>
+                      <a:tailEnd type="none" w="med" len="med"/>
+                    </a:lnR>
+                    <a:lnT w="6350" cap="flat" cmpd="sng" algn="ctr">
+                      <a:solidFill>
+                        <a:srgbClr val="334155"/>
+                      </a:solidFill>
+                      <a:prstDash val="solid"/>
+                      <a:round/>
+                      <a:headEnd type="none" w="med" len="med"/>
+                      <a:tailEnd type="none" w="med" len="med"/>
+                    </a:lnT>
+                    <a:lnB w="6350" cap="flat" cmpd="sng" algn="ctr">
+                      <a:solidFill>
+                        <a:srgbClr val="334155"/>
+                      </a:solidFill>
+                      <a:prstDash val="solid"/>
+                      <a:round/>
+                      <a:headEnd type="none" w="med" len="med"/>
+                      <a:tailEnd type="none" w="med" len="med"/>
+                    </a:lnB>
+                    <a:solidFill>
+                      <a:srgbClr val="1E293B"/>
+                    </a:solidFill>
+                  </a:tcPr>
+                </a:tc>
+                <a:tc>
+                  <a:txBody>
+                    <a:bodyPr/>
+                    <a:lstStyle/>
+                    <a:p>
+                      <a:pPr indent="0" marL="0">
+                        <a:buNone/>
+                      </a:pPr>
+                      <a:r>
+                        <a:rPr lang="en-US" sz="850" dirty="0">
+                          <a:solidFill>
+                            <a:srgbClr val="F1F5F9"/>
+                          </a:solidFill>
+                          <a:latin typeface="Calibri" pitchFamily="34" charset="0"/>
+                          <a:ea typeface="Calibri" pitchFamily="34" charset="-122"/>
+                          <a:cs typeface="Calibri" pitchFamily="34" charset="-120"/>
+                        </a:rPr>
+                        <a:t>(CDN)</a:t>
+                      </a:r>
+                      <a:endParaRPr lang="en-US" sz="850" dirty="0">
+                        <a:latin typeface="Calibri" charset="0"/>
+                        <a:ea typeface="Calibri" charset="0"/>
+                        <a:cs typeface="Calibri" charset="0"/>
+                      </a:endParaRPr>
+                    </a:p>
+                  </a:txBody>
+                  <a:tcPr marL="91440" marR="91440" marT="45720" marB="45720" anchor="ctr">
+                    <a:lnL w="6350" cap="flat" cmpd="sng" algn="ctr">
+                      <a:solidFill>
+                        <a:srgbClr val="334155"/>
+                      </a:solidFill>
+                      <a:prstDash val="solid"/>
+                      <a:round/>
+                      <a:headEnd type="none" w="med" len="med"/>
+                      <a:tailEnd type="none" w="med" len="med"/>
+                    </a:lnL>
+                    <a:lnR w="6350" cap="flat" cmpd="sng" algn="ctr">
+                      <a:solidFill>
+                        <a:srgbClr val="334155"/>
+                      </a:solidFill>
+                      <a:prstDash val="solid"/>
+                      <a:round/>
+                      <a:headEnd type="none" w="med" len="med"/>
+                      <a:tailEnd type="none" w="med" len="med"/>
+                    </a:lnR>
+                    <a:lnT w="6350" cap="flat" cmpd="sng" algn="ctr">
+                      <a:solidFill>
+                        <a:srgbClr val="334155"/>
+                      </a:solidFill>
+                      <a:prstDash val="solid"/>
+                      <a:round/>
+                      <a:headEnd type="none" w="med" len="med"/>
+                      <a:tailEnd type="none" w="med" len="med"/>
+                    </a:lnT>
+                    <a:lnB w="6350" cap="flat" cmpd="sng" algn="ctr">
+                      <a:solidFill>
+                        <a:srgbClr val="334155"/>
+                      </a:solidFill>
+                      <a:prstDash val="solid"/>
+                      <a:round/>
+                      <a:headEnd type="none" w="med" len="med"/>
+                      <a:tailEnd type="none" w="med" len="med"/>
+                    </a:lnB>
+                    <a:solidFill>
+                      <a:srgbClr val="1E293B"/>
+                    </a:solidFill>
+                  </a:tcPr>
+                </a:tc>
+                <a:tc>
+                  <a:txBody>
+                    <a:bodyPr/>
+                    <a:lstStyle/>
+                    <a:p>
+                      <a:pPr indent="0" marL="0">
+                        <a:buNone/>
+                      </a:pPr>
+                      <a:r>
+                        <a:rPr lang="en-US" sz="850" dirty="0">
+                          <a:solidFill>
+                            <a:srgbClr val="F1F5F9"/>
+                          </a:solidFill>
+                          <a:latin typeface="Calibri" pitchFamily="34" charset="0"/>
+                          <a:ea typeface="Calibri" pitchFamily="34" charset="-122"/>
+                          <a:cs typeface="Calibri" pitchFamily="34" charset="-120"/>
+                        </a:rPr>
+                        <a:t>OAuth 2.0 popup-based sign-in</a:t>
+                      </a:r>
+                      <a:endParaRPr lang="en-US" sz="850" dirty="0">
+                        <a:latin typeface="Calibri" charset="0"/>
+                        <a:ea typeface="Calibri" charset="0"/>
+                        <a:cs typeface="Calibri" charset="0"/>
+                      </a:endParaRPr>
+                    </a:p>
+                  </a:txBody>
+                  <a:tcPr marL="91440" marR="91440" marT="45720" marB="45720" anchor="ctr">
+                    <a:lnL w="6350" cap="flat" cmpd="sng" algn="ctr">
+                      <a:solidFill>
+                        <a:srgbClr val="334155"/>
+                      </a:solidFill>
+                      <a:prstDash val="solid"/>
+                      <a:round/>
+                      <a:headEnd type="none" w="med" len="med"/>
+                      <a:tailEnd type="none" w="med" len="med"/>
+                    </a:lnL>
+                    <a:lnR w="6350" cap="flat" cmpd="sng" algn="ctr">
+                      <a:solidFill>
+                        <a:srgbClr val="334155"/>
+                      </a:solidFill>
+                      <a:prstDash val="solid"/>
+                      <a:round/>
+                      <a:headEnd type="none" w="med" len="med"/>
+                      <a:tailEnd type="none" w="med" len="med"/>
+                    </a:lnR>
+                    <a:lnT w="6350" cap="flat" cmpd="sng" algn="ctr">
+                      <a:solidFill>
+                        <a:srgbClr val="334155"/>
+                      </a:solidFill>
+                      <a:prstDash val="solid"/>
+                      <a:round/>
+                      <a:headEnd type="none" w="med" len="med"/>
+                      <a:tailEnd type="none" w="med" len="med"/>
+                    </a:lnT>
+                    <a:lnB w="6350" cap="flat" cmpd="sng" algn="ctr">
+                      <a:solidFill>
+                        <a:srgbClr val="334155"/>
+                      </a:solidFill>
+                      <a:prstDash val="solid"/>
+                      <a:round/>
+                      <a:headEnd type="none" w="med" len="med"/>
+                      <a:tailEnd type="none" w="med" len="med"/>
+                    </a:lnB>
+                    <a:solidFill>
+                      <a:srgbClr val="1E293B"/>
+                    </a:solidFill>
+                  </a:tcPr>
+                </a:tc>
+              </a:tr>
+              <a:tr h="228600">
+                <a:tc>
+                  <a:txBody>
+                    <a:bodyPr/>
+                    <a:lstStyle/>
+                    <a:p>
+                      <a:pPr indent="0" marL="0">
+                        <a:buNone/>
+                      </a:pPr>
+                      <a:r>
+                        <a:rPr lang="en-US" sz="850" dirty="0">
+                          <a:solidFill>
+                            <a:srgbClr val="F1F5F9"/>
+                          </a:solidFill>
+                          <a:latin typeface="Calibri" pitchFamily="34" charset="0"/>
+                          <a:ea typeface="Calibri" pitchFamily="34" charset="-122"/>
+                          <a:cs typeface="Calibri" pitchFamily="34" charset="-120"/>
+                        </a:rPr>
+                        <a:t>Build</a:t>
+                      </a:r>
+                      <a:endParaRPr lang="en-US" sz="850" dirty="0">
+                        <a:latin typeface="Calibri" charset="0"/>
+                        <a:ea typeface="Calibri" charset="0"/>
+                        <a:cs typeface="Calibri" charset="0"/>
+                      </a:endParaRPr>
+                    </a:p>
+                  </a:txBody>
+                  <a:tcPr marL="91440" marR="91440" marT="45720" marB="45720" anchor="ctr">
+                    <a:lnL w="6350" cap="flat" cmpd="sng" algn="ctr">
+                      <a:solidFill>
+                        <a:srgbClr val="334155"/>
+                      </a:solidFill>
+                      <a:prstDash val="solid"/>
+                      <a:round/>
+                      <a:headEnd type="none" w="med" len="med"/>
+                      <a:tailEnd type="none" w="med" len="med"/>
+                    </a:lnL>
+                    <a:lnR w="6350" cap="flat" cmpd="sng" algn="ctr">
+                      <a:solidFill>
+                        <a:srgbClr val="334155"/>
+                      </a:solidFill>
+                      <a:prstDash val="solid"/>
+                      <a:round/>
+                      <a:headEnd type="none" w="med" len="med"/>
+                      <a:tailEnd type="none" w="med" len="med"/>
+                    </a:lnR>
+                    <a:lnT w="6350" cap="flat" cmpd="sng" algn="ctr">
+                      <a:solidFill>
+                        <a:srgbClr val="334155"/>
+                      </a:solidFill>
+                      <a:prstDash val="solid"/>
+                      <a:round/>
+                      <a:headEnd type="none" w="med" len="med"/>
+                      <a:tailEnd type="none" w="med" len="med"/>
+                    </a:lnT>
+                    <a:lnB w="6350" cap="flat" cmpd="sng" algn="ctr">
+                      <a:solidFill>
+                        <a:srgbClr val="334155"/>
+                      </a:solidFill>
+                      <a:prstDash val="solid"/>
+                      <a:round/>
+                      <a:headEnd type="none" w="med" len="med"/>
+                      <a:tailEnd type="none" w="med" len="med"/>
+                    </a:lnB>
+                    <a:solidFill>
+                      <a:srgbClr val="0F172A"/>
+                    </a:solidFill>
+                  </a:tcPr>
+                </a:tc>
+                <a:tc>
+                  <a:txBody>
+                    <a:bodyPr/>
+                    <a:lstStyle/>
+                    <a:p>
+                      <a:pPr indent="0" marL="0">
+                        <a:buNone/>
+                      </a:pPr>
+                      <a:r>
+                        <a:rPr lang="en-US" sz="850" dirty="0">
+                          <a:solidFill>
+                            <a:srgbClr val="F1F5F9"/>
+                          </a:solidFill>
+                          <a:latin typeface="Calibri" pitchFamily="34" charset="0"/>
+                          <a:ea typeface="Calibri" pitchFamily="34" charset="-122"/>
+                          <a:cs typeface="Calibri" pitchFamily="34" charset="-120"/>
+                        </a:rPr>
+                        <a:t>Apache Maven (wrapper)</a:t>
+                      </a:r>
+                      <a:endParaRPr lang="en-US" sz="850" dirty="0">
+                        <a:latin typeface="Calibri" charset="0"/>
+                        <a:ea typeface="Calibri" charset="0"/>
+                        <a:cs typeface="Calibri" charset="0"/>
+                      </a:endParaRPr>
+                    </a:p>
+                  </a:txBody>
+                  <a:tcPr marL="91440" marR="91440" marT="45720" marB="45720" anchor="ctr">
+                    <a:lnL w="6350" cap="flat" cmpd="sng" algn="ctr">
+                      <a:solidFill>
+                        <a:srgbClr val="334155"/>
+                      </a:solidFill>
+                      <a:prstDash val="solid"/>
+                      <a:round/>
+                      <a:headEnd type="none" w="med" len="med"/>
+                      <a:tailEnd type="none" w="med" len="med"/>
+                    </a:lnL>
+                    <a:lnR w="6350" cap="flat" cmpd="sng" algn="ctr">
+                      <a:solidFill>
+                        <a:srgbClr val="334155"/>
+                      </a:solidFill>
+                      <a:prstDash val="solid"/>
+                      <a:round/>
+                      <a:headEnd type="none" w="med" len="med"/>
+                      <a:tailEnd type="none" w="med" len="med"/>
+                    </a:lnR>
+                    <a:lnT w="6350" cap="flat" cmpd="sng" algn="ctr">
+                      <a:solidFill>
+                        <a:srgbClr val="334155"/>
+                      </a:solidFill>
+                      <a:prstDash val="solid"/>
+                      <a:round/>
+                      <a:headEnd type="none" w="med" len="med"/>
+                      <a:tailEnd type="none" w="med" len="med"/>
+                    </a:lnT>
+                    <a:lnB w="6350" cap="flat" cmpd="sng" algn="ctr">
+                      <a:solidFill>
+                        <a:srgbClr val="334155"/>
+                      </a:solidFill>
+                      <a:prstDash val="solid"/>
+                      <a:round/>
+                      <a:headEnd type="none" w="med" len="med"/>
+                      <a:tailEnd type="none" w="med" len="med"/>
+                    </a:lnB>
+                    <a:solidFill>
+                      <a:srgbClr val="0F172A"/>
+                    </a:solidFill>
+                  </a:tcPr>
+                </a:tc>
+                <a:tc>
+                  <a:txBody>
+                    <a:bodyPr/>
+                    <a:lstStyle/>
+                    <a:p>
+                      <a:pPr indent="0" marL="0">
+                        <a:buNone/>
+                      </a:pPr>
+                      <a:r>
+                        <a:rPr lang="en-US" sz="850" dirty="0">
+                          <a:solidFill>
+                            <a:srgbClr val="F1F5F9"/>
+                          </a:solidFill>
+                          <a:latin typeface="Calibri" pitchFamily="34" charset="0"/>
+                          <a:ea typeface="Calibri" pitchFamily="34" charset="-122"/>
+                          <a:cs typeface="Calibri" pitchFamily="34" charset="-120"/>
+                        </a:rPr>
+                        <a:t>3.9.15</a:t>
+                      </a:r>
+                      <a:endParaRPr lang="en-US" sz="850" dirty="0">
+                        <a:latin typeface="Calibri" charset="0"/>
+                        <a:ea typeface="Calibri" charset="0"/>
+                        <a:cs typeface="Calibri" charset="0"/>
+                      </a:endParaRPr>
+                    </a:p>
+                  </a:txBody>
+                  <a:tcPr marL="91440" marR="91440" marT="45720" marB="45720" anchor="ctr">
+                    <a:lnL w="6350" cap="flat" cmpd="sng" algn="ctr">
+                      <a:solidFill>
+                        <a:srgbClr val="334155"/>
+                      </a:solidFill>
+                      <a:prstDash val="solid"/>
+                      <a:round/>
+                      <a:headEnd type="none" w="med" len="med"/>
+                      <a:tailEnd type="none" w="med" len="med"/>
+                    </a:lnL>
+                    <a:lnR w="6350" cap="flat" cmpd="sng" algn="ctr">
+                      <a:solidFill>
+                        <a:srgbClr val="334155"/>
+                      </a:solidFill>
+                      <a:prstDash val="solid"/>
+                      <a:round/>
+                      <a:headEnd type="none" w="med" len="med"/>
+                      <a:tailEnd type="none" w="med" len="med"/>
+                    </a:lnR>
+                    <a:lnT w="6350" cap="flat" cmpd="sng" algn="ctr">
+                      <a:solidFill>
+                        <a:srgbClr val="334155"/>
+                      </a:solidFill>
+                      <a:prstDash val="solid"/>
+                      <a:round/>
+                      <a:headEnd type="none" w="med" len="med"/>
+                      <a:tailEnd type="none" w="med" len="med"/>
+                    </a:lnT>
+                    <a:lnB w="6350" cap="flat" cmpd="sng" algn="ctr">
+                      <a:solidFill>
+                        <a:srgbClr val="334155"/>
+                      </a:solidFill>
+                      <a:prstDash val="solid"/>
+                      <a:round/>
+                      <a:headEnd type="none" w="med" len="med"/>
+                      <a:tailEnd type="none" w="med" len="med"/>
+                    </a:lnB>
+                    <a:solidFill>
+                      <a:srgbClr val="0F172A"/>
+                    </a:solidFill>
+                  </a:tcPr>
+                </a:tc>
+                <a:tc>
+                  <a:txBody>
+                    <a:bodyPr/>
+                    <a:lstStyle/>
+                    <a:p>
+                      <a:pPr indent="0" marL="0">
+                        <a:buNone/>
+                      </a:pPr>
+                      <a:r>
+                        <a:rPr lang="en-US" sz="850" dirty="0">
+                          <a:solidFill>
+                            <a:srgbClr val="F1F5F9"/>
+                          </a:solidFill>
+                          <a:latin typeface="Calibri" pitchFamily="34" charset="0"/>
+                          <a:ea typeface="Calibri" pitchFamily="34" charset="-122"/>
+                          <a:cs typeface="Calibri" pitchFamily="34" charset="-120"/>
+                        </a:rPr>
+                        <a:t>Dependency management and JAR packaging</a:t>
+                      </a:r>
+                      <a:endParaRPr lang="en-US" sz="850" dirty="0">
+                        <a:latin typeface="Calibri" charset="0"/>
+                        <a:ea typeface="Calibri" charset="0"/>
+                        <a:cs typeface="Calibri" charset="0"/>
+                      </a:endParaRPr>
+                    </a:p>
+                  </a:txBody>
+                  <a:tcPr marL="91440" marR="91440" marT="45720" marB="45720" anchor="ctr">
+                    <a:lnL w="6350" cap="flat" cmpd="sng" algn="ctr">
+                      <a:solidFill>
+                        <a:srgbClr val="334155"/>
+                      </a:solidFill>
+                      <a:prstDash val="solid"/>
+                      <a:round/>
+                      <a:headEnd type="none" w="med" len="med"/>
+                      <a:tailEnd type="none" w="med" len="med"/>
+                    </a:lnL>
+                    <a:lnR w="6350" cap="flat" cmpd="sng" algn="ctr">
+                      <a:solidFill>
+                        <a:srgbClr val="334155"/>
+                      </a:solidFill>
+                      <a:prstDash val="solid"/>
+                      <a:round/>
+                      <a:headEnd type="none" w="med" len="med"/>
+                      <a:tailEnd type="none" w="med" len="med"/>
+                    </a:lnR>
+                    <a:lnT w="6350" cap="flat" cmpd="sng" algn="ctr">
+                      <a:solidFill>
+                        <a:srgbClr val="334155"/>
+                      </a:solidFill>
+                      <a:prstDash val="solid"/>
+                      <a:round/>
+                      <a:headEnd type="none" w="med" len="med"/>
+                      <a:tailEnd type="none" w="med" len="med"/>
+                    </a:lnT>
+                    <a:lnB w="6350" cap="flat" cmpd="sng" algn="ctr">
+                      <a:solidFill>
+                        <a:srgbClr val="334155"/>
+                      </a:solidFill>
+                      <a:prstDash val="solid"/>
+                      <a:round/>
+                      <a:headEnd type="none" w="med" len="med"/>
+                      <a:tailEnd type="none" w="med" len="med"/>
+                    </a:lnB>
+                    <a:solidFill>
+                      <a:srgbClr val="0F172A"/>
+                    </a:solidFill>
+                  </a:tcPr>
+                </a:tc>
+              </a:tr>
+              <a:tr h="228600">
+                <a:tc>
+                  <a:txBody>
+                    <a:bodyPr/>
+                    <a:lstStyle/>
+                    <a:p>
+                      <a:pPr indent="0" marL="0">
+                        <a:buNone/>
+                      </a:pPr>
+                      <a:r>
+                        <a:rPr lang="en-US" sz="850" dirty="0">
+                          <a:solidFill>
+                            <a:srgbClr val="F1F5F9"/>
+                          </a:solidFill>
+                          <a:latin typeface="Calibri" pitchFamily="34" charset="0"/>
+                          <a:ea typeface="Calibri" pitchFamily="34" charset="-122"/>
+                          <a:cs typeface="Calibri" pitchFamily="34" charset="-120"/>
+                        </a:rPr>
+                        <a:t>Runtime</a:t>
+                      </a:r>
+                      <a:endParaRPr lang="en-US" sz="850" dirty="0">
+                        <a:latin typeface="Calibri" charset="0"/>
+                        <a:ea typeface="Calibri" charset="0"/>
+                        <a:cs typeface="Calibri" charset="0"/>
+                      </a:endParaRPr>
+                    </a:p>
+                  </a:txBody>
+                  <a:tcPr marL="91440" marR="91440" marT="45720" marB="45720" anchor="ctr">
+                    <a:lnL w="6350" cap="flat" cmpd="sng" algn="ctr">
+                      <a:solidFill>
+                        <a:srgbClr val="334155"/>
+                      </a:solidFill>
+                      <a:prstDash val="solid"/>
+                      <a:round/>
+                      <a:headEnd type="none" w="med" len="med"/>
+                      <a:tailEnd type="none" w="med" len="med"/>
+                    </a:lnL>
+                    <a:lnR w="6350" cap="flat" cmpd="sng" algn="ctr">
+                      <a:solidFill>
+                        <a:srgbClr val="334155"/>
+                      </a:solidFill>
+                      <a:prstDash val="solid"/>
+                      <a:round/>
+                      <a:headEnd type="none" w="med" len="med"/>
+                      <a:tailEnd type="none" w="med" len="med"/>
+                    </a:lnR>
+                    <a:lnT w="6350" cap="flat" cmpd="sng" algn="ctr">
+                      <a:solidFill>
+                        <a:srgbClr val="334155"/>
+                      </a:solidFill>
+                      <a:prstDash val="solid"/>
+                      <a:round/>
+                      <a:headEnd type="none" w="med" len="med"/>
+                      <a:tailEnd type="none" w="med" len="med"/>
+                    </a:lnT>
+                    <a:lnB w="6350" cap="flat" cmpd="sng" algn="ctr">
+                      <a:solidFill>
+                        <a:srgbClr val="334155"/>
+                      </a:solidFill>
+                      <a:prstDash val="solid"/>
+                      <a:round/>
+                      <a:headEnd type="none" w="med" len="med"/>
+                      <a:tailEnd type="none" w="med" len="med"/>
+                    </a:lnB>
+                    <a:solidFill>
+                      <a:srgbClr val="1E293B"/>
+                    </a:solidFill>
+                  </a:tcPr>
+                </a:tc>
+                <a:tc>
+                  <a:txBody>
+                    <a:bodyPr/>
+                    <a:lstStyle/>
+                    <a:p>
+                      <a:pPr indent="0" marL="0">
+                        <a:buNone/>
+                      </a:pPr>
+                      <a:r>
+                        <a:rPr lang="en-US" sz="850" dirty="0">
+                          <a:solidFill>
+                            <a:srgbClr val="F1F5F9"/>
+                          </a:solidFill>
+                          <a:latin typeface="Calibri" pitchFamily="34" charset="0"/>
+                          <a:ea typeface="Calibri" pitchFamily="34" charset="-122"/>
+                          <a:cs typeface="Calibri" pitchFamily="34" charset="-120"/>
+                        </a:rPr>
+                        <a:t>Java (OpenJDK Temurin)</a:t>
+                      </a:r>
+                      <a:endParaRPr lang="en-US" sz="850" dirty="0">
+                        <a:latin typeface="Calibri" charset="0"/>
+                        <a:ea typeface="Calibri" charset="0"/>
+                        <a:cs typeface="Calibri" charset="0"/>
+                      </a:endParaRPr>
+                    </a:p>
+                  </a:txBody>
+                  <a:tcPr marL="91440" marR="91440" marT="45720" marB="45720" anchor="ctr">
+                    <a:lnL w="6350" cap="flat" cmpd="sng" algn="ctr">
+                      <a:solidFill>
+                        <a:srgbClr val="334155"/>
+                      </a:solidFill>
+                      <a:prstDash val="solid"/>
+                      <a:round/>
+                      <a:headEnd type="none" w="med" len="med"/>
+                      <a:tailEnd type="none" w="med" len="med"/>
+                    </a:lnL>
+                    <a:lnR w="6350" cap="flat" cmpd="sng" algn="ctr">
+                      <a:solidFill>
+                        <a:srgbClr val="334155"/>
+                      </a:solidFill>
+                      <a:prstDash val="solid"/>
+                      <a:round/>
+                      <a:headEnd type="none" w="med" len="med"/>
+                      <a:tailEnd type="none" w="med" len="med"/>
+                    </a:lnR>
+                    <a:lnT w="6350" cap="flat" cmpd="sng" algn="ctr">
+                      <a:solidFill>
+                        <a:srgbClr val="334155"/>
+                      </a:solidFill>
+                      <a:prstDash val="solid"/>
+                      <a:round/>
+                      <a:headEnd type="none" w="med" len="med"/>
+                      <a:tailEnd type="none" w="med" len="med"/>
+                    </a:lnT>
+                    <a:lnB w="6350" cap="flat" cmpd="sng" algn="ctr">
+                      <a:solidFill>
+                        <a:srgbClr val="334155"/>
+                      </a:solidFill>
+                      <a:prstDash val="solid"/>
+                      <a:round/>
+                      <a:headEnd type="none" w="med" len="med"/>
+                      <a:tailEnd type="none" w="med" len="med"/>
+                    </a:lnB>
+                    <a:solidFill>
+                      <a:srgbClr val="1E293B"/>
+                    </a:solidFill>
+                  </a:tcPr>
+                </a:tc>
+                <a:tc>
+                  <a:txBody>
+                    <a:bodyPr/>
+                    <a:lstStyle/>
+                    <a:p>
+                      <a:pPr indent="0" marL="0">
+                        <a:buNone/>
+                      </a:pPr>
+                      <a:r>
+                        <a:rPr lang="en-US" sz="850" dirty="0">
+                          <a:solidFill>
+                            <a:srgbClr val="F1F5F9"/>
+                          </a:solidFill>
+                          <a:latin typeface="Calibri" pitchFamily="34" charset="0"/>
+                          <a:ea typeface="Calibri" pitchFamily="34" charset="-122"/>
+                          <a:cs typeface="Calibri" pitchFamily="34" charset="-120"/>
+                        </a:rPr>
+                        <a:t>25.0.2</a:t>
+                      </a:r>
+                      <a:endParaRPr lang="en-US" sz="850" dirty="0">
+                        <a:latin typeface="Calibri" charset="0"/>
+                        <a:ea typeface="Calibri" charset="0"/>
+                        <a:cs typeface="Calibri" charset="0"/>
+                      </a:endParaRPr>
+                    </a:p>
+                  </a:txBody>
+                  <a:tcPr marL="91440" marR="91440" marT="45720" marB="45720" anchor="ctr">
+                    <a:lnL w="6350" cap="flat" cmpd="sng" algn="ctr">
+                      <a:solidFill>
+                        <a:srgbClr val="334155"/>
+                      </a:solidFill>
+                      <a:prstDash val="solid"/>
+                      <a:round/>
+                      <a:headEnd type="none" w="med" len="med"/>
+                      <a:tailEnd type="none" w="med" len="med"/>
+                    </a:lnL>
+                    <a:lnR w="6350" cap="flat" cmpd="sng" algn="ctr">
+                      <a:solidFill>
+                        <a:srgbClr val="334155"/>
+                      </a:solidFill>
+                      <a:prstDash val="solid"/>
+                      <a:round/>
+                      <a:headEnd type="none" w="med" len="med"/>
+                      <a:tailEnd type="none" w="med" len="med"/>
+                    </a:lnR>
+                    <a:lnT w="6350" cap="flat" cmpd="sng" algn="ctr">
+                      <a:solidFill>
+                        <a:srgbClr val="334155"/>
+                      </a:solidFill>
+                      <a:prstDash val="solid"/>
+                      <a:round/>
+                      <a:headEnd type="none" w="med" len="med"/>
+                      <a:tailEnd type="none" w="med" len="med"/>
+                    </a:lnT>
+                    <a:lnB w="6350" cap="flat" cmpd="sng" algn="ctr">
+                      <a:solidFill>
+                        <a:srgbClr val="334155"/>
+                      </a:solidFill>
+                      <a:prstDash val="solid"/>
+                      <a:round/>
+                      <a:headEnd type="none" w="med" len="med"/>
+                      <a:tailEnd type="none" w="med" len="med"/>
+                    </a:lnB>
+                    <a:solidFill>
+                      <a:srgbClr val="1E293B"/>
+                    </a:solidFill>
+                  </a:tcPr>
+                </a:tc>
+                <a:tc>
+                  <a:txBody>
+                    <a:bodyPr/>
+                    <a:lstStyle/>
+                    <a:p>
+                      <a:pPr indent="0" marL="0">
+                        <a:buNone/>
+                      </a:pPr>
+                      <a:r>
+                        <a:rPr lang="en-US" sz="850" dirty="0">
+                          <a:solidFill>
+                            <a:srgbClr val="F1F5F9"/>
+                          </a:solidFill>
+                          <a:latin typeface="Calibri" pitchFamily="34" charset="0"/>
+                          <a:ea typeface="Calibri" pitchFamily="34" charset="-122"/>
+                          <a:cs typeface="Calibri" pitchFamily="34" charset="-120"/>
+                        </a:rPr>
+                        <a:t>Runtime environment</a:t>
+                      </a:r>
+                      <a:endParaRPr lang="en-US" sz="850" dirty="0">
+                        <a:latin typeface="Calibri" charset="0"/>
+                        <a:ea typeface="Calibri" charset="0"/>
+                        <a:cs typeface="Calibri" charset="0"/>
+                      </a:endParaRPr>
+                    </a:p>
+                  </a:txBody>
+                  <a:tcPr marL="91440" marR="91440" marT="45720" marB="45720" anchor="ctr">
+                    <a:lnL w="6350" cap="flat" cmpd="sng" algn="ctr">
+                      <a:solidFill>
+                        <a:srgbClr val="334155"/>
+                      </a:solidFill>
+                      <a:prstDash val="solid"/>
+                      <a:round/>
+                      <a:headEnd type="none" w="med" len="med"/>
+                      <a:tailEnd type="none" w="med" len="med"/>
+                    </a:lnL>
+                    <a:lnR w="6350" cap="flat" cmpd="sng" algn="ctr">
+                      <a:solidFill>
+                        <a:srgbClr val="334155"/>
+                      </a:solidFill>
+                      <a:prstDash val="solid"/>
+                      <a:round/>
+                      <a:headEnd type="none" w="med" len="med"/>
+                      <a:tailEnd type="none" w="med" len="med"/>
+                    </a:lnR>
+                    <a:lnT w="6350" cap="flat" cmpd="sng" algn="ctr">
+                      <a:solidFill>
+                        <a:srgbClr val="334155"/>
+                      </a:solidFill>
+                      <a:prstDash val="solid"/>
+                      <a:round/>
+                      <a:headEnd type="none" w="med" len="med"/>
+                      <a:tailEnd type="none" w="med" len="med"/>
+                    </a:lnT>
+                    <a:lnB w="6350" cap="flat" cmpd="sng" algn="ctr">
+                      <a:solidFill>
+                        <a:srgbClr val="334155"/>
+                      </a:solidFill>
+                      <a:prstDash val="solid"/>
+                      <a:round/>
+                      <a:headEnd type="none" w="med" len="med"/>
+                      <a:tailEnd type="none" w="med" len="med"/>
+                    </a:lnB>
+                    <a:solidFill>
+                      <a:srgbClr val="1E293B"/>
+                    </a:solidFill>
+                  </a:tcPr>
+                </a:tc>
+              </a:tr>
+              <a:tr h="228600">
+                <a:tc>
+                  <a:txBody>
+                    <a:bodyPr/>
+                    <a:lstStyle/>
+                    <a:p>
+                      <a:pPr indent="0" marL="0">
+                        <a:buNone/>
+                      </a:pPr>
+                      <a:r>
+                        <a:rPr lang="en-US" sz="850" dirty="0">
+                          <a:solidFill>
+                            <a:srgbClr val="F1F5F9"/>
+                          </a:solidFill>
+                          <a:latin typeface="Calibri" pitchFamily="34" charset="0"/>
+                          <a:ea typeface="Calibri" pitchFamily="34" charset="-122"/>
+                          <a:cs typeface="Calibri" pitchFamily="34" charset="-120"/>
+                        </a:rPr>
+                        <a:t>Database</a:t>
+                      </a:r>
+                      <a:endParaRPr lang="en-US" sz="850" dirty="0">
+                        <a:latin typeface="Calibri" charset="0"/>
+                        <a:ea typeface="Calibri" charset="0"/>
+                        <a:cs typeface="Calibri" charset="0"/>
+                      </a:endParaRPr>
+                    </a:p>
+                  </a:txBody>
+                  <a:tcPr marL="91440" marR="91440" marT="45720" marB="45720" anchor="ctr">
+                    <a:lnL w="6350" cap="flat" cmpd="sng" algn="ctr">
+                      <a:solidFill>
+                        <a:srgbClr val="334155"/>
+                      </a:solidFill>
+                      <a:prstDash val="solid"/>
+                      <a:round/>
+                      <a:headEnd type="none" w="med" len="med"/>
+                      <a:tailEnd type="none" w="med" len="med"/>
+                    </a:lnL>
+                    <a:lnR w="6350" cap="flat" cmpd="sng" algn="ctr">
+                      <a:solidFill>
+                        <a:srgbClr val="334155"/>
+                      </a:solidFill>
+                      <a:prstDash val="solid"/>
+                      <a:round/>
+                      <a:headEnd type="none" w="med" len="med"/>
+                      <a:tailEnd type="none" w="med" len="med"/>
+                    </a:lnR>
+                    <a:lnT w="6350" cap="flat" cmpd="sng" algn="ctr">
+                      <a:solidFill>
+                        <a:srgbClr val="334155"/>
+                      </a:solidFill>
+                      <a:prstDash val="solid"/>
+                      <a:round/>
+                      <a:headEnd type="none" w="med" len="med"/>
+                      <a:tailEnd type="none" w="med" len="med"/>
+                    </a:lnT>
+                    <a:lnB w="6350" cap="flat" cmpd="sng" algn="ctr">
+                      <a:solidFill>
+                        <a:srgbClr val="334155"/>
+                      </a:solidFill>
+                      <a:prstDash val="solid"/>
+                      <a:round/>
+                      <a:headEnd type="none" w="med" len="med"/>
+                      <a:tailEnd type="none" w="med" len="med"/>
+                    </a:lnB>
+                    <a:solidFill>
+                      <a:srgbClr val="0F172A"/>
+                    </a:solidFill>
+                  </a:tcPr>
+                </a:tc>
+                <a:tc>
+                  <a:txBody>
+                    <a:bodyPr/>
+                    <a:lstStyle/>
+                    <a:p>
+                      <a:pPr indent="0" marL="0">
+                        <a:buNone/>
+                      </a:pPr>
+                      <a:r>
+                        <a:rPr lang="en-US" sz="850" dirty="0">
+                          <a:solidFill>
+                            <a:srgbClr val="F1F5F9"/>
+                          </a:solidFill>
+                          <a:latin typeface="Calibri" pitchFamily="34" charset="0"/>
+                          <a:ea typeface="Calibri" pitchFamily="34" charset="-122"/>
+                          <a:cs typeface="Calibri" pitchFamily="34" charset="-120"/>
+                        </a:rPr>
+                        <a:t>PostgreSQL Server</a:t>
+                      </a:r>
+                      <a:endParaRPr lang="en-US" sz="850" dirty="0">
+                        <a:latin typeface="Calibri" charset="0"/>
+                        <a:ea typeface="Calibri" charset="0"/>
+                        <a:cs typeface="Calibri" charset="0"/>
+                      </a:endParaRPr>
+                    </a:p>
+                  </a:txBody>
+                  <a:tcPr marL="91440" marR="91440" marT="45720" marB="45720" anchor="ctr">
+                    <a:lnL w="6350" cap="flat" cmpd="sng" algn="ctr">
+                      <a:solidFill>
+                        <a:srgbClr val="334155"/>
+                      </a:solidFill>
+                      <a:prstDash val="solid"/>
+                      <a:round/>
+                      <a:headEnd type="none" w="med" len="med"/>
+                      <a:tailEnd type="none" w="med" len="med"/>
+                    </a:lnL>
+                    <a:lnR w="6350" cap="flat" cmpd="sng" algn="ctr">
+                      <a:solidFill>
+                        <a:srgbClr val="334155"/>
+                      </a:solidFill>
+                      <a:prstDash val="solid"/>
+                      <a:round/>
+                      <a:headEnd type="none" w="med" len="med"/>
+                      <a:tailEnd type="none" w="med" len="med"/>
+                    </a:lnR>
+                    <a:lnT w="6350" cap="flat" cmpd="sng" algn="ctr">
+                      <a:solidFill>
+                        <a:srgbClr val="334155"/>
+                      </a:solidFill>
+                      <a:prstDash val="solid"/>
+                      <a:round/>
+                      <a:headEnd type="none" w="med" len="med"/>
+                      <a:tailEnd type="none" w="med" len="med"/>
+                    </a:lnT>
+                    <a:lnB w="6350" cap="flat" cmpd="sng" algn="ctr">
+                      <a:solidFill>
+                        <a:srgbClr val="334155"/>
+                      </a:solidFill>
+                      <a:prstDash val="solid"/>
+                      <a:round/>
+                      <a:headEnd type="none" w="med" len="med"/>
+                      <a:tailEnd type="none" w="med" len="med"/>
+                    </a:lnB>
+                    <a:solidFill>
+                      <a:srgbClr val="0F172A"/>
+                    </a:solidFill>
+                  </a:tcPr>
+                </a:tc>
+                <a:tc>
+                  <a:txBody>
+                    <a:bodyPr/>
+                    <a:lstStyle/>
+                    <a:p>
+                      <a:pPr indent="0" marL="0">
+                        <a:buNone/>
+                      </a:pPr>
+                      <a:r>
+                        <a:rPr lang="en-US" sz="850" dirty="0">
+                          <a:solidFill>
+                            <a:srgbClr val="F1F5F9"/>
+                          </a:solidFill>
+                          <a:latin typeface="Calibri" pitchFamily="34" charset="0"/>
+                          <a:ea typeface="Calibri" pitchFamily="34" charset="-122"/>
+                          <a:cs typeface="Calibri" pitchFamily="34" charset="-120"/>
+                        </a:rPr>
+                        <a:t>18.3</a:t>
+                      </a:r>
+                      <a:endParaRPr lang="en-US" sz="850" dirty="0">
+                        <a:latin typeface="Calibri" charset="0"/>
+                        <a:ea typeface="Calibri" charset="0"/>
+                        <a:cs typeface="Calibri" charset="0"/>
+                      </a:endParaRPr>
+                    </a:p>
+                  </a:txBody>
+                  <a:tcPr marL="91440" marR="91440" marT="45720" marB="45720" anchor="ctr">
+                    <a:lnL w="6350" cap="flat" cmpd="sng" algn="ctr">
+                      <a:solidFill>
+                        <a:srgbClr val="334155"/>
+                      </a:solidFill>
+                      <a:prstDash val="solid"/>
+                      <a:round/>
+                      <a:headEnd type="none" w="med" len="med"/>
+                      <a:tailEnd type="none" w="med" len="med"/>
+                    </a:lnL>
+                    <a:lnR w="6350" cap="flat" cmpd="sng" algn="ctr">
+                      <a:solidFill>
+                        <a:srgbClr val="334155"/>
+                      </a:solidFill>
+                      <a:prstDash val="solid"/>
+                      <a:round/>
+                      <a:headEnd type="none" w="med" len="med"/>
+                      <a:tailEnd type="none" w="med" len="med"/>
+                    </a:lnR>
+                    <a:lnT w="6350" cap="flat" cmpd="sng" algn="ctr">
+                      <a:solidFill>
+                        <a:srgbClr val="334155"/>
+                      </a:solidFill>
+                      <a:prstDash val="solid"/>
+                      <a:round/>
+                      <a:headEnd type="none" w="med" len="med"/>
+                      <a:tailEnd type="none" w="med" len="med"/>
+                    </a:lnT>
+                    <a:lnB w="6350" cap="flat" cmpd="sng" algn="ctr">
+                      <a:solidFill>
+                        <a:srgbClr val="334155"/>
+                      </a:solidFill>
+                      <a:prstDash val="solid"/>
+                      <a:round/>
+                      <a:headEnd type="none" w="med" len="med"/>
+                      <a:tailEnd type="none" w="med" len="med"/>
+                    </a:lnB>
+                    <a:solidFill>
+                      <a:srgbClr val="0F172A"/>
+                    </a:solidFill>
+                  </a:tcPr>
+                </a:tc>
+                <a:tc>
+                  <a:txBody>
+                    <a:bodyPr/>
+                    <a:lstStyle/>
+                    <a:p>
+                      <a:pPr indent="0" marL="0">
+                        <a:buNone/>
+                      </a:pPr>
+                      <a:r>
+                        <a:rPr lang="en-US" sz="850" dirty="0">
+                          <a:solidFill>
+                            <a:srgbClr val="F1F5F9"/>
+                          </a:solidFill>
+                          <a:latin typeface="Calibri" pitchFamily="34" charset="0"/>
+                          <a:ea typeface="Calibri" pitchFamily="34" charset="-122"/>
+                          <a:cs typeface="Calibri" pitchFamily="34" charset="-120"/>
+                        </a:rPr>
+                        <a:t>Relational database management system</a:t>
+                      </a:r>
+                      <a:endParaRPr lang="en-US" sz="850" dirty="0">
+                        <a:latin typeface="Calibri" charset="0"/>
+                        <a:ea typeface="Calibri" charset="0"/>
+                        <a:cs typeface="Calibri" charset="0"/>
+                      </a:endParaRPr>
+                    </a:p>
+                  </a:txBody>
+                  <a:tcPr marL="91440" marR="91440" marT="45720" marB="45720" anchor="ctr">
+                    <a:lnL w="6350" cap="flat" cmpd="sng" algn="ctr">
+                      <a:solidFill>
+                        <a:srgbClr val="334155"/>
+                      </a:solidFill>
+                      <a:prstDash val="solid"/>
+                      <a:round/>
+                      <a:headEnd type="none" w="med" len="med"/>
+                      <a:tailEnd type="none" w="med" len="med"/>
+                    </a:lnL>
+                    <a:lnR w="6350" cap="flat" cmpd="sng" algn="ctr">
+                      <a:solidFill>
+                        <a:srgbClr val="334155"/>
+                      </a:solidFill>
+                      <a:prstDash val="solid"/>
+                      <a:round/>
+                      <a:headEnd type="none" w="med" len="med"/>
+                      <a:tailEnd type="none" w="med" len="med"/>
+                    </a:lnR>
+                    <a:lnT w="6350" cap="flat" cmpd="sng" algn="ctr">
+                      <a:solidFill>
+                        <a:srgbClr val="334155"/>
+                      </a:solidFill>
+                      <a:prstDash val="solid"/>
+                      <a:round/>
+                      <a:headEnd type="none" w="med" len="med"/>
+                      <a:tailEnd type="none" w="med" len="med"/>
+                    </a:lnT>
+                    <a:lnB w="6350" cap="flat" cmpd="sng" algn="ctr">
+                      <a:solidFill>
+                        <a:srgbClr val="334155"/>
+                      </a:solidFill>
+                      <a:prstDash val="solid"/>
+                      <a:round/>
+                      <a:headEnd type="none" w="med" len="med"/>
+                      <a:tailEnd type="none" w="med" len="med"/>
+                    </a:lnB>
+                    <a:solidFill>
+                      <a:srgbClr val="0F172A"/>
+                    </a:solidFill>
+                  </a:tcPr>
+                </a:tc>
+              </a:tr>
+            </a:tbl>
+          </a:graphicData>
+        </a:graphic>
+      </p:graphicFrame>
+      <p:sp>
+        <p:nvSpPr>
+          <p:cNvPr id="4" name="Shape 1"/>
+          <p:cNvSpPr/>
+          <p:nvPr/>
+        </p:nvSpPr>
+        <p:spPr>
+          <a:xfrm>
+            <a:off x="0" y="4709160"/>
+            <a:ext cx="9144000" cy="434340"/>
+          </a:xfrm>
+          <a:prstGeom prst="rect">
+            <a:avLst/>
+          </a:prstGeom>
+          <a:solidFill>
+            <a:srgbClr val="1E293B"/>
+          </a:solidFill>
+          <a:ln/>
+        </p:spPr>
+      </p:sp>
+      <p:sp>
+        <p:nvSpPr>
+          <p:cNvPr id="5" name="Text 2"/>
+          <p:cNvSpPr/>
+          <p:nvPr/>
+        </p:nvSpPr>
+        <p:spPr>
+          <a:xfrm>
+            <a:off x="365760" y="4736592"/>
+            <a:ext cx="6400800" cy="347472"/>
+          </a:xfrm>
+          <a:prstGeom prst="rect">
+            <a:avLst/>
+          </a:prstGeom>
+          <a:noFill/>
+          <a:ln/>
+        </p:spPr>
+        <p:txBody>
+          <a:bodyPr wrap="square" lIns="0" tIns="0" rIns="0" bIns="0" rtlCol="0" anchor="ctr"/>
+          <a:lstStyle/>
+          <a:p>
+            <a:pPr indent="0" marL="0">
+              <a:buNone/>
+            </a:pPr>
+            <a:r>
+              <a:rPr lang="en-US" sz="800" dirty="0">
+                <a:solidFill>
+                  <a:srgbClr val="94A3B8"/>
+                </a:solidFill>
+                <a:latin typeface="Calibri" pitchFamily="34" charset="0"/>
+                <a:ea typeface="Calibri" pitchFamily="34" charset="-122"/>
+                <a:cs typeface="Calibri" pitchFamily="34" charset="-120"/>
+              </a:rPr>
+              <a:t>Edidiong Emmanuel Samuel  |  NIIT — MMS (Software Engineering)  |  2025/2026</a:t>
+            </a:r>
+            <a:endParaRPr lang="en-US" sz="800" dirty="0"/>
+          </a:p>
+        </p:txBody>
+      </p:sp>
+      <p:sp>
+        <p:nvSpPr>
+          <p:cNvPr id="6" name="Text 3"/>
+          <p:cNvSpPr/>
+          <p:nvPr/>
+        </p:nvSpPr>
+        <p:spPr>
+          <a:xfrm>
+            <a:off x="8229600" y="4736592"/>
+            <a:ext cx="548640" cy="347472"/>
+          </a:xfrm>
+          <a:prstGeom prst="rect">
+            <a:avLst/>
+          </a:prstGeom>
+          <a:noFill/>
+          <a:ln/>
+        </p:spPr>
+        <p:txBody>
+          <a:bodyPr wrap="square" lIns="0" tIns="0" rIns="0" bIns="0" rtlCol="0" anchor="ctr"/>
+          <a:lstStyle/>
+          <a:p>
+            <a:pPr algn="r" indent="0" marL="0">
+              <a:buNone/>
+            </a:pPr>
+            <a:r>
+              <a:rPr lang="en-US" sz="800" dirty="0">
+                <a:solidFill>
+                  <a:srgbClr val="94A3B8"/>
+                </a:solidFill>
+                <a:latin typeface="Calibri" pitchFamily="34" charset="0"/>
+                <a:ea typeface="Calibri" pitchFamily="34" charset="-122"/>
+                <a:cs typeface="Calibri" pitchFamily="34" charset="-120"/>
+              </a:rPr>
+              <a:t>14</a:t>
+            </a:r>
+            <a:endParaRPr lang="en-US" sz="800" dirty="0"/>
+          </a:p>
+        </p:txBody>
+      </p:sp>
+    </p:spTree>
+  </p:cSld>
+  <p:clrMapOvr>
+    <a:masterClrMapping/>
+  </p:clrMapOvr>
+</p:sld>
+</file>
+
+<file path=ppt/slides/slide15.xml><?xml version="1.0" encoding="utf-8"?>
+<p:sld xmlns:a="http://schemas.openxmlformats.org/drawingml/2006/main" xmlns:r="http://schemas.openxmlformats.org/officeDocument/2006/relationships" xmlns:p="http://schemas.openxmlformats.org/presentationml/2006/main">
+  <p:cSld name="Slide 15">
+    <p:bg>
+      <p:bgPr>
+        <a:solidFill>
+          <a:srgbClr val="0F172A"/>
+        </a:solidFill>
+      </p:bgPr>
+    </p:bg>
+    <p:spTree>
+      <p:nvGrpSpPr>
+        <p:cNvPr id="1" name=""/>
+        <p:cNvGrpSpPr/>
+        <p:nvPr/>
+      </p:nvGrpSpPr>
+      <p:grpSpPr>
+        <a:xfrm>
+          <a:off x="0" y="0"/>
+          <a:ext cx="0" cy="0"/>
+          <a:chOff x="0" y="0"/>
+          <a:chExt cx="0" cy="0"/>
+        </a:xfrm>
+      </p:grpSpPr>
+      <p:sp>
+        <p:nvSpPr>
+          <p:cNvPr id="2" name="Text 0"/>
+          <p:cNvSpPr/>
+          <p:nvPr/>
+        </p:nvSpPr>
+        <p:spPr>
+          <a:xfrm>
+            <a:off x="548640" y="228600"/>
+            <a:ext cx="8046720" cy="457200"/>
+          </a:xfrm>
+          <a:prstGeom prst="rect">
+            <a:avLst/>
+          </a:prstGeom>
+          <a:noFill/>
+          <a:ln/>
+        </p:spPr>
+        <p:txBody>
+          <a:bodyPr wrap="square" lIns="0" tIns="0" rIns="0" bIns="0" rtlCol="0" anchor="ctr"/>
+          <a:lstStyle/>
+          <a:p>
+            <a:pPr indent="0" marL="0">
               <a:buNone/>
             </a:pPr>
             <a:r>
@@ -6906,7 +12059,7 @@
           </a:solidFill>
           <a:ln/>
           <a:effectLst>
-            <a:outerShdw blurRad="38100" dist="12700" dir="8100000" algn="bl" rotWithShape="0">
+            <a:outerShdw sx="100000" sy="100000" kx="0" ky="0" algn="bl" rotWithShape="0" blurRad="38100" dist="12700" dir="8100000">
               <a:srgbClr val="000000">
                 <a:alpha val="25000"/>
               </a:srgbClr>
@@ -6955,7 +12108,7 @@
           <a:bodyPr wrap="square" lIns="0" tIns="0" rIns="0" bIns="0" rtlCol="0" anchor="t"/>
           <a:lstStyle/>
           <a:p>
-            <a:pPr marL="0" indent="0">
+            <a:pPr indent="0" marL="0">
               <a:buNone/>
             </a:pPr>
             <a:r>
@@ -7014,7 +12167,7 @@
           <a:bodyPr wrap="square" lIns="0" tIns="0" rIns="0" bIns="0" rtlCol="0" anchor="t"/>
           <a:lstStyle/>
           <a:p>
-            <a:pPr marL="0" indent="0">
+            <a:pPr indent="0" marL="0">
               <a:buNone/>
             </a:pPr>
             <a:r>
@@ -7026,7 +12179,7 @@
                 <a:ea typeface="Calibri" pitchFamily="34" charset="-122"/>
                 <a:cs typeface="Calibri" pitchFamily="34" charset="-120"/>
               </a:rPr>
-              <a:t>The three primitives that determine whether a system is genuinely configurable are Role, Enrollment, and Schedule. These must be modelled as relationships and self-referential structures, not as fixed entities.</a:t>
+              <a:t>The three primitives that determine whether a system is genuinely configurable are Role, Enrollment, and Schedule. These must be modelled as relationships and self-referential structures.</a:t>
             </a:r>
             <a:endParaRPr lang="en-US" sz="1200" dirty="0"/>
           </a:p>
@@ -7073,7 +12226,7 @@
           <a:bodyPr wrap="square" lIns="0" tIns="0" rIns="0" bIns="0" rtlCol="0" anchor="t"/>
           <a:lstStyle/>
           <a:p>
-            <a:pPr marL="0" indent="0">
+            <a:pPr indent="0" marL="0">
               <a:buNone/>
             </a:pPr>
             <a:r>
@@ -7085,7 +12238,7 @@
                 <a:ea typeface="Calibri" pitchFamily="34" charset="-122"/>
                 <a:cs typeface="Calibri" pitchFamily="34" charset="-120"/>
               </a:rPr>
-              <a:t>Scope discipline is essential. Supporting K-12 private schools and vocational institutes is achievable and defensible. Attempting to support every institution type simultaneously leads to combinatorial complexity that exceeds the scope of a single project.</a:t>
+              <a:t>Scope discipline is essential. Supporting K-12 private schools and vocational institutes is achievable and defensible. Attempting to support every institution type simultaneously leads to combinatorial complexity.</a:t>
             </a:r>
             <a:endParaRPr lang="en-US" sz="1200" dirty="0"/>
           </a:p>
@@ -7132,7 +12285,7 @@
           <a:bodyPr wrap="square" lIns="0" tIns="0" rIns="0" bIns="0" rtlCol="0" anchor="t"/>
           <a:lstStyle/>
           <a:p>
-            <a:pPr marL="0" indent="0">
+            <a:pPr indent="0" marL="0">
               <a:buNone/>
             </a:pPr>
             <a:r>
@@ -7171,7 +12324,7 @@
           <a:bodyPr wrap="square" rtlCol="0" anchor="ctr"/>
           <a:lstStyle/>
           <a:p>
-            <a:pPr marL="0" indent="0" algn="ctr">
+            <a:pPr algn="ctr" indent="0" marL="0">
               <a:buNone/>
             </a:pPr>
             <a:r>
@@ -7230,7 +12383,7 @@
           <a:bodyPr wrap="square" lIns="0" tIns="0" rIns="0" bIns="0" rtlCol="0" anchor="ctr"/>
           <a:lstStyle/>
           <a:p>
-            <a:pPr marL="0" indent="0">
+            <a:pPr indent="0" marL="0">
               <a:buNone/>
             </a:pPr>
             <a:r>
@@ -7269,7 +12422,7 @@
           <a:bodyPr wrap="square" lIns="0" tIns="0" rIns="0" bIns="0" rtlCol="0" anchor="ctr"/>
           <a:lstStyle/>
           <a:p>
-            <a:pPr marL="0" indent="0" algn="r">
+            <a:pPr algn="r" indent="0" marL="0">
               <a:buNone/>
             </a:pPr>
             <a:r>
@@ -7281,7 +12434,7 @@
                 <a:ea typeface="Calibri" pitchFamily="34" charset="-122"/>
                 <a:cs typeface="Calibri" pitchFamily="34" charset="-120"/>
               </a:rPr>
-              <a:t>14</a:t>
+              <a:t>15</a:t>
             </a:r>
             <a:endParaRPr lang="en-US" sz="800" dirty="0"/>
           </a:p>
@@ -7303,7 +12456,6 @@
         <a:solidFill>
           <a:srgbClr val="0F172A"/>
         </a:solidFill>
-        <a:effectLst/>
       </p:bgPr>
     </p:bg>
     <p:spTree>
@@ -7341,7 +12493,7 @@
           <a:bodyPr wrap="square" lIns="0" tIns="0" rIns="0" bIns="0" rtlCol="0" anchor="ctr"/>
           <a:lstStyle/>
           <a:p>
-            <a:pPr marL="0" indent="0">
+            <a:pPr indent="0" marL="0">
               <a:buNone/>
             </a:pPr>
             <a:r>
@@ -7378,7 +12530,7 @@
           </a:solidFill>
           <a:ln/>
           <a:effectLst>
-            <a:outerShdw blurRad="38100" dist="12700" dir="8100000" algn="bl" rotWithShape="0">
+            <a:outerShdw sx="100000" sy="100000" kx="0" ky="0" algn="bl" rotWithShape="0" blurRad="38100" dist="12700" dir="8100000">
               <a:srgbClr val="000000">
                 <a:alpha val="25000"/>
               </a:srgbClr>
@@ -7407,7 +12559,7 @@
           <a:bodyPr wrap="square" rtlCol="0" anchor="ctr"/>
           <a:lstStyle/>
           <a:p>
-            <a:pPr marL="0" indent="0" algn="ctr">
+            <a:pPr algn="ctr" indent="0" marL="0">
               <a:buNone/>
             </a:pPr>
             <a:r>
@@ -7421,6 +12573,9 @@
               </a:rPr>
               <a:t>“</a:t>
             </a:r>
+            <a:pPr algn="ctr" indent="0" marL="0">
+              <a:buNone/>
+            </a:pPr>
             <a:r>
               <a:rPr lang="en-US" sz="1700" dirty="0">
                 <a:solidFill>
@@ -7432,6 +12587,9 @@
               </a:rPr>
               <a:t>A university’s section, a bootcamp’s batch, and a primary school’s class are the same entity wearing different labels.</a:t>
             </a:r>
+            <a:pPr algn="ctr" indent="0" marL="0">
+              <a:buNone/>
+            </a:pPr>
             <a:r>
               <a:rPr lang="en-US" sz="3200" dirty="0">
                 <a:solidFill>
@@ -7466,7 +12624,7 @@
           </a:solidFill>
           <a:ln/>
           <a:effectLst>
-            <a:outerShdw blurRad="38100" dist="12700" dir="8100000" algn="bl" rotWithShape="0">
+            <a:outerShdw sx="100000" sy="100000" kx="0" ky="0" algn="bl" rotWithShape="0" blurRad="38100" dist="12700" dir="8100000">
               <a:srgbClr val="000000">
                 <a:alpha val="25000"/>
               </a:srgbClr>
@@ -7495,7 +12653,7 @@
           <a:bodyPr wrap="square" lIns="0" tIns="0" rIns="0" bIns="0" rtlCol="0" anchor="ctr"/>
           <a:lstStyle/>
           <a:p>
-            <a:pPr marL="0" indent="0">
+            <a:pPr indent="0" marL="0">
               <a:buNone/>
             </a:pPr>
             <a:r>
@@ -7534,7 +12692,7 @@
           <a:bodyPr wrap="square" lIns="0" tIns="0" rIns="0" bIns="0" rtlCol="0" anchor="ctr"/>
           <a:lstStyle/>
           <a:p>
-            <a:pPr marL="0" indent="0">
+            <a:pPr indent="0" marL="0">
               <a:buNone/>
             </a:pPr>
             <a:r>
@@ -7546,7 +12704,7 @@
                 <a:ea typeface="Calibri" pitchFamily="34" charset="-122"/>
                 <a:cs typeface="Calibri" pitchFamily="34" charset="-120"/>
               </a:rPr>
-              <a:t>One entity, one table, one set of business logic. Never duplicate code for each institution type. The underlying concept stays the same regardless of what it is called.</a:t>
+              <a:t>One entity, one table, one set of business logic. Never duplicate code for each institution type.</a:t>
             </a:r>
             <a:endParaRPr lang="en-US" sz="1100" dirty="0"/>
           </a:p>
@@ -7571,7 +12729,7 @@
           </a:solidFill>
           <a:ln/>
           <a:effectLst>
-            <a:outerShdw blurRad="38100" dist="12700" dir="8100000" algn="bl" rotWithShape="0">
+            <a:outerShdw sx="100000" sy="100000" kx="0" ky="0" algn="bl" rotWithShape="0" blurRad="38100" dist="12700" dir="8100000">
               <a:srgbClr val="000000">
                 <a:alpha val="25000"/>
               </a:srgbClr>
@@ -7600,7 +12758,7 @@
           <a:bodyPr wrap="square" lIns="0" tIns="0" rIns="0" bIns="0" rtlCol="0" anchor="ctr"/>
           <a:lstStyle/>
           <a:p>
-            <a:pPr marL="0" indent="0">
+            <a:pPr indent="0" marL="0">
               <a:buNone/>
             </a:pPr>
             <a:r>
@@ -7639,7 +12797,7 @@
           <a:bodyPr wrap="square" lIns="0" tIns="0" rIns="0" bIns="0" rtlCol="0" anchor="ctr"/>
           <a:lstStyle/>
           <a:p>
-            <a:pPr marL="0" indent="0">
+            <a:pPr indent="0" marL="0">
               <a:buNone/>
             </a:pPr>
             <a:r>
@@ -7698,7 +12856,7 @@
           <a:bodyPr wrap="square" lIns="0" tIns="0" rIns="0" bIns="0" rtlCol="0" anchor="ctr"/>
           <a:lstStyle/>
           <a:p>
-            <a:pPr marL="0" indent="0">
+            <a:pPr indent="0" marL="0">
               <a:buNone/>
             </a:pPr>
             <a:r>
@@ -7737,7 +12895,7 @@
           <a:bodyPr wrap="square" lIns="0" tIns="0" rIns="0" bIns="0" rtlCol="0" anchor="ctr"/>
           <a:lstStyle/>
           <a:p>
-            <a:pPr marL="0" indent="0" algn="r">
+            <a:pPr algn="r" indent="0" marL="0">
               <a:buNone/>
             </a:pPr>
             <a:r>
@@ -7771,7 +12929,6 @@
         <a:solidFill>
           <a:srgbClr val="0F172A"/>
         </a:solidFill>
-        <a:effectLst/>
       </p:bgPr>
     </p:bg>
     <p:spTree>
@@ -7809,7 +12966,7 @@
           <a:bodyPr wrap="square" lIns="0" tIns="0" rIns="0" bIns="0" rtlCol="0" anchor="ctr"/>
           <a:lstStyle/>
           <a:p>
-            <a:pPr marL="0" indent="0">
+            <a:pPr indent="0" marL="0">
               <a:buNone/>
             </a:pPr>
             <a:r>
@@ -7843,41 +13000,17 @@
         </p:nvGraphicFramePr>
         <p:xfrm>
           <a:off x="274320" y="868680"/>
-          <a:ext cx="8595360" cy="3730752"/>
+          <a:ext cx="8595360" cy="914400"/>
         </p:xfrm>
         <a:graphic>
           <a:graphicData uri="http://schemas.openxmlformats.org/drawingml/2006/table">
             <a:tbl>
               <a:tblPr/>
               <a:tblGrid>
-                <a:gridCol w="365760">
-                  <a:extLst>
-                    <a:ext uri="{9D8B030D-6E8A-4147-A177-3AD203B41FA5}">
-                      <a16:colId xmlns:a16="http://schemas.microsoft.com/office/drawing/2014/main" val="20000"/>
-                    </a:ext>
-                  </a:extLst>
-                </a:gridCol>
-                <a:gridCol w="1554480">
-                  <a:extLst>
-                    <a:ext uri="{9D8B030D-6E8A-4147-A177-3AD203B41FA5}">
-                      <a16:colId xmlns:a16="http://schemas.microsoft.com/office/drawing/2014/main" val="20001"/>
-                    </a:ext>
-                  </a:extLst>
-                </a:gridCol>
-                <a:gridCol w="2560320">
-                  <a:extLst>
-                    <a:ext uri="{9D8B030D-6E8A-4147-A177-3AD203B41FA5}">
-                      <a16:colId xmlns:a16="http://schemas.microsoft.com/office/drawing/2014/main" val="20002"/>
-                    </a:ext>
-                  </a:extLst>
-                </a:gridCol>
-                <a:gridCol w="4114800">
-                  <a:extLst>
-                    <a:ext uri="{9D8B030D-6E8A-4147-A177-3AD203B41FA5}">
-                      <a16:colId xmlns:a16="http://schemas.microsoft.com/office/drawing/2014/main" val="20003"/>
-                    </a:ext>
-                  </a:extLst>
-                </a:gridCol>
+                <a:gridCol w="365760"/>
+                <a:gridCol w="1554480"/>
+                <a:gridCol w="2560320"/>
+                <a:gridCol w="4114800"/>
               </a:tblGrid>
               <a:tr h="274320">
                 <a:tc>
@@ -7885,7 +13018,7 @@
                     <a:bodyPr/>
                     <a:lstStyle/>
                     <a:p>
-                      <a:pPr marL="0" indent="0" algn="ctr">
+                      <a:pPr algn="ctr" indent="0" marL="0">
                         <a:buNone/>
                       </a:pPr>
                       <a:r>
@@ -7906,7 +13039,7 @@
                       </a:endParaRPr>
                     </a:p>
                   </a:txBody>
-                  <a:tcPr anchor="ctr">
+                  <a:tcPr marL="91440" marR="91440" marT="45720" marB="45720" anchor="ctr">
                     <a:lnL w="6350" cap="flat" cmpd="sng" algn="ctr">
                       <a:solidFill>
                         <a:srgbClr val="334155"/>
@@ -7953,7 +13086,7 @@
                     <a:bodyPr/>
                     <a:lstStyle/>
                     <a:p>
-                      <a:pPr marL="0" indent="0" algn="ctr">
+                      <a:pPr algn="ctr" indent="0" marL="0">
                         <a:buNone/>
                       </a:pPr>
                       <a:r>
@@ -7974,7 +13107,7 @@
                       </a:endParaRPr>
                     </a:p>
                   </a:txBody>
-                  <a:tcPr anchor="ctr">
+                  <a:tcPr marL="91440" marR="91440" marT="45720" marB="45720" anchor="ctr">
                     <a:lnL w="6350" cap="flat" cmpd="sng" algn="ctr">
                       <a:solidFill>
                         <a:srgbClr val="334155"/>
@@ -8021,7 +13154,7 @@
                     <a:bodyPr/>
                     <a:lstStyle/>
                     <a:p>
-                      <a:pPr marL="0" indent="0" algn="ctr">
+                      <a:pPr algn="ctr" indent="0" marL="0">
                         <a:buNone/>
                       </a:pPr>
                       <a:r>
@@ -8042,7 +13175,7 @@
                       </a:endParaRPr>
                     </a:p>
                   </a:txBody>
-                  <a:tcPr anchor="ctr">
+                  <a:tcPr marL="91440" marR="91440" marT="45720" marB="45720" anchor="ctr">
                     <a:lnL w="6350" cap="flat" cmpd="sng" algn="ctr">
                       <a:solidFill>
                         <a:srgbClr val="334155"/>
@@ -8089,7 +13222,7 @@
                     <a:bodyPr/>
                     <a:lstStyle/>
                     <a:p>
-                      <a:pPr marL="0" indent="0" algn="ctr">
+                      <a:pPr algn="ctr" indent="0" marL="0">
                         <a:buNone/>
                       </a:pPr>
                       <a:r>
@@ -8110,7 +13243,7 @@
                       </a:endParaRPr>
                     </a:p>
                   </a:txBody>
-                  <a:tcPr anchor="ctr">
+                  <a:tcPr marL="91440" marR="91440" marT="45720" marB="45720" anchor="ctr">
                     <a:lnL w="6350" cap="flat" cmpd="sng" algn="ctr">
                       <a:solidFill>
                         <a:srgbClr val="334155"/>
@@ -8152,11 +13285,6 @@
                     </a:solidFill>
                   </a:tcPr>
                 </a:tc>
-                <a:extLst>
-                  <a:ext uri="{0D108BD9-81ED-4DB2-BD59-A6C34878D82A}">
-                    <a16:rowId xmlns:a16="http://schemas.microsoft.com/office/drawing/2014/main" val="10000"/>
-                  </a:ext>
-                </a:extLst>
               </a:tr>
               <a:tr h="246888">
                 <a:tc>
@@ -8164,7 +13292,7 @@
                     <a:bodyPr/>
                     <a:lstStyle/>
                     <a:p>
-                      <a:pPr marL="0" indent="0">
+                      <a:pPr indent="0" marL="0">
                         <a:buNone/>
                       </a:pPr>
                       <a:r>
@@ -8185,7 +13313,7 @@
                       </a:endParaRPr>
                     </a:p>
                   </a:txBody>
-                  <a:tcPr anchor="ctr">
+                  <a:tcPr marL="91440" marR="91440" marT="45720" marB="45720" anchor="ctr">
                     <a:lnL w="6350" cap="flat" cmpd="sng" algn="ctr">
                       <a:solidFill>
                         <a:srgbClr val="334155"/>
@@ -8232,7 +13360,7 @@
                     <a:bodyPr/>
                     <a:lstStyle/>
                     <a:p>
-                      <a:pPr marL="0" indent="0">
+                      <a:pPr indent="0" marL="0">
                         <a:buNone/>
                       </a:pPr>
                       <a:r>
@@ -8253,7 +13381,7 @@
                       </a:endParaRPr>
                     </a:p>
                   </a:txBody>
-                  <a:tcPr anchor="ctr">
+                  <a:tcPr marL="91440" marR="91440" marT="45720" marB="45720" anchor="ctr">
                     <a:lnL w="6350" cap="flat" cmpd="sng" algn="ctr">
                       <a:solidFill>
                         <a:srgbClr val="334155"/>
@@ -8300,7 +13428,7 @@
                     <a:bodyPr/>
                     <a:lstStyle/>
                     <a:p>
-                      <a:pPr marL="0" indent="0">
+                      <a:pPr indent="0" marL="0">
                         <a:buNone/>
                       </a:pPr>
                       <a:r>
@@ -8321,7 +13449,7 @@
                       </a:endParaRPr>
                     </a:p>
                   </a:txBody>
-                  <a:tcPr anchor="ctr">
+                  <a:tcPr marL="91440" marR="91440" marT="45720" marB="45720" anchor="ctr">
                     <a:lnL w="6350" cap="flat" cmpd="sng" algn="ctr">
                       <a:solidFill>
                         <a:srgbClr val="334155"/>
@@ -8368,7 +13496,7 @@
                     <a:bodyPr/>
                     <a:lstStyle/>
                     <a:p>
-                      <a:pPr marL="0" indent="0">
+                      <a:pPr indent="0" marL="0">
                         <a:buNone/>
                       </a:pPr>
                       <a:r>
@@ -8389,7 +13517,7 @@
                       </a:endParaRPr>
                     </a:p>
                   </a:txBody>
-                  <a:tcPr anchor="ctr">
+                  <a:tcPr marL="91440" marR="91440" marT="45720" marB="45720" anchor="ctr">
                     <a:lnL w="6350" cap="flat" cmpd="sng" algn="ctr">
                       <a:solidFill>
                         <a:srgbClr val="334155"/>
@@ -8431,11 +13559,6 @@
                     </a:solidFill>
                   </a:tcPr>
                 </a:tc>
-                <a:extLst>
-                  <a:ext uri="{0D108BD9-81ED-4DB2-BD59-A6C34878D82A}">
-                    <a16:rowId xmlns:a16="http://schemas.microsoft.com/office/drawing/2014/main" val="10001"/>
-                  </a:ext>
-                </a:extLst>
               </a:tr>
               <a:tr h="246888">
                 <a:tc>
@@ -8443,7 +13566,7 @@
                     <a:bodyPr/>
                     <a:lstStyle/>
                     <a:p>
-                      <a:pPr marL="0" indent="0">
+                      <a:pPr indent="0" marL="0">
                         <a:buNone/>
                       </a:pPr>
                       <a:r>
@@ -8464,7 +13587,7 @@
                       </a:endParaRPr>
                     </a:p>
                   </a:txBody>
-                  <a:tcPr anchor="ctr">
+                  <a:tcPr marL="91440" marR="91440" marT="45720" marB="45720" anchor="ctr">
                     <a:lnL w="6350" cap="flat" cmpd="sng" algn="ctr">
                       <a:solidFill>
                         <a:srgbClr val="334155"/>
@@ -8511,7 +13634,7 @@
                     <a:bodyPr/>
                     <a:lstStyle/>
                     <a:p>
-                      <a:pPr marL="0" indent="0">
+                      <a:pPr indent="0" marL="0">
                         <a:buNone/>
                       </a:pPr>
                       <a:r>
@@ -8532,7 +13655,7 @@
                       </a:endParaRPr>
                     </a:p>
                   </a:txBody>
-                  <a:tcPr anchor="ctr">
+                  <a:tcPr marL="91440" marR="91440" marT="45720" marB="45720" anchor="ctr">
                     <a:lnL w="6350" cap="flat" cmpd="sng" algn="ctr">
                       <a:solidFill>
                         <a:srgbClr val="334155"/>
@@ -8579,7 +13702,7 @@
                     <a:bodyPr/>
                     <a:lstStyle/>
                     <a:p>
-                      <a:pPr marL="0" indent="0">
+                      <a:pPr indent="0" marL="0">
                         <a:buNone/>
                       </a:pPr>
                       <a:r>
@@ -8600,7 +13723,7 @@
                       </a:endParaRPr>
                     </a:p>
                   </a:txBody>
-                  <a:tcPr anchor="ctr">
+                  <a:tcPr marL="91440" marR="91440" marT="45720" marB="45720" anchor="ctr">
                     <a:lnL w="6350" cap="flat" cmpd="sng" algn="ctr">
                       <a:solidFill>
                         <a:srgbClr val="334155"/>
@@ -8647,7 +13770,7 @@
                     <a:bodyPr/>
                     <a:lstStyle/>
                     <a:p>
-                      <a:pPr marL="0" indent="0">
+                      <a:pPr indent="0" marL="0">
                         <a:buNone/>
                       </a:pPr>
                       <a:r>
@@ -8668,7 +13791,7 @@
                       </a:endParaRPr>
                     </a:p>
                   </a:txBody>
-                  <a:tcPr anchor="ctr">
+                  <a:tcPr marL="91440" marR="91440" marT="45720" marB="45720" anchor="ctr">
                     <a:lnL w="6350" cap="flat" cmpd="sng" algn="ctr">
                       <a:solidFill>
                         <a:srgbClr val="334155"/>
@@ -8710,11 +13833,6 @@
                     </a:solidFill>
                   </a:tcPr>
                 </a:tc>
-                <a:extLst>
-                  <a:ext uri="{0D108BD9-81ED-4DB2-BD59-A6C34878D82A}">
-                    <a16:rowId xmlns:a16="http://schemas.microsoft.com/office/drawing/2014/main" val="10002"/>
-                  </a:ext>
-                </a:extLst>
               </a:tr>
               <a:tr h="246888">
                 <a:tc>
@@ -8722,7 +13840,7 @@
                     <a:bodyPr/>
                     <a:lstStyle/>
                     <a:p>
-                      <a:pPr marL="0" indent="0">
+                      <a:pPr indent="0" marL="0">
                         <a:buNone/>
                       </a:pPr>
                       <a:r>
@@ -8743,7 +13861,7 @@
                       </a:endParaRPr>
                     </a:p>
                   </a:txBody>
-                  <a:tcPr anchor="ctr">
+                  <a:tcPr marL="91440" marR="91440" marT="45720" marB="45720" anchor="ctr">
                     <a:lnL w="6350" cap="flat" cmpd="sng" algn="ctr">
                       <a:solidFill>
                         <a:srgbClr val="334155"/>
@@ -8790,7 +13908,7 @@
                     <a:bodyPr/>
                     <a:lstStyle/>
                     <a:p>
-                      <a:pPr marL="0" indent="0">
+                      <a:pPr indent="0" marL="0">
                         <a:buNone/>
                       </a:pPr>
                       <a:r>
@@ -8811,7 +13929,7 @@
                       </a:endParaRPr>
                     </a:p>
                   </a:txBody>
-                  <a:tcPr anchor="ctr">
+                  <a:tcPr marL="91440" marR="91440" marT="45720" marB="45720" anchor="ctr">
                     <a:lnL w="6350" cap="flat" cmpd="sng" algn="ctr">
                       <a:solidFill>
                         <a:srgbClr val="334155"/>
@@ -8858,7 +13976,7 @@
                     <a:bodyPr/>
                     <a:lstStyle/>
                     <a:p>
-                      <a:pPr marL="0" indent="0">
+                      <a:pPr indent="0" marL="0">
                         <a:buNone/>
                       </a:pPr>
                       <a:r>
@@ -8879,7 +13997,7 @@
                       </a:endParaRPr>
                     </a:p>
                   </a:txBody>
-                  <a:tcPr anchor="ctr">
+                  <a:tcPr marL="91440" marR="91440" marT="45720" marB="45720" anchor="ctr">
                     <a:lnL w="6350" cap="flat" cmpd="sng" algn="ctr">
                       <a:solidFill>
                         <a:srgbClr val="334155"/>
@@ -8926,7 +14044,7 @@
                     <a:bodyPr/>
                     <a:lstStyle/>
                     <a:p>
-                      <a:pPr marL="0" indent="0">
+                      <a:pPr indent="0" marL="0">
                         <a:buNone/>
                       </a:pPr>
                       <a:r>
@@ -8947,7 +14065,7 @@
                       </a:endParaRPr>
                     </a:p>
                   </a:txBody>
-                  <a:tcPr anchor="ctr">
+                  <a:tcPr marL="91440" marR="91440" marT="45720" marB="45720" anchor="ctr">
                     <a:lnL w="6350" cap="flat" cmpd="sng" algn="ctr">
                       <a:solidFill>
                         <a:srgbClr val="334155"/>
@@ -8989,11 +14107,6 @@
                     </a:solidFill>
                   </a:tcPr>
                 </a:tc>
-                <a:extLst>
-                  <a:ext uri="{0D108BD9-81ED-4DB2-BD59-A6C34878D82A}">
-                    <a16:rowId xmlns:a16="http://schemas.microsoft.com/office/drawing/2014/main" val="10003"/>
-                  </a:ext>
-                </a:extLst>
               </a:tr>
               <a:tr h="246888">
                 <a:tc>
@@ -9001,7 +14114,7 @@
                     <a:bodyPr/>
                     <a:lstStyle/>
                     <a:p>
-                      <a:pPr marL="0" indent="0">
+                      <a:pPr indent="0" marL="0">
                         <a:buNone/>
                       </a:pPr>
                       <a:r>
@@ -9022,7 +14135,7 @@
                       </a:endParaRPr>
                     </a:p>
                   </a:txBody>
-                  <a:tcPr anchor="ctr">
+                  <a:tcPr marL="91440" marR="91440" marT="45720" marB="45720" anchor="ctr">
                     <a:lnL w="6350" cap="flat" cmpd="sng" algn="ctr">
                       <a:solidFill>
                         <a:srgbClr val="334155"/>
@@ -9069,7 +14182,7 @@
                     <a:bodyPr/>
                     <a:lstStyle/>
                     <a:p>
-                      <a:pPr marL="0" indent="0">
+                      <a:pPr indent="0" marL="0">
                         <a:buNone/>
                       </a:pPr>
                       <a:r>
@@ -9090,7 +14203,7 @@
                       </a:endParaRPr>
                     </a:p>
                   </a:txBody>
-                  <a:tcPr anchor="ctr">
+                  <a:tcPr marL="91440" marR="91440" marT="45720" marB="45720" anchor="ctr">
                     <a:lnL w="6350" cap="flat" cmpd="sng" algn="ctr">
                       <a:solidFill>
                         <a:srgbClr val="334155"/>
@@ -9137,7 +14250,7 @@
                     <a:bodyPr/>
                     <a:lstStyle/>
                     <a:p>
-                      <a:pPr marL="0" indent="0">
+                      <a:pPr indent="0" marL="0">
                         <a:buNone/>
                       </a:pPr>
                       <a:r>
@@ -9158,7 +14271,7 @@
                       </a:endParaRPr>
                     </a:p>
                   </a:txBody>
-                  <a:tcPr anchor="ctr">
+                  <a:tcPr marL="91440" marR="91440" marT="45720" marB="45720" anchor="ctr">
                     <a:lnL w="6350" cap="flat" cmpd="sng" algn="ctr">
                       <a:solidFill>
                         <a:srgbClr val="334155"/>
@@ -9205,7 +14318,7 @@
                     <a:bodyPr/>
                     <a:lstStyle/>
                     <a:p>
-                      <a:pPr marL="0" indent="0">
+                      <a:pPr indent="0" marL="0">
                         <a:buNone/>
                       </a:pPr>
                       <a:r>
@@ -9226,7 +14339,7 @@
                       </a:endParaRPr>
                     </a:p>
                   </a:txBody>
-                  <a:tcPr anchor="ctr">
+                  <a:tcPr marL="91440" marR="91440" marT="45720" marB="45720" anchor="ctr">
                     <a:lnL w="6350" cap="flat" cmpd="sng" algn="ctr">
                       <a:solidFill>
                         <a:srgbClr val="334155"/>
@@ -9268,11 +14381,6 @@
                     </a:solidFill>
                   </a:tcPr>
                 </a:tc>
-                <a:extLst>
-                  <a:ext uri="{0D108BD9-81ED-4DB2-BD59-A6C34878D82A}">
-                    <a16:rowId xmlns:a16="http://schemas.microsoft.com/office/drawing/2014/main" val="10004"/>
-                  </a:ext>
-                </a:extLst>
               </a:tr>
               <a:tr h="246888">
                 <a:tc>
@@ -9280,7 +14388,7 @@
                     <a:bodyPr/>
                     <a:lstStyle/>
                     <a:p>
-                      <a:pPr marL="0" indent="0">
+                      <a:pPr indent="0" marL="0">
                         <a:buNone/>
                       </a:pPr>
                       <a:r>
@@ -9301,7 +14409,7 @@
                       </a:endParaRPr>
                     </a:p>
                   </a:txBody>
-                  <a:tcPr anchor="ctr">
+                  <a:tcPr marL="91440" marR="91440" marT="45720" marB="45720" anchor="ctr">
                     <a:lnL w="6350" cap="flat" cmpd="sng" algn="ctr">
                       <a:solidFill>
                         <a:srgbClr val="334155"/>
@@ -9348,7 +14456,7 @@
                     <a:bodyPr/>
                     <a:lstStyle/>
                     <a:p>
-                      <a:pPr marL="0" indent="0">
+                      <a:pPr indent="0" marL="0">
                         <a:buNone/>
                       </a:pPr>
                       <a:r>
@@ -9369,7 +14477,7 @@
                       </a:endParaRPr>
                     </a:p>
                   </a:txBody>
-                  <a:tcPr anchor="ctr">
+                  <a:tcPr marL="91440" marR="91440" marT="45720" marB="45720" anchor="ctr">
                     <a:lnL w="6350" cap="flat" cmpd="sng" algn="ctr">
                       <a:solidFill>
                         <a:srgbClr val="334155"/>
@@ -9416,7 +14524,7 @@
                     <a:bodyPr/>
                     <a:lstStyle/>
                     <a:p>
-                      <a:pPr marL="0" indent="0">
+                      <a:pPr indent="0" marL="0">
                         <a:buNone/>
                       </a:pPr>
                       <a:r>
@@ -9437,7 +14545,7 @@
                       </a:endParaRPr>
                     </a:p>
                   </a:txBody>
-                  <a:tcPr anchor="ctr">
+                  <a:tcPr marL="91440" marR="91440" marT="45720" marB="45720" anchor="ctr">
                     <a:lnL w="6350" cap="flat" cmpd="sng" algn="ctr">
                       <a:solidFill>
                         <a:srgbClr val="334155"/>
@@ -9484,7 +14592,7 @@
                     <a:bodyPr/>
                     <a:lstStyle/>
                     <a:p>
-                      <a:pPr marL="0" indent="0">
+                      <a:pPr indent="0" marL="0">
                         <a:buNone/>
                       </a:pPr>
                       <a:r>
@@ -9505,7 +14613,7 @@
                       </a:endParaRPr>
                     </a:p>
                   </a:txBody>
-                  <a:tcPr anchor="ctr">
+                  <a:tcPr marL="91440" marR="91440" marT="45720" marB="45720" anchor="ctr">
                     <a:lnL w="6350" cap="flat" cmpd="sng" algn="ctr">
                       <a:solidFill>
                         <a:srgbClr val="334155"/>
@@ -9547,11 +14655,6 @@
                     </a:solidFill>
                   </a:tcPr>
                 </a:tc>
-                <a:extLst>
-                  <a:ext uri="{0D108BD9-81ED-4DB2-BD59-A6C34878D82A}">
-                    <a16:rowId xmlns:a16="http://schemas.microsoft.com/office/drawing/2014/main" val="10005"/>
-                  </a:ext>
-                </a:extLst>
               </a:tr>
               <a:tr h="246888">
                 <a:tc>
@@ -9559,7 +14662,7 @@
                     <a:bodyPr/>
                     <a:lstStyle/>
                     <a:p>
-                      <a:pPr marL="0" indent="0">
+                      <a:pPr indent="0" marL="0">
                         <a:buNone/>
                       </a:pPr>
                       <a:r>
@@ -9580,7 +14683,7 @@
                       </a:endParaRPr>
                     </a:p>
                   </a:txBody>
-                  <a:tcPr anchor="ctr">
+                  <a:tcPr marL="91440" marR="91440" marT="45720" marB="45720" anchor="ctr">
                     <a:lnL w="6350" cap="flat" cmpd="sng" algn="ctr">
                       <a:solidFill>
                         <a:srgbClr val="334155"/>
@@ -9627,7 +14730,7 @@
                     <a:bodyPr/>
                     <a:lstStyle/>
                     <a:p>
-                      <a:pPr marL="0" indent="0">
+                      <a:pPr indent="0" marL="0">
                         <a:buNone/>
                       </a:pPr>
                       <a:r>
@@ -9648,7 +14751,7 @@
                       </a:endParaRPr>
                     </a:p>
                   </a:txBody>
-                  <a:tcPr anchor="ctr">
+                  <a:tcPr marL="91440" marR="91440" marT="45720" marB="45720" anchor="ctr">
                     <a:lnL w="6350" cap="flat" cmpd="sng" algn="ctr">
                       <a:solidFill>
                         <a:srgbClr val="334155"/>
@@ -9695,7 +14798,7 @@
                     <a:bodyPr/>
                     <a:lstStyle/>
                     <a:p>
-                      <a:pPr marL="0" indent="0">
+                      <a:pPr indent="0" marL="0">
                         <a:buNone/>
                       </a:pPr>
                       <a:r>
@@ -9716,7 +14819,7 @@
                       </a:endParaRPr>
                     </a:p>
                   </a:txBody>
-                  <a:tcPr anchor="ctr">
+                  <a:tcPr marL="91440" marR="91440" marT="45720" marB="45720" anchor="ctr">
                     <a:lnL w="6350" cap="flat" cmpd="sng" algn="ctr">
                       <a:solidFill>
                         <a:srgbClr val="334155"/>
@@ -9763,7 +14866,7 @@
                     <a:bodyPr/>
                     <a:lstStyle/>
                     <a:p>
-                      <a:pPr marL="0" indent="0">
+                      <a:pPr indent="0" marL="0">
                         <a:buNone/>
                       </a:pPr>
                       <a:r>
@@ -9784,7 +14887,7 @@
                       </a:endParaRPr>
                     </a:p>
                   </a:txBody>
-                  <a:tcPr anchor="ctr">
+                  <a:tcPr marL="91440" marR="91440" marT="45720" marB="45720" anchor="ctr">
                     <a:lnL w="6350" cap="flat" cmpd="sng" algn="ctr">
                       <a:solidFill>
                         <a:srgbClr val="334155"/>
@@ -9826,11 +14929,6 @@
                     </a:solidFill>
                   </a:tcPr>
                 </a:tc>
-                <a:extLst>
-                  <a:ext uri="{0D108BD9-81ED-4DB2-BD59-A6C34878D82A}">
-                    <a16:rowId xmlns:a16="http://schemas.microsoft.com/office/drawing/2014/main" val="10006"/>
-                  </a:ext>
-                </a:extLst>
               </a:tr>
               <a:tr h="246888">
                 <a:tc>
@@ -9838,7 +14936,7 @@
                     <a:bodyPr/>
                     <a:lstStyle/>
                     <a:p>
-                      <a:pPr marL="0" indent="0">
+                      <a:pPr indent="0" marL="0">
                         <a:buNone/>
                       </a:pPr>
                       <a:r>
@@ -9859,7 +14957,7 @@
                       </a:endParaRPr>
                     </a:p>
                   </a:txBody>
-                  <a:tcPr anchor="ctr">
+                  <a:tcPr marL="91440" marR="91440" marT="45720" marB="45720" anchor="ctr">
                     <a:lnL w="6350" cap="flat" cmpd="sng" algn="ctr">
                       <a:solidFill>
                         <a:srgbClr val="334155"/>
@@ -9906,7 +15004,7 @@
                     <a:bodyPr/>
                     <a:lstStyle/>
                     <a:p>
-                      <a:pPr marL="0" indent="0">
+                      <a:pPr indent="0" marL="0">
                         <a:buNone/>
                       </a:pPr>
                       <a:r>
@@ -9927,7 +15025,7 @@
                       </a:endParaRPr>
                     </a:p>
                   </a:txBody>
-                  <a:tcPr anchor="ctr">
+                  <a:tcPr marL="91440" marR="91440" marT="45720" marB="45720" anchor="ctr">
                     <a:lnL w="6350" cap="flat" cmpd="sng" algn="ctr">
                       <a:solidFill>
                         <a:srgbClr val="334155"/>
@@ -9974,7 +15072,7 @@
                     <a:bodyPr/>
                     <a:lstStyle/>
                     <a:p>
-                      <a:pPr marL="0" indent="0">
+                      <a:pPr indent="0" marL="0">
                         <a:buNone/>
                       </a:pPr>
                       <a:r>
@@ -9995,7 +15093,7 @@
                       </a:endParaRPr>
                     </a:p>
                   </a:txBody>
-                  <a:tcPr anchor="ctr">
+                  <a:tcPr marL="91440" marR="91440" marT="45720" marB="45720" anchor="ctr">
                     <a:lnL w="6350" cap="flat" cmpd="sng" algn="ctr">
                       <a:solidFill>
                         <a:srgbClr val="334155"/>
@@ -10042,7 +15140,7 @@
                     <a:bodyPr/>
                     <a:lstStyle/>
                     <a:p>
-                      <a:pPr marL="0" indent="0">
+                      <a:pPr indent="0" marL="0">
                         <a:buNone/>
                       </a:pPr>
                       <a:r>
@@ -10063,7 +15161,7 @@
                       </a:endParaRPr>
                     </a:p>
                   </a:txBody>
-                  <a:tcPr anchor="ctr">
+                  <a:tcPr marL="91440" marR="91440" marT="45720" marB="45720" anchor="ctr">
                     <a:lnL w="6350" cap="flat" cmpd="sng" algn="ctr">
                       <a:solidFill>
                         <a:srgbClr val="334155"/>
@@ -10105,11 +15203,6 @@
                     </a:solidFill>
                   </a:tcPr>
                 </a:tc>
-                <a:extLst>
-                  <a:ext uri="{0D108BD9-81ED-4DB2-BD59-A6C34878D82A}">
-                    <a16:rowId xmlns:a16="http://schemas.microsoft.com/office/drawing/2014/main" val="10007"/>
-                  </a:ext>
-                </a:extLst>
               </a:tr>
               <a:tr h="246888">
                 <a:tc>
@@ -10117,7 +15210,7 @@
                     <a:bodyPr/>
                     <a:lstStyle/>
                     <a:p>
-                      <a:pPr marL="0" indent="0">
+                      <a:pPr indent="0" marL="0">
                         <a:buNone/>
                       </a:pPr>
                       <a:r>
@@ -10138,7 +15231,7 @@
                       </a:endParaRPr>
                     </a:p>
                   </a:txBody>
-                  <a:tcPr anchor="ctr">
+                  <a:tcPr marL="91440" marR="91440" marT="45720" marB="45720" anchor="ctr">
                     <a:lnL w="6350" cap="flat" cmpd="sng" algn="ctr">
                       <a:solidFill>
                         <a:srgbClr val="334155"/>
@@ -10185,7 +15278,7 @@
                     <a:bodyPr/>
                     <a:lstStyle/>
                     <a:p>
-                      <a:pPr marL="0" indent="0">
+                      <a:pPr indent="0" marL="0">
                         <a:buNone/>
                       </a:pPr>
                       <a:r>
@@ -10206,7 +15299,7 @@
                       </a:endParaRPr>
                     </a:p>
                   </a:txBody>
-                  <a:tcPr anchor="ctr">
+                  <a:tcPr marL="91440" marR="91440" marT="45720" marB="45720" anchor="ctr">
                     <a:lnL w="6350" cap="flat" cmpd="sng" algn="ctr">
                       <a:solidFill>
                         <a:srgbClr val="334155"/>
@@ -10253,7 +15346,7 @@
                     <a:bodyPr/>
                     <a:lstStyle/>
                     <a:p>
-                      <a:pPr marL="0" indent="0">
+                      <a:pPr indent="0" marL="0">
                         <a:buNone/>
                       </a:pPr>
                       <a:r>
@@ -10274,7 +15367,7 @@
                       </a:endParaRPr>
                     </a:p>
                   </a:txBody>
-                  <a:tcPr anchor="ctr">
+                  <a:tcPr marL="91440" marR="91440" marT="45720" marB="45720" anchor="ctr">
                     <a:lnL w="6350" cap="flat" cmpd="sng" algn="ctr">
                       <a:solidFill>
                         <a:srgbClr val="334155"/>
@@ -10321,7 +15414,7 @@
                     <a:bodyPr/>
                     <a:lstStyle/>
                     <a:p>
-                      <a:pPr marL="0" indent="0">
+                      <a:pPr indent="0" marL="0">
                         <a:buNone/>
                       </a:pPr>
                       <a:r>
@@ -10342,7 +15435,7 @@
                       </a:endParaRPr>
                     </a:p>
                   </a:txBody>
-                  <a:tcPr anchor="ctr">
+                  <a:tcPr marL="91440" marR="91440" marT="45720" marB="45720" anchor="ctr">
                     <a:lnL w="6350" cap="flat" cmpd="sng" algn="ctr">
                       <a:solidFill>
                         <a:srgbClr val="334155"/>
@@ -10384,11 +15477,6 @@
                     </a:solidFill>
                   </a:tcPr>
                 </a:tc>
-                <a:extLst>
-                  <a:ext uri="{0D108BD9-81ED-4DB2-BD59-A6C34878D82A}">
-                    <a16:rowId xmlns:a16="http://schemas.microsoft.com/office/drawing/2014/main" val="10008"/>
-                  </a:ext>
-                </a:extLst>
               </a:tr>
               <a:tr h="246888">
                 <a:tc>
@@ -10396,7 +15484,7 @@
                     <a:bodyPr/>
                     <a:lstStyle/>
                     <a:p>
-                      <a:pPr marL="0" indent="0">
+                      <a:pPr indent="0" marL="0">
                         <a:buNone/>
                       </a:pPr>
                       <a:r>
@@ -10417,7 +15505,7 @@
                       </a:endParaRPr>
                     </a:p>
                   </a:txBody>
-                  <a:tcPr anchor="ctr">
+                  <a:tcPr marL="91440" marR="91440" marT="45720" marB="45720" anchor="ctr">
                     <a:lnL w="6350" cap="flat" cmpd="sng" algn="ctr">
                       <a:solidFill>
                         <a:srgbClr val="334155"/>
@@ -10464,7 +15552,7 @@
                     <a:bodyPr/>
                     <a:lstStyle/>
                     <a:p>
-                      <a:pPr marL="0" indent="0">
+                      <a:pPr indent="0" marL="0">
                         <a:buNone/>
                       </a:pPr>
                       <a:r>
@@ -10485,7 +15573,7 @@
                       </a:endParaRPr>
                     </a:p>
                   </a:txBody>
-                  <a:tcPr anchor="ctr">
+                  <a:tcPr marL="91440" marR="91440" marT="45720" marB="45720" anchor="ctr">
                     <a:lnL w="6350" cap="flat" cmpd="sng" algn="ctr">
                       <a:solidFill>
                         <a:srgbClr val="334155"/>
@@ -10532,7 +15620,7 @@
                     <a:bodyPr/>
                     <a:lstStyle/>
                     <a:p>
-                      <a:pPr marL="0" indent="0">
+                      <a:pPr indent="0" marL="0">
                         <a:buNone/>
                       </a:pPr>
                       <a:r>
@@ -10553,7 +15641,7 @@
                       </a:endParaRPr>
                     </a:p>
                   </a:txBody>
-                  <a:tcPr anchor="ctr">
+                  <a:tcPr marL="91440" marR="91440" marT="45720" marB="45720" anchor="ctr">
                     <a:lnL w="6350" cap="flat" cmpd="sng" algn="ctr">
                       <a:solidFill>
                         <a:srgbClr val="334155"/>
@@ -10600,7 +15688,7 @@
                     <a:bodyPr/>
                     <a:lstStyle/>
                     <a:p>
-                      <a:pPr marL="0" indent="0">
+                      <a:pPr indent="0" marL="0">
                         <a:buNone/>
                       </a:pPr>
                       <a:r>
@@ -10621,7 +15709,7 @@
                       </a:endParaRPr>
                     </a:p>
                   </a:txBody>
-                  <a:tcPr anchor="ctr">
+                  <a:tcPr marL="91440" marR="91440" marT="45720" marB="45720" anchor="ctr">
                     <a:lnL w="6350" cap="flat" cmpd="sng" algn="ctr">
                       <a:solidFill>
                         <a:srgbClr val="334155"/>
@@ -10663,11 +15751,6 @@
                     </a:solidFill>
                   </a:tcPr>
                 </a:tc>
-                <a:extLst>
-                  <a:ext uri="{0D108BD9-81ED-4DB2-BD59-A6C34878D82A}">
-                    <a16:rowId xmlns:a16="http://schemas.microsoft.com/office/drawing/2014/main" val="10009"/>
-                  </a:ext>
-                </a:extLst>
               </a:tr>
               <a:tr h="246888">
                 <a:tc>
@@ -10675,7 +15758,7 @@
                     <a:bodyPr/>
                     <a:lstStyle/>
                     <a:p>
-                      <a:pPr marL="0" indent="0">
+                      <a:pPr indent="0" marL="0">
                         <a:buNone/>
                       </a:pPr>
                       <a:r>
@@ -10696,7 +15779,7 @@
                       </a:endParaRPr>
                     </a:p>
                   </a:txBody>
-                  <a:tcPr anchor="ctr">
+                  <a:tcPr marL="91440" marR="91440" marT="45720" marB="45720" anchor="ctr">
                     <a:lnL w="6350" cap="flat" cmpd="sng" algn="ctr">
                       <a:solidFill>
                         <a:srgbClr val="334155"/>
@@ -10743,7 +15826,7 @@
                     <a:bodyPr/>
                     <a:lstStyle/>
                     <a:p>
-                      <a:pPr marL="0" indent="0">
+                      <a:pPr indent="0" marL="0">
                         <a:buNone/>
                       </a:pPr>
                       <a:r>
@@ -10764,7 +15847,7 @@
                       </a:endParaRPr>
                     </a:p>
                   </a:txBody>
-                  <a:tcPr anchor="ctr">
+                  <a:tcPr marL="91440" marR="91440" marT="45720" marB="45720" anchor="ctr">
                     <a:lnL w="6350" cap="flat" cmpd="sng" algn="ctr">
                       <a:solidFill>
                         <a:srgbClr val="334155"/>
@@ -10811,7 +15894,7 @@
                     <a:bodyPr/>
                     <a:lstStyle/>
                     <a:p>
-                      <a:pPr marL="0" indent="0">
+                      <a:pPr indent="0" marL="0">
                         <a:buNone/>
                       </a:pPr>
                       <a:r>
@@ -10832,7 +15915,7 @@
                       </a:endParaRPr>
                     </a:p>
                   </a:txBody>
-                  <a:tcPr anchor="ctr">
+                  <a:tcPr marL="91440" marR="91440" marT="45720" marB="45720" anchor="ctr">
                     <a:lnL w="6350" cap="flat" cmpd="sng" algn="ctr">
                       <a:solidFill>
                         <a:srgbClr val="334155"/>
@@ -10879,7 +15962,7 @@
                     <a:bodyPr/>
                     <a:lstStyle/>
                     <a:p>
-                      <a:pPr marL="0" indent="0">
+                      <a:pPr indent="0" marL="0">
                         <a:buNone/>
                       </a:pPr>
                       <a:r>
@@ -10900,7 +15983,7 @@
                       </a:endParaRPr>
                     </a:p>
                   </a:txBody>
-                  <a:tcPr anchor="ctr">
+                  <a:tcPr marL="91440" marR="91440" marT="45720" marB="45720" anchor="ctr">
                     <a:lnL w="6350" cap="flat" cmpd="sng" algn="ctr">
                       <a:solidFill>
                         <a:srgbClr val="334155"/>
@@ -10942,11 +16025,6 @@
                     </a:solidFill>
                   </a:tcPr>
                 </a:tc>
-                <a:extLst>
-                  <a:ext uri="{0D108BD9-81ED-4DB2-BD59-A6C34878D82A}">
-                    <a16:rowId xmlns:a16="http://schemas.microsoft.com/office/drawing/2014/main" val="10010"/>
-                  </a:ext>
-                </a:extLst>
               </a:tr>
               <a:tr h="246888">
                 <a:tc>
@@ -10954,7 +16032,7 @@
                     <a:bodyPr/>
                     <a:lstStyle/>
                     <a:p>
-                      <a:pPr marL="0" indent="0">
+                      <a:pPr indent="0" marL="0">
                         <a:buNone/>
                       </a:pPr>
                       <a:r>
@@ -10975,7 +16053,7 @@
                       </a:endParaRPr>
                     </a:p>
                   </a:txBody>
-                  <a:tcPr anchor="ctr">
+                  <a:tcPr marL="91440" marR="91440" marT="45720" marB="45720" anchor="ctr">
                     <a:lnL w="6350" cap="flat" cmpd="sng" algn="ctr">
                       <a:solidFill>
                         <a:srgbClr val="334155"/>
@@ -11022,7 +16100,7 @@
                     <a:bodyPr/>
                     <a:lstStyle/>
                     <a:p>
-                      <a:pPr marL="0" indent="0">
+                      <a:pPr indent="0" marL="0">
                         <a:buNone/>
                       </a:pPr>
                       <a:r>
@@ -11043,7 +16121,7 @@
                       </a:endParaRPr>
                     </a:p>
                   </a:txBody>
-                  <a:tcPr anchor="ctr">
+                  <a:tcPr marL="91440" marR="91440" marT="45720" marB="45720" anchor="ctr">
                     <a:lnL w="6350" cap="flat" cmpd="sng" algn="ctr">
                       <a:solidFill>
                         <a:srgbClr val="334155"/>
@@ -11090,7 +16168,7 @@
                     <a:bodyPr/>
                     <a:lstStyle/>
                     <a:p>
-                      <a:pPr marL="0" indent="0">
+                      <a:pPr indent="0" marL="0">
                         <a:buNone/>
                       </a:pPr>
                       <a:r>
@@ -11111,7 +16189,7 @@
                       </a:endParaRPr>
                     </a:p>
                   </a:txBody>
-                  <a:tcPr anchor="ctr">
+                  <a:tcPr marL="91440" marR="91440" marT="45720" marB="45720" anchor="ctr">
                     <a:lnL w="6350" cap="flat" cmpd="sng" algn="ctr">
                       <a:solidFill>
                         <a:srgbClr val="334155"/>
@@ -11158,7 +16236,7 @@
                     <a:bodyPr/>
                     <a:lstStyle/>
                     <a:p>
-                      <a:pPr marL="0" indent="0">
+                      <a:pPr indent="0" marL="0">
                         <a:buNone/>
                       </a:pPr>
                       <a:r>
@@ -11179,7 +16257,7 @@
                       </a:endParaRPr>
                     </a:p>
                   </a:txBody>
-                  <a:tcPr anchor="ctr">
+                  <a:tcPr marL="91440" marR="91440" marT="45720" marB="45720" anchor="ctr">
                     <a:lnL w="6350" cap="flat" cmpd="sng" algn="ctr">
                       <a:solidFill>
                         <a:srgbClr val="334155"/>
@@ -11221,11 +16299,6 @@
                     </a:solidFill>
                   </a:tcPr>
                 </a:tc>
-                <a:extLst>
-                  <a:ext uri="{0D108BD9-81ED-4DB2-BD59-A6C34878D82A}">
-                    <a16:rowId xmlns:a16="http://schemas.microsoft.com/office/drawing/2014/main" val="10011"/>
-                  </a:ext>
-                </a:extLst>
               </a:tr>
               <a:tr h="246888">
                 <a:tc>
@@ -11233,7 +16306,7 @@
                     <a:bodyPr/>
                     <a:lstStyle/>
                     <a:p>
-                      <a:pPr marL="0" indent="0">
+                      <a:pPr indent="0" marL="0">
                         <a:buNone/>
                       </a:pPr>
                       <a:r>
@@ -11254,7 +16327,7 @@
                       </a:endParaRPr>
                     </a:p>
                   </a:txBody>
-                  <a:tcPr anchor="ctr">
+                  <a:tcPr marL="91440" marR="91440" marT="45720" marB="45720" anchor="ctr">
                     <a:lnL w="6350" cap="flat" cmpd="sng" algn="ctr">
                       <a:solidFill>
                         <a:srgbClr val="334155"/>
@@ -11301,7 +16374,7 @@
                     <a:bodyPr/>
                     <a:lstStyle/>
                     <a:p>
-                      <a:pPr marL="0" indent="0">
+                      <a:pPr indent="0" marL="0">
                         <a:buNone/>
                       </a:pPr>
                       <a:r>
@@ -11322,7 +16395,7 @@
                       </a:endParaRPr>
                     </a:p>
                   </a:txBody>
-                  <a:tcPr anchor="ctr">
+                  <a:tcPr marL="91440" marR="91440" marT="45720" marB="45720" anchor="ctr">
                     <a:lnL w="6350" cap="flat" cmpd="sng" algn="ctr">
                       <a:solidFill>
                         <a:srgbClr val="334155"/>
@@ -11369,7 +16442,7 @@
                     <a:bodyPr/>
                     <a:lstStyle/>
                     <a:p>
-                      <a:pPr marL="0" indent="0">
+                      <a:pPr indent="0" marL="0">
                         <a:buNone/>
                       </a:pPr>
                       <a:r>
@@ -11390,7 +16463,7 @@
                       </a:endParaRPr>
                     </a:p>
                   </a:txBody>
-                  <a:tcPr anchor="ctr">
+                  <a:tcPr marL="91440" marR="91440" marT="45720" marB="45720" anchor="ctr">
                     <a:lnL w="6350" cap="flat" cmpd="sng" algn="ctr">
                       <a:solidFill>
                         <a:srgbClr val="334155"/>
@@ -11437,7 +16510,7 @@
                     <a:bodyPr/>
                     <a:lstStyle/>
                     <a:p>
-                      <a:pPr marL="0" indent="0">
+                      <a:pPr indent="0" marL="0">
                         <a:buNone/>
                       </a:pPr>
                       <a:r>
@@ -11458,7 +16531,7 @@
                       </a:endParaRPr>
                     </a:p>
                   </a:txBody>
-                  <a:tcPr anchor="ctr">
+                  <a:tcPr marL="91440" marR="91440" marT="45720" marB="45720" anchor="ctr">
                     <a:lnL w="6350" cap="flat" cmpd="sng" algn="ctr">
                       <a:solidFill>
                         <a:srgbClr val="334155"/>
@@ -11500,11 +16573,6 @@
                     </a:solidFill>
                   </a:tcPr>
                 </a:tc>
-                <a:extLst>
-                  <a:ext uri="{0D108BD9-81ED-4DB2-BD59-A6C34878D82A}">
-                    <a16:rowId xmlns:a16="http://schemas.microsoft.com/office/drawing/2014/main" val="10012"/>
-                  </a:ext>
-                </a:extLst>
               </a:tr>
               <a:tr h="246888">
                 <a:tc>
@@ -11512,7 +16580,7 @@
                     <a:bodyPr/>
                     <a:lstStyle/>
                     <a:p>
-                      <a:pPr marL="0" indent="0">
+                      <a:pPr indent="0" marL="0">
                         <a:buNone/>
                       </a:pPr>
                       <a:r>
@@ -11533,7 +16601,7 @@
                       </a:endParaRPr>
                     </a:p>
                   </a:txBody>
-                  <a:tcPr anchor="ctr">
+                  <a:tcPr marL="91440" marR="91440" marT="45720" marB="45720" anchor="ctr">
                     <a:lnL w="6350" cap="flat" cmpd="sng" algn="ctr">
                       <a:solidFill>
                         <a:srgbClr val="334155"/>
@@ -11580,7 +16648,7 @@
                     <a:bodyPr/>
                     <a:lstStyle/>
                     <a:p>
-                      <a:pPr marL="0" indent="0">
+                      <a:pPr indent="0" marL="0">
                         <a:buNone/>
                       </a:pPr>
                       <a:r>
@@ -11601,7 +16669,7 @@
                       </a:endParaRPr>
                     </a:p>
                   </a:txBody>
-                  <a:tcPr anchor="ctr">
+                  <a:tcPr marL="91440" marR="91440" marT="45720" marB="45720" anchor="ctr">
                     <a:lnL w="6350" cap="flat" cmpd="sng" algn="ctr">
                       <a:solidFill>
                         <a:srgbClr val="334155"/>
@@ -11648,7 +16716,7 @@
                     <a:bodyPr/>
                     <a:lstStyle/>
                     <a:p>
-                      <a:pPr marL="0" indent="0">
+                      <a:pPr indent="0" marL="0">
                         <a:buNone/>
                       </a:pPr>
                       <a:r>
@@ -11669,7 +16737,7 @@
                       </a:endParaRPr>
                     </a:p>
                   </a:txBody>
-                  <a:tcPr anchor="ctr">
+                  <a:tcPr marL="91440" marR="91440" marT="45720" marB="45720" anchor="ctr">
                     <a:lnL w="6350" cap="flat" cmpd="sng" algn="ctr">
                       <a:solidFill>
                         <a:srgbClr val="334155"/>
@@ -11716,7 +16784,7 @@
                     <a:bodyPr/>
                     <a:lstStyle/>
                     <a:p>
-                      <a:pPr marL="0" indent="0">
+                      <a:pPr indent="0" marL="0">
                         <a:buNone/>
                       </a:pPr>
                       <a:r>
@@ -11737,7 +16805,7 @@
                       </a:endParaRPr>
                     </a:p>
                   </a:txBody>
-                  <a:tcPr anchor="ctr">
+                  <a:tcPr marL="91440" marR="91440" marT="45720" marB="45720" anchor="ctr">
                     <a:lnL w="6350" cap="flat" cmpd="sng" algn="ctr">
                       <a:solidFill>
                         <a:srgbClr val="334155"/>
@@ -11779,11 +16847,6 @@
                     </a:solidFill>
                   </a:tcPr>
                 </a:tc>
-                <a:extLst>
-                  <a:ext uri="{0D108BD9-81ED-4DB2-BD59-A6C34878D82A}">
-                    <a16:rowId xmlns:a16="http://schemas.microsoft.com/office/drawing/2014/main" val="10013"/>
-                  </a:ext>
-                </a:extLst>
               </a:tr>
               <a:tr h="246888">
                 <a:tc>
@@ -11791,7 +16854,7 @@
                     <a:bodyPr/>
                     <a:lstStyle/>
                     <a:p>
-                      <a:pPr marL="0" indent="0">
+                      <a:pPr indent="0" marL="0">
                         <a:buNone/>
                       </a:pPr>
                       <a:r>
@@ -11812,7 +16875,7 @@
                       </a:endParaRPr>
                     </a:p>
                   </a:txBody>
-                  <a:tcPr anchor="ctr">
+                  <a:tcPr marL="91440" marR="91440" marT="45720" marB="45720" anchor="ctr">
                     <a:lnL w="6350" cap="flat" cmpd="sng" algn="ctr">
                       <a:solidFill>
                         <a:srgbClr val="334155"/>
@@ -11859,7 +16922,7 @@
                     <a:bodyPr/>
                     <a:lstStyle/>
                     <a:p>
-                      <a:pPr marL="0" indent="0">
+                      <a:pPr indent="0" marL="0">
                         <a:buNone/>
                       </a:pPr>
                       <a:r>
@@ -11880,7 +16943,7 @@
                       </a:endParaRPr>
                     </a:p>
                   </a:txBody>
-                  <a:tcPr anchor="ctr">
+                  <a:tcPr marL="91440" marR="91440" marT="45720" marB="45720" anchor="ctr">
                     <a:lnL w="6350" cap="flat" cmpd="sng" algn="ctr">
                       <a:solidFill>
                         <a:srgbClr val="334155"/>
@@ -11927,7 +16990,7 @@
                     <a:bodyPr/>
                     <a:lstStyle/>
                     <a:p>
-                      <a:pPr marL="0" indent="0">
+                      <a:pPr indent="0" marL="0">
                         <a:buNone/>
                       </a:pPr>
                       <a:r>
@@ -11948,7 +17011,7 @@
                       </a:endParaRPr>
                     </a:p>
                   </a:txBody>
-                  <a:tcPr anchor="ctr">
+                  <a:tcPr marL="91440" marR="91440" marT="45720" marB="45720" anchor="ctr">
                     <a:lnL w="6350" cap="flat" cmpd="sng" algn="ctr">
                       <a:solidFill>
                         <a:srgbClr val="334155"/>
@@ -11995,7 +17058,7 @@
                     <a:bodyPr/>
                     <a:lstStyle/>
                     <a:p>
-                      <a:pPr marL="0" indent="0">
+                      <a:pPr indent="0" marL="0">
                         <a:buNone/>
                       </a:pPr>
                       <a:r>
@@ -12016,7 +17079,7 @@
                       </a:endParaRPr>
                     </a:p>
                   </a:txBody>
-                  <a:tcPr anchor="ctr">
+                  <a:tcPr marL="91440" marR="91440" marT="45720" marB="45720" anchor="ctr">
                     <a:lnL w="6350" cap="flat" cmpd="sng" algn="ctr">
                       <a:solidFill>
                         <a:srgbClr val="334155"/>
@@ -12058,11 +17121,6 @@
                     </a:solidFill>
                   </a:tcPr>
                 </a:tc>
-                <a:extLst>
-                  <a:ext uri="{0D108BD9-81ED-4DB2-BD59-A6C34878D82A}">
-                    <a16:rowId xmlns:a16="http://schemas.microsoft.com/office/drawing/2014/main" val="10014"/>
-                  </a:ext>
-                </a:extLst>
               </a:tr>
             </a:tbl>
           </a:graphicData>
@@ -12070,7 +17128,7 @@
       </p:graphicFrame>
       <p:sp>
         <p:nvSpPr>
-          <p:cNvPr id="3" name="Shape 1"/>
+          <p:cNvPr id="4" name="Shape 1"/>
           <p:cNvSpPr/>
           <p:nvPr/>
         </p:nvSpPr>
@@ -12109,7 +17167,7 @@
           <a:bodyPr wrap="square" lIns="0" tIns="0" rIns="0" bIns="0" rtlCol="0" anchor="ctr"/>
           <a:lstStyle/>
           <a:p>
-            <a:pPr marL="0" indent="0">
+            <a:pPr indent="0" marL="0">
               <a:buNone/>
             </a:pPr>
             <a:r>
@@ -12148,7 +17206,7 @@
           <a:bodyPr wrap="square" lIns="0" tIns="0" rIns="0" bIns="0" rtlCol="0" anchor="ctr"/>
           <a:lstStyle/>
           <a:p>
-            <a:pPr marL="0" indent="0" algn="r">
+            <a:pPr algn="r" indent="0" marL="0">
               <a:buNone/>
             </a:pPr>
             <a:r>
@@ -12182,7 +17240,6 @@
         <a:solidFill>
           <a:srgbClr val="0F172A"/>
         </a:solidFill>
-        <a:effectLst/>
       </p:bgPr>
     </p:bg>
     <p:spTree>
@@ -12220,7 +17277,7 @@
           <a:bodyPr wrap="square" lIns="0" tIns="0" rIns="0" bIns="0" rtlCol="0" anchor="ctr"/>
           <a:lstStyle/>
           <a:p>
-            <a:pPr marL="0" indent="0">
+            <a:pPr indent="0" marL="0">
               <a:buNone/>
             </a:pPr>
             <a:r>
@@ -12257,7 +17314,7 @@
           </a:solidFill>
           <a:ln/>
           <a:effectLst>
-            <a:outerShdw blurRad="38100" dist="12700" dir="8100000" algn="bl" rotWithShape="0">
+            <a:outerShdw sx="100000" sy="100000" kx="0" ky="0" algn="bl" rotWithShape="0" blurRad="38100" dist="12700" dir="8100000">
               <a:srgbClr val="000000">
                 <a:alpha val="25000"/>
               </a:srgbClr>
@@ -12306,7 +17363,7 @@
           <a:bodyPr wrap="square" rtlCol="0" anchor="ctr"/>
           <a:lstStyle/>
           <a:p>
-            <a:pPr marL="0" indent="0" algn="ctr">
+            <a:pPr algn="ctr" indent="0" marL="0">
               <a:buNone/>
             </a:pPr>
             <a:r>
@@ -12345,7 +17402,7 @@
           <a:bodyPr wrap="square" lIns="0" tIns="0" rIns="0" bIns="0" rtlCol="0" anchor="ctr"/>
           <a:lstStyle/>
           <a:p>
-            <a:pPr marL="0" indent="0">
+            <a:pPr indent="0" marL="0">
               <a:buNone/>
             </a:pPr>
             <a:r>
@@ -12384,7 +17441,7 @@
           <a:bodyPr wrap="square" lIns="0" tIns="0" rIns="0" bIns="0" rtlCol="0" anchor="ctr"/>
           <a:lstStyle/>
           <a:p>
-            <a:pPr marL="0" indent="0">
+            <a:pPr indent="0" marL="0">
               <a:buNone/>
             </a:pPr>
             <a:r>
@@ -12396,7 +17453,7 @@
                 <a:ea typeface="Calibri" pitchFamily="34" charset="-122"/>
                 <a:cs typeface="Calibri" pitchFamily="34" charset="-120"/>
               </a:rPr>
-              <a:t>Any human in the system. Represented by a single table, not separate tables for each persona. One person can hold multiple roles across multiple institutions.</a:t>
+              <a:t>Any human in the system. Represented by a single table, not separate tables for each persona. One person can hold multiple roles across institutions.</a:t>
             </a:r>
             <a:endParaRPr lang="en-US" sz="1000" dirty="0"/>
           </a:p>
@@ -12421,7 +17478,7 @@
           </a:solidFill>
           <a:ln/>
           <a:effectLst>
-            <a:outerShdw blurRad="38100" dist="12700" dir="8100000" algn="bl" rotWithShape="0">
+            <a:outerShdw sx="100000" sy="100000" kx="0" ky="0" algn="bl" rotWithShape="0" blurRad="38100" dist="12700" dir="8100000">
               <a:srgbClr val="000000">
                 <a:alpha val="25000"/>
               </a:srgbClr>
@@ -12470,7 +17527,7 @@
           <a:bodyPr wrap="square" rtlCol="0" anchor="ctr"/>
           <a:lstStyle/>
           <a:p>
-            <a:pPr marL="0" indent="0" algn="ctr">
+            <a:pPr algn="ctr" indent="0" marL="0">
               <a:buNone/>
             </a:pPr>
             <a:r>
@@ -12509,7 +17566,7 @@
           <a:bodyPr wrap="square" lIns="0" tIns="0" rIns="0" bIns="0" rtlCol="0" anchor="ctr"/>
           <a:lstStyle/>
           <a:p>
-            <a:pPr marL="0" indent="0">
+            <a:pPr indent="0" marL="0">
               <a:buNone/>
             </a:pPr>
             <a:r>
@@ -12548,7 +17605,7 @@
           <a:bodyPr wrap="square" lIns="0" tIns="0" rIns="0" bIns="0" rtlCol="0" anchor="ctr"/>
           <a:lstStyle/>
           <a:p>
-            <a:pPr marL="0" indent="0">
+            <a:pPr indent="0" marL="0">
               <a:buNone/>
             </a:pPr>
             <a:r>
@@ -12560,7 +17617,7 @@
                 <a:ea typeface="Calibri" pitchFamily="34" charset="-122"/>
                 <a:cs typeface="Calibri" pitchFamily="34" charset="-120"/>
               </a:rPr>
-              <a:t>A relationship, not a type. One person can simultaneously be a teacher, a parent, and a student. The professional approach uses a join table rather than separate entity tables.</a:t>
+              <a:t>A relationship, not a type. One person can simultaneously be a teacher, a parent, and a student. The professional approach uses a join table.</a:t>
             </a:r>
             <a:endParaRPr lang="en-US" sz="1000" dirty="0"/>
           </a:p>
@@ -12585,7 +17642,7 @@
           </a:solidFill>
           <a:ln/>
           <a:effectLst>
-            <a:outerShdw blurRad="38100" dist="12700" dir="8100000" algn="bl" rotWithShape="0">
+            <a:outerShdw sx="100000" sy="100000" kx="0" ky="0" algn="bl" rotWithShape="0" blurRad="38100" dist="12700" dir="8100000">
               <a:srgbClr val="000000">
                 <a:alpha val="25000"/>
               </a:srgbClr>
@@ -12614,11 +17671,11 @@
           <a:bodyPr wrap="square" lIns="0" tIns="0" rIns="0" bIns="0" rtlCol="0" anchor="ctr"/>
           <a:lstStyle/>
           <a:p>
-            <a:pPr marL="0" indent="0">
+            <a:pPr indent="0" marL="0">
               <a:buNone/>
             </a:pPr>
             <a:r>
-              <a:rPr lang="en-US" sz="1100" b="1" kern="0" spc="200" dirty="0">
+              <a:rPr lang="en-US" sz="1100" b="1" spc="200" kern="0" dirty="0">
                 <a:solidFill>
                   <a:srgbClr val="6366F1"/>
                 </a:solidFill>
@@ -12653,7 +17710,7 @@
           <a:bodyPr wrap="square" lIns="0" tIns="0" rIns="0" bIns="0" rtlCol="0" anchor="ctr"/>
           <a:lstStyle/>
           <a:p>
-            <a:pPr marL="0" indent="0">
+            <a:pPr indent="0" marL="0">
               <a:buNone/>
             </a:pPr>
             <a:r>
@@ -12712,7 +17769,7 @@
           <a:bodyPr wrap="square" lIns="0" tIns="0" rIns="0" bIns="0" rtlCol="0" anchor="ctr"/>
           <a:lstStyle/>
           <a:p>
-            <a:pPr marL="0" indent="0">
+            <a:pPr indent="0" marL="0">
               <a:buNone/>
             </a:pPr>
             <a:r>
@@ -12751,7 +17808,7 @@
           <a:bodyPr wrap="square" lIns="0" tIns="0" rIns="0" bIns="0" rtlCol="0" anchor="ctr"/>
           <a:lstStyle/>
           <a:p>
-            <a:pPr marL="0" indent="0" algn="r">
+            <a:pPr algn="r" indent="0" marL="0">
               <a:buNone/>
             </a:pPr>
             <a:r>
@@ -12785,7 +17842,6 @@
         <a:solidFill>
           <a:srgbClr val="0F172A"/>
         </a:solidFill>
-        <a:effectLst/>
       </p:bgPr>
     </p:bg>
     <p:spTree>
@@ -12823,7 +17879,7 @@
           <a:bodyPr wrap="square" lIns="0" tIns="0" rIns="0" bIns="0" rtlCol="0" anchor="ctr"/>
           <a:lstStyle/>
           <a:p>
-            <a:pPr marL="0" indent="0">
+            <a:pPr indent="0" marL="0">
               <a:buNone/>
             </a:pPr>
             <a:r>
@@ -12860,7 +17916,7 @@
           </a:solidFill>
           <a:ln/>
           <a:effectLst>
-            <a:outerShdw blurRad="38100" dist="12700" dir="8100000" algn="bl" rotWithShape="0">
+            <a:outerShdw sx="100000" sy="100000" kx="0" ky="0" algn="bl" rotWithShape="0" blurRad="38100" dist="12700" dir="8100000">
               <a:srgbClr val="000000">
                 <a:alpha val="25000"/>
               </a:srgbClr>
@@ -12909,7 +17965,7 @@
           <a:bodyPr wrap="square" rtlCol="0" anchor="ctr"/>
           <a:lstStyle/>
           <a:p>
-            <a:pPr marL="0" indent="0" algn="ctr">
+            <a:pPr algn="ctr" indent="0" marL="0">
               <a:buNone/>
             </a:pPr>
             <a:r>
@@ -12948,7 +18004,7 @@
           <a:bodyPr wrap="square" lIns="0" tIns="0" rIns="0" bIns="0" rtlCol="0" anchor="ctr"/>
           <a:lstStyle/>
           <a:p>
-            <a:pPr marL="0" indent="0">
+            <a:pPr indent="0" marL="0">
               <a:buNone/>
             </a:pPr>
             <a:r>
@@ -12987,7 +18043,7 @@
           <a:bodyPr wrap="square" lIns="0" tIns="0" rIns="0" bIns="0" rtlCol="0" anchor="ctr"/>
           <a:lstStyle/>
           <a:p>
-            <a:pPr marL="0" indent="0">
+            <a:pPr indent="0" marL="0">
               <a:buNone/>
             </a:pPr>
             <a:r>
@@ -12999,7 +18055,7 @@
                 <a:ea typeface="Calibri" pitchFamily="34" charset="-122"/>
                 <a:cs typeface="Calibri" pitchFamily="34" charset="-120"/>
               </a:rPr>
-              <a:t>A recursive structural container. Institution to Campus to Faculty to Department. Unlimited depth with freeform type labels stored as data, not constrained by database enums.</a:t>
+              <a:t>A recursive structural container. Institution to Campus to Faculty to Department. Unlimited depth with freeform type labels stored as data.</a:t>
             </a:r>
             <a:endParaRPr lang="en-US" sz="1000" dirty="0"/>
           </a:p>
@@ -13024,7 +18080,7 @@
           </a:solidFill>
           <a:ln/>
           <a:effectLst>
-            <a:outerShdw blurRad="38100" dist="12700" dir="8100000" algn="bl" rotWithShape="0">
+            <a:outerShdw sx="100000" sy="100000" kx="0" ky="0" algn="bl" rotWithShape="0" blurRad="38100" dist="12700" dir="8100000">
               <a:srgbClr val="000000">
                 <a:alpha val="25000"/>
               </a:srgbClr>
@@ -13073,7 +18129,7 @@
           <a:bodyPr wrap="square" rtlCol="0" anchor="ctr"/>
           <a:lstStyle/>
           <a:p>
-            <a:pPr marL="0" indent="0" algn="ctr">
+            <a:pPr algn="ctr" indent="0" marL="0">
               <a:buNone/>
             </a:pPr>
             <a:r>
@@ -13112,7 +18168,7 @@
           <a:bodyPr wrap="square" lIns="0" tIns="0" rIns="0" bIns="0" rtlCol="0" anchor="ctr"/>
           <a:lstStyle/>
           <a:p>
-            <a:pPr marL="0" indent="0">
+            <a:pPr indent="0" marL="0">
               <a:buNone/>
             </a:pPr>
             <a:r>
@@ -13151,7 +18207,7 @@
           <a:bodyPr wrap="square" lIns="0" tIns="0" rIns="0" bIns="0" rtlCol="0" anchor="ctr"/>
           <a:lstStyle/>
           <a:p>
-            <a:pPr marL="0" indent="0">
+            <a:pPr indent="0" marL="0">
               <a:buNone/>
             </a:pPr>
             <a:r>
@@ -13163,7 +18219,7 @@
                 <a:ea typeface="Calibri" pitchFamily="34" charset="-122"/>
                 <a:cs typeface="Calibri" pitchFamily="34" charset="-120"/>
               </a:rPr>
-              <a:t>The item being taught. Also recursive: Program contains Course contains Module. Can be cross-listed to multiple organizational units via a link table.</a:t>
+              <a:t>The item being taught. Also recursive: Program to Course to Module. Cross-listed to multiple org units via a link table.</a:t>
             </a:r>
             <a:endParaRPr lang="en-US" sz="1000" dirty="0"/>
           </a:p>
@@ -13188,7 +18244,7 @@
           </a:solidFill>
           <a:ln/>
           <a:effectLst>
-            <a:outerShdw blurRad="38100" dist="12700" dir="8100000" algn="bl" rotWithShape="0">
+            <a:outerShdw sx="100000" sy="100000" kx="0" ky="0" algn="bl" rotWithShape="0" blurRad="38100" dist="12700" dir="8100000">
               <a:srgbClr val="000000">
                 <a:alpha val="25000"/>
               </a:srgbClr>
@@ -13217,11 +18273,11 @@
           <a:bodyPr wrap="square" lIns="0" tIns="0" rIns="0" bIns="0" rtlCol="0" anchor="ctr"/>
           <a:lstStyle/>
           <a:p>
-            <a:pPr marL="0" indent="0">
+            <a:pPr indent="0" marL="0">
               <a:buNone/>
             </a:pPr>
             <a:r>
-              <a:rPr lang="en-US" sz="1100" b="1" kern="0" spc="200" dirty="0">
+              <a:rPr lang="en-US" sz="1100" b="1" spc="200" kern="0" dirty="0">
                 <a:solidFill>
                   <a:srgbClr val="6366F1"/>
                 </a:solidFill>
@@ -13256,7 +18312,7 @@
           <a:bodyPr wrap="square" lIns="0" tIns="0" rIns="0" bIns="0" rtlCol="0" anchor="ctr"/>
           <a:lstStyle/>
           <a:p>
-            <a:pPr marL="0" indent="0">
+            <a:pPr indent="0" marL="0">
               <a:buNone/>
             </a:pPr>
             <a:r>
@@ -13268,7 +18324,7 @@
                 <a:ea typeface="Calibri" pitchFamily="34" charset="-122"/>
                 <a:cs typeface="Calibri" pitchFamily="34" charset="-120"/>
               </a:rPr>
-              <a:t>org_unit uses a self-referential parent_id for unlimited nesting. offering mirrors this pattern. offering_org_unit enables cross-listing so one course can belong to multiple departments. Together they answer: who teaches what, and where?</a:t>
+              <a:t>org_unit uses self-referential parent_id for unlimited nesting. offering mirrors this pattern. offering_org_unit enables cross-listing. Together they answer: who teaches what, and where?</a:t>
             </a:r>
             <a:endParaRPr lang="en-US" sz="1100" dirty="0"/>
           </a:p>
@@ -13315,7 +18371,7 @@
           <a:bodyPr wrap="square" lIns="0" tIns="0" rIns="0" bIns="0" rtlCol="0" anchor="ctr"/>
           <a:lstStyle/>
           <a:p>
-            <a:pPr marL="0" indent="0">
+            <a:pPr indent="0" marL="0">
               <a:buNone/>
             </a:pPr>
             <a:r>
@@ -13354,7 +18410,7 @@
           <a:bodyPr wrap="square" lIns="0" tIns="0" rIns="0" bIns="0" rtlCol="0" anchor="ctr"/>
           <a:lstStyle/>
           <a:p>
-            <a:pPr marL="0" indent="0" algn="r">
+            <a:pPr algn="r" indent="0" marL="0">
               <a:buNone/>
             </a:pPr>
             <a:r>
@@ -13388,7 +18444,6 @@
         <a:solidFill>
           <a:srgbClr val="0F172A"/>
         </a:solidFill>
-        <a:effectLst/>
       </p:bgPr>
     </p:bg>
     <p:spTree>
@@ -13426,7 +18481,7 @@
           <a:bodyPr wrap="square" lIns="0" tIns="0" rIns="0" bIns="0" rtlCol="0" anchor="ctr"/>
           <a:lstStyle/>
           <a:p>
-            <a:pPr marL="0" indent="0">
+            <a:pPr indent="0" marL="0">
               <a:buNone/>
             </a:pPr>
             <a:r>
@@ -13463,7 +18518,7 @@
           </a:solidFill>
           <a:ln/>
           <a:effectLst>
-            <a:outerShdw blurRad="38100" dist="12700" dir="8100000" algn="bl" rotWithShape="0">
+            <a:outerShdw sx="100000" sy="100000" kx="0" ky="0" algn="bl" rotWithShape="0" blurRad="38100" dist="12700" dir="8100000">
               <a:srgbClr val="000000">
                 <a:alpha val="25000"/>
               </a:srgbClr>
@@ -13512,7 +18567,7 @@
           <a:bodyPr wrap="square" rtlCol="0" anchor="ctr"/>
           <a:lstStyle/>
           <a:p>
-            <a:pPr marL="0" indent="0" algn="ctr">
+            <a:pPr algn="ctr" indent="0" marL="0">
               <a:buNone/>
             </a:pPr>
             <a:r>
@@ -13551,7 +18606,7 @@
           <a:bodyPr wrap="square" lIns="0" tIns="0" rIns="0" bIns="0" rtlCol="0" anchor="ctr"/>
           <a:lstStyle/>
           <a:p>
-            <a:pPr marL="0" indent="0">
+            <a:pPr indent="0" marL="0">
               <a:buNone/>
             </a:pPr>
             <a:r>
@@ -13590,7 +18645,7 @@
           <a:bodyPr wrap="square" lIns="0" tIns="0" rIns="0" bIns="0" rtlCol="0" anchor="ctr"/>
           <a:lstStyle/>
           <a:p>
-            <a:pPr marL="0" indent="0">
+            <a:pPr indent="0" marL="0">
               <a:buNone/>
             </a:pPr>
             <a:r>
@@ -13602,7 +18657,7 @@
                 <a:ea typeface="Calibri" pitchFamily="34" charset="-122"/>
                 <a:cs typeface="Calibri" pitchFamily="34" charset="-120"/>
               </a:rPr>
-              <a:t>How learners are bundled. Recreated every schedule period. Continuity across periods is tracked through enrollment history, not by persisting cohort rows.</a:t>
+              <a:t>How learners are bundled. Recreated every schedule period. Continuity across periods is tracked through enrollment history.</a:t>
             </a:r>
             <a:endParaRPr lang="en-US" sz="1000" dirty="0"/>
           </a:p>
@@ -13627,7 +18682,7 @@
           </a:solidFill>
           <a:ln/>
           <a:effectLst>
-            <a:outerShdw blurRad="38100" dist="12700" dir="8100000" algn="bl" rotWithShape="0">
+            <a:outerShdw sx="100000" sy="100000" kx="0" ky="0" algn="bl" rotWithShape="0" blurRad="38100" dist="12700" dir="8100000">
               <a:srgbClr val="000000">
                 <a:alpha val="25000"/>
               </a:srgbClr>
@@ -13676,7 +18731,7 @@
           <a:bodyPr wrap="square" rtlCol="0" anchor="ctr"/>
           <a:lstStyle/>
           <a:p>
-            <a:pPr marL="0" indent="0" algn="ctr">
+            <a:pPr algn="ctr" indent="0" marL="0">
               <a:buNone/>
             </a:pPr>
             <a:r>
@@ -13715,7 +18770,7 @@
           <a:bodyPr wrap="square" lIns="0" tIns="0" rIns="0" bIns="0" rtlCol="0" anchor="ctr"/>
           <a:lstStyle/>
           <a:p>
-            <a:pPr marL="0" indent="0">
+            <a:pPr indent="0" marL="0">
               <a:buNone/>
             </a:pPr>
             <a:r>
@@ -13754,7 +18809,7 @@
           <a:bodyPr wrap="square" lIns="0" tIns="0" rIns="0" bIns="0" rtlCol="0" anchor="ctr"/>
           <a:lstStyle/>
           <a:p>
-            <a:pPr marL="0" indent="0">
+            <a:pPr indent="0" marL="0">
               <a:buNone/>
             </a:pPr>
             <a:r>
@@ -13766,7 +18821,7 @@
                 <a:ea typeface="Calibri" pitchFamily="34" charset="-122"/>
                 <a:cs typeface="Calibri" pitchFamily="34" charset="-120"/>
               </a:rPr>
-              <a:t>The central hub of the system. Not a field on a student record but its own entity. Carries dates, status, results, and fees. Attendance, grading, and billing all depend on it.</a:t>
+              <a:t>The central hub. Not a field on a student but its own entity. Carries dates, status, results, and fees. Attendance, grading, and billing all depend on it.</a:t>
             </a:r>
             <a:endParaRPr lang="en-US" sz="1000" dirty="0"/>
           </a:p>
@@ -13791,7 +18846,7 @@
           </a:solidFill>
           <a:ln/>
           <a:effectLst>
-            <a:outerShdw blurRad="38100" dist="12700" dir="8100000" algn="bl" rotWithShape="0">
+            <a:outerShdw sx="100000" sy="100000" kx="0" ky="0" algn="bl" rotWithShape="0" blurRad="38100" dist="12700" dir="8100000">
               <a:srgbClr val="000000">
                 <a:alpha val="25000"/>
               </a:srgbClr>
@@ -13820,11 +18875,11 @@
           <a:bodyPr wrap="square" lIns="0" tIns="0" rIns="0" bIns="0" rtlCol="0" anchor="ctr"/>
           <a:lstStyle/>
           <a:p>
-            <a:pPr marL="0" indent="0">
+            <a:pPr indent="0" marL="0">
               <a:buNone/>
             </a:pPr>
             <a:r>
-              <a:rPr lang="en-US" sz="1100" b="1" kern="0" spc="200" dirty="0">
+              <a:rPr lang="en-US" sz="1100" b="1" spc="200" kern="0" dirty="0">
                 <a:solidFill>
                   <a:srgbClr val="6366F1"/>
                 </a:solidFill>
@@ -13859,7 +18914,7 @@
           <a:bodyPr wrap="square" lIns="0" tIns="0" rIns="0" bIns="0" rtlCol="0" anchor="ctr"/>
           <a:lstStyle/>
           <a:p>
-            <a:pPr marL="0" indent="0">
+            <a:pPr indent="0" marL="0">
               <a:buNone/>
             </a:pPr>
             <a:r>
@@ -13871,7 +18926,7 @@
                 <a:ea typeface="Calibri" pitchFamily="34" charset="-122"/>
                 <a:cs typeface="Calibri" pitchFamily="34" charset="-120"/>
               </a:rPr>
-              <a:t>enrollment binds a student to a cohort, offering, or group for one schedule_period. The status lifecycle includes active, transferred_out, withdrawn, graduated, and repeating. The legacy student.class_id field is transitional and will be removed once all read paths migrate.</a:t>
+              <a:t>enrollment binds a student to a cohort, offering, or group for one schedule_period. Status lifecycle: active, transferred_out, withdrawn, graduated, repeating. The legacy student.class_id is transitional.</a:t>
             </a:r>
             <a:endParaRPr lang="en-US" sz="1100" dirty="0"/>
           </a:p>
@@ -13918,7 +18973,7 @@
           <a:bodyPr wrap="square" lIns="0" tIns="0" rIns="0" bIns="0" rtlCol="0" anchor="ctr"/>
           <a:lstStyle/>
           <a:p>
-            <a:pPr marL="0" indent="0">
+            <a:pPr indent="0" marL="0">
               <a:buNone/>
             </a:pPr>
             <a:r>
@@ -13957,7 +19012,7 @@
           <a:bodyPr wrap="square" lIns="0" tIns="0" rIns="0" bIns="0" rtlCol="0" anchor="ctr"/>
           <a:lstStyle/>
           <a:p>
-            <a:pPr marL="0" indent="0" algn="r">
+            <a:pPr algn="r" indent="0" marL="0">
               <a:buNone/>
             </a:pPr>
             <a:r>
@@ -13991,7 +19046,6 @@
         <a:solidFill>
           <a:srgbClr val="0F172A"/>
         </a:solidFill>
-        <a:effectLst/>
       </p:bgPr>
     </p:bg>
     <p:spTree>
@@ -14029,7 +19083,7 @@
           <a:bodyPr wrap="square" lIns="0" tIns="0" rIns="0" bIns="0" rtlCol="0" anchor="ctr"/>
           <a:lstStyle/>
           <a:p>
-            <a:pPr marL="0" indent="0">
+            <a:pPr indent="0" marL="0">
               <a:buNone/>
             </a:pPr>
             <a:r>
@@ -14066,7 +19120,7 @@
           </a:solidFill>
           <a:ln/>
           <a:effectLst>
-            <a:outerShdw blurRad="38100" dist="12700" dir="8100000" algn="bl" rotWithShape="0">
+            <a:outerShdw sx="100000" sy="100000" kx="0" ky="0" algn="bl" rotWithShape="0" blurRad="38100" dist="12700" dir="8100000">
               <a:srgbClr val="000000">
                 <a:alpha val="25000"/>
               </a:srgbClr>
@@ -14115,7 +19169,7 @@
           <a:bodyPr wrap="square" rtlCol="0" anchor="ctr"/>
           <a:lstStyle/>
           <a:p>
-            <a:pPr marL="0" indent="0" algn="ctr">
+            <a:pPr algn="ctr" indent="0" marL="0">
               <a:buNone/>
             </a:pPr>
             <a:r>
@@ -14154,7 +19208,7 @@
           <a:bodyPr wrap="square" lIns="0" tIns="0" rIns="0" bIns="0" rtlCol="0" anchor="ctr"/>
           <a:lstStyle/>
           <a:p>
-            <a:pPr marL="0" indent="0">
+            <a:pPr indent="0" marL="0">
               <a:buNone/>
             </a:pPr>
             <a:r>
@@ -14193,7 +19247,7 @@
           <a:bodyPr wrap="square" lIns="0" tIns="0" rIns="0" bIns="0" rtlCol="0" anchor="ctr"/>
           <a:lstStyle/>
           <a:p>
-            <a:pPr marL="0" indent="0">
+            <a:pPr indent="0" marL="0">
               <a:buNone/>
             </a:pPr>
             <a:r>
@@ -14205,7 +19259,7 @@
                 <a:ea typeface="Calibri" pitchFamily="34" charset="-122"/>
                 <a:cs typeface="Calibri" pitchFamily="34" charset="-120"/>
               </a:rPr>
-              <a:t>A single time-bound teaching act. Types include lesson, exam, seminar, and lab. Carries start and end times, resource booking, recurrence rules, and per-session attendance records.</a:t>
+              <a:t>A single time-bound teaching act. Types include lesson, exam, seminar, and lab. Carries start/end times, resource booking, and recurrence rules.</a:t>
             </a:r>
             <a:endParaRPr lang="en-US" sz="1000" dirty="0"/>
           </a:p>
@@ -14230,7 +19284,7 @@
           </a:solidFill>
           <a:ln/>
           <a:effectLst>
-            <a:outerShdw blurRad="38100" dist="12700" dir="8100000" algn="bl" rotWithShape="0">
+            <a:outerShdw sx="100000" sy="100000" kx="0" ky="0" algn="bl" rotWithShape="0" blurRad="38100" dist="12700" dir="8100000">
               <a:srgbClr val="000000">
                 <a:alpha val="25000"/>
               </a:srgbClr>
@@ -14279,7 +19333,7 @@
           <a:bodyPr wrap="square" rtlCol="0" anchor="ctr"/>
           <a:lstStyle/>
           <a:p>
-            <a:pPr marL="0" indent="0" algn="ctr">
+            <a:pPr algn="ctr" indent="0" marL="0">
               <a:buNone/>
             </a:pPr>
             <a:r>
@@ -14318,7 +19372,7 @@
           <a:bodyPr wrap="square" lIns="0" tIns="0" rIns="0" bIns="0" rtlCol="0" anchor="ctr"/>
           <a:lstStyle/>
           <a:p>
-            <a:pPr marL="0" indent="0">
+            <a:pPr indent="0" marL="0">
               <a:buNone/>
             </a:pPr>
             <a:r>
@@ -14357,7 +19411,7 @@
           <a:bodyPr wrap="square" lIns="0" tIns="0" rIns="0" bIns="0" rtlCol="0" anchor="ctr"/>
           <a:lstStyle/>
           <a:p>
-            <a:pPr marL="0" indent="0">
+            <a:pPr indent="0" marL="0">
               <a:buNone/>
             </a:pPr>
             <a:r>
@@ -14369,7 +19423,7 @@
                 <a:ea typeface="Calibri" pitchFamily="34" charset="-122"/>
                 <a:cs typeface="Calibri" pitchFamily="34" charset="-120"/>
               </a:rPr>
-              <a:t>The time skeleton of the institution. Self-referential: a Term nests under a Year. This is the axis that most frequently causes system failure when designed too rigidly.</a:t>
+              <a:t>The time skeleton. Self-referential: a Term nests under a Year. This is the axis that most frequently causes system failure when designed too rigidly.</a:t>
             </a:r>
             <a:endParaRPr lang="en-US" sz="1000" dirty="0"/>
           </a:p>
@@ -14394,7 +19448,7 @@
           </a:solidFill>
           <a:ln/>
           <a:effectLst>
-            <a:outerShdw blurRad="38100" dist="12700" dir="8100000" algn="bl" rotWithShape="0">
+            <a:outerShdw sx="100000" sy="100000" kx="0" ky="0" algn="bl" rotWithShape="0" blurRad="38100" dist="12700" dir="8100000">
               <a:srgbClr val="000000">
                 <a:alpha val="25000"/>
               </a:srgbClr>
@@ -14423,11 +19477,11 @@
           <a:bodyPr wrap="square" lIns="0" tIns="0" rIns="0" bIns="0" rtlCol="0" anchor="ctr"/>
           <a:lstStyle/>
           <a:p>
-            <a:pPr marL="0" indent="0">
+            <a:pPr indent="0" marL="0">
               <a:buNone/>
             </a:pPr>
             <a:r>
-              <a:rPr lang="en-US" sz="1100" b="1" kern="0" spc="200" dirty="0">
+              <a:rPr lang="en-US" sz="1100" b="1" spc="200" kern="0" dirty="0">
                 <a:solidFill>
                   <a:srgbClr val="6366F1"/>
                 </a:solidFill>
@@ -14462,7 +19516,7 @@
           <a:bodyPr wrap="square" lIns="0" tIns="0" rIns="0" bIns="0" rtlCol="0" anchor="ctr"/>
           <a:lstStyle/>
           <a:p>
-            <a:pPr marL="0" indent="0">
+            <a:pPr indent="0" marL="0">
               <a:buNone/>
             </a:pPr>
             <a:r>
@@ -14474,7 +19528,7 @@
                 <a:ea typeface="Calibri" pitchFamily="34" charset="-122"/>
                 <a:cs typeface="Calibri" pitchFamily="34" charset="-120"/>
               </a:rPr>
-              <a:t>schedule_period uses self-referential nesting for terms within academic years. session books resources, targets a cohort_offering, and supports recurrence rules. The system is scoped to term-based K-12 schools and vocational institutes to keep time model complexity manageable.</a:t>
+              <a:t>schedule_period uses self-referential nesting for terms within academic years. session books resources and supports recurrence rules. Scoped to term-based K-12 schools and vocational institutes.</a:t>
             </a:r>
             <a:endParaRPr lang="en-US" sz="1100" dirty="0"/>
           </a:p>
@@ -14521,7 +19575,7 @@
           <a:bodyPr wrap="square" lIns="0" tIns="0" rIns="0" bIns="0" rtlCol="0" anchor="ctr"/>
           <a:lstStyle/>
           <a:p>
-            <a:pPr marL="0" indent="0">
+            <a:pPr indent="0" marL="0">
               <a:buNone/>
             </a:pPr>
             <a:r>
@@ -14560,7 +19614,7 @@
           <a:bodyPr wrap="square" lIns="0" tIns="0" rIns="0" bIns="0" rtlCol="0" anchor="ctr"/>
           <a:lstStyle/>
           <a:p>
-            <a:pPr marL="0" indent="0" algn="r">
+            <a:pPr algn="r" indent="0" marL="0">
               <a:buNone/>
             </a:pPr>
             <a:r>
@@ -14594,7 +19648,6 @@
         <a:solidFill>
           <a:srgbClr val="0F172A"/>
         </a:solidFill>
-        <a:effectLst/>
       </p:bgPr>
     </p:bg>
     <p:spTree>
@@ -14632,7 +19685,7 @@
           <a:bodyPr wrap="square" lIns="0" tIns="0" rIns="0" bIns="0" rtlCol="0" anchor="ctr"/>
           <a:lstStyle/>
           <a:p>
-            <a:pPr marL="0" indent="0">
+            <a:pPr indent="0" marL="0">
               <a:buNone/>
             </a:pPr>
             <a:r>
@@ -14669,7 +19722,7 @@
           </a:solidFill>
           <a:ln/>
           <a:effectLst>
-            <a:outerShdw blurRad="38100" dist="12700" dir="8100000" algn="bl" rotWithShape="0">
+            <a:outerShdw sx="100000" sy="100000" kx="0" ky="0" algn="bl" rotWithShape="0" blurRad="38100" dist="12700" dir="8100000">
               <a:srgbClr val="000000">
                 <a:alpha val="25000"/>
               </a:srgbClr>
@@ -14718,7 +19771,7 @@
           <a:bodyPr wrap="square" rtlCol="0" anchor="ctr"/>
           <a:lstStyle/>
           <a:p>
-            <a:pPr marL="0" indent="0" algn="ctr">
+            <a:pPr algn="ctr" indent="0" marL="0">
               <a:buNone/>
             </a:pPr>
             <a:r>
@@ -14757,7 +19810,7 @@
           <a:bodyPr wrap="square" lIns="0" tIns="0" rIns="0" bIns="0" rtlCol="0" anchor="ctr"/>
           <a:lstStyle/>
           <a:p>
-            <a:pPr marL="0" indent="0">
+            <a:pPr indent="0" marL="0">
               <a:buNone/>
             </a:pPr>
             <a:r>
@@ -14796,7 +19849,7 @@
           <a:bodyPr wrap="square" lIns="0" tIns="0" rIns="0" bIns="0" rtlCol="0" anchor="ctr"/>
           <a:lstStyle/>
           <a:p>
-            <a:pPr marL="0" indent="0">
+            <a:pPr indent="0" marL="0">
               <a:buNone/>
             </a:pPr>
             <a:r>
@@ -14808,7 +19861,7 @@
                 <a:ea typeface="Calibri" pitchFamily="34" charset="-122"/>
                 <a:cs typeface="Calibri" pitchFamily="34" charset="-120"/>
               </a:rPr>
-              <a:t>Any measurement of learning. Carries a publish gate so teachers can enter scores privately before releasing them. Supports weighting for composite scoring across multiple assessments.</a:t>
+              <a:t>Any measurement of learning. Carries a publish gate so teachers can enter scores privately before releasing them. Supports weighting for composite scoring.</a:t>
             </a:r>
             <a:endParaRPr lang="en-US" sz="1000" dirty="0"/>
           </a:p>
@@ -14833,7 +19886,7 @@
           </a:solidFill>
           <a:ln/>
           <a:effectLst>
-            <a:outerShdw blurRad="38100" dist="12700" dir="8100000" algn="bl" rotWithShape="0">
+            <a:outerShdw sx="100000" sy="100000" kx="0" ky="0" algn="bl" rotWithShape="0" blurRad="38100" dist="12700" dir="8100000">
               <a:srgbClr val="000000">
                 <a:alpha val="25000"/>
               </a:srgbClr>
@@ -14882,7 +19935,7 @@
           <a:bodyPr wrap="square" rtlCol="0" anchor="ctr"/>
           <a:lstStyle/>
           <a:p>
-            <a:pPr marL="0" indent="0" algn="ctr">
+            <a:pPr algn="ctr" indent="0" marL="0">
               <a:buNone/>
             </a:pPr>
             <a:r>
@@ -14921,7 +19974,7 @@
           <a:bodyPr wrap="square" lIns="0" tIns="0" rIns="0" bIns="0" rtlCol="0" anchor="ctr"/>
           <a:lstStyle/>
           <a:p>
-            <a:pPr marL="0" indent="0">
+            <a:pPr indent="0" marL="0">
               <a:buNone/>
             </a:pPr>
             <a:r>
@@ -14960,7 +20013,7 @@
           <a:bodyPr wrap="square" lIns="0" tIns="0" rIns="0" bIns="0" rtlCol="0" anchor="ctr"/>
           <a:lstStyle/>
           <a:p>
-            <a:pPr marL="0" indent="0">
+            <a:pPr indent="0" marL="0">
               <a:buNone/>
             </a:pPr>
             <a:r>
@@ -14997,7 +20050,7 @@
           </a:solidFill>
           <a:ln/>
           <a:effectLst>
-            <a:outerShdw blurRad="38100" dist="12700" dir="8100000" algn="bl" rotWithShape="0">
+            <a:outerShdw sx="100000" sy="100000" kx="0" ky="0" algn="bl" rotWithShape="0" blurRad="38100" dist="12700" dir="8100000">
               <a:srgbClr val="000000">
                 <a:alpha val="25000"/>
               </a:srgbClr>
@@ -15026,11 +20079,11 @@
           <a:bodyPr wrap="square" lIns="0" tIns="0" rIns="0" bIns="0" rtlCol="0" anchor="ctr"/>
           <a:lstStyle/>
           <a:p>
-            <a:pPr marL="0" indent="0">
+            <a:pPr indent="0" marL="0">
               <a:buNone/>
             </a:pPr>
             <a:r>
-              <a:rPr lang="en-US" sz="1100" b="1" kern="0" spc="200" dirty="0">
+              <a:rPr lang="en-US" sz="1100" b="1" spc="200" kern="0" dirty="0">
                 <a:solidFill>
                   <a:srgbClr val="6366F1"/>
                 </a:solidFill>
@@ -15065,7 +20118,7 @@
           <a:bodyPr wrap="square" lIns="0" tIns="0" rIns="0" bIns="0" rtlCol="0" anchor="ctr"/>
           <a:lstStyle/>
           <a:p>
-            <a:pPr marL="0" indent="0">
+            <a:pPr indent="0" marL="0">
               <a:buNone/>
             </a:pPr>
             <a:r>
@@ -15077,7 +20130,7 @@
                 <a:ea typeface="Calibri" pitchFamily="34" charset="-122"/>
                 <a:cs typeface="Calibri" pitchFamily="34" charset="-120"/>
               </a:rPr>
-              <a:t>assessment uses a publish flag to control visibility to students. result rows are unique per assessment-student pair and carry resit flags and penalty deductions. Transcripts are live queries, so corrected scores propagate instantly to every view.</a:t>
+              <a:t>assessment uses a publish flag to control visibility. result rows are unique per assessment-student pair with resit flags and penalties. Transcripts are live queries so corrected scores propagate instantly.</a:t>
             </a:r>
             <a:endParaRPr lang="en-US" sz="1100" dirty="0"/>
           </a:p>
@@ -15124,7 +20177,7 @@
           <a:bodyPr wrap="square" lIns="0" tIns="0" rIns="0" bIns="0" rtlCol="0" anchor="ctr"/>
           <a:lstStyle/>
           <a:p>
-            <a:pPr marL="0" indent="0">
+            <a:pPr indent="0" marL="0">
               <a:buNone/>
             </a:pPr>
             <a:r>
@@ -15163,7 +20216,7 @@
           <a:bodyPr wrap="square" lIns="0" tIns="0" rIns="0" bIns="0" rtlCol="0" anchor="ctr"/>
           <a:lstStyle/>
           <a:p>
-            <a:pPr marL="0" indent="0" algn="r">
+            <a:pPr algn="r" indent="0" marL="0">
               <a:buNone/>
             </a:pPr>
             <a:r>
@@ -15197,7 +20250,6 @@
         <a:solidFill>
           <a:srgbClr val="0F172A"/>
         </a:solidFill>
-        <a:effectLst/>
       </p:bgPr>
     </p:bg>
     <p:spTree>
@@ -15235,7 +20287,7 @@
           <a:bodyPr wrap="square" lIns="0" tIns="0" rIns="0" bIns="0" rtlCol="0" anchor="ctr"/>
           <a:lstStyle/>
           <a:p>
-            <a:pPr marL="0" indent="0">
+            <a:pPr indent="0" marL="0">
               <a:buNone/>
             </a:pPr>
             <a:r>
@@ -15272,7 +20324,7 @@
           </a:solidFill>
           <a:ln/>
           <a:effectLst>
-            <a:outerShdw blurRad="38100" dist="12700" dir="8100000" algn="bl" rotWithShape="0">
+            <a:outerShdw sx="100000" sy="100000" kx="0" ky="0" algn="bl" rotWithShape="0" blurRad="38100" dist="12700" dir="8100000">
               <a:srgbClr val="000000">
                 <a:alpha val="25000"/>
               </a:srgbClr>
@@ -15321,7 +20373,7 @@
           <a:bodyPr wrap="square" rtlCol="0" anchor="ctr"/>
           <a:lstStyle/>
           <a:p>
-            <a:pPr marL="0" indent="0" algn="ctr">
+            <a:pPr algn="ctr" indent="0" marL="0">
               <a:buNone/>
             </a:pPr>
             <a:r>
@@ -15360,7 +20412,7 @@
           <a:bodyPr wrap="square" lIns="0" tIns="0" rIns="0" bIns="0" rtlCol="0" anchor="ctr"/>
           <a:lstStyle/>
           <a:p>
-            <a:pPr marL="0" indent="0">
+            <a:pPr indent="0" marL="0">
               <a:buNone/>
             </a:pPr>
             <a:r>
@@ -15399,7 +20451,7 @@
           <a:bodyPr wrap="square" lIns="0" tIns="0" rIns="0" bIns="0" rtlCol="0" anchor="ctr"/>
           <a:lstStyle/>
           <a:p>
-            <a:pPr marL="0" indent="0">
+            <a:pPr indent="0" marL="0">
               <a:buNone/>
             </a:pPr>
             <a:r>
@@ -15411,7 +20463,7 @@
                 <a:ea typeface="Calibri" pitchFamily="34" charset="-122"/>
                 <a:cs typeface="Calibri" pitchFamily="34" charset="-120"/>
               </a:rPr>
-              <a:t>Proof of completion issued by the institution. Can be auto-generated when a progression rule is satisfied, or issued manually. Revocation requires moderator approval through the workflow system.</a:t>
+              <a:t>Proof of completion issued by the institution. Can be auto-generated when a progression rule is satisfied or issued manually. Revocation requires moderator approval.</a:t>
             </a:r>
             <a:endParaRPr lang="en-US" sz="1000" dirty="0"/>
           </a:p>
@@ -15436,7 +20488,7 @@
           </a:solidFill>
           <a:ln/>
           <a:effectLst>
-            <a:outerShdw blurRad="38100" dist="12700" dir="8100000" algn="bl" rotWithShape="0">
+            <a:outerShdw sx="100000" sy="100000" kx="0" ky="0" algn="bl" rotWithShape="0" blurRad="38100" dist="12700" dir="8100000">
               <a:srgbClr val="000000">
                 <a:alpha val="25000"/>
               </a:srgbClr>
@@ -15485,7 +20537,7 @@
           <a:bodyPr wrap="square" rtlCol="0" anchor="ctr"/>
           <a:lstStyle/>
           <a:p>
-            <a:pPr marL="0" indent="0" algn="ctr">
+            <a:pPr algn="ctr" indent="0" marL="0">
               <a:buNone/>
             </a:pPr>
             <a:r>
@@ -15524,7 +20576,7 @@
           <a:bodyPr wrap="square" lIns="0" tIns="0" rIns="0" bIns="0" rtlCol="0" anchor="ctr"/>
           <a:lstStyle/>
           <a:p>
-            <a:pPr marL="0" indent="0">
+            <a:pPr indent="0" marL="0">
               <a:buNone/>
             </a:pPr>
             <a:r>
@@ -15563,7 +20615,7 @@
           <a:bodyPr wrap="square" lIns="0" tIns="0" rIns="0" bIns="0" rtlCol="0" anchor="ctr"/>
           <a:lstStyle/>
           <a:p>
-            <a:pPr marL="0" indent="0">
+            <a:pPr indent="0" marL="0">
               <a:buNone/>
             </a:pPr>
             <a:r>
@@ -15575,7 +20627,7 @@
                 <a:ea typeface="Calibri" pitchFamily="34" charset="-122"/>
                 <a:cs typeface="Calibri" pitchFamily="34" charset="-120"/>
               </a:rPr>
-              <a:t>Logic for determining advancement. Rule types include attendance minimums, prerequisite completion, and manual score thresholds. Results are evaluated once per enrollment and stored to prevent re-evaluation.</a:t>
+              <a:t>Logic for advancing. Rule types: attendance minimums, prerequisite completion, manual score thresholds. Results are evaluated once and stored.</a:t>
             </a:r>
             <a:endParaRPr lang="en-US" sz="1000" dirty="0"/>
           </a:p>
@@ -15600,7 +20652,7 @@
           </a:solidFill>
           <a:ln/>
           <a:effectLst>
-            <a:outerShdw blurRad="38100" dist="12700" dir="8100000" algn="bl" rotWithShape="0">
+            <a:outerShdw sx="100000" sy="100000" kx="0" ky="0" algn="bl" rotWithShape="0" blurRad="38100" dist="12700" dir="8100000">
               <a:srgbClr val="000000">
                 <a:alpha val="25000"/>
               </a:srgbClr>
@@ -15629,11 +20681,11 @@
           <a:bodyPr wrap="square" lIns="0" tIns="0" rIns="0" bIns="0" rtlCol="0" anchor="ctr"/>
           <a:lstStyle/>
           <a:p>
-            <a:pPr marL="0" indent="0">
+            <a:pPr indent="0" marL="0">
               <a:buNone/>
             </a:pPr>
             <a:r>
-              <a:rPr lang="en-US" sz="1100" b="1" kern="0" spc="200" dirty="0">
+              <a:rPr lang="en-US" sz="1100" b="1" spc="200" kern="0" dirty="0">
                 <a:solidFill>
                   <a:srgbClr val="6366F1"/>
                 </a:solidFill>
@@ -15668,7 +20720,7 @@
           <a:bodyPr wrap="square" lIns="0" tIns="0" rIns="0" bIns="0" rtlCol="0" anchor="ctr"/>
           <a:lstStyle/>
           <a:p>
-            <a:pPr marL="0" indent="0">
+            <a:pPr indent="0" marL="0">
               <a:buNone/>
             </a:pPr>
             <a:r>
@@ -15680,7 +20732,7 @@
                 <a:ea typeface="Calibri" pitchFamily="34" charset="-122"/>
                 <a:cs typeface="Calibri" pitchFamily="34" charset="-120"/>
               </a:rPr>
-              <a:t>progression_rule defines the criteria; progression_result stores the outcome per rule-enrollment pair. A rule can carry an auto_issue_credential title to automatically mint a certificate upon passing. Together they close the loop from enrollment to graduation.</a:t>
+              <a:t>progression_rule defines the criteria; progression_result stores the outcome. A rule can auto_issue_credential to mint a certificate upon passing. Together they close the enrollment-to-graduation loop.</a:t>
             </a:r>
             <a:endParaRPr lang="en-US" sz="1100" dirty="0"/>
           </a:p>
@@ -15727,7 +20779,7 @@
           <a:bodyPr wrap="square" lIns="0" tIns="0" rIns="0" bIns="0" rtlCol="0" anchor="ctr"/>
           <a:lstStyle/>
           <a:p>
-            <a:pPr marL="0" indent="0">
+            <a:pPr indent="0" marL="0">
               <a:buNone/>
             </a:pPr>
             <a:r>
@@ -15766,7 +20818,7 @@
           <a:bodyPr wrap="square" lIns="0" tIns="0" rIns="0" bIns="0" rtlCol="0" anchor="ctr"/>
           <a:lstStyle/>
           <a:p>
-            <a:pPr marL="0" indent="0" algn="r">
+            <a:pPr algn="r" indent="0" marL="0">
               <a:buNone/>
             </a:pPr>
             <a:r>
@@ -16085,319 +21137,4 @@
     </a:ext>
   </a:extLst>
 </a:theme>
-</file>
-
-<file path=ppt/theme/theme2.xml><?xml version="1.0" encoding="utf-8"?>
-<a:theme xmlns:a="http://schemas.openxmlformats.org/drawingml/2006/main" name="Office Theme">
-  <a:themeElements>
-    <a:clrScheme name="Office">
-      <a:dk1>
-        <a:sysClr val="windowText" lastClr="000000"/>
-      </a:dk1>
-      <a:lt1>
-        <a:sysClr val="window" lastClr="FFFFFF"/>
-      </a:lt1>
-      <a:dk2>
-        <a:srgbClr val="0E2841"/>
-      </a:dk2>
-      <a:lt2>
-        <a:srgbClr val="E8E8E8"/>
-      </a:lt2>
-      <a:accent1>
-        <a:srgbClr val="156082"/>
-      </a:accent1>
-      <a:accent2>
-        <a:srgbClr val="E97132"/>
-      </a:accent2>
-      <a:accent3>
-        <a:srgbClr val="196B24"/>
-      </a:accent3>
-      <a:accent4>
-        <a:srgbClr val="0F9ED5"/>
-      </a:accent4>
-      <a:accent5>
-        <a:srgbClr val="A02B93"/>
-      </a:accent5>
-      <a:accent6>
-        <a:srgbClr val="4EA72E"/>
-      </a:accent6>
-      <a:hlink>
-        <a:srgbClr val="467886"/>
-      </a:hlink>
-      <a:folHlink>
-        <a:srgbClr val="96607D"/>
-      </a:folHlink>
-    </a:clrScheme>
-    <a:fontScheme name="Office">
-      <a:majorFont>
-        <a:latin typeface="Aptos Display" panose="02110004020202020204"/>
-        <a:ea typeface=""/>
-        <a:cs typeface=""/>
-        <a:font script="Jpan" typeface="游ゴシック Light"/>
-        <a:font script="Hang" typeface="맑은 고딕"/>
-        <a:font script="Hans" typeface="等线 Light"/>
-        <a:font script="Hant" typeface="新細明體"/>
-        <a:font script="Arab" typeface="Times New Roman"/>
-        <a:font script="Hebr" typeface="Times New Roman"/>
-        <a:font script="Thai" typeface="Angsana New"/>
-        <a:font script="Ethi" typeface="Nyala"/>
-        <a:font script="Beng" typeface="Vrinda"/>
-        <a:font script="Gujr" typeface="Shruti"/>
-        <a:font script="Khmr" typeface="MoolBoran"/>
-        <a:font script="Knda" typeface="Tunga"/>
-        <a:font script="Guru" typeface="Raavi"/>
-        <a:font script="Cans" typeface="Euphemia"/>
-        <a:font script="Cher" typeface="Plantagenet Cherokee"/>
-        <a:font script="Yiii" typeface="Microsoft Yi Baiti"/>
-        <a:font script="Tibt" typeface="Microsoft Himalaya"/>
-        <a:font script="Thaa" typeface="MV Boli"/>
-        <a:font script="Deva" typeface="Mangal"/>
-        <a:font script="Telu" typeface="Gautami"/>
-        <a:font script="Taml" typeface="Latha"/>
-        <a:font script="Syrc" typeface="Estrangelo Edessa"/>
-        <a:font script="Orya" typeface="Kalinga"/>
-        <a:font script="Mlym" typeface="Kartika"/>
-        <a:font script="Laoo" typeface="DokChampa"/>
-        <a:font script="Sinh" typeface="Iskoola Pota"/>
-        <a:font script="Mong" typeface="Mongolian Baiti"/>
-        <a:font script="Viet" typeface="Times New Roman"/>
-        <a:font script="Uigh" typeface="Microsoft Uighur"/>
-        <a:font script="Geor" typeface="Sylfaen"/>
-        <a:font script="Armn" typeface="Arial"/>
-        <a:font script="Bugi" typeface="Leelawadee UI"/>
-        <a:font script="Bopo" typeface="Microsoft JhengHei"/>
-        <a:font script="Java" typeface="Javanese Text"/>
-        <a:font script="Lisu" typeface="Segoe UI"/>
-        <a:font script="Mymr" typeface="Myanmar Text"/>
-        <a:font script="Nkoo" typeface="Ebrima"/>
-        <a:font script="Olck" typeface="Nirmala UI"/>
-        <a:font script="Osma" typeface="Ebrima"/>
-        <a:font script="Phag" typeface="Phagspa"/>
-        <a:font script="Syrn" typeface="Estrangelo Edessa"/>
-        <a:font script="Syrj" typeface="Estrangelo Edessa"/>
-        <a:font script="Syre" typeface="Estrangelo Edessa"/>
-        <a:font script="Sora" typeface="Nirmala UI"/>
-        <a:font script="Tale" typeface="Microsoft Tai Le"/>
-        <a:font script="Talu" typeface="Microsoft New Tai Lue"/>
-        <a:font script="Tfng" typeface="Ebrima"/>
-      </a:majorFont>
-      <a:minorFont>
-        <a:latin typeface="Aptos" panose="02110004020202020204"/>
-        <a:ea typeface=""/>
-        <a:cs typeface=""/>
-        <a:font script="Jpan" typeface="游ゴシック"/>
-        <a:font script="Hang" typeface="맑은 고딕"/>
-        <a:font script="Hans" typeface="等线"/>
-        <a:font script="Hant" typeface="新細明體"/>
-        <a:font script="Arab" typeface="Arial"/>
-        <a:font script="Hebr" typeface="Arial"/>
-        <a:font script="Thai" typeface="Cordia New"/>
-        <a:font script="Ethi" typeface="Nyala"/>
-        <a:font script="Beng" typeface="Vrinda"/>
-        <a:font script="Gujr" typeface="Shruti"/>
-        <a:font script="Khmr" typeface="DaunPenh"/>
-        <a:font script="Knda" typeface="Tunga"/>
-        <a:font script="Guru" typeface="Raavi"/>
-        <a:font script="Cans" typeface="Euphemia"/>
-        <a:font script="Cher" typeface="Plantagenet Cherokee"/>
-        <a:font script="Yiii" typeface="Microsoft Yi Baiti"/>
-        <a:font script="Tibt" typeface="Microsoft Himalaya"/>
-        <a:font script="Thaa" typeface="MV Boli"/>
-        <a:font script="Deva" typeface="Mangal"/>
-        <a:font script="Telu" typeface="Gautami"/>
-        <a:font script="Taml" typeface="Latha"/>
-        <a:font script="Syrc" typeface="Estrangelo Edessa"/>
-        <a:font script="Orya" typeface="Kalinga"/>
-        <a:font script="Mlym" typeface="Kartika"/>
-        <a:font script="Laoo" typeface="DokChampa"/>
-        <a:font script="Sinh" typeface="Iskoola Pota"/>
-        <a:font script="Mong" typeface="Mongolian Baiti"/>
-        <a:font script="Viet" typeface="Arial"/>
-        <a:font script="Uigh" typeface="Microsoft Uighur"/>
-        <a:font script="Geor" typeface="Sylfaen"/>
-        <a:font script="Armn" typeface="Arial"/>
-        <a:font script="Bugi" typeface="Leelawadee UI"/>
-        <a:font script="Bopo" typeface="Microsoft JhengHei"/>
-        <a:font script="Java" typeface="Javanese Text"/>
-        <a:font script="Lisu" typeface="Segoe UI"/>
-        <a:font script="Mymr" typeface="Myanmar Text"/>
-        <a:font script="Nkoo" typeface="Ebrima"/>
-        <a:font script="Olck" typeface="Nirmala UI"/>
-        <a:font script="Osma" typeface="Ebrima"/>
-        <a:font script="Phag" typeface="Phagspa"/>
-        <a:font script="Syrn" typeface="Estrangelo Edessa"/>
-        <a:font script="Syrj" typeface="Estrangelo Edessa"/>
-        <a:font script="Syre" typeface="Estrangelo Edessa"/>
-        <a:font script="Sora" typeface="Nirmala UI"/>
-        <a:font script="Tale" typeface="Microsoft Tai Le"/>
-        <a:font script="Talu" typeface="Microsoft New Tai Lue"/>
-        <a:font script="Tfng" typeface="Ebrima"/>
-      </a:minorFont>
-    </a:fontScheme>
-    <a:fmtScheme name="Office">
-      <a:fillStyleLst>
-        <a:solidFill>
-          <a:schemeClr val="phClr"/>
-        </a:solidFill>
-        <a:gradFill rotWithShape="1">
-          <a:gsLst>
-            <a:gs pos="0">
-              <a:schemeClr val="phClr">
-                <a:lumMod val="110000"/>
-                <a:satMod val="105000"/>
-                <a:tint val="67000"/>
-              </a:schemeClr>
-            </a:gs>
-            <a:gs pos="50000">
-              <a:schemeClr val="phClr">
-                <a:lumMod val="105000"/>
-                <a:satMod val="103000"/>
-                <a:tint val="73000"/>
-              </a:schemeClr>
-            </a:gs>
-            <a:gs pos="100000">
-              <a:schemeClr val="phClr">
-                <a:lumMod val="105000"/>
-                <a:satMod val="109000"/>
-                <a:tint val="81000"/>
-              </a:schemeClr>
-            </a:gs>
-          </a:gsLst>
-          <a:lin ang="5400000" scaled="0"/>
-        </a:gradFill>
-        <a:gradFill rotWithShape="1">
-          <a:gsLst>
-            <a:gs pos="0">
-              <a:schemeClr val="phClr">
-                <a:satMod val="103000"/>
-                <a:lumMod val="102000"/>
-                <a:tint val="94000"/>
-              </a:schemeClr>
-            </a:gs>
-            <a:gs pos="50000">
-              <a:schemeClr val="phClr">
-                <a:satMod val="110000"/>
-                <a:lumMod val="100000"/>
-                <a:shade val="100000"/>
-              </a:schemeClr>
-            </a:gs>
-            <a:gs pos="100000">
-              <a:schemeClr val="phClr">
-                <a:lumMod val="99000"/>
-                <a:satMod val="120000"/>
-                <a:shade val="78000"/>
-              </a:schemeClr>
-            </a:gs>
-          </a:gsLst>
-          <a:lin ang="5400000" scaled="0"/>
-        </a:gradFill>
-      </a:fillStyleLst>
-      <a:lnStyleLst>
-        <a:ln w="12700" cap="flat" cmpd="sng" algn="ctr">
-          <a:solidFill>
-            <a:schemeClr val="phClr"/>
-          </a:solidFill>
-          <a:prstDash val="solid"/>
-          <a:miter lim="800000"/>
-        </a:ln>
-        <a:ln w="19050" cap="flat" cmpd="sng" algn="ctr">
-          <a:solidFill>
-            <a:schemeClr val="phClr"/>
-          </a:solidFill>
-          <a:prstDash val="solid"/>
-          <a:miter lim="800000"/>
-        </a:ln>
-        <a:ln w="25400" cap="flat" cmpd="sng" algn="ctr">
-          <a:solidFill>
-            <a:schemeClr val="phClr"/>
-          </a:solidFill>
-          <a:prstDash val="solid"/>
-          <a:miter lim="800000"/>
-        </a:ln>
-      </a:lnStyleLst>
-      <a:effectStyleLst>
-        <a:effectStyle>
-          <a:effectLst/>
-        </a:effectStyle>
-        <a:effectStyle>
-          <a:effectLst/>
-        </a:effectStyle>
-        <a:effectStyle>
-          <a:effectLst>
-            <a:outerShdw blurRad="57150" dist="19050" dir="5400000" algn="ctr" rotWithShape="0">
-              <a:srgbClr val="000000">
-                <a:alpha val="63000"/>
-              </a:srgbClr>
-            </a:outerShdw>
-          </a:effectLst>
-        </a:effectStyle>
-      </a:effectStyleLst>
-      <a:bgFillStyleLst>
-        <a:solidFill>
-          <a:schemeClr val="phClr"/>
-        </a:solidFill>
-        <a:solidFill>
-          <a:schemeClr val="phClr">
-            <a:tint val="95000"/>
-            <a:satMod val="170000"/>
-          </a:schemeClr>
-        </a:solidFill>
-        <a:gradFill rotWithShape="1">
-          <a:gsLst>
-            <a:gs pos="0">
-              <a:schemeClr val="phClr">
-                <a:tint val="93000"/>
-                <a:satMod val="150000"/>
-                <a:shade val="98000"/>
-                <a:lumMod val="102000"/>
-              </a:schemeClr>
-            </a:gs>
-            <a:gs pos="50000">
-              <a:schemeClr val="phClr">
-                <a:tint val="98000"/>
-                <a:satMod val="130000"/>
-                <a:shade val="90000"/>
-                <a:lumMod val="103000"/>
-              </a:schemeClr>
-            </a:gs>
-            <a:gs pos="100000">
-              <a:schemeClr val="phClr">
-                <a:shade val="63000"/>
-                <a:satMod val="120000"/>
-              </a:schemeClr>
-            </a:gs>
-          </a:gsLst>
-          <a:lin ang="5400000" scaled="0"/>
-        </a:gradFill>
-      </a:bgFillStyleLst>
-    </a:fmtScheme>
-  </a:themeElements>
-  <a:objectDefaults>
-    <a:lnDef>
-      <a:spPr/>
-      <a:bodyPr/>
-      <a:lstStyle/>
-      <a:style>
-        <a:lnRef idx="2">
-          <a:schemeClr val="accent1"/>
-        </a:lnRef>
-        <a:fillRef idx="0">
-          <a:schemeClr val="accent1"/>
-        </a:fillRef>
-        <a:effectRef idx="1">
-          <a:schemeClr val="accent1"/>
-        </a:effectRef>
-        <a:fontRef idx="minor">
-          <a:schemeClr val="tx1"/>
-        </a:fontRef>
-      </a:style>
-    </a:lnDef>
-  </a:objectDefaults>
-  <a:extraClrSchemeLst/>
-  <a:extLst>
-    <a:ext uri="{05A4C25C-085E-4340-85A3-A5531E510DB2}">
-      <thm15:themeFamily xmlns:thm15="http://schemas.microsoft.com/office/thememl/2012/main" name="Office Theme" id="{2E142A2C-CD16-42D6-873A-C26D2A0506FA}" vid="{1BDDFF52-6CD6-40A5-AB3C-68EB2F1E4D0A}"/>
-    </a:ext>
-  </a:extLst>
-</a:theme>
 </file>